--- a/Презентация.pptx
+++ b/Презентация.pptx
@@ -379,7 +379,7 @@
             <a:pPr indent="0" algn="r">
               <a:buNone/>
             </a:pPr>
-            <a:fld id="{4C1F01ED-0657-4C78-9B9A-0736F2BBD4A5}" type="slidenum">
+            <a:fld id="{96EC5D58-59B1-4982-A401-EDDBF79925C3}" type="slidenum">
               <a:rPr b="0" lang="ru-RU" sz="1400" spc="-1" strike="noStrike">
                 <a:solidFill>
                   <a:srgbClr val="000000"/>
@@ -433,7 +433,7 @@
         <p:spPr>
           <a:xfrm>
             <a:off x="685800" y="1143000"/>
-            <a:ext cx="5485320" cy="3085200"/>
+            <a:ext cx="5484240" cy="3084120"/>
           </a:xfrm>
           <a:prstGeom prst="rect">
             <a:avLst/>
@@ -456,7 +456,7 @@
         <p:spPr>
           <a:xfrm>
             <a:off x="685800" y="4400640"/>
-            <a:ext cx="5485320" cy="3599280"/>
+            <a:ext cx="5484240" cy="3598200"/>
           </a:xfrm>
           <a:prstGeom prst="rect">
             <a:avLst/>
@@ -537,7 +537,7 @@
         <p:spPr>
           <a:xfrm>
             <a:off x="3884760" y="8685360"/>
-            <a:ext cx="2970720" cy="457560"/>
+            <a:ext cx="2969640" cy="456480"/>
           </a:xfrm>
           <a:prstGeom prst="rect">
             <a:avLst/>
@@ -578,7 +578,7 @@
                 <a:tab algn="l" pos="0"/>
               </a:tabLst>
             </a:pPr>
-            <a:fld id="{F07EAD34-68F4-468E-A88D-4725A75AC17C}" type="slidenum">
+            <a:fld id="{9955F734-8E56-4F4E-B846-028769AD92F8}" type="slidenum">
               <a:rPr b="0" lang="ru-RU" sz="1200" spc="-1" strike="noStrike">
                 <a:solidFill>
                   <a:srgbClr val="000000"/>
@@ -631,7 +631,7 @@
         <p:spPr>
           <a:xfrm>
             <a:off x="685800" y="1143000"/>
-            <a:ext cx="5485320" cy="3085200"/>
+            <a:ext cx="5484240" cy="3084120"/>
           </a:xfrm>
           <a:prstGeom prst="rect">
             <a:avLst/>
@@ -654,7 +654,7 @@
         <p:spPr>
           <a:xfrm>
             <a:off x="685800" y="4400640"/>
-            <a:ext cx="5485320" cy="3599280"/>
+            <a:ext cx="5484240" cy="3598200"/>
           </a:xfrm>
           <a:prstGeom prst="rect">
             <a:avLst/>
@@ -709,7 +709,7 @@
         <p:spPr>
           <a:xfrm>
             <a:off x="3884760" y="8685360"/>
-            <a:ext cx="2970720" cy="457560"/>
+            <a:ext cx="2969640" cy="456480"/>
           </a:xfrm>
           <a:prstGeom prst="rect">
             <a:avLst/>
@@ -750,7 +750,7 @@
                 <a:tab algn="l" pos="0"/>
               </a:tabLst>
             </a:pPr>
-            <a:fld id="{810D11B9-1FE4-4F1F-89B0-E84E6C67295A}" type="slidenum">
+            <a:fld id="{8C5F84B2-B5B0-4CA4-95F8-DABA7EE5A5A1}" type="slidenum">
               <a:rPr b="0" lang="ru-RU" sz="1200" spc="-1" strike="noStrike">
                 <a:solidFill>
                   <a:srgbClr val="000000"/>
@@ -846,7 +846,7 @@
         <p:txBody>
           <a:bodyPr/>
           <a:p>
-            <a:fld id="{A75EF852-043E-416C-BEC9-B474C624B6AC}" type="slidenum">
+            <a:fld id="{C8505B25-A0BE-4F43-8EE8-4AB4039E27B0}" type="slidenum">
               <a:t>&lt;#&gt;</a:t>
             </a:fld>
           </a:p>
@@ -908,7 +908,7 @@
         <p:txBody>
           <a:bodyPr/>
           <a:p>
-            <a:fld id="{266FDCD4-5AB4-4AD0-9181-598DE542F99A}" type="slidenum">
+            <a:fld id="{9734CE7E-597E-4739-80A9-1AC62FF79E3C}" type="slidenum">
               <a:t>&lt;#&gt;</a:t>
             </a:fld>
           </a:p>
@@ -992,7 +992,7 @@
         <p:txBody>
           <a:bodyPr/>
           <a:p>
-            <a:fld id="{F9544EFA-2D3F-4461-9E0C-7BA44795BB99}" type="slidenum">
+            <a:fld id="{CFB34A69-9508-4B5E-9897-72AC70C30991}" type="slidenum">
               <a:t>&lt;#&gt;</a:t>
             </a:fld>
           </a:p>
@@ -1054,7 +1054,7 @@
         <p:txBody>
           <a:bodyPr/>
           <a:p>
-            <a:fld id="{138D7CEB-105B-4682-A35C-9CC441583FF8}" type="slidenum">
+            <a:fld id="{B07E7DD2-1A49-4AFA-964D-2379B5D04E59}" type="slidenum">
               <a:t>&lt;#&gt;</a:t>
             </a:fld>
           </a:p>
@@ -1116,7 +1116,7 @@
         <p:txBody>
           <a:bodyPr/>
           <a:p>
-            <a:fld id="{AFE60A43-DEE4-4B88-924E-66700820C535}" type="slidenum">
+            <a:fld id="{5F958E0E-B883-4969-813C-BC7517BC5ECC}" type="slidenum">
               <a:t>&lt;#&gt;</a:t>
             </a:fld>
           </a:p>
@@ -1200,7 +1200,7 @@
         <p:txBody>
           <a:bodyPr/>
           <a:p>
-            <a:fld id="{C6EB0A4F-3DCE-448D-AEBC-796D98569F85}" type="slidenum">
+            <a:fld id="{C587285E-562B-4E35-88FA-1C65ACA53565}" type="slidenum">
               <a:t>&lt;#&gt;</a:t>
             </a:fld>
           </a:p>
@@ -1262,7 +1262,7 @@
         <p:txBody>
           <a:bodyPr/>
           <a:p>
-            <a:fld id="{83683ADE-D071-418C-AE1F-3A94F85D4E74}" type="slidenum">
+            <a:fld id="{3285D2D3-E657-4723-A3D8-430F5670A9FA}" type="slidenum">
               <a:t>&lt;#&gt;</a:t>
             </a:fld>
           </a:p>
@@ -1324,7 +1324,7 @@
         <p:txBody>
           <a:bodyPr/>
           <a:p>
-            <a:fld id="{8C3EBBA7-FC6E-4EAB-BCEE-46A69CE389CE}" type="slidenum">
+            <a:fld id="{4A9698BD-63E1-4B7C-8516-F73C398B4601}" type="slidenum">
               <a:t>&lt;#&gt;</a:t>
             </a:fld>
           </a:p>
@@ -1386,7 +1386,7 @@
         <p:txBody>
           <a:bodyPr/>
           <a:p>
-            <a:fld id="{04A749BA-8A7A-482F-89D2-32576D0E4E0D}" type="slidenum">
+            <a:fld id="{19CB1EC3-8329-41EC-B3BA-7446E9F9131F}" type="slidenum">
               <a:t>&lt;#&gt;</a:t>
             </a:fld>
           </a:p>
@@ -1448,7 +1448,7 @@
         <p:txBody>
           <a:bodyPr/>
           <a:p>
-            <a:fld id="{3FD7EA80-5110-4FF3-8A75-1A761B35B84B}" type="slidenum">
+            <a:fld id="{5663F22C-72BE-4B74-8A7F-F779B8B687B8}" type="slidenum">
               <a:t>&lt;#&gt;</a:t>
             </a:fld>
           </a:p>
@@ -1510,7 +1510,7 @@
         <p:txBody>
           <a:bodyPr/>
           <a:p>
-            <a:fld id="{2EE7CDCF-63B2-4B52-A5EC-4E09463BB823}" type="slidenum">
+            <a:fld id="{A5ED9E5A-600C-4039-BC6E-F32B08B3BFBE}" type="slidenum">
               <a:t>&lt;#&gt;</a:t>
             </a:fld>
           </a:p>
@@ -1572,7 +1572,7 @@
         <p:txBody>
           <a:bodyPr/>
           <a:p>
-            <a:fld id="{4D5FA409-0B23-440A-992A-53F3E47C746D}" type="slidenum">
+            <a:fld id="{1718EFC4-7927-4346-83A1-CA9644DF4CA9}" type="slidenum">
               <a:t>&lt;#&gt;</a:t>
             </a:fld>
           </a:p>
@@ -1714,7 +1714,7 @@
         <p:txBody>
           <a:bodyPr/>
           <a:p>
-            <a:fld id="{889BDF2D-E4B1-45F8-B549-DA11BAD0E760}" type="slidenum">
+            <a:fld id="{9D890573-8BF3-4395-A256-508B8B11D79A}" type="slidenum">
               <a:t>&lt;#&gt;</a:t>
             </a:fld>
           </a:p>
@@ -1797,7 +1797,7 @@
         <p:txBody>
           <a:bodyPr/>
           <a:p>
-            <a:fld id="{FB53A77E-0212-4673-9798-9195B64F3652}" type="slidenum">
+            <a:fld id="{BE70719B-A27A-4501-8AE2-DFDAAAFEED00}" type="slidenum">
               <a:t>&lt;#&gt;</a:t>
             </a:fld>
           </a:p>
@@ -1859,7 +1859,7 @@
         <p:txBody>
           <a:bodyPr/>
           <a:p>
-            <a:fld id="{EEC4421F-2FEE-4F26-9811-2DC4B4989469}" type="slidenum">
+            <a:fld id="{BB8DA761-F452-499D-A510-A1F849B5239B}" type="slidenum">
               <a:t>&lt;#&gt;</a:t>
             </a:fld>
           </a:p>
@@ -1921,7 +1921,7 @@
         <p:txBody>
           <a:bodyPr/>
           <a:p>
-            <a:fld id="{FDB8F9D9-47DD-4589-BA62-2C60E31EF814}" type="slidenum">
+            <a:fld id="{B881B1B9-3782-4AFD-B04B-B7EAD832BCBD}" type="slidenum">
               <a:t>&lt;#&gt;</a:t>
             </a:fld>
           </a:p>
@@ -1983,7 +1983,7 @@
         <p:txBody>
           <a:bodyPr/>
           <a:p>
-            <a:fld id="{C3309B2A-5961-4CC7-925B-8EBA10EAD494}" type="slidenum">
+            <a:fld id="{A6A48FAD-F255-4C90-AA0E-F7C9190E0BC6}" type="slidenum">
               <a:t>&lt;#&gt;</a:t>
             </a:fld>
           </a:p>
@@ -2045,7 +2045,7 @@
         <p:txBody>
           <a:bodyPr/>
           <a:p>
-            <a:fld id="{69C2E7CD-7992-4014-B879-BFB754D65D7F}" type="slidenum">
+            <a:fld id="{1C203389-17F3-4809-8A74-033AD6D2F013}" type="slidenum">
               <a:t>&lt;#&gt;</a:t>
             </a:fld>
           </a:p>
@@ -2107,7 +2107,7 @@
         <p:txBody>
           <a:bodyPr/>
           <a:p>
-            <a:fld id="{DD371A9D-C140-42FB-836F-A5EBF08AA12B}" type="slidenum">
+            <a:fld id="{E8BAA534-5644-4547-91D3-C3AB4A933A54}" type="slidenum">
               <a:t>&lt;#&gt;</a:t>
             </a:fld>
           </a:p>
@@ -2169,7 +2169,7 @@
         <p:txBody>
           <a:bodyPr/>
           <a:p>
-            <a:fld id="{A079CD92-F0E7-4720-9022-7A93AB63160A}" type="slidenum">
+            <a:fld id="{D3BDD5AA-F064-4655-A7F8-4E588AF633D9}" type="slidenum">
               <a:t>&lt;#&gt;</a:t>
             </a:fld>
           </a:p>
@@ -2223,7 +2223,7 @@
         <p:spPr>
           <a:xfrm>
             <a:off x="10760040" y="142200"/>
-            <a:ext cx="951480" cy="292320"/>
+            <a:ext cx="950400" cy="291240"/>
           </a:xfrm>
           <a:prstGeom prst="rect">
             <a:avLst/>
@@ -2252,7 +2252,7 @@
         <p:spPr>
           <a:xfrm>
             <a:off x="10921320" y="0"/>
-            <a:ext cx="1271160" cy="1372320"/>
+            <a:ext cx="1270080" cy="1371240"/>
           </a:xfrm>
           <a:prstGeom prst="rect">
             <a:avLst/>
@@ -2280,8 +2280,8 @@
         </p:blipFill>
         <p:spPr>
           <a:xfrm flipH="1" rot="16200000">
-            <a:off x="49680" y="5535000"/>
-            <a:ext cx="1271160" cy="1372320"/>
+            <a:off x="48600" y="5535000"/>
+            <a:ext cx="1270080" cy="1371240"/>
           </a:xfrm>
           <a:prstGeom prst="rect">
             <a:avLst/>
@@ -2300,7 +2300,7 @@
         <p:spPr>
           <a:xfrm>
             <a:off x="609120" y="240480"/>
-            <a:ext cx="10972440" cy="6303240"/>
+            <a:ext cx="10971360" cy="6302160"/>
           </a:xfrm>
           <a:prstGeom prst="roundRect">
             <a:avLst>
@@ -2373,7 +2373,7 @@
         <p:spPr>
           <a:xfrm>
             <a:off x="609120" y="240480"/>
-            <a:ext cx="4127760" cy="2085480"/>
+            <a:ext cx="4126680" cy="2084400"/>
           </a:xfrm>
           <a:prstGeom prst="rect">
             <a:avLst/>
@@ -2709,7 +2709,7 @@
         <p:spPr>
           <a:xfrm>
             <a:off x="10760040" y="142200"/>
-            <a:ext cx="951480" cy="292320"/>
+            <a:ext cx="950400" cy="291240"/>
           </a:xfrm>
           <a:prstGeom prst="rect">
             <a:avLst/>
@@ -2738,7 +2738,7 @@
         <p:spPr>
           <a:xfrm>
             <a:off x="10921320" y="0"/>
-            <a:ext cx="1271160" cy="1372320"/>
+            <a:ext cx="1270080" cy="1371240"/>
           </a:xfrm>
           <a:prstGeom prst="rect">
             <a:avLst/>
@@ -2766,8 +2766,8 @@
         </p:blipFill>
         <p:spPr>
           <a:xfrm flipH="1" rot="16200000">
-            <a:off x="49680" y="5535000"/>
-            <a:ext cx="1271160" cy="1372320"/>
+            <a:off x="48600" y="5535000"/>
+            <a:ext cx="1270080" cy="1371240"/>
           </a:xfrm>
           <a:prstGeom prst="rect">
             <a:avLst/>
@@ -2790,7 +2790,7 @@
         <p:spPr>
           <a:xfrm>
             <a:off x="1333440" y="6352560"/>
-            <a:ext cx="7479360" cy="363960"/>
+            <a:ext cx="7478280" cy="362880"/>
           </a:xfrm>
           <a:prstGeom prst="rect">
             <a:avLst/>
@@ -2862,7 +2862,7 @@
         <p:spPr>
           <a:xfrm>
             <a:off x="8966160" y="6352560"/>
-            <a:ext cx="2742120" cy="363960"/>
+            <a:ext cx="2741040" cy="362880"/>
           </a:xfrm>
           <a:prstGeom prst="rect">
             <a:avLst/>
@@ -2905,7 +2905,7 @@
                 <a:tab algn="l" pos="0"/>
               </a:tabLst>
             </a:pPr>
-            <a:fld id="{63607AAD-CBA2-4E2C-BEB7-CAC4FE72C9D7}" type="slidenum">
+            <a:fld id="{915B24D1-D9DF-4905-934E-25FD5A68EAA2}" type="slidenum">
               <a:rPr b="1" lang="ru-RU" sz="1600" spc="-1" strike="noStrike">
                 <a:solidFill>
                   <a:schemeClr val="dk1">
@@ -2977,7 +2977,7 @@
         <p:spPr>
           <a:xfrm>
             <a:off x="10760040" y="142200"/>
-            <a:ext cx="951480" cy="292320"/>
+            <a:ext cx="950400" cy="291240"/>
           </a:xfrm>
           <a:prstGeom prst="rect">
             <a:avLst/>
@@ -3006,7 +3006,7 @@
         <p:spPr>
           <a:xfrm>
             <a:off x="10921320" y="0"/>
-            <a:ext cx="1271160" cy="1372320"/>
+            <a:ext cx="1270080" cy="1371240"/>
           </a:xfrm>
           <a:prstGeom prst="rect">
             <a:avLst/>
@@ -3034,8 +3034,8 @@
         </p:blipFill>
         <p:spPr>
           <a:xfrm flipH="1" rot="16200000">
-            <a:off x="49680" y="5535000"/>
-            <a:ext cx="1271160" cy="1372320"/>
+            <a:off x="48600" y="5535000"/>
+            <a:ext cx="1270080" cy="1371240"/>
           </a:xfrm>
           <a:prstGeom prst="rect">
             <a:avLst/>
@@ -3058,7 +3058,7 @@
         <p:spPr>
           <a:xfrm>
             <a:off x="1333440" y="6352560"/>
-            <a:ext cx="7479360" cy="363960"/>
+            <a:ext cx="7478280" cy="362880"/>
           </a:xfrm>
           <a:prstGeom prst="rect">
             <a:avLst/>
@@ -3130,7 +3130,7 @@
         <p:spPr>
           <a:xfrm>
             <a:off x="8966160" y="6352560"/>
-            <a:ext cx="2742120" cy="363960"/>
+            <a:ext cx="2741040" cy="362880"/>
           </a:xfrm>
           <a:prstGeom prst="rect">
             <a:avLst/>
@@ -3173,7 +3173,7 @@
                 <a:tab algn="l" pos="0"/>
               </a:tabLst>
             </a:pPr>
-            <a:fld id="{97CE512D-D549-4D18-A266-AAA99A46B84F}" type="slidenum">
+            <a:fld id="{2A5669CB-802C-4D99-A61C-1198A6D91134}" type="slidenum">
               <a:rPr b="1" lang="ru-RU" sz="1600" spc="-1" strike="noStrike">
                 <a:solidFill>
                   <a:schemeClr val="dk1">
@@ -3519,7 +3519,7 @@
         <p:spPr>
           <a:xfrm>
             <a:off x="10760040" y="142200"/>
-            <a:ext cx="951480" cy="292320"/>
+            <a:ext cx="950400" cy="291240"/>
           </a:xfrm>
           <a:prstGeom prst="rect">
             <a:avLst/>
@@ -3548,7 +3548,7 @@
         <p:spPr>
           <a:xfrm>
             <a:off x="10921320" y="0"/>
-            <a:ext cx="1271160" cy="1372320"/>
+            <a:ext cx="1270080" cy="1371240"/>
           </a:xfrm>
           <a:prstGeom prst="rect">
             <a:avLst/>
@@ -3576,8 +3576,8 @@
         </p:blipFill>
         <p:spPr>
           <a:xfrm flipH="1" rot="16200000">
-            <a:off x="49680" y="5535000"/>
-            <a:ext cx="1271160" cy="1372320"/>
+            <a:off x="48600" y="5535000"/>
+            <a:ext cx="1270080" cy="1371240"/>
           </a:xfrm>
           <a:prstGeom prst="rect">
             <a:avLst/>
@@ -3596,7 +3596,7 @@
         <p:spPr>
           <a:xfrm>
             <a:off x="609120" y="240480"/>
-            <a:ext cx="10972440" cy="6303240"/>
+            <a:ext cx="10971360" cy="6302160"/>
           </a:xfrm>
           <a:prstGeom prst="roundRect">
             <a:avLst>
@@ -3675,7 +3675,7 @@
         <p:spPr>
           <a:xfrm>
             <a:off x="1265040" y="827640"/>
-            <a:ext cx="2796480" cy="860760"/>
+            <a:ext cx="2795400" cy="859680"/>
           </a:xfrm>
           <a:prstGeom prst="rect">
             <a:avLst/>
@@ -3737,7 +3737,7 @@
         <p:spPr>
           <a:xfrm>
             <a:off x="10760040" y="142200"/>
-            <a:ext cx="951480" cy="292320"/>
+            <a:ext cx="950400" cy="291240"/>
           </a:xfrm>
           <a:prstGeom prst="rect">
             <a:avLst/>
@@ -3766,7 +3766,7 @@
         <p:spPr>
           <a:xfrm>
             <a:off x="10921320" y="0"/>
-            <a:ext cx="1271160" cy="1372320"/>
+            <a:ext cx="1270080" cy="1371240"/>
           </a:xfrm>
           <a:prstGeom prst="rect">
             <a:avLst/>
@@ -3794,8 +3794,8 @@
         </p:blipFill>
         <p:spPr>
           <a:xfrm flipH="1" rot="16200000">
-            <a:off x="49680" y="5535000"/>
-            <a:ext cx="1271160" cy="1372320"/>
+            <a:off x="48600" y="5535000"/>
+            <a:ext cx="1270080" cy="1371240"/>
           </a:xfrm>
           <a:prstGeom prst="rect">
             <a:avLst/>
@@ -3818,7 +3818,7 @@
         <p:spPr>
           <a:xfrm>
             <a:off x="1333440" y="6352560"/>
-            <a:ext cx="7479360" cy="363960"/>
+            <a:ext cx="7478280" cy="362880"/>
           </a:xfrm>
           <a:prstGeom prst="rect">
             <a:avLst/>
@@ -3890,7 +3890,7 @@
         <p:spPr>
           <a:xfrm>
             <a:off x="8966160" y="6352560"/>
-            <a:ext cx="2742120" cy="363960"/>
+            <a:ext cx="2741040" cy="362880"/>
           </a:xfrm>
           <a:prstGeom prst="rect">
             <a:avLst/>
@@ -3933,7 +3933,7 @@
                 <a:tab algn="l" pos="0"/>
               </a:tabLst>
             </a:pPr>
-            <a:fld id="{98012B6B-C0F6-4B10-B82C-B12060940706}" type="slidenum">
+            <a:fld id="{45FA2F63-30A3-48F1-8ECC-888B7E2CEDEF}" type="slidenum">
               <a:rPr b="1" lang="ru-RU" sz="1600" spc="-1" strike="noStrike">
                 <a:solidFill>
                   <a:schemeClr val="dk1">
@@ -4005,7 +4005,7 @@
         <p:spPr>
           <a:xfrm>
             <a:off x="10760040" y="142200"/>
-            <a:ext cx="951480" cy="292320"/>
+            <a:ext cx="950400" cy="291240"/>
           </a:xfrm>
           <a:prstGeom prst="rect">
             <a:avLst/>
@@ -4034,7 +4034,7 @@
         <p:spPr>
           <a:xfrm>
             <a:off x="10921320" y="0"/>
-            <a:ext cx="1271160" cy="1372320"/>
+            <a:ext cx="1270080" cy="1371240"/>
           </a:xfrm>
           <a:prstGeom prst="rect">
             <a:avLst/>
@@ -4062,8 +4062,8 @@
         </p:blipFill>
         <p:spPr>
           <a:xfrm flipH="1" rot="16200000">
-            <a:off x="49680" y="5535000"/>
-            <a:ext cx="1271160" cy="1372320"/>
+            <a:off x="48600" y="5535000"/>
+            <a:ext cx="1270080" cy="1371240"/>
           </a:xfrm>
           <a:prstGeom prst="rect">
             <a:avLst/>
@@ -4086,7 +4086,7 @@
         <p:spPr>
           <a:xfrm>
             <a:off x="1333440" y="6352560"/>
-            <a:ext cx="7479360" cy="363960"/>
+            <a:ext cx="7478280" cy="362880"/>
           </a:xfrm>
           <a:prstGeom prst="rect">
             <a:avLst/>
@@ -4158,7 +4158,7 @@
         <p:spPr>
           <a:xfrm>
             <a:off x="8966160" y="6352560"/>
-            <a:ext cx="2742120" cy="363960"/>
+            <a:ext cx="2741040" cy="362880"/>
           </a:xfrm>
           <a:prstGeom prst="rect">
             <a:avLst/>
@@ -4201,7 +4201,7 @@
                 <a:tab algn="l" pos="0"/>
               </a:tabLst>
             </a:pPr>
-            <a:fld id="{A2B10C9B-CE19-433A-A292-A5C2EB899D48}" type="slidenum">
+            <a:fld id="{59798F5A-8DCB-4B40-9078-9EB8BDB52066}" type="slidenum">
               <a:rPr b="1" lang="ru-RU" sz="1600" spc="-1" strike="noStrike">
                 <a:solidFill>
                   <a:schemeClr val="dk1">
@@ -4273,7 +4273,7 @@
         <p:spPr>
           <a:xfrm>
             <a:off x="10760040" y="142200"/>
-            <a:ext cx="951480" cy="292320"/>
+            <a:ext cx="950400" cy="291240"/>
           </a:xfrm>
           <a:prstGeom prst="rect">
             <a:avLst/>
@@ -4302,7 +4302,7 @@
         <p:spPr>
           <a:xfrm>
             <a:off x="10921320" y="0"/>
-            <a:ext cx="1271160" cy="1372320"/>
+            <a:ext cx="1270080" cy="1371240"/>
           </a:xfrm>
           <a:prstGeom prst="rect">
             <a:avLst/>
@@ -4330,8 +4330,8 @@
         </p:blipFill>
         <p:spPr>
           <a:xfrm flipH="1" rot="16200000">
-            <a:off x="49680" y="5535000"/>
-            <a:ext cx="1271160" cy="1372320"/>
+            <a:off x="48600" y="5535000"/>
+            <a:ext cx="1270080" cy="1371240"/>
           </a:xfrm>
           <a:prstGeom prst="rect">
             <a:avLst/>
@@ -4354,7 +4354,7 @@
         <p:spPr>
           <a:xfrm>
             <a:off x="1333440" y="6352560"/>
-            <a:ext cx="7479360" cy="363960"/>
+            <a:ext cx="7478280" cy="362880"/>
           </a:xfrm>
           <a:prstGeom prst="rect">
             <a:avLst/>
@@ -4426,7 +4426,7 @@
         <p:spPr>
           <a:xfrm>
             <a:off x="8966160" y="6352560"/>
-            <a:ext cx="2742120" cy="363960"/>
+            <a:ext cx="2741040" cy="362880"/>
           </a:xfrm>
           <a:prstGeom prst="rect">
             <a:avLst/>
@@ -4469,7 +4469,7 @@
                 <a:tab algn="l" pos="0"/>
               </a:tabLst>
             </a:pPr>
-            <a:fld id="{09BB66F5-A934-468E-AB19-A17614681ECE}" type="slidenum">
+            <a:fld id="{5D9FC91A-4310-4B62-A1BE-A5F44D84D137}" type="slidenum">
               <a:rPr b="1" lang="ru-RU" sz="1600" spc="-1" strike="noStrike">
                 <a:solidFill>
                   <a:schemeClr val="dk1">
@@ -4541,7 +4541,7 @@
         <p:spPr>
           <a:xfrm>
             <a:off x="10760040" y="142200"/>
-            <a:ext cx="951480" cy="292320"/>
+            <a:ext cx="950400" cy="291240"/>
           </a:xfrm>
           <a:prstGeom prst="rect">
             <a:avLst/>
@@ -4570,7 +4570,7 @@
         <p:spPr>
           <a:xfrm>
             <a:off x="10921320" y="0"/>
-            <a:ext cx="1271160" cy="1372320"/>
+            <a:ext cx="1270080" cy="1371240"/>
           </a:xfrm>
           <a:prstGeom prst="rect">
             <a:avLst/>
@@ -4598,8 +4598,8 @@
         </p:blipFill>
         <p:spPr>
           <a:xfrm flipH="1" rot="16200000">
-            <a:off x="49680" y="5535000"/>
-            <a:ext cx="1271160" cy="1372320"/>
+            <a:off x="48600" y="5535000"/>
+            <a:ext cx="1270080" cy="1371240"/>
           </a:xfrm>
           <a:prstGeom prst="rect">
             <a:avLst/>
@@ -4618,7 +4618,7 @@
         <p:spPr>
           <a:xfrm>
             <a:off x="609120" y="240480"/>
-            <a:ext cx="10972440" cy="6303240"/>
+            <a:ext cx="10971360" cy="6302160"/>
           </a:xfrm>
           <a:prstGeom prst="roundRect">
             <a:avLst>
@@ -4697,7 +4697,7 @@
         <p:spPr>
           <a:xfrm>
             <a:off x="820800" y="368280"/>
-            <a:ext cx="3414960" cy="1741680"/>
+            <a:ext cx="3413880" cy="1740600"/>
           </a:xfrm>
           <a:prstGeom prst="rect">
             <a:avLst/>
@@ -4759,7 +4759,7 @@
         <p:spPr>
           <a:xfrm>
             <a:off x="10760040" y="142200"/>
-            <a:ext cx="951480" cy="292320"/>
+            <a:ext cx="950400" cy="291240"/>
           </a:xfrm>
           <a:prstGeom prst="rect">
             <a:avLst/>
@@ -4788,7 +4788,7 @@
         <p:spPr>
           <a:xfrm>
             <a:off x="10921320" y="0"/>
-            <a:ext cx="1271160" cy="1372320"/>
+            <a:ext cx="1270080" cy="1371240"/>
           </a:xfrm>
           <a:prstGeom prst="rect">
             <a:avLst/>
@@ -4816,8 +4816,8 @@
         </p:blipFill>
         <p:spPr>
           <a:xfrm flipH="1" rot="16200000">
-            <a:off x="49680" y="5535000"/>
-            <a:ext cx="1271160" cy="1372320"/>
+            <a:off x="48600" y="5535000"/>
+            <a:ext cx="1270080" cy="1371240"/>
           </a:xfrm>
           <a:prstGeom prst="rect">
             <a:avLst/>
@@ -4840,7 +4840,7 @@
         <p:spPr>
           <a:xfrm>
             <a:off x="1333440" y="6352560"/>
-            <a:ext cx="7479360" cy="363960"/>
+            <a:ext cx="7478280" cy="362880"/>
           </a:xfrm>
           <a:prstGeom prst="rect">
             <a:avLst/>
@@ -4912,7 +4912,7 @@
         <p:spPr>
           <a:xfrm>
             <a:off x="8966160" y="6352560"/>
-            <a:ext cx="2742120" cy="363960"/>
+            <a:ext cx="2741040" cy="362880"/>
           </a:xfrm>
           <a:prstGeom prst="rect">
             <a:avLst/>
@@ -4955,7 +4955,7 @@
                 <a:tab algn="l" pos="0"/>
               </a:tabLst>
             </a:pPr>
-            <a:fld id="{E5E850BC-9740-4E8B-A679-B50BE8FA0036}" type="slidenum">
+            <a:fld id="{9BD2EBEC-A884-41EA-8FBF-F8322548BBB1}" type="slidenum">
               <a:rPr b="1" lang="ru-RU" sz="1600" spc="-1" strike="noStrike">
                 <a:solidFill>
                   <a:schemeClr val="dk1">
@@ -5027,7 +5027,7 @@
         <p:spPr>
           <a:xfrm>
             <a:off x="10760040" y="142200"/>
-            <a:ext cx="951480" cy="292320"/>
+            <a:ext cx="950400" cy="291240"/>
           </a:xfrm>
           <a:prstGeom prst="rect">
             <a:avLst/>
@@ -5056,7 +5056,7 @@
         <p:spPr>
           <a:xfrm>
             <a:off x="10921320" y="0"/>
-            <a:ext cx="1271160" cy="1372320"/>
+            <a:ext cx="1270080" cy="1371240"/>
           </a:xfrm>
           <a:prstGeom prst="rect">
             <a:avLst/>
@@ -5084,8 +5084,8 @@
         </p:blipFill>
         <p:spPr>
           <a:xfrm flipH="1" rot="16200000">
-            <a:off x="49680" y="5535000"/>
-            <a:ext cx="1271160" cy="1372320"/>
+            <a:off x="48600" y="5535000"/>
+            <a:ext cx="1270080" cy="1371240"/>
           </a:xfrm>
           <a:prstGeom prst="rect">
             <a:avLst/>
@@ -5108,7 +5108,7 @@
         <p:spPr>
           <a:xfrm>
             <a:off x="1333440" y="6352560"/>
-            <a:ext cx="7479360" cy="363960"/>
+            <a:ext cx="7478280" cy="362880"/>
           </a:xfrm>
           <a:prstGeom prst="rect">
             <a:avLst/>
@@ -5180,7 +5180,7 @@
         <p:spPr>
           <a:xfrm>
             <a:off x="8966160" y="6352560"/>
-            <a:ext cx="2742120" cy="363960"/>
+            <a:ext cx="2741040" cy="362880"/>
           </a:xfrm>
           <a:prstGeom prst="rect">
             <a:avLst/>
@@ -5223,7 +5223,7 @@
                 <a:tab algn="l" pos="0"/>
               </a:tabLst>
             </a:pPr>
-            <a:fld id="{34FCF3C1-2E0E-46A7-8311-F5D6E3836BCE}" type="slidenum">
+            <a:fld id="{8D0CB1F1-1516-4048-ACB6-77CB92C9251A}" type="slidenum">
               <a:rPr b="1" lang="ru-RU" sz="1600" spc="-1" strike="noStrike">
                 <a:solidFill>
                   <a:schemeClr val="dk1">
@@ -5295,7 +5295,7 @@
         <p:spPr>
           <a:xfrm>
             <a:off x="10760040" y="142200"/>
-            <a:ext cx="951480" cy="292320"/>
+            <a:ext cx="950400" cy="291240"/>
           </a:xfrm>
           <a:prstGeom prst="rect">
             <a:avLst/>
@@ -5324,7 +5324,7 @@
         <p:spPr>
           <a:xfrm>
             <a:off x="10921320" y="0"/>
-            <a:ext cx="1271160" cy="1372320"/>
+            <a:ext cx="1270080" cy="1371240"/>
           </a:xfrm>
           <a:prstGeom prst="rect">
             <a:avLst/>
@@ -5352,8 +5352,8 @@
         </p:blipFill>
         <p:spPr>
           <a:xfrm flipH="1" rot="16200000">
-            <a:off x="49680" y="5535000"/>
-            <a:ext cx="1271160" cy="1372320"/>
+            <a:off x="48600" y="5535000"/>
+            <a:ext cx="1270080" cy="1371240"/>
           </a:xfrm>
           <a:prstGeom prst="rect">
             <a:avLst/>
@@ -5376,7 +5376,7 @@
         <p:spPr>
           <a:xfrm>
             <a:off x="1333440" y="6352560"/>
-            <a:ext cx="7479360" cy="363960"/>
+            <a:ext cx="7478280" cy="362880"/>
           </a:xfrm>
           <a:prstGeom prst="rect">
             <a:avLst/>
@@ -5448,7 +5448,7 @@
         <p:spPr>
           <a:xfrm>
             <a:off x="8966160" y="6352560"/>
-            <a:ext cx="2742120" cy="363960"/>
+            <a:ext cx="2741040" cy="362880"/>
           </a:xfrm>
           <a:prstGeom prst="rect">
             <a:avLst/>
@@ -5491,7 +5491,7 @@
                 <a:tab algn="l" pos="0"/>
               </a:tabLst>
             </a:pPr>
-            <a:fld id="{91EC360E-FF9A-45ED-B960-C257A984D4ED}" type="slidenum">
+            <a:fld id="{4ADC6B07-AAB4-4C80-8565-8202FA2EADEC}" type="slidenum">
               <a:rPr b="1" lang="ru-RU" sz="1600" spc="-1" strike="noStrike">
                 <a:solidFill>
                   <a:schemeClr val="dk1">
@@ -5563,7 +5563,7 @@
         <p:spPr>
           <a:xfrm>
             <a:off x="10760040" y="142200"/>
-            <a:ext cx="951480" cy="292320"/>
+            <a:ext cx="950400" cy="291240"/>
           </a:xfrm>
           <a:prstGeom prst="rect">
             <a:avLst/>
@@ -5592,7 +5592,7 @@
         <p:spPr>
           <a:xfrm>
             <a:off x="10921320" y="0"/>
-            <a:ext cx="1271160" cy="1372320"/>
+            <a:ext cx="1270080" cy="1371240"/>
           </a:xfrm>
           <a:prstGeom prst="rect">
             <a:avLst/>
@@ -5620,8 +5620,8 @@
         </p:blipFill>
         <p:spPr>
           <a:xfrm flipH="1" rot="16200000">
-            <a:off x="49680" y="5535000"/>
-            <a:ext cx="1271160" cy="1372320"/>
+            <a:off x="48600" y="5535000"/>
+            <a:ext cx="1270080" cy="1371240"/>
           </a:xfrm>
           <a:prstGeom prst="rect">
             <a:avLst/>
@@ -5644,7 +5644,7 @@
         <p:spPr>
           <a:xfrm>
             <a:off x="1333440" y="6352560"/>
-            <a:ext cx="7479360" cy="363960"/>
+            <a:ext cx="7478280" cy="362880"/>
           </a:xfrm>
           <a:prstGeom prst="rect">
             <a:avLst/>
@@ -5716,7 +5716,7 @@
         <p:spPr>
           <a:xfrm>
             <a:off x="8966160" y="6352560"/>
-            <a:ext cx="2742120" cy="363960"/>
+            <a:ext cx="2741040" cy="362880"/>
           </a:xfrm>
           <a:prstGeom prst="rect">
             <a:avLst/>
@@ -5759,7 +5759,7 @@
                 <a:tab algn="l" pos="0"/>
               </a:tabLst>
             </a:pPr>
-            <a:fld id="{D3C0346E-B610-408D-BCA6-B3FD93F51481}" type="slidenum">
+            <a:fld id="{760AF06F-F244-464C-8EEF-09F1DCAB985A}" type="slidenum">
               <a:rPr b="1" lang="ru-RU" sz="1600" spc="-1" strike="noStrike">
                 <a:solidFill>
                   <a:schemeClr val="dk1">
@@ -5831,7 +5831,7 @@
         <p:spPr>
           <a:xfrm>
             <a:off x="10760040" y="142200"/>
-            <a:ext cx="951480" cy="292320"/>
+            <a:ext cx="950400" cy="291240"/>
           </a:xfrm>
           <a:prstGeom prst="rect">
             <a:avLst/>
@@ -5860,7 +5860,7 @@
         <p:spPr>
           <a:xfrm>
             <a:off x="10921320" y="0"/>
-            <a:ext cx="1271160" cy="1372320"/>
+            <a:ext cx="1270080" cy="1371240"/>
           </a:xfrm>
           <a:prstGeom prst="rect">
             <a:avLst/>
@@ -5888,8 +5888,8 @@
         </p:blipFill>
         <p:spPr>
           <a:xfrm flipH="1" rot="16200000">
-            <a:off x="49680" y="5535000"/>
-            <a:ext cx="1271160" cy="1372320"/>
+            <a:off x="48600" y="5535000"/>
+            <a:ext cx="1270080" cy="1371240"/>
           </a:xfrm>
           <a:prstGeom prst="rect">
             <a:avLst/>
@@ -5912,7 +5912,7 @@
         <p:spPr>
           <a:xfrm>
             <a:off x="1333440" y="6352560"/>
-            <a:ext cx="7479360" cy="363960"/>
+            <a:ext cx="7478280" cy="362880"/>
           </a:xfrm>
           <a:prstGeom prst="rect">
             <a:avLst/>
@@ -5984,7 +5984,7 @@
         <p:spPr>
           <a:xfrm>
             <a:off x="8966160" y="6352560"/>
-            <a:ext cx="2742120" cy="363960"/>
+            <a:ext cx="2741040" cy="362880"/>
           </a:xfrm>
           <a:prstGeom prst="rect">
             <a:avLst/>
@@ -6027,7 +6027,7 @@
                 <a:tab algn="l" pos="0"/>
               </a:tabLst>
             </a:pPr>
-            <a:fld id="{5E8B82F5-35D7-4A20-83A2-3540BC2B3639}" type="slidenum">
+            <a:fld id="{331122CA-A1D4-40CB-9E77-0097E6127EFC}" type="slidenum">
               <a:rPr b="1" lang="ru-RU" sz="1600" spc="-1" strike="noStrike">
                 <a:solidFill>
                   <a:schemeClr val="dk1">
@@ -6099,7 +6099,7 @@
         <p:spPr>
           <a:xfrm>
             <a:off x="10760040" y="142200"/>
-            <a:ext cx="951480" cy="292320"/>
+            <a:ext cx="950400" cy="291240"/>
           </a:xfrm>
           <a:prstGeom prst="rect">
             <a:avLst/>
@@ -6128,7 +6128,7 @@
         <p:spPr>
           <a:xfrm>
             <a:off x="10921320" y="0"/>
-            <a:ext cx="1271160" cy="1372320"/>
+            <a:ext cx="1270080" cy="1371240"/>
           </a:xfrm>
           <a:prstGeom prst="rect">
             <a:avLst/>
@@ -6156,8 +6156,8 @@
         </p:blipFill>
         <p:spPr>
           <a:xfrm flipH="1" rot="16200000">
-            <a:off x="49680" y="5535000"/>
-            <a:ext cx="1271160" cy="1372320"/>
+            <a:off x="48600" y="5535000"/>
+            <a:ext cx="1270080" cy="1371240"/>
           </a:xfrm>
           <a:prstGeom prst="rect">
             <a:avLst/>
@@ -6180,7 +6180,7 @@
         <p:spPr>
           <a:xfrm>
             <a:off x="1333440" y="6352560"/>
-            <a:ext cx="7479360" cy="363960"/>
+            <a:ext cx="7478280" cy="362880"/>
           </a:xfrm>
           <a:prstGeom prst="rect">
             <a:avLst/>
@@ -6252,7 +6252,7 @@
         <p:spPr>
           <a:xfrm>
             <a:off x="8966160" y="6352560"/>
-            <a:ext cx="2742120" cy="363960"/>
+            <a:ext cx="2741040" cy="362880"/>
           </a:xfrm>
           <a:prstGeom prst="rect">
             <a:avLst/>
@@ -6295,7 +6295,7 @@
                 <a:tab algn="l" pos="0"/>
               </a:tabLst>
             </a:pPr>
-            <a:fld id="{A10D65AD-88B0-4332-A09F-C9FC984831C8}" type="slidenum">
+            <a:fld id="{E4CC6330-8E03-46E6-A9A7-F378E304FE51}" type="slidenum">
               <a:rPr b="1" lang="ru-RU" sz="1600" spc="-1" strike="noStrike">
                 <a:solidFill>
                   <a:schemeClr val="dk1">
@@ -6367,7 +6367,7 @@
         <p:spPr>
           <a:xfrm>
             <a:off x="10760040" y="142200"/>
-            <a:ext cx="951480" cy="292320"/>
+            <a:ext cx="950400" cy="291240"/>
           </a:xfrm>
           <a:prstGeom prst="rect">
             <a:avLst/>
@@ -6396,7 +6396,7 @@
         <p:spPr>
           <a:xfrm>
             <a:off x="10921320" y="0"/>
-            <a:ext cx="1271160" cy="1372320"/>
+            <a:ext cx="1270080" cy="1371240"/>
           </a:xfrm>
           <a:prstGeom prst="rect">
             <a:avLst/>
@@ -6424,8 +6424,8 @@
         </p:blipFill>
         <p:spPr>
           <a:xfrm flipH="1" rot="16200000">
-            <a:off x="49680" y="5535000"/>
-            <a:ext cx="1271160" cy="1372320"/>
+            <a:off x="48600" y="5535000"/>
+            <a:ext cx="1270080" cy="1371240"/>
           </a:xfrm>
           <a:prstGeom prst="rect">
             <a:avLst/>
@@ -6448,7 +6448,7 @@
         <p:spPr>
           <a:xfrm>
             <a:off x="1333440" y="6352560"/>
-            <a:ext cx="7479360" cy="363960"/>
+            <a:ext cx="7478280" cy="362880"/>
           </a:xfrm>
           <a:prstGeom prst="rect">
             <a:avLst/>
@@ -6520,7 +6520,7 @@
         <p:spPr>
           <a:xfrm>
             <a:off x="8966160" y="6352560"/>
-            <a:ext cx="2742120" cy="363960"/>
+            <a:ext cx="2741040" cy="362880"/>
           </a:xfrm>
           <a:prstGeom prst="rect">
             <a:avLst/>
@@ -6563,7 +6563,7 @@
                 <a:tab algn="l" pos="0"/>
               </a:tabLst>
             </a:pPr>
-            <a:fld id="{CC0C580A-5B22-44A1-BEFC-405B9156D975}" type="slidenum">
+            <a:fld id="{E3D07C96-6B66-4B76-92E1-13746396D0A0}" type="slidenum">
               <a:rPr b="1" lang="ru-RU" sz="1600" spc="-1" strike="noStrike">
                 <a:solidFill>
                   <a:schemeClr val="dk1">
@@ -6678,7 +6678,7 @@
         <p:spPr>
           <a:xfrm>
             <a:off x="4038480" y="6356520"/>
-            <a:ext cx="4111200" cy="361440"/>
+            <a:ext cx="4110120" cy="360360"/>
           </a:xfrm>
           <a:prstGeom prst="rect">
             <a:avLst/>
@@ -6750,7 +6750,7 @@
         <p:spPr>
           <a:xfrm>
             <a:off x="8610480" y="6356520"/>
-            <a:ext cx="2739600" cy="361440"/>
+            <a:ext cx="2738520" cy="360360"/>
           </a:xfrm>
           <a:prstGeom prst="rect">
             <a:avLst/>
@@ -6793,7 +6793,7 @@
                 <a:tab algn="l" pos="0"/>
               </a:tabLst>
             </a:pPr>
-            <a:fld id="{55FF4322-4CD7-40B5-8626-2705616DE21F}" type="slidenum">
+            <a:fld id="{DA75E014-78A9-4FCE-832D-E1D8EEAE3BD5}" type="slidenum">
               <a:rPr b="0" lang="ru-RU" sz="1200" spc="-1" strike="noStrike">
                 <a:solidFill>
                   <a:schemeClr val="dk1">
@@ -6826,7 +6826,7 @@
         <p:spPr>
           <a:xfrm>
             <a:off x="838080" y="6356520"/>
-            <a:ext cx="2739600" cy="361440"/>
+            <a:ext cx="2738520" cy="360360"/>
           </a:xfrm>
           <a:prstGeom prst="rect">
             <a:avLst/>
@@ -6925,7 +6925,7 @@
         <p:spPr>
           <a:xfrm>
             <a:off x="10760040" y="142200"/>
-            <a:ext cx="951480" cy="292320"/>
+            <a:ext cx="950400" cy="291240"/>
           </a:xfrm>
           <a:prstGeom prst="rect">
             <a:avLst/>
@@ -6954,7 +6954,7 @@
         <p:spPr>
           <a:xfrm>
             <a:off x="10921320" y="0"/>
-            <a:ext cx="1271160" cy="1372320"/>
+            <a:ext cx="1270080" cy="1371240"/>
           </a:xfrm>
           <a:prstGeom prst="rect">
             <a:avLst/>
@@ -6982,8 +6982,8 @@
         </p:blipFill>
         <p:spPr>
           <a:xfrm flipH="1" rot="16200000">
-            <a:off x="49680" y="5535000"/>
-            <a:ext cx="1271160" cy="1372320"/>
+            <a:off x="48600" y="5535000"/>
+            <a:ext cx="1270080" cy="1371240"/>
           </a:xfrm>
           <a:prstGeom prst="rect">
             <a:avLst/>
@@ -7006,7 +7006,7 @@
         <p:spPr>
           <a:xfrm>
             <a:off x="1333440" y="6352560"/>
-            <a:ext cx="7479360" cy="363960"/>
+            <a:ext cx="7478280" cy="362880"/>
           </a:xfrm>
           <a:prstGeom prst="rect">
             <a:avLst/>
@@ -7078,7 +7078,7 @@
         <p:spPr>
           <a:xfrm>
             <a:off x="8966160" y="6352560"/>
-            <a:ext cx="2742120" cy="363960"/>
+            <a:ext cx="2741040" cy="362880"/>
           </a:xfrm>
           <a:prstGeom prst="rect">
             <a:avLst/>
@@ -7121,7 +7121,7 @@
                 <a:tab algn="l" pos="0"/>
               </a:tabLst>
             </a:pPr>
-            <a:fld id="{CD29BE74-B94F-4CD9-BD93-7A1CC2238141}" type="slidenum">
+            <a:fld id="{040D2F26-CAF8-4C0C-842F-B575D3525C71}" type="slidenum">
               <a:rPr b="1" lang="ru-RU" sz="1600" spc="-1" strike="noStrike">
                 <a:solidFill>
                   <a:schemeClr val="dk1">
@@ -7193,7 +7193,7 @@
         <p:spPr>
           <a:xfrm>
             <a:off x="10760040" y="142200"/>
-            <a:ext cx="951480" cy="292320"/>
+            <a:ext cx="950400" cy="291240"/>
           </a:xfrm>
           <a:prstGeom prst="rect">
             <a:avLst/>
@@ -7222,7 +7222,7 @@
         <p:spPr>
           <a:xfrm>
             <a:off x="10921320" y="0"/>
-            <a:ext cx="1271160" cy="1372320"/>
+            <a:ext cx="1270080" cy="1371240"/>
           </a:xfrm>
           <a:prstGeom prst="rect">
             <a:avLst/>
@@ -7250,8 +7250,8 @@
         </p:blipFill>
         <p:spPr>
           <a:xfrm flipH="1" rot="16200000">
-            <a:off x="49680" y="5535000"/>
-            <a:ext cx="1271160" cy="1372320"/>
+            <a:off x="48600" y="5535000"/>
+            <a:ext cx="1270080" cy="1371240"/>
           </a:xfrm>
           <a:prstGeom prst="rect">
             <a:avLst/>
@@ -7274,7 +7274,7 @@
         <p:spPr>
           <a:xfrm>
             <a:off x="1333440" y="6352560"/>
-            <a:ext cx="7479360" cy="363960"/>
+            <a:ext cx="7478280" cy="362880"/>
           </a:xfrm>
           <a:prstGeom prst="rect">
             <a:avLst/>
@@ -7346,7 +7346,7 @@
         <p:spPr>
           <a:xfrm>
             <a:off x="8966160" y="6352560"/>
-            <a:ext cx="2742120" cy="363960"/>
+            <a:ext cx="2741040" cy="362880"/>
           </a:xfrm>
           <a:prstGeom prst="rect">
             <a:avLst/>
@@ -7389,7 +7389,7 @@
                 <a:tab algn="l" pos="0"/>
               </a:tabLst>
             </a:pPr>
-            <a:fld id="{68311F19-1606-4FA9-B0CD-463ED0CAAADF}" type="slidenum">
+            <a:fld id="{8433103F-5681-4AF5-9F91-8E2A98773C59}" type="slidenum">
               <a:rPr b="1" lang="ru-RU" sz="1600" spc="-1" strike="noStrike">
                 <a:solidFill>
                   <a:schemeClr val="dk1">
@@ -7461,7 +7461,7 @@
         <p:spPr>
           <a:xfrm>
             <a:off x="10760040" y="142200"/>
-            <a:ext cx="951480" cy="292320"/>
+            <a:ext cx="950400" cy="291240"/>
           </a:xfrm>
           <a:prstGeom prst="rect">
             <a:avLst/>
@@ -7490,7 +7490,7 @@
         <p:spPr>
           <a:xfrm>
             <a:off x="10921320" y="0"/>
-            <a:ext cx="1271160" cy="1372320"/>
+            <a:ext cx="1270080" cy="1371240"/>
           </a:xfrm>
           <a:prstGeom prst="rect">
             <a:avLst/>
@@ -7518,8 +7518,8 @@
         </p:blipFill>
         <p:spPr>
           <a:xfrm flipH="1" rot="16200000">
-            <a:off x="49680" y="5535000"/>
-            <a:ext cx="1271160" cy="1372320"/>
+            <a:off x="48600" y="5535000"/>
+            <a:ext cx="1270080" cy="1371240"/>
           </a:xfrm>
           <a:prstGeom prst="rect">
             <a:avLst/>
@@ -7542,7 +7542,7 @@
         <p:spPr>
           <a:xfrm>
             <a:off x="1333440" y="6352560"/>
-            <a:ext cx="7479360" cy="363960"/>
+            <a:ext cx="7478280" cy="362880"/>
           </a:xfrm>
           <a:prstGeom prst="rect">
             <a:avLst/>
@@ -7614,7 +7614,7 @@
         <p:spPr>
           <a:xfrm>
             <a:off x="8966160" y="6352560"/>
-            <a:ext cx="2742120" cy="363960"/>
+            <a:ext cx="2741040" cy="362880"/>
           </a:xfrm>
           <a:prstGeom prst="rect">
             <a:avLst/>
@@ -7657,7 +7657,7 @@
                 <a:tab algn="l" pos="0"/>
               </a:tabLst>
             </a:pPr>
-            <a:fld id="{69C08E20-039F-4382-80D9-D0486ED5827C}" type="slidenum">
+            <a:fld id="{B06B6EE0-0833-45A8-AE08-0C05E5F6CA99}" type="slidenum">
               <a:rPr b="1" lang="ru-RU" sz="1600" spc="-1" strike="noStrike">
                 <a:solidFill>
                   <a:schemeClr val="dk1">
@@ -7729,7 +7729,7 @@
         <p:spPr>
           <a:xfrm>
             <a:off x="10760040" y="142200"/>
-            <a:ext cx="951480" cy="292320"/>
+            <a:ext cx="950400" cy="291240"/>
           </a:xfrm>
           <a:prstGeom prst="rect">
             <a:avLst/>
@@ -7758,7 +7758,7 @@
         <p:spPr>
           <a:xfrm>
             <a:off x="10921320" y="0"/>
-            <a:ext cx="1271160" cy="1372320"/>
+            <a:ext cx="1270080" cy="1371240"/>
           </a:xfrm>
           <a:prstGeom prst="rect">
             <a:avLst/>
@@ -7786,8 +7786,8 @@
         </p:blipFill>
         <p:spPr>
           <a:xfrm flipH="1" rot="16200000">
-            <a:off x="49680" y="5535000"/>
-            <a:ext cx="1271160" cy="1372320"/>
+            <a:off x="48600" y="5535000"/>
+            <a:ext cx="1270080" cy="1371240"/>
           </a:xfrm>
           <a:prstGeom prst="rect">
             <a:avLst/>
@@ -7810,7 +7810,7 @@
         <p:spPr>
           <a:xfrm>
             <a:off x="1333440" y="6352560"/>
-            <a:ext cx="7479360" cy="363960"/>
+            <a:ext cx="7478280" cy="362880"/>
           </a:xfrm>
           <a:prstGeom prst="rect">
             <a:avLst/>
@@ -7882,7 +7882,7 @@
         <p:spPr>
           <a:xfrm>
             <a:off x="8966160" y="6352560"/>
-            <a:ext cx="2742120" cy="363960"/>
+            <a:ext cx="2741040" cy="362880"/>
           </a:xfrm>
           <a:prstGeom prst="rect">
             <a:avLst/>
@@ -7925,7 +7925,7 @@
                 <a:tab algn="l" pos="0"/>
               </a:tabLst>
             </a:pPr>
-            <a:fld id="{A201993D-BF99-4F66-B9C4-1F38C0552D54}" type="slidenum">
+            <a:fld id="{A282763F-3048-4EED-A931-A64D148F0E31}" type="slidenum">
               <a:rPr b="1" lang="ru-RU" sz="1600" spc="-1" strike="noStrike">
                 <a:solidFill>
                   <a:schemeClr val="dk1">
@@ -7997,7 +7997,7 @@
         <p:spPr>
           <a:xfrm>
             <a:off x="10760040" y="142200"/>
-            <a:ext cx="951480" cy="292320"/>
+            <a:ext cx="950400" cy="291240"/>
           </a:xfrm>
           <a:prstGeom prst="rect">
             <a:avLst/>
@@ -8026,7 +8026,7 @@
         <p:spPr>
           <a:xfrm>
             <a:off x="10921320" y="0"/>
-            <a:ext cx="1271160" cy="1372320"/>
+            <a:ext cx="1270080" cy="1371240"/>
           </a:xfrm>
           <a:prstGeom prst="rect">
             <a:avLst/>
@@ -8054,8 +8054,8 @@
         </p:blipFill>
         <p:spPr>
           <a:xfrm flipH="1" rot="16200000">
-            <a:off x="49680" y="5535000"/>
-            <a:ext cx="1271160" cy="1372320"/>
+            <a:off x="48600" y="5535000"/>
+            <a:ext cx="1270080" cy="1371240"/>
           </a:xfrm>
           <a:prstGeom prst="rect">
             <a:avLst/>
@@ -8078,7 +8078,7 @@
         <p:spPr>
           <a:xfrm>
             <a:off x="1333440" y="6352560"/>
-            <a:ext cx="7479360" cy="363960"/>
+            <a:ext cx="7478280" cy="362880"/>
           </a:xfrm>
           <a:prstGeom prst="rect">
             <a:avLst/>
@@ -8150,7 +8150,7 @@
         <p:spPr>
           <a:xfrm>
             <a:off x="8966160" y="6352560"/>
-            <a:ext cx="2742120" cy="363960"/>
+            <a:ext cx="2741040" cy="362880"/>
           </a:xfrm>
           <a:prstGeom prst="rect">
             <a:avLst/>
@@ -8193,7 +8193,7 @@
                 <a:tab algn="l" pos="0"/>
               </a:tabLst>
             </a:pPr>
-            <a:fld id="{7F5FE579-9C97-40F4-8AC7-AF3A11942407}" type="slidenum">
+            <a:fld id="{0ACCFA92-4E1D-45CF-8C3A-AC6C8529DAF8}" type="slidenum">
               <a:rPr b="1" lang="ru-RU" sz="1600" spc="-1" strike="noStrike">
                 <a:solidFill>
                   <a:schemeClr val="dk1">
@@ -8265,7 +8265,7 @@
         <p:spPr>
           <a:xfrm>
             <a:off x="10760040" y="142200"/>
-            <a:ext cx="951480" cy="292320"/>
+            <a:ext cx="950400" cy="291240"/>
           </a:xfrm>
           <a:prstGeom prst="rect">
             <a:avLst/>
@@ -8294,7 +8294,7 @@
         <p:spPr>
           <a:xfrm>
             <a:off x="10921320" y="0"/>
-            <a:ext cx="1271160" cy="1372320"/>
+            <a:ext cx="1270080" cy="1371240"/>
           </a:xfrm>
           <a:prstGeom prst="rect">
             <a:avLst/>
@@ -8322,8 +8322,8 @@
         </p:blipFill>
         <p:spPr>
           <a:xfrm flipH="1" rot="16200000">
-            <a:off x="49680" y="5535000"/>
-            <a:ext cx="1271160" cy="1372320"/>
+            <a:off x="48600" y="5535000"/>
+            <a:ext cx="1270080" cy="1371240"/>
           </a:xfrm>
           <a:prstGeom prst="rect">
             <a:avLst/>
@@ -8346,7 +8346,7 @@
         <p:spPr>
           <a:xfrm>
             <a:off x="1333440" y="6352560"/>
-            <a:ext cx="7479360" cy="363960"/>
+            <a:ext cx="7478280" cy="362880"/>
           </a:xfrm>
           <a:prstGeom prst="rect">
             <a:avLst/>
@@ -8418,7 +8418,7 @@
         <p:spPr>
           <a:xfrm>
             <a:off x="8966160" y="6352560"/>
-            <a:ext cx="2742120" cy="363960"/>
+            <a:ext cx="2741040" cy="362880"/>
           </a:xfrm>
           <a:prstGeom prst="rect">
             <a:avLst/>
@@ -8461,7 +8461,7 @@
                 <a:tab algn="l" pos="0"/>
               </a:tabLst>
             </a:pPr>
-            <a:fld id="{C2F42F11-2B50-4781-8E73-F4F5F7B7DB78}" type="slidenum">
+            <a:fld id="{71DE46A9-9ECC-44F0-A7DC-8284B75AC3B6}" type="slidenum">
               <a:rPr b="1" lang="ru-RU" sz="1600" spc="-1" strike="noStrike">
                 <a:solidFill>
                   <a:schemeClr val="dk1">
@@ -8533,7 +8533,7 @@
         <p:spPr>
           <a:xfrm>
             <a:off x="10760040" y="142200"/>
-            <a:ext cx="951480" cy="292320"/>
+            <a:ext cx="950400" cy="291240"/>
           </a:xfrm>
           <a:prstGeom prst="rect">
             <a:avLst/>
@@ -8562,7 +8562,7 @@
         <p:spPr>
           <a:xfrm>
             <a:off x="10921320" y="0"/>
-            <a:ext cx="1271160" cy="1372320"/>
+            <a:ext cx="1270080" cy="1371240"/>
           </a:xfrm>
           <a:prstGeom prst="rect">
             <a:avLst/>
@@ -8590,8 +8590,8 @@
         </p:blipFill>
         <p:spPr>
           <a:xfrm flipH="1" rot="16200000">
-            <a:off x="49680" y="5535000"/>
-            <a:ext cx="1271160" cy="1372320"/>
+            <a:off x="48600" y="5535000"/>
+            <a:ext cx="1270080" cy="1371240"/>
           </a:xfrm>
           <a:prstGeom prst="rect">
             <a:avLst/>
@@ -8614,7 +8614,7 @@
         <p:spPr>
           <a:xfrm>
             <a:off x="1333440" y="6352560"/>
-            <a:ext cx="7479360" cy="363960"/>
+            <a:ext cx="7478280" cy="362880"/>
           </a:xfrm>
           <a:prstGeom prst="rect">
             <a:avLst/>
@@ -8686,7 +8686,7 @@
         <p:spPr>
           <a:xfrm>
             <a:off x="8966160" y="6352560"/>
-            <a:ext cx="2742120" cy="363960"/>
+            <a:ext cx="2741040" cy="362880"/>
           </a:xfrm>
           <a:prstGeom prst="rect">
             <a:avLst/>
@@ -8729,7 +8729,7 @@
                 <a:tab algn="l" pos="0"/>
               </a:tabLst>
             </a:pPr>
-            <a:fld id="{A7E59B02-1B1D-42A5-8DDB-EBD29E015C71}" type="slidenum">
+            <a:fld id="{6F4D7913-24E6-4B6C-9D64-EC5878B15891}" type="slidenum">
               <a:rPr b="1" lang="ru-RU" sz="1600" spc="-1" strike="noStrike">
                 <a:solidFill>
                   <a:schemeClr val="dk1">
@@ -8788,7 +8788,7 @@
         <p:spPr>
           <a:xfrm>
             <a:off x="3759120" y="5218920"/>
-            <a:ext cx="7822440" cy="745560"/>
+            <a:ext cx="7821360" cy="744480"/>
           </a:xfrm>
           <a:prstGeom prst="rect">
             <a:avLst/>
@@ -8873,7 +8873,7 @@
         <p:spPr>
           <a:xfrm>
             <a:off x="3759120" y="4242240"/>
-            <a:ext cx="7822440" cy="772920"/>
+            <a:ext cx="7821360" cy="771840"/>
           </a:xfrm>
           <a:prstGeom prst="rect">
             <a:avLst/>
@@ -8984,7 +8984,7 @@
         <p:spPr>
           <a:xfrm>
             <a:off x="4776840" y="6168600"/>
-            <a:ext cx="2637000" cy="334080"/>
+            <a:ext cx="2635920" cy="333000"/>
           </a:xfrm>
           <a:prstGeom prst="rect">
             <a:avLst/>
@@ -9026,8 +9026,8 @@
         </p:nvSpPr>
         <p:spPr>
           <a:xfrm>
-            <a:off x="2880000" y="1620000"/>
-            <a:ext cx="7822440" cy="2031480"/>
+            <a:off x="3600000" y="1620000"/>
+            <a:ext cx="6921360" cy="1850400"/>
           </a:xfrm>
           <a:prstGeom prst="rect">
             <a:avLst/>
@@ -9056,7 +9056,7 @@
               </a:tabLst>
             </a:pPr>
             <a:r>
-              <a:rPr b="0" lang="ru-RU" sz="4000" spc="-1" strike="noStrike">
+              <a:rPr b="1" lang="ru-RU" sz="4000" spc="-1" strike="noStrike">
                 <a:solidFill>
                   <a:schemeClr val="dk1"/>
                 </a:solidFill>
@@ -9064,7 +9064,7 @@
               </a:rPr>
               <a:t>Информационная система комплексной оценки надежности поставщиков</a:t>
             </a:r>
-            <a:endParaRPr b="0" lang="ru-RU" sz="4000" spc="-1" strike="noStrike">
+            <a:endParaRPr b="1" lang="ru-RU" sz="4000" spc="-1" strike="noStrike">
               <a:solidFill>
                 <a:srgbClr val="000000"/>
               </a:solidFill>
@@ -9116,7 +9116,7 @@
         <p:spPr>
           <a:xfrm>
             <a:off x="0" y="0"/>
-            <a:ext cx="11228760" cy="921960"/>
+            <a:ext cx="11227680" cy="920880"/>
           </a:xfrm>
           <a:prstGeom prst="rect">
             <a:avLst/>
@@ -9141,7 +9141,7 @@
               </a:tabLst>
             </a:pPr>
             <a:r>
-              <a:rPr b="0" lang="ru-RU" sz="3600" spc="-1" strike="noStrike">
+              <a:rPr b="1" lang="ru-RU" sz="3600" spc="-1" strike="noStrike">
                 <a:solidFill>
                   <a:srgbClr val="332974"/>
                 </a:solidFill>
@@ -9171,7 +9171,7 @@
         <p:spPr>
           <a:xfrm>
             <a:off x="1333440" y="6352560"/>
-            <a:ext cx="7479360" cy="363960"/>
+            <a:ext cx="7478280" cy="362880"/>
           </a:xfrm>
           <a:prstGeom prst="rect">
             <a:avLst/>
@@ -9211,7 +9211,7 @@
         <p:spPr>
           <a:xfrm>
             <a:off x="2340360" y="1611720"/>
-            <a:ext cx="7556760" cy="4145040"/>
+            <a:ext cx="7555680" cy="4143960"/>
           </a:xfrm>
           <a:prstGeom prst="rect">
             <a:avLst/>
@@ -9235,7 +9235,7 @@
         <p:txBody>
           <a:bodyPr/>
           <a:p>
-            <a:fld id="{E5A50AF0-9FCD-4600-9295-0732C3DB9FBF}" type="slidenum">
+            <a:fld id="{A31519F7-CBB4-443B-83BF-C75C14F76D51}" type="slidenum">
               <a:t>10</a:t>
             </a:fld>
           </a:p>
@@ -9280,7 +9280,7 @@
         <p:spPr>
           <a:xfrm>
             <a:off x="0" y="0"/>
-            <a:ext cx="7739640" cy="719640"/>
+            <a:ext cx="7738560" cy="718560"/>
           </a:xfrm>
           <a:prstGeom prst="rect">
             <a:avLst/>
@@ -9341,7 +9341,7 @@
         <p:spPr>
           <a:xfrm>
             <a:off x="4140360" y="1620360"/>
-            <a:ext cx="4136760" cy="4649400"/>
+            <a:ext cx="4135680" cy="4648320"/>
           </a:xfrm>
           <a:prstGeom prst="rect">
             <a:avLst/>
@@ -9365,7 +9365,7 @@
         <p:txBody>
           <a:bodyPr/>
           <a:p>
-            <a:fld id="{8087C502-4DF7-4366-AD7D-B0EEC0135465}" type="slidenum">
+            <a:fld id="{FDE61B0C-08E8-49F5-8A84-45F436119218}" type="slidenum">
               <a:t>11</a:t>
             </a:fld>
           </a:p>
@@ -9414,7 +9414,7 @@
         <p:spPr>
           <a:xfrm>
             <a:off x="3060000" y="985320"/>
-            <a:ext cx="6299640" cy="5674320"/>
+            <a:ext cx="6298560" cy="5673240"/>
           </a:xfrm>
           <a:prstGeom prst="rect">
             <a:avLst/>
@@ -9433,7 +9433,7 @@
         <p:spPr>
           <a:xfrm>
             <a:off x="0" y="0"/>
-            <a:ext cx="11228760" cy="921960"/>
+            <a:ext cx="11227680" cy="920880"/>
           </a:xfrm>
           <a:prstGeom prst="rect">
             <a:avLst/>
@@ -9460,7 +9460,7 @@
               </a:lnSpc>
             </a:pPr>
             <a:r>
-              <a:rPr b="0" lang="ru-RU" sz="3600" spc="-1" strike="noStrike">
+              <a:rPr b="1" lang="ru-RU" sz="3600" spc="-1" strike="noStrike">
                 <a:solidFill>
                   <a:srgbClr val="332974"/>
                 </a:solidFill>
@@ -9492,7 +9492,7 @@
         <p:txBody>
           <a:bodyPr/>
           <a:p>
-            <a:fld id="{E95549B2-43CE-4166-810C-93A19E607F0F}" type="slidenum">
+            <a:fld id="{E5501F62-4D55-45DF-A18B-E7E652942E2B}" type="slidenum">
               <a:t>12</a:t>
             </a:fld>
           </a:p>
@@ -9541,7 +9541,7 @@
         <p:spPr>
           <a:xfrm>
             <a:off x="0" y="0"/>
-            <a:ext cx="11228760" cy="921960"/>
+            <a:ext cx="11227680" cy="920880"/>
           </a:xfrm>
           <a:prstGeom prst="rect">
             <a:avLst/>
@@ -9566,7 +9566,7 @@
               </a:tabLst>
             </a:pPr>
             <a:r>
-              <a:rPr b="0" lang="ru-RU" sz="3600" spc="-1" strike="noStrike">
+              <a:rPr b="1" lang="ru-RU" sz="3600" spc="-1" strike="noStrike">
                 <a:solidFill>
                   <a:srgbClr val="332974"/>
                 </a:solidFill>
@@ -9596,7 +9596,7 @@
         <p:spPr>
           <a:xfrm>
             <a:off x="1333440" y="6352560"/>
-            <a:ext cx="7479360" cy="363960"/>
+            <a:ext cx="7478280" cy="362880"/>
           </a:xfrm>
           <a:prstGeom prst="rect">
             <a:avLst/>
@@ -9631,8 +9631,8 @@
         </p:nvSpPr>
         <p:spPr>
           <a:xfrm>
-            <a:off x="0" y="900000"/>
-            <a:ext cx="11580120" cy="547560"/>
+            <a:off x="0" y="921600"/>
+            <a:ext cx="11579040" cy="546480"/>
           </a:xfrm>
           <a:prstGeom prst="rect">
             <a:avLst/>
@@ -9689,7 +9689,7 @@
         <p:spPr>
           <a:xfrm>
             <a:off x="1605960" y="2246760"/>
-            <a:ext cx="8114040" cy="4053240"/>
+            <a:ext cx="8112960" cy="4052160"/>
           </a:xfrm>
           <a:prstGeom prst="rect">
             <a:avLst/>
@@ -9713,7 +9713,7 @@
         <p:txBody>
           <a:bodyPr/>
           <a:p>
-            <a:fld id="{F84BC631-2E23-46A3-AD8F-DAF42DAE6460}" type="slidenum">
+            <a:fld id="{358FB8A1-F5FC-4075-9B01-0754548710A8}" type="slidenum">
               <a:t>13</a:t>
             </a:fld>
           </a:p>
@@ -9758,7 +9758,7 @@
         <p:spPr>
           <a:xfrm>
             <a:off x="0" y="0"/>
-            <a:ext cx="11159640" cy="818280"/>
+            <a:ext cx="11158560" cy="817200"/>
           </a:xfrm>
           <a:prstGeom prst="rect">
             <a:avLst/>
@@ -9818,7 +9818,7 @@
         <p:spPr>
           <a:xfrm>
             <a:off x="502200" y="3240000"/>
-            <a:ext cx="11017800" cy="1715400"/>
+            <a:ext cx="11016720" cy="1714320"/>
           </a:xfrm>
           <a:prstGeom prst="rect">
             <a:avLst/>
@@ -9841,7 +9841,7 @@
         <p:spPr>
           <a:xfrm>
             <a:off x="228240" y="1542600"/>
-            <a:ext cx="11831760" cy="1337400"/>
+            <a:ext cx="11830680" cy="1336320"/>
           </a:xfrm>
           <a:prstGeom prst="rect">
             <a:avLst/>
@@ -9865,7 +9865,7 @@
         <p:txBody>
           <a:bodyPr/>
           <a:p>
-            <a:fld id="{06BD138D-8E31-475D-B8E9-8B5221ED033F}" type="slidenum">
+            <a:fld id="{E0F79812-EF97-4D94-899D-971015F96B50}" type="slidenum">
               <a:t>14</a:t>
             </a:fld>
           </a:p>
@@ -9910,7 +9910,7 @@
         <p:spPr>
           <a:xfrm>
             <a:off x="0" y="0"/>
-            <a:ext cx="10079640" cy="601920"/>
+            <a:ext cx="10078560" cy="600840"/>
           </a:xfrm>
           <a:prstGeom prst="rect">
             <a:avLst/>
@@ -9970,7 +9970,7 @@
         <p:spPr>
           <a:xfrm>
             <a:off x="360" y="1577880"/>
-            <a:ext cx="3971880" cy="4001760"/>
+            <a:ext cx="3970800" cy="4000680"/>
           </a:xfrm>
           <a:prstGeom prst="rect">
             <a:avLst/>
@@ -9993,7 +9993,7 @@
         <p:spPr>
           <a:xfrm>
             <a:off x="4500000" y="2009160"/>
-            <a:ext cx="7403400" cy="3210480"/>
+            <a:ext cx="7402320" cy="3209400"/>
           </a:xfrm>
           <a:prstGeom prst="rect">
             <a:avLst/>
@@ -10017,7 +10017,7 @@
         <p:txBody>
           <a:bodyPr/>
           <a:p>
-            <a:fld id="{C3261ABB-5A08-431D-9E69-2687FDAF7577}" type="slidenum">
+            <a:fld id="{D6681F90-24C7-470B-A35D-97B2181F18DD}" type="slidenum">
               <a:t>15</a:t>
             </a:fld>
           </a:p>
@@ -10066,7 +10066,7 @@
         <p:spPr>
           <a:xfrm>
             <a:off x="3585240" y="1124640"/>
-            <a:ext cx="7394760" cy="2650680"/>
+            <a:ext cx="7393680" cy="2649600"/>
           </a:xfrm>
           <a:prstGeom prst="rect">
             <a:avLst/>
@@ -10089,7 +10089,7 @@
         <p:spPr>
           <a:xfrm>
             <a:off x="3602520" y="4007880"/>
-            <a:ext cx="7355880" cy="2652120"/>
+            <a:ext cx="7354800" cy="2651040"/>
           </a:xfrm>
           <a:prstGeom prst="rect">
             <a:avLst/>
@@ -10108,7 +10108,7 @@
         <p:spPr>
           <a:xfrm>
             <a:off x="0" y="0"/>
-            <a:ext cx="10079640" cy="601920"/>
+            <a:ext cx="10078560" cy="600840"/>
           </a:xfrm>
           <a:prstGeom prst="rect">
             <a:avLst/>
@@ -10168,7 +10168,7 @@
         <p:spPr>
           <a:xfrm>
             <a:off x="77400" y="1165320"/>
-            <a:ext cx="3342600" cy="3154680"/>
+            <a:ext cx="3341520" cy="3153600"/>
           </a:xfrm>
           <a:prstGeom prst="rect">
             <a:avLst/>
@@ -10192,7 +10192,7 @@
         <p:txBody>
           <a:bodyPr/>
           <a:p>
-            <a:fld id="{7AD9E877-704D-4CAA-BA5B-51012DE6CA3A}" type="slidenum">
+            <a:fld id="{2A702851-677F-48AF-89ED-007E108F89D9}" type="slidenum">
               <a:t>16</a:t>
             </a:fld>
           </a:p>
@@ -10237,7 +10237,7 @@
         <p:spPr>
           <a:xfrm>
             <a:off x="643320" y="10080"/>
-            <a:ext cx="10900080" cy="1321920"/>
+            <a:ext cx="10899000" cy="1320840"/>
           </a:xfrm>
           <a:prstGeom prst="rect">
             <a:avLst/>
@@ -10288,7 +10288,7 @@
         <p:spPr>
           <a:xfrm>
             <a:off x="3022200" y="1440000"/>
-            <a:ext cx="7597800" cy="1235880"/>
+            <a:ext cx="7596720" cy="1234800"/>
           </a:xfrm>
           <a:prstGeom prst="rect">
             <a:avLst/>
@@ -10311,7 +10311,7 @@
         <p:spPr>
           <a:xfrm>
             <a:off x="3022200" y="2880000"/>
-            <a:ext cx="7448400" cy="2259360"/>
+            <a:ext cx="7447320" cy="2258280"/>
           </a:xfrm>
           <a:prstGeom prst="rect">
             <a:avLst/>
@@ -10330,7 +10330,7 @@
         <p:spPr>
           <a:xfrm>
             <a:off x="0" y="0"/>
-            <a:ext cx="8678160" cy="735120"/>
+            <a:ext cx="8677080" cy="734040"/>
           </a:xfrm>
           <a:prstGeom prst="rect">
             <a:avLst/>
@@ -10388,7 +10388,7 @@
         <p:spPr>
           <a:xfrm>
             <a:off x="0" y="1440000"/>
-            <a:ext cx="2866320" cy="3060000"/>
+            <a:ext cx="2865240" cy="3058920"/>
           </a:xfrm>
           <a:prstGeom prst="rect">
             <a:avLst/>
@@ -10412,7 +10412,7 @@
         <p:txBody>
           <a:bodyPr/>
           <a:p>
-            <a:fld id="{F44DC001-B9E7-45C4-86A8-CC2AE4C89B24}" type="slidenum">
+            <a:fld id="{EF7B7E12-060E-4E99-B9C4-5D8FEDEE5B8C}" type="slidenum">
               <a:t>17</a:t>
             </a:fld>
           </a:p>
@@ -10461,7 +10461,7 @@
         <p:spPr>
           <a:xfrm>
             <a:off x="0" y="0"/>
-            <a:ext cx="11228760" cy="921960"/>
+            <a:ext cx="11227680" cy="920880"/>
           </a:xfrm>
           <a:prstGeom prst="rect">
             <a:avLst/>
@@ -10486,7 +10486,7 @@
               </a:tabLst>
             </a:pPr>
             <a:r>
-              <a:rPr b="0" lang="ru-RU" sz="3600" spc="-1" strike="noStrike">
+              <a:rPr b="1" lang="ru-RU" sz="3600" spc="-1" strike="noStrike">
                 <a:solidFill>
                   <a:schemeClr val="dk1"/>
                 </a:solidFill>
@@ -10516,7 +10516,7 @@
         <p:spPr>
           <a:xfrm>
             <a:off x="1333440" y="6352560"/>
-            <a:ext cx="7479360" cy="363960"/>
+            <a:ext cx="7478280" cy="362880"/>
           </a:xfrm>
           <a:prstGeom prst="rect">
             <a:avLst/>
@@ -10551,7 +10551,7 @@
         </p:nvGraphicFramePr>
         <p:xfrm>
           <a:off x="313560" y="1138680"/>
-          <a:ext cx="7919640" cy="2779560"/>
+          <a:ext cx="7919640" cy="3035520"/>
         </p:xfrm>
         <a:graphic>
           <a:graphicData uri="http://schemas.openxmlformats.org/drawingml/2006/table">
@@ -11149,7 +11149,7 @@
         <p:txBody>
           <a:bodyPr/>
           <a:p>
-            <a:fld id="{0C35B95A-298C-4997-AF2E-01C0BDCE1995}" type="slidenum">
+            <a:fld id="{0A9D8CCA-79A4-4E91-814B-4FD80D8CBB8C}" type="slidenum">
               <a:t>18</a:t>
             </a:fld>
           </a:p>
@@ -11198,7 +11198,7 @@
         <p:spPr>
           <a:xfrm>
             <a:off x="3759120" y="5218920"/>
-            <a:ext cx="7822440" cy="745560"/>
+            <a:ext cx="7821360" cy="744480"/>
           </a:xfrm>
           <a:prstGeom prst="rect">
             <a:avLst/>
@@ -11257,7 +11257,7 @@
         <p:spPr>
           <a:xfrm>
             <a:off x="3759120" y="4242240"/>
-            <a:ext cx="7822440" cy="772920"/>
+            <a:ext cx="7821360" cy="771840"/>
           </a:xfrm>
           <a:prstGeom prst="rect">
             <a:avLst/>
@@ -11368,7 +11368,7 @@
         <p:spPr>
           <a:xfrm>
             <a:off x="4776840" y="6168600"/>
-            <a:ext cx="2637000" cy="334080"/>
+            <a:ext cx="2635920" cy="333000"/>
           </a:xfrm>
           <a:prstGeom prst="rect">
             <a:avLst/>
@@ -11411,7 +11411,7 @@
         <p:spPr>
           <a:xfrm>
             <a:off x="3759120" y="2007000"/>
-            <a:ext cx="7822440" cy="2031480"/>
+            <a:ext cx="7821360" cy="2030400"/>
           </a:xfrm>
           <a:prstGeom prst="rect">
             <a:avLst/>
@@ -11440,7 +11440,7 @@
               </a:tabLst>
             </a:pPr>
             <a:r>
-              <a:rPr b="0" lang="ru-RU" sz="4000" spc="-1" strike="noStrike">
+              <a:rPr b="1" lang="ru-RU" sz="4000" spc="-1" strike="noStrike">
                 <a:solidFill>
                   <a:schemeClr val="dk1"/>
                 </a:solidFill>
@@ -11448,7 +11448,7 @@
               </a:rPr>
               <a:t>Спасибо за внимание</a:t>
             </a:r>
-            <a:endParaRPr b="0" lang="ru-RU" sz="4000" spc="-1" strike="noStrike">
+            <a:endParaRPr b="1" lang="ru-RU" sz="4000" spc="-1" strike="noStrike">
               <a:solidFill>
                 <a:srgbClr val="000000"/>
               </a:solidFill>
@@ -11500,7 +11500,7 @@
         <p:spPr>
           <a:xfrm>
             <a:off x="0" y="0"/>
-            <a:ext cx="11228760" cy="921960"/>
+            <a:ext cx="11227680" cy="920880"/>
           </a:xfrm>
           <a:prstGeom prst="rect">
             <a:avLst/>
@@ -11525,7 +11525,7 @@
               </a:tabLst>
             </a:pPr>
             <a:r>
-              <a:rPr b="0" lang="ru-RU" sz="3600" spc="-1" strike="noStrike">
+              <a:rPr b="1" lang="ru-RU" sz="3600" spc="-1" strike="noStrike">
                 <a:solidFill>
                   <a:srgbClr val="332974"/>
                 </a:solidFill>
@@ -11555,7 +11555,7 @@
         <p:spPr>
           <a:xfrm>
             <a:off x="1333440" y="6352560"/>
-            <a:ext cx="7479360" cy="363960"/>
+            <a:ext cx="7478280" cy="362880"/>
           </a:xfrm>
           <a:prstGeom prst="rect">
             <a:avLst/>
@@ -11591,7 +11591,7 @@
         <p:spPr>
           <a:xfrm>
             <a:off x="277560" y="921960"/>
-            <a:ext cx="11242440" cy="4756680"/>
+            <a:ext cx="11241360" cy="4755600"/>
           </a:xfrm>
           <a:prstGeom prst="rect">
             <a:avLst/>
@@ -11634,7 +11634,7 @@
               <a:solidFill>
                 <a:srgbClr val="000000"/>
               </a:solidFill>
-              <a:latin typeface="Montserrat"/>
+              <a:latin typeface="Arial"/>
             </a:endParaRPr>
           </a:p>
         </p:txBody>
@@ -11653,7 +11653,7 @@
         <p:txBody>
           <a:bodyPr/>
           <a:p>
-            <a:fld id="{2680FFCE-8BD6-4D9C-8A01-B5D815C95096}" type="slidenum">
+            <a:fld id="{5A668F5B-0CFF-46B4-A968-2C78E61CEDDC}" type="slidenum">
               <a:t>2</a:t>
             </a:fld>
           </a:p>
@@ -11692,13 +11692,13 @@
       <p:sp>
         <p:nvSpPr>
           <p:cNvPr id="133" name="PlaceHolder 8"/>
-          <p:cNvSpPr txBox="1"/>
+          <p:cNvSpPr/>
           <p:nvPr/>
         </p:nvSpPr>
         <p:spPr>
           <a:xfrm>
             <a:off x="360" y="360"/>
-            <a:ext cx="11228760" cy="921960"/>
+            <a:ext cx="11227680" cy="920880"/>
           </a:xfrm>
           <a:prstGeom prst="rect">
             <a:avLst/>
@@ -11708,8 +11708,14 @@
             <a:noFill/>
           </a:ln>
         </p:spPr>
+        <p:style>
+          <a:lnRef idx="0"/>
+          <a:fillRef idx="0"/>
+          <a:effectRef idx="0"/>
+          <a:fontRef idx="minor"/>
+        </p:style>
         <p:txBody>
-          <a:bodyPr anchor="t">
+          <a:bodyPr lIns="90000" rIns="90000" tIns="45000" bIns="45000" anchor="t">
             <a:noAutofit/>
           </a:bodyPr>
           <a:p>
@@ -11722,7 +11728,7 @@
               </a:tabLst>
             </a:pPr>
             <a:r>
-              <a:rPr b="0" lang="ru-RU" sz="3600" spc="-1" strike="noStrike">
+              <a:rPr b="1" lang="ru-RU" sz="3600" spc="-1" strike="noStrike">
                 <a:solidFill>
                   <a:srgbClr val="332974"/>
                 </a:solidFill>
@@ -11742,13 +11748,13 @@
       <p:sp>
         <p:nvSpPr>
           <p:cNvPr id="134" name=""/>
-          <p:cNvSpPr txBox="1"/>
+          <p:cNvSpPr/>
           <p:nvPr/>
         </p:nvSpPr>
         <p:spPr>
           <a:xfrm>
             <a:off x="360000" y="1002960"/>
-            <a:ext cx="10774080" cy="977040"/>
+            <a:ext cx="10773000" cy="975960"/>
           </a:xfrm>
           <a:prstGeom prst="rect">
             <a:avLst/>
@@ -11758,11 +11764,22 @@
             <a:noFill/>
           </a:ln>
         </p:spPr>
+        <p:style>
+          <a:lnRef idx="0"/>
+          <a:fillRef idx="0"/>
+          <a:effectRef idx="0"/>
+          <a:fontRef idx="minor"/>
+        </p:style>
         <p:txBody>
           <a:bodyPr lIns="90000" rIns="90000" tIns="45000" bIns="45000" anchor="t">
             <a:noAutofit/>
           </a:bodyPr>
           <a:p>
+            <a:pPr>
+              <a:lnSpc>
+                <a:spcPct val="100000"/>
+              </a:lnSpc>
+            </a:pPr>
             <a:r>
               <a:rPr b="0" lang="ru-RU" sz="2000" spc="-1" strike="noStrike">
                 <a:solidFill>
@@ -11805,9 +11822,9 @@
             </a:r>
             <a:endParaRPr b="0" lang="ru-RU" sz="2000" spc="-1" strike="noStrike">
               <a:solidFill>
-                <a:srgbClr val="332974"/>
+                <a:srgbClr val="000000"/>
               </a:solidFill>
-              <a:latin typeface="Montserrat"/>
+              <a:latin typeface="Arial"/>
             </a:endParaRPr>
           </a:p>
         </p:txBody>
@@ -11815,13 +11832,13 @@
       <p:sp>
         <p:nvSpPr>
           <p:cNvPr id="135" name="PlaceHolder 10"/>
-          <p:cNvSpPr txBox="1"/>
+          <p:cNvSpPr/>
           <p:nvPr/>
         </p:nvSpPr>
         <p:spPr>
           <a:xfrm>
             <a:off x="0" y="2318040"/>
-            <a:ext cx="6728760" cy="921960"/>
+            <a:ext cx="6727680" cy="920880"/>
           </a:xfrm>
           <a:prstGeom prst="rect">
             <a:avLst/>
@@ -11831,13 +11848,24 @@
             <a:noFill/>
           </a:ln>
         </p:spPr>
+        <p:style>
+          <a:lnRef idx="0"/>
+          <a:fillRef idx="0"/>
+          <a:effectRef idx="0"/>
+          <a:fontRef idx="minor"/>
+        </p:style>
         <p:txBody>
-          <a:bodyPr anchor="t">
+          <a:bodyPr lIns="90000" rIns="90000" tIns="45000" bIns="45000" anchor="t">
             <a:noAutofit/>
           </a:bodyPr>
           <a:p>
+            <a:pPr>
+              <a:lnSpc>
+                <a:spcPct val="100000"/>
+              </a:lnSpc>
+            </a:pPr>
             <a:r>
-              <a:rPr b="0" lang="ru-RU" sz="3600" spc="-1" strike="noStrike">
+              <a:rPr b="1" lang="ru-RU" sz="3600" spc="-1" strike="noStrike">
                 <a:solidFill>
                   <a:srgbClr val="332974"/>
                 </a:solidFill>
@@ -11846,12 +11874,11 @@
               </a:rPr>
               <a:t>Объект исследования</a:t>
             </a:r>
-            <a:endParaRPr b="1" lang="ru-RU" sz="3600" spc="-1" strike="noStrike">
+            <a:endParaRPr b="0" lang="ru-RU" sz="3600" spc="-1" strike="noStrike">
               <a:solidFill>
                 <a:srgbClr val="000000"/>
               </a:solidFill>
               <a:latin typeface="Arial"/>
-              <a:ea typeface="Times New Roman"/>
             </a:endParaRPr>
           </a:p>
         </p:txBody>
@@ -11859,13 +11886,13 @@
       <p:sp>
         <p:nvSpPr>
           <p:cNvPr id="136" name=""/>
-          <p:cNvSpPr txBox="1"/>
+          <p:cNvSpPr/>
           <p:nvPr/>
         </p:nvSpPr>
         <p:spPr>
           <a:xfrm>
             <a:off x="0" y="3060000"/>
-            <a:ext cx="10774080" cy="599760"/>
+            <a:ext cx="10773000" cy="598680"/>
           </a:xfrm>
           <a:prstGeom prst="rect">
             <a:avLst/>
@@ -11875,11 +11902,22 @@
             <a:noFill/>
           </a:ln>
         </p:spPr>
+        <p:style>
+          <a:lnRef idx="0"/>
+          <a:fillRef idx="0"/>
+          <a:effectRef idx="0"/>
+          <a:fontRef idx="minor"/>
+        </p:style>
         <p:txBody>
           <a:bodyPr lIns="90000" rIns="90000" tIns="45000" bIns="45000" anchor="t">
             <a:noAutofit/>
           </a:bodyPr>
           <a:p>
+            <a:pPr>
+              <a:lnSpc>
+                <a:spcPct val="100000"/>
+              </a:lnSpc>
+            </a:pPr>
             <a:r>
               <a:rPr b="0" lang="ru-RU" sz="2000" spc="-1" strike="noStrike">
                 <a:solidFill>
@@ -11895,7 +11933,6 @@
                 <a:srgbClr val="000000"/>
               </a:solidFill>
               <a:latin typeface="Arial"/>
-              <a:ea typeface="Times New Roman"/>
             </a:endParaRPr>
           </a:p>
         </p:txBody>
@@ -11903,13 +11940,13 @@
       <p:sp>
         <p:nvSpPr>
           <p:cNvPr id="137" name="PlaceHolder 11"/>
-          <p:cNvSpPr txBox="1"/>
+          <p:cNvSpPr/>
           <p:nvPr/>
         </p:nvSpPr>
         <p:spPr>
           <a:xfrm>
             <a:off x="0" y="3834360"/>
-            <a:ext cx="11228760" cy="921960"/>
+            <a:ext cx="11227680" cy="920880"/>
           </a:xfrm>
           <a:prstGeom prst="rect">
             <a:avLst/>
@@ -11919,13 +11956,24 @@
             <a:noFill/>
           </a:ln>
         </p:spPr>
+        <p:style>
+          <a:lnRef idx="0"/>
+          <a:fillRef idx="0"/>
+          <a:effectRef idx="0"/>
+          <a:fontRef idx="minor"/>
+        </p:style>
         <p:txBody>
-          <a:bodyPr anchor="t">
+          <a:bodyPr lIns="90000" rIns="90000" tIns="45000" bIns="45000" anchor="t">
             <a:noAutofit/>
           </a:bodyPr>
           <a:p>
+            <a:pPr>
+              <a:lnSpc>
+                <a:spcPct val="100000"/>
+              </a:lnSpc>
+            </a:pPr>
             <a:r>
-              <a:rPr b="0" lang="ru-RU" sz="3600" spc="-1" strike="noStrike">
+              <a:rPr b="1" lang="ru-RU" sz="3600" spc="-1" strike="noStrike">
                 <a:solidFill>
                   <a:srgbClr val="332974"/>
                 </a:solidFill>
@@ -11934,12 +11982,11 @@
               </a:rPr>
               <a:t>Предмет исследования</a:t>
             </a:r>
-            <a:endParaRPr b="1" lang="ru-RU" sz="3600" spc="-1" strike="noStrike">
+            <a:endParaRPr b="0" lang="ru-RU" sz="3600" spc="-1" strike="noStrike">
               <a:solidFill>
                 <a:srgbClr val="000000"/>
               </a:solidFill>
               <a:latin typeface="Arial"/>
-              <a:ea typeface="Times New Roman"/>
             </a:endParaRPr>
           </a:p>
         </p:txBody>
@@ -11947,13 +11994,13 @@
       <p:sp>
         <p:nvSpPr>
           <p:cNvPr id="138" name=""/>
-          <p:cNvSpPr txBox="1"/>
+          <p:cNvSpPr/>
           <p:nvPr/>
         </p:nvSpPr>
         <p:spPr>
           <a:xfrm>
             <a:off x="454680" y="4602960"/>
-            <a:ext cx="10774080" cy="681480"/>
+            <a:ext cx="10773000" cy="680400"/>
           </a:xfrm>
           <a:prstGeom prst="rect">
             <a:avLst/>
@@ -11963,11 +12010,22 @@
             <a:noFill/>
           </a:ln>
         </p:spPr>
+        <p:style>
+          <a:lnRef idx="0"/>
+          <a:fillRef idx="0"/>
+          <a:effectRef idx="0"/>
+          <a:fontRef idx="minor"/>
+        </p:style>
         <p:txBody>
           <a:bodyPr lIns="90000" rIns="90000" tIns="45000" bIns="45000" anchor="t">
             <a:noAutofit/>
           </a:bodyPr>
           <a:p>
+            <a:pPr>
+              <a:lnSpc>
+                <a:spcPct val="100000"/>
+              </a:lnSpc>
+            </a:pPr>
             <a:r>
               <a:rPr b="0" lang="ru-RU" sz="2000" spc="-1" strike="noStrike">
                 <a:solidFill>
@@ -11979,9 +12037,9 @@
             </a:r>
             <a:endParaRPr b="0" lang="ru-RU" sz="2000" spc="-1" strike="noStrike">
               <a:solidFill>
-                <a:srgbClr val="332974"/>
+                <a:srgbClr val="000000"/>
               </a:solidFill>
-              <a:latin typeface="Montserrat"/>
+              <a:latin typeface="Arial"/>
             </a:endParaRPr>
           </a:p>
         </p:txBody>
@@ -12000,7 +12058,7 @@
         <p:txBody>
           <a:bodyPr/>
           <a:p>
-            <a:fld id="{5260ED52-0B42-44FA-BF81-CF7F9A78826B}" type="slidenum">
+            <a:fld id="{E3F0C389-A6DE-484D-AE4B-7B4E6CD9C39A}" type="slidenum">
               <a:t>3</a:t>
             </a:fld>
           </a:p>
@@ -12045,7 +12103,7 @@
         <p:spPr>
           <a:xfrm>
             <a:off x="0" y="0"/>
-            <a:ext cx="11159640" cy="1259640"/>
+            <a:ext cx="11158560" cy="1258560"/>
           </a:xfrm>
           <a:prstGeom prst="rect">
             <a:avLst/>
@@ -12105,7 +12163,7 @@
         <p:spPr>
           <a:xfrm>
             <a:off x="6026760" y="1620000"/>
-            <a:ext cx="5672880" cy="3959640"/>
+            <a:ext cx="5671800" cy="3958560"/>
           </a:xfrm>
           <a:prstGeom prst="rect">
             <a:avLst/>
@@ -12128,7 +12186,7 @@
         <p:spPr>
           <a:xfrm>
             <a:off x="720000" y="1620000"/>
-            <a:ext cx="5474520" cy="3960000"/>
+            <a:ext cx="5473440" cy="3958920"/>
           </a:xfrm>
           <a:prstGeom prst="rect">
             <a:avLst/>
@@ -12152,7 +12210,7 @@
         <p:txBody>
           <a:bodyPr/>
           <a:p>
-            <a:fld id="{171105F1-0461-4769-BB12-90B8EF190262}" type="slidenum">
+            <a:fld id="{8D1661C6-7A23-463F-A1B3-418541F3F309}" type="slidenum">
               <a:t>4</a:t>
             </a:fld>
           </a:p>
@@ -12197,7 +12255,7 @@
         <p:spPr>
           <a:xfrm>
             <a:off x="2160" y="0"/>
-            <a:ext cx="12057480" cy="962280"/>
+            <a:ext cx="12056400" cy="961200"/>
           </a:xfrm>
           <a:prstGeom prst="rect">
             <a:avLst/>
@@ -12257,7 +12315,7 @@
         <p:spPr>
           <a:xfrm>
             <a:off x="2160000" y="1080000"/>
-            <a:ext cx="7559640" cy="5345640"/>
+            <a:ext cx="7558560" cy="5344560"/>
           </a:xfrm>
           <a:prstGeom prst="rect">
             <a:avLst/>
@@ -12281,7 +12339,7 @@
         <p:txBody>
           <a:bodyPr/>
           <a:p>
-            <a:fld id="{09248AB6-B2A3-4C27-98FE-E646CE683012}" type="slidenum">
+            <a:fld id="{BC68B574-134D-4112-BE2A-3615041CA473}" type="slidenum">
               <a:t>5</a:t>
             </a:fld>
           </a:p>
@@ -12330,7 +12388,7 @@
         <p:spPr>
           <a:xfrm>
             <a:off x="0" y="0"/>
-            <a:ext cx="11699640" cy="921960"/>
+            <a:ext cx="11698560" cy="920880"/>
           </a:xfrm>
           <a:prstGeom prst="rect">
             <a:avLst/>
@@ -12355,7 +12413,7 @@
               </a:tabLst>
             </a:pPr>
             <a:r>
-              <a:rPr b="0" lang="ru-RU" sz="3600" spc="-1" strike="noStrike">
+              <a:rPr b="1" lang="ru-RU" sz="3600" spc="-1" strike="noStrike">
                 <a:solidFill>
                   <a:schemeClr val="dk1"/>
                 </a:solidFill>
@@ -12385,7 +12443,7 @@
         <p:spPr>
           <a:xfrm>
             <a:off x="1333440" y="6386400"/>
-            <a:ext cx="7479360" cy="363960"/>
+            <a:ext cx="7478280" cy="362880"/>
           </a:xfrm>
           <a:prstGeom prst="rect">
             <a:avLst/>
@@ -12420,7 +12478,7 @@
         </p:nvGraphicFramePr>
         <p:xfrm>
           <a:off x="1469520" y="972360"/>
-          <a:ext cx="9148680" cy="5024160"/>
+          <a:ext cx="9148680" cy="4384800"/>
         </p:xfrm>
         <a:graphic>
           <a:graphicData uri="http://schemas.openxmlformats.org/drawingml/2006/table">
@@ -12461,7 +12519,7 @@
                         <a:solidFill>
                           <a:srgbClr val="ffffff"/>
                         </a:solidFill>
-                        <a:latin typeface="Times New Roman"/>
+                        <a:latin typeface="Arial"/>
                       </a:endParaRPr>
                     </a:p>
                     <a:p>
@@ -12486,7 +12544,7 @@
                         <a:solidFill>
                           <a:srgbClr val="ffffff"/>
                         </a:solidFill>
-                        <a:latin typeface="Times New Roman"/>
+                        <a:latin typeface="Arial"/>
                       </a:endParaRPr>
                     </a:p>
                   </a:txBody>
@@ -12544,7 +12602,7 @@
                         <a:solidFill>
                           <a:srgbClr val="ffffff"/>
                         </a:solidFill>
-                        <a:latin typeface="Times New Roman"/>
+                        <a:latin typeface="Arial"/>
                       </a:endParaRPr>
                     </a:p>
                   </a:txBody>
@@ -12602,7 +12660,7 @@
                         <a:solidFill>
                           <a:srgbClr val="ffffff"/>
                         </a:solidFill>
-                        <a:latin typeface="Times New Roman"/>
+                        <a:latin typeface="Arial"/>
                       </a:endParaRPr>
                     </a:p>
                   </a:txBody>
@@ -12660,7 +12718,7 @@
                         <a:solidFill>
                           <a:srgbClr val="ffffff"/>
                         </a:solidFill>
-                        <a:latin typeface="Times New Roman"/>
+                        <a:latin typeface="Arial"/>
                       </a:endParaRPr>
                     </a:p>
                   </a:txBody>
@@ -12721,7 +12779,7 @@
                         <a:solidFill>
                           <a:srgbClr val="ffffff"/>
                         </a:solidFill>
-                        <a:latin typeface="Times New Roman"/>
+                        <a:latin typeface="Arial"/>
                       </a:endParaRPr>
                     </a:p>
                   </a:txBody>
@@ -12784,7 +12842,7 @@
                         <a:solidFill>
                           <a:srgbClr val="ffffff"/>
                         </a:solidFill>
-                        <a:latin typeface="Times New Roman"/>
+                        <a:latin typeface="Arial"/>
                       </a:endParaRPr>
                     </a:p>
                   </a:txBody>
@@ -12845,7 +12903,7 @@
                         <a:solidFill>
                           <a:srgbClr val="000000"/>
                         </a:solidFill>
-                        <a:latin typeface="Times New Roman"/>
+                        <a:latin typeface="Arial"/>
                       </a:endParaRPr>
                     </a:p>
                   </a:txBody>
@@ -12906,7 +12964,7 @@
                         <a:solidFill>
                           <a:srgbClr val="000000"/>
                         </a:solidFill>
-                        <a:latin typeface="Times New Roman"/>
+                        <a:latin typeface="Arial"/>
                       </a:endParaRPr>
                     </a:p>
                   </a:txBody>
@@ -12967,7 +13025,7 @@
                         <a:solidFill>
                           <a:srgbClr val="000000"/>
                         </a:solidFill>
-                        <a:latin typeface="Times New Roman"/>
+                        <a:latin typeface="Arial"/>
                       </a:endParaRPr>
                     </a:p>
                   </a:txBody>
@@ -13028,7 +13086,7 @@
                         <a:solidFill>
                           <a:srgbClr val="000000"/>
                         </a:solidFill>
-                        <a:latin typeface="Times New Roman"/>
+                        <a:latin typeface="Arial"/>
                       </a:endParaRPr>
                     </a:p>
                   </a:txBody>
@@ -13091,7 +13149,7 @@
                         <a:solidFill>
                           <a:srgbClr val="ffffff"/>
                         </a:solidFill>
-                        <a:latin typeface="Times New Roman"/>
+                        <a:latin typeface="Arial"/>
                       </a:endParaRPr>
                     </a:p>
                   </a:txBody>
@@ -13152,7 +13210,7 @@
                         <a:solidFill>
                           <a:srgbClr val="000000"/>
                         </a:solidFill>
-                        <a:latin typeface="Times New Roman"/>
+                        <a:latin typeface="Arial"/>
                       </a:endParaRPr>
                     </a:p>
                   </a:txBody>
@@ -13215,7 +13273,7 @@
                         <a:solidFill>
                           <a:srgbClr val="000000"/>
                         </a:solidFill>
-                        <a:latin typeface="Times New Roman"/>
+                        <a:latin typeface="Arial"/>
                       </a:endParaRPr>
                     </a:p>
                   </a:txBody>
@@ -13278,7 +13336,7 @@
                         <a:solidFill>
                           <a:srgbClr val="000000"/>
                         </a:solidFill>
-                        <a:latin typeface="Times New Roman"/>
+                        <a:latin typeface="Arial"/>
                       </a:endParaRPr>
                     </a:p>
                   </a:txBody>
@@ -13341,7 +13399,7 @@
                         <a:solidFill>
                           <a:srgbClr val="000000"/>
                         </a:solidFill>
-                        <a:latin typeface="Times New Roman"/>
+                        <a:latin typeface="Arial"/>
                       </a:endParaRPr>
                     </a:p>
                   </a:txBody>
@@ -13406,7 +13464,7 @@
                         <a:solidFill>
                           <a:srgbClr val="ffffff"/>
                         </a:solidFill>
-                        <a:latin typeface="Times New Roman"/>
+                        <a:latin typeface="Arial"/>
                       </a:endParaRPr>
                     </a:p>
                   </a:txBody>
@@ -13467,7 +13525,7 @@
                         <a:solidFill>
                           <a:srgbClr val="000000"/>
                         </a:solidFill>
-                        <a:latin typeface="Times New Roman"/>
+                        <a:latin typeface="Arial"/>
                       </a:endParaRPr>
                     </a:p>
                   </a:txBody>
@@ -13528,7 +13586,7 @@
                         <a:solidFill>
                           <a:srgbClr val="000000"/>
                         </a:solidFill>
-                        <a:latin typeface="Times New Roman"/>
+                        <a:latin typeface="Arial"/>
                       </a:endParaRPr>
                     </a:p>
                   </a:txBody>
@@ -13589,7 +13647,7 @@
                         <a:solidFill>
                           <a:srgbClr val="000000"/>
                         </a:solidFill>
-                        <a:latin typeface="Times New Roman"/>
+                        <a:latin typeface="Arial"/>
                       </a:endParaRPr>
                     </a:p>
                   </a:txBody>
@@ -13650,7 +13708,7 @@
                         <a:solidFill>
                           <a:srgbClr val="000000"/>
                         </a:solidFill>
-                        <a:latin typeface="Times New Roman"/>
+                        <a:latin typeface="Arial"/>
                       </a:endParaRPr>
                     </a:p>
                   </a:txBody>
@@ -13713,7 +13771,7 @@
                         <a:solidFill>
                           <a:srgbClr val="ffffff"/>
                         </a:solidFill>
-                        <a:latin typeface="Times New Roman"/>
+                        <a:latin typeface="Arial"/>
                       </a:endParaRPr>
                     </a:p>
                   </a:txBody>
@@ -13774,7 +13832,7 @@
                         <a:solidFill>
                           <a:srgbClr val="000000"/>
                         </a:solidFill>
-                        <a:latin typeface="Times New Roman"/>
+                        <a:latin typeface="Arial"/>
                       </a:endParaRPr>
                     </a:p>
                   </a:txBody>
@@ -13837,7 +13895,7 @@
                         <a:solidFill>
                           <a:srgbClr val="000000"/>
                         </a:solidFill>
-                        <a:latin typeface="Times New Roman"/>
+                        <a:latin typeface="Arial"/>
                       </a:endParaRPr>
                     </a:p>
                   </a:txBody>
@@ -13900,7 +13958,7 @@
                         <a:solidFill>
                           <a:srgbClr val="000000"/>
                         </a:solidFill>
-                        <a:latin typeface="Times New Roman"/>
+                        <a:latin typeface="Arial"/>
                       </a:endParaRPr>
                     </a:p>
                   </a:txBody>
@@ -13963,7 +14021,7 @@
                         <a:solidFill>
                           <a:srgbClr val="000000"/>
                         </a:solidFill>
-                        <a:latin typeface="Times New Roman"/>
+                        <a:latin typeface="Arial"/>
                       </a:endParaRPr>
                     </a:p>
                   </a:txBody>
@@ -14028,7 +14086,7 @@
                         <a:solidFill>
                           <a:srgbClr val="ffffff"/>
                         </a:solidFill>
-                        <a:latin typeface="Times New Roman"/>
+                        <a:latin typeface="Arial"/>
                       </a:endParaRPr>
                     </a:p>
                   </a:txBody>
@@ -14089,7 +14147,7 @@
                         <a:solidFill>
                           <a:srgbClr val="000000"/>
                         </a:solidFill>
-                        <a:latin typeface="Times New Roman"/>
+                        <a:latin typeface="Arial"/>
                       </a:endParaRPr>
                     </a:p>
                   </a:txBody>
@@ -14150,7 +14208,7 @@
                         <a:solidFill>
                           <a:srgbClr val="000000"/>
                         </a:solidFill>
-                        <a:latin typeface="Times New Roman"/>
+                        <a:latin typeface="Arial"/>
                       </a:endParaRPr>
                     </a:p>
                   </a:txBody>
@@ -14211,7 +14269,7 @@
                         <a:solidFill>
                           <a:srgbClr val="000000"/>
                         </a:solidFill>
-                        <a:latin typeface="Times New Roman"/>
+                        <a:latin typeface="Arial"/>
                       </a:endParaRPr>
                     </a:p>
                   </a:txBody>
@@ -14272,7 +14330,7 @@
                         <a:solidFill>
                           <a:srgbClr val="000000"/>
                         </a:solidFill>
-                        <a:latin typeface="Times New Roman"/>
+                        <a:latin typeface="Arial"/>
                       </a:endParaRPr>
                     </a:p>
                   </a:txBody>
@@ -14335,7 +14393,7 @@
                         <a:solidFill>
                           <a:srgbClr val="ffffff"/>
                         </a:solidFill>
-                        <a:latin typeface="Times New Roman"/>
+                        <a:latin typeface="Arial"/>
                       </a:endParaRPr>
                     </a:p>
                   </a:txBody>
@@ -14396,7 +14454,7 @@
                         <a:solidFill>
                           <a:srgbClr val="000000"/>
                         </a:solidFill>
-                        <a:latin typeface="Times New Roman"/>
+                        <a:latin typeface="Arial"/>
                       </a:endParaRPr>
                     </a:p>
                   </a:txBody>
@@ -14459,7 +14517,7 @@
                         <a:solidFill>
                           <a:srgbClr val="000000"/>
                         </a:solidFill>
-                        <a:latin typeface="Times New Roman"/>
+                        <a:latin typeface="Arial"/>
                       </a:endParaRPr>
                     </a:p>
                   </a:txBody>
@@ -14522,7 +14580,7 @@
                         <a:solidFill>
                           <a:srgbClr val="000000"/>
                         </a:solidFill>
-                        <a:latin typeface="Times New Roman"/>
+                        <a:latin typeface="Arial"/>
                       </a:endParaRPr>
                     </a:p>
                   </a:txBody>
@@ -14585,7 +14643,7 @@
                         <a:solidFill>
                           <a:srgbClr val="000000"/>
                         </a:solidFill>
-                        <a:latin typeface="Times New Roman"/>
+                        <a:latin typeface="Arial"/>
                       </a:endParaRPr>
                     </a:p>
                   </a:txBody>
@@ -14650,7 +14708,7 @@
                         <a:solidFill>
                           <a:srgbClr val="ffffff"/>
                         </a:solidFill>
-                        <a:latin typeface="Times New Roman"/>
+                        <a:latin typeface="Arial"/>
                       </a:endParaRPr>
                     </a:p>
                   </a:txBody>
@@ -14711,7 +14769,7 @@
                         <a:solidFill>
                           <a:srgbClr val="000000"/>
                         </a:solidFill>
-                        <a:latin typeface="Times New Roman"/>
+                        <a:latin typeface="Arial"/>
                       </a:endParaRPr>
                     </a:p>
                   </a:txBody>
@@ -14772,7 +14830,7 @@
                         <a:solidFill>
                           <a:srgbClr val="000000"/>
                         </a:solidFill>
-                        <a:latin typeface="Times New Roman"/>
+                        <a:latin typeface="Arial"/>
                       </a:endParaRPr>
                     </a:p>
                   </a:txBody>
@@ -14833,7 +14891,7 @@
                         <a:solidFill>
                           <a:srgbClr val="000000"/>
                         </a:solidFill>
-                        <a:latin typeface="Times New Roman"/>
+                        <a:latin typeface="Arial"/>
                       </a:endParaRPr>
                     </a:p>
                   </a:txBody>
@@ -14894,7 +14952,7 @@
                         <a:solidFill>
                           <a:srgbClr val="000000"/>
                         </a:solidFill>
-                        <a:latin typeface="Times New Roman"/>
+                        <a:latin typeface="Arial"/>
                       </a:endParaRPr>
                     </a:p>
                   </a:txBody>
@@ -14947,7 +15005,7 @@
         <p:txBody>
           <a:bodyPr/>
           <a:p>
-            <a:fld id="{6F153F30-D7A1-43F2-BE58-97A1D6361A63}" type="slidenum">
+            <a:fld id="{9FD1F968-69E7-4426-8790-B3F21F4BFEA5}" type="slidenum">
               <a:t>6</a:t>
             </a:fld>
           </a:p>
@@ -14996,7 +15054,7 @@
         <p:spPr>
           <a:xfrm>
             <a:off x="0" y="0"/>
-            <a:ext cx="11228760" cy="921960"/>
+            <a:ext cx="11227680" cy="920880"/>
           </a:xfrm>
           <a:prstGeom prst="rect">
             <a:avLst/>
@@ -15021,7 +15079,7 @@
               </a:tabLst>
             </a:pPr>
             <a:r>
-              <a:rPr b="0" lang="ru-RU" sz="3600" spc="-1" strike="noStrike">
+              <a:rPr b="1" lang="ru-RU" sz="3600" spc="-1" strike="noStrike">
                 <a:solidFill>
                   <a:srgbClr val="332974"/>
                 </a:solidFill>
@@ -15051,7 +15109,7 @@
         <p:spPr>
           <a:xfrm>
             <a:off x="1333440" y="6352560"/>
-            <a:ext cx="7479360" cy="363960"/>
+            <a:ext cx="7478280" cy="362880"/>
           </a:xfrm>
           <a:prstGeom prst="rect">
             <a:avLst/>
@@ -15087,7 +15145,7 @@
         <p:spPr>
           <a:xfrm>
             <a:off x="141480" y="1088640"/>
-            <a:ext cx="5617800" cy="4696920"/>
+            <a:ext cx="5616720" cy="4695840"/>
           </a:xfrm>
           <a:prstGeom prst="rect">
             <a:avLst/>
@@ -15402,7 +15460,7 @@
         <p:spPr>
           <a:xfrm>
             <a:off x="6120000" y="1062360"/>
-            <a:ext cx="4859280" cy="4696920"/>
+            <a:ext cx="4858200" cy="4695840"/>
           </a:xfrm>
           <a:prstGeom prst="rect">
             <a:avLst/>
@@ -15681,7 +15739,7 @@
         <p:txBody>
           <a:bodyPr/>
           <a:p>
-            <a:fld id="{4BCA66BA-1B65-4E5A-AE38-90A26C05815F}" type="slidenum">
+            <a:fld id="{C4A10015-B558-4F01-834B-903273752C84}" type="slidenum">
               <a:t>7</a:t>
             </a:fld>
           </a:p>
@@ -15726,7 +15784,7 @@
         <p:spPr>
           <a:xfrm>
             <a:off x="214560" y="360000"/>
-            <a:ext cx="5364720" cy="5208840"/>
+            <a:ext cx="5363640" cy="5207760"/>
           </a:xfrm>
           <a:prstGeom prst="rect">
             <a:avLst/>
@@ -16000,7 +16058,7 @@
         <p:spPr>
           <a:xfrm>
             <a:off x="6351120" y="360000"/>
-            <a:ext cx="4448160" cy="2649240"/>
+            <a:ext cx="4447080" cy="2648160"/>
           </a:xfrm>
           <a:prstGeom prst="rect">
             <a:avLst/>
@@ -16238,7 +16296,7 @@
         <p:txBody>
           <a:bodyPr/>
           <a:p>
-            <a:fld id="{A8E2964B-8287-4FA3-9216-5157352BBCE8}" type="slidenum">
+            <a:fld id="{50172B82-2FA1-464E-8E59-6170B6524344}" type="slidenum">
               <a:t>8</a:t>
             </a:fld>
           </a:p>
@@ -16283,7 +16341,7 @@
         <p:spPr>
           <a:xfrm>
             <a:off x="266760" y="360000"/>
-            <a:ext cx="4772520" cy="5173920"/>
+            <a:ext cx="4771440" cy="5172840"/>
           </a:xfrm>
           <a:prstGeom prst="rect">
             <a:avLst/>
@@ -16529,7 +16587,7 @@
         <p:spPr>
           <a:xfrm>
             <a:off x="5580000" y="360000"/>
-            <a:ext cx="5703480" cy="5219280"/>
+            <a:ext cx="5702400" cy="5218200"/>
           </a:xfrm>
           <a:prstGeom prst="rect">
             <a:avLst/>
@@ -16712,7 +16770,7 @@
         <p:txBody>
           <a:bodyPr/>
           <a:p>
-            <a:fld id="{9064B055-AF51-452E-A62D-00C3840F44D3}" type="slidenum">
+            <a:fld id="{0A1DA40D-3662-4647-B668-1E3E97C3D579}" type="slidenum">
               <a:t>9</a:t>
             </a:fld>
           </a:p>

--- a/Презентация.pptx
+++ b/Презентация.pptx
@@ -379,7 +379,7 @@
             <a:pPr indent="0" algn="r">
               <a:buNone/>
             </a:pPr>
-            <a:fld id="{96EC5D58-59B1-4982-A401-EDDBF79925C3}" type="slidenum">
+            <a:fld id="{BF8422A3-24B2-43CD-AED8-7CB66880806F}" type="slidenum">
               <a:rPr b="0" lang="ru-RU" sz="1400" spc="-1" strike="noStrike">
                 <a:solidFill>
                   <a:srgbClr val="000000"/>
@@ -422,7 +422,7 @@
       </p:grpSpPr>
       <p:sp>
         <p:nvSpPr>
-          <p:cNvPr id="188" name="PlaceHolder 1"/>
+          <p:cNvPr id="186" name="PlaceHolder 1"/>
           <p:cNvSpPr>
             <a:spLocks noGrp="1"/>
           </p:cNvSpPr>
@@ -433,7 +433,7 @@
         <p:spPr>
           <a:xfrm>
             <a:off x="685800" y="1143000"/>
-            <a:ext cx="5484240" cy="3084120"/>
+            <a:ext cx="5483520" cy="3083400"/>
           </a:xfrm>
           <a:prstGeom prst="rect">
             <a:avLst/>
@@ -445,7 +445,7 @@
       </p:sp>
       <p:sp>
         <p:nvSpPr>
-          <p:cNvPr id="189" name="PlaceHolder 2"/>
+          <p:cNvPr id="187" name="PlaceHolder 2"/>
           <p:cNvSpPr>
             <a:spLocks noGrp="1"/>
           </p:cNvSpPr>
@@ -456,7 +456,7 @@
         <p:spPr>
           <a:xfrm>
             <a:off x="685800" y="4400640"/>
-            <a:ext cx="5484240" cy="3598200"/>
+            <a:ext cx="5483520" cy="3597480"/>
           </a:xfrm>
           <a:prstGeom prst="rect">
             <a:avLst/>
@@ -526,18 +526,18 @@
       </p:sp>
       <p:sp>
         <p:nvSpPr>
-          <p:cNvPr id="190" name="PlaceHolder 3"/>
+          <p:cNvPr id="188" name="PlaceHolder 3"/>
           <p:cNvSpPr>
             <a:spLocks noGrp="1"/>
           </p:cNvSpPr>
           <p:nvPr>
-            <p:ph type="sldNum" idx="51"/>
+            <p:ph type="sldNum" idx="49"/>
           </p:nvPr>
         </p:nvSpPr>
         <p:spPr>
           <a:xfrm>
             <a:off x="3884760" y="8685360"/>
-            <a:ext cx="2969640" cy="456480"/>
+            <a:ext cx="2968920" cy="455760"/>
           </a:xfrm>
           <a:prstGeom prst="rect">
             <a:avLst/>
@@ -578,7 +578,7 @@
                 <a:tab algn="l" pos="0"/>
               </a:tabLst>
             </a:pPr>
-            <a:fld id="{9955F734-8E56-4F4E-B846-028769AD92F8}" type="slidenum">
+            <a:fld id="{5345CD0D-7EF1-4152-9003-DD84F89930E1}" type="slidenum">
               <a:rPr b="0" lang="ru-RU" sz="1200" spc="-1" strike="noStrike">
                 <a:solidFill>
                   <a:srgbClr val="000000"/>
@@ -620,7 +620,7 @@
       </p:grpSpPr>
       <p:sp>
         <p:nvSpPr>
-          <p:cNvPr id="191" name="PlaceHolder 1"/>
+          <p:cNvPr id="189" name="PlaceHolder 1"/>
           <p:cNvSpPr>
             <a:spLocks noGrp="1"/>
           </p:cNvSpPr>
@@ -631,7 +631,7 @@
         <p:spPr>
           <a:xfrm>
             <a:off x="685800" y="1143000"/>
-            <a:ext cx="5484240" cy="3084120"/>
+            <a:ext cx="5483520" cy="3083400"/>
           </a:xfrm>
           <a:prstGeom prst="rect">
             <a:avLst/>
@@ -643,7 +643,7 @@
       </p:sp>
       <p:sp>
         <p:nvSpPr>
-          <p:cNvPr id="192" name="PlaceHolder 2"/>
+          <p:cNvPr id="190" name="PlaceHolder 2"/>
           <p:cNvSpPr>
             <a:spLocks noGrp="1"/>
           </p:cNvSpPr>
@@ -654,7 +654,7 @@
         <p:spPr>
           <a:xfrm>
             <a:off x="685800" y="4400640"/>
-            <a:ext cx="5484240" cy="3598200"/>
+            <a:ext cx="5483520" cy="3597480"/>
           </a:xfrm>
           <a:prstGeom prst="rect">
             <a:avLst/>
@@ -698,18 +698,18 @@
       </p:sp>
       <p:sp>
         <p:nvSpPr>
-          <p:cNvPr id="193" name="PlaceHolder 3"/>
+          <p:cNvPr id="191" name="PlaceHolder 3"/>
           <p:cNvSpPr>
             <a:spLocks noGrp="1"/>
           </p:cNvSpPr>
           <p:nvPr>
-            <p:ph type="sldNum" idx="52"/>
+            <p:ph type="sldNum" idx="50"/>
           </p:nvPr>
         </p:nvSpPr>
         <p:spPr>
           <a:xfrm>
             <a:off x="3884760" y="8685360"/>
-            <a:ext cx="2969640" cy="456480"/>
+            <a:ext cx="2968920" cy="455760"/>
           </a:xfrm>
           <a:prstGeom prst="rect">
             <a:avLst/>
@@ -750,7 +750,7 @@
                 <a:tab algn="l" pos="0"/>
               </a:tabLst>
             </a:pPr>
-            <a:fld id="{8C5F84B2-B5B0-4CA4-95F8-DABA7EE5A5A1}" type="slidenum">
+            <a:fld id="{0E31F1E7-86FA-4A27-BF78-EFF232B5F519}" type="slidenum">
               <a:rPr b="0" lang="ru-RU" sz="1200" spc="-1" strike="noStrike">
                 <a:solidFill>
                   <a:srgbClr val="000000"/>
@@ -846,7 +846,7 @@
         <p:txBody>
           <a:bodyPr/>
           <a:p>
-            <a:fld id="{C8505B25-A0BE-4F43-8EE8-4AB4039E27B0}" type="slidenum">
+            <a:fld id="{8837AA72-C54E-496A-9A1D-DE11845C2A94}" type="slidenum">
               <a:t>&lt;#&gt;</a:t>
             </a:fld>
           </a:p>
@@ -908,7 +908,7 @@
         <p:txBody>
           <a:bodyPr/>
           <a:p>
-            <a:fld id="{9734CE7E-597E-4739-80A9-1AC62FF79E3C}" type="slidenum">
+            <a:fld id="{6D29F847-6513-4998-B67C-F71A6DD4ED0A}" type="slidenum">
               <a:t>&lt;#&gt;</a:t>
             </a:fld>
           </a:p>
@@ -992,7 +992,7 @@
         <p:txBody>
           <a:bodyPr/>
           <a:p>
-            <a:fld id="{CFB34A69-9508-4B5E-9897-72AC70C30991}" type="slidenum">
+            <a:fld id="{E1AE1369-3AA8-4823-90B7-EEF8DABB80A5}" type="slidenum">
               <a:t>&lt;#&gt;</a:t>
             </a:fld>
           </a:p>
@@ -1054,7 +1054,7 @@
         <p:txBody>
           <a:bodyPr/>
           <a:p>
-            <a:fld id="{B07E7DD2-1A49-4AFA-964D-2379B5D04E59}" type="slidenum">
+            <a:fld id="{D1E3A616-56C1-4332-92D8-698B20A00F22}" type="slidenum">
               <a:t>&lt;#&gt;</a:t>
             </a:fld>
           </a:p>
@@ -1116,7 +1116,7 @@
         <p:txBody>
           <a:bodyPr/>
           <a:p>
-            <a:fld id="{5F958E0E-B883-4969-813C-BC7517BC5ECC}" type="slidenum">
+            <a:fld id="{45B2274D-D661-4B4C-94AB-D167ED724F39}" type="slidenum">
               <a:t>&lt;#&gt;</a:t>
             </a:fld>
           </a:p>
@@ -1200,7 +1200,7 @@
         <p:txBody>
           <a:bodyPr/>
           <a:p>
-            <a:fld id="{C587285E-562B-4E35-88FA-1C65ACA53565}" type="slidenum">
+            <a:fld id="{90257BF7-5208-4D81-B46B-2E8DA87271E8}" type="slidenum">
               <a:t>&lt;#&gt;</a:t>
             </a:fld>
           </a:p>
@@ -1262,7 +1262,7 @@
         <p:txBody>
           <a:bodyPr/>
           <a:p>
-            <a:fld id="{3285D2D3-E657-4723-A3D8-430F5670A9FA}" type="slidenum">
+            <a:fld id="{2B81EF3F-9EF0-45D4-82FB-935C9FAA97B1}" type="slidenum">
               <a:t>&lt;#&gt;</a:t>
             </a:fld>
           </a:p>
@@ -1324,7 +1324,7 @@
         <p:txBody>
           <a:bodyPr/>
           <a:p>
-            <a:fld id="{4A9698BD-63E1-4B7C-8516-F73C398B4601}" type="slidenum">
+            <a:fld id="{511B05FA-EFC7-489D-848A-764558128B5E}" type="slidenum">
               <a:t>&lt;#&gt;</a:t>
             </a:fld>
           </a:p>
@@ -1386,7 +1386,7 @@
         <p:txBody>
           <a:bodyPr/>
           <a:p>
-            <a:fld id="{19CB1EC3-8329-41EC-B3BA-7446E9F9131F}" type="slidenum">
+            <a:fld id="{9AFAA896-C695-4E07-89B2-E60D6F22AD96}" type="slidenum">
               <a:t>&lt;#&gt;</a:t>
             </a:fld>
           </a:p>
@@ -1448,7 +1448,7 @@
         <p:txBody>
           <a:bodyPr/>
           <a:p>
-            <a:fld id="{5663F22C-72BE-4B74-8A7F-F779B8B687B8}" type="slidenum">
+            <a:fld id="{D42BD790-7236-4DA4-8ABA-5150E5650772}" type="slidenum">
               <a:t>&lt;#&gt;</a:t>
             </a:fld>
           </a:p>
@@ -1510,7 +1510,7 @@
         <p:txBody>
           <a:bodyPr/>
           <a:p>
-            <a:fld id="{A5ED9E5A-600C-4039-BC6E-F32B08B3BFBE}" type="slidenum">
+            <a:fld id="{57184803-7C3D-4C77-8AAD-783F4E77890D}" type="slidenum">
               <a:t>&lt;#&gt;</a:t>
             </a:fld>
           </a:p>
@@ -1572,7 +1572,7 @@
         <p:txBody>
           <a:bodyPr/>
           <a:p>
-            <a:fld id="{1718EFC4-7927-4346-83A1-CA9644DF4CA9}" type="slidenum">
+            <a:fld id="{F04AB7EC-B282-4360-873E-DFE3B88D0E8C}" type="slidenum">
               <a:t>&lt;#&gt;</a:t>
             </a:fld>
           </a:p>
@@ -1714,7 +1714,7 @@
         <p:txBody>
           <a:bodyPr/>
           <a:p>
-            <a:fld id="{9D890573-8BF3-4395-A256-508B8B11D79A}" type="slidenum">
+            <a:fld id="{3512E404-C665-4EFD-91C1-A20B6F1128CA}" type="slidenum">
               <a:t>&lt;#&gt;</a:t>
             </a:fld>
           </a:p>
@@ -1797,7 +1797,7 @@
         <p:txBody>
           <a:bodyPr/>
           <a:p>
-            <a:fld id="{BE70719B-A27A-4501-8AE2-DFDAAAFEED00}" type="slidenum">
+            <a:fld id="{C93984B9-8195-4A49-BD1E-26CD393D0174}" type="slidenum">
               <a:t>&lt;#&gt;</a:t>
             </a:fld>
           </a:p>
@@ -1859,7 +1859,7 @@
         <p:txBody>
           <a:bodyPr/>
           <a:p>
-            <a:fld id="{BB8DA761-F452-499D-A510-A1F849B5239B}" type="slidenum">
+            <a:fld id="{3D60FB58-B5E5-4FD6-BF0A-4450A5C37CEC}" type="slidenum">
               <a:t>&lt;#&gt;</a:t>
             </a:fld>
           </a:p>
@@ -1921,7 +1921,7 @@
         <p:txBody>
           <a:bodyPr/>
           <a:p>
-            <a:fld id="{B881B1B9-3782-4AFD-B04B-B7EAD832BCBD}" type="slidenum">
+            <a:fld id="{4E5F3CA8-0A08-42DC-952D-686C663D749A}" type="slidenum">
               <a:t>&lt;#&gt;</a:t>
             </a:fld>
           </a:p>
@@ -1983,7 +1983,7 @@
         <p:txBody>
           <a:bodyPr/>
           <a:p>
-            <a:fld id="{A6A48FAD-F255-4C90-AA0E-F7C9190E0BC6}" type="slidenum">
+            <a:fld id="{53B3CC7E-BF38-4C9F-999C-A8054794DD41}" type="slidenum">
               <a:t>&lt;#&gt;</a:t>
             </a:fld>
           </a:p>
@@ -2045,7 +2045,7 @@
         <p:txBody>
           <a:bodyPr/>
           <a:p>
-            <a:fld id="{1C203389-17F3-4809-8A74-033AD6D2F013}" type="slidenum">
+            <a:fld id="{5DF8F557-618B-4ACF-B48B-17F4800BEB74}" type="slidenum">
               <a:t>&lt;#&gt;</a:t>
             </a:fld>
           </a:p>
@@ -2107,7 +2107,7 @@
         <p:txBody>
           <a:bodyPr/>
           <a:p>
-            <a:fld id="{E8BAA534-5644-4547-91D3-C3AB4A933A54}" type="slidenum">
+            <a:fld id="{07133831-A43E-4E04-B8DA-3996FEE5FEBC}" type="slidenum">
               <a:t>&lt;#&gt;</a:t>
             </a:fld>
           </a:p>
@@ -2169,7 +2169,7 @@
         <p:txBody>
           <a:bodyPr/>
           <a:p>
-            <a:fld id="{D3BDD5AA-F064-4655-A7F8-4E588AF633D9}" type="slidenum">
+            <a:fld id="{570D0438-F318-4053-9820-8864F4E3B835}" type="slidenum">
               <a:t>&lt;#&gt;</a:t>
             </a:fld>
           </a:p>
@@ -2223,7 +2223,7 @@
         <p:spPr>
           <a:xfrm>
             <a:off x="10760040" y="142200"/>
-            <a:ext cx="950400" cy="291240"/>
+            <a:ext cx="949680" cy="290520"/>
           </a:xfrm>
           <a:prstGeom prst="rect">
             <a:avLst/>
@@ -2252,7 +2252,7 @@
         <p:spPr>
           <a:xfrm>
             <a:off x="10921320" y="0"/>
-            <a:ext cx="1270080" cy="1371240"/>
+            <a:ext cx="1269360" cy="1370520"/>
           </a:xfrm>
           <a:prstGeom prst="rect">
             <a:avLst/>
@@ -2280,8 +2280,8 @@
         </p:blipFill>
         <p:spPr>
           <a:xfrm flipH="1" rot="16200000">
-            <a:off x="48600" y="5535000"/>
-            <a:ext cx="1270080" cy="1371240"/>
+            <a:off x="47880" y="5535000"/>
+            <a:ext cx="1269360" cy="1370520"/>
           </a:xfrm>
           <a:prstGeom prst="rect">
             <a:avLst/>
@@ -2300,7 +2300,7 @@
         <p:spPr>
           <a:xfrm>
             <a:off x="609120" y="240480"/>
-            <a:ext cx="10971360" cy="6302160"/>
+            <a:ext cx="10970640" cy="6301440"/>
           </a:xfrm>
           <a:prstGeom prst="roundRect">
             <a:avLst>
@@ -2373,7 +2373,7 @@
         <p:spPr>
           <a:xfrm>
             <a:off x="609120" y="240480"/>
-            <a:ext cx="4126680" cy="2084400"/>
+            <a:ext cx="4125960" cy="2083680"/>
           </a:xfrm>
           <a:prstGeom prst="rect">
             <a:avLst/>
@@ -2709,7 +2709,7 @@
         <p:spPr>
           <a:xfrm>
             <a:off x="10760040" y="142200"/>
-            <a:ext cx="950400" cy="291240"/>
+            <a:ext cx="949680" cy="290520"/>
           </a:xfrm>
           <a:prstGeom prst="rect">
             <a:avLst/>
@@ -2738,7 +2738,7 @@
         <p:spPr>
           <a:xfrm>
             <a:off x="10921320" y="0"/>
-            <a:ext cx="1270080" cy="1371240"/>
+            <a:ext cx="1269360" cy="1370520"/>
           </a:xfrm>
           <a:prstGeom prst="rect">
             <a:avLst/>
@@ -2766,8 +2766,8 @@
         </p:blipFill>
         <p:spPr>
           <a:xfrm flipH="1" rot="16200000">
-            <a:off x="48600" y="5535000"/>
-            <a:ext cx="1270080" cy="1371240"/>
+            <a:off x="47880" y="5535000"/>
+            <a:ext cx="1269360" cy="1370520"/>
           </a:xfrm>
           <a:prstGeom prst="rect">
             <a:avLst/>
@@ -2790,7 +2790,7 @@
         <p:spPr>
           <a:xfrm>
             <a:off x="1333440" y="6352560"/>
-            <a:ext cx="7478280" cy="362880"/>
+            <a:ext cx="7477560" cy="362160"/>
           </a:xfrm>
           <a:prstGeom prst="rect">
             <a:avLst/>
@@ -2862,7 +2862,7 @@
         <p:spPr>
           <a:xfrm>
             <a:off x="8966160" y="6352560"/>
-            <a:ext cx="2741040" cy="362880"/>
+            <a:ext cx="2740320" cy="362160"/>
           </a:xfrm>
           <a:prstGeom prst="rect">
             <a:avLst/>
@@ -2905,7 +2905,7 @@
                 <a:tab algn="l" pos="0"/>
               </a:tabLst>
             </a:pPr>
-            <a:fld id="{915B24D1-D9DF-4905-934E-25FD5A68EAA2}" type="slidenum">
+            <a:fld id="{2A26E631-7794-4E5C-98D9-0684136F021E}" type="slidenum">
               <a:rPr b="1" lang="ru-RU" sz="1600" spc="-1" strike="noStrike">
                 <a:solidFill>
                   <a:schemeClr val="dk1">
@@ -2977,7 +2977,7 @@
         <p:spPr>
           <a:xfrm>
             <a:off x="10760040" y="142200"/>
-            <a:ext cx="950400" cy="291240"/>
+            <a:ext cx="949680" cy="290520"/>
           </a:xfrm>
           <a:prstGeom prst="rect">
             <a:avLst/>
@@ -3006,7 +3006,7 @@
         <p:spPr>
           <a:xfrm>
             <a:off x="10921320" y="0"/>
-            <a:ext cx="1270080" cy="1371240"/>
+            <a:ext cx="1269360" cy="1370520"/>
           </a:xfrm>
           <a:prstGeom prst="rect">
             <a:avLst/>
@@ -3034,8 +3034,8 @@
         </p:blipFill>
         <p:spPr>
           <a:xfrm flipH="1" rot="16200000">
-            <a:off x="48600" y="5535000"/>
-            <a:ext cx="1270080" cy="1371240"/>
+            <a:off x="47880" y="5535000"/>
+            <a:ext cx="1269360" cy="1370520"/>
           </a:xfrm>
           <a:prstGeom prst="rect">
             <a:avLst/>
@@ -3058,7 +3058,7 @@
         <p:spPr>
           <a:xfrm>
             <a:off x="1333440" y="6352560"/>
-            <a:ext cx="7478280" cy="362880"/>
+            <a:ext cx="7477560" cy="362160"/>
           </a:xfrm>
           <a:prstGeom prst="rect">
             <a:avLst/>
@@ -3130,7 +3130,7 @@
         <p:spPr>
           <a:xfrm>
             <a:off x="8966160" y="6352560"/>
-            <a:ext cx="2741040" cy="362880"/>
+            <a:ext cx="2740320" cy="362160"/>
           </a:xfrm>
           <a:prstGeom prst="rect">
             <a:avLst/>
@@ -3173,7 +3173,7 @@
                 <a:tab algn="l" pos="0"/>
               </a:tabLst>
             </a:pPr>
-            <a:fld id="{2A5669CB-802C-4D99-A61C-1198A6D91134}" type="slidenum">
+            <a:fld id="{882146B0-1F60-4938-811B-E101CC347081}" type="slidenum">
               <a:rPr b="1" lang="ru-RU" sz="1600" spc="-1" strike="noStrike">
                 <a:solidFill>
                   <a:schemeClr val="dk1">
@@ -3519,7 +3519,7 @@
         <p:spPr>
           <a:xfrm>
             <a:off x="10760040" y="142200"/>
-            <a:ext cx="950400" cy="291240"/>
+            <a:ext cx="949680" cy="290520"/>
           </a:xfrm>
           <a:prstGeom prst="rect">
             <a:avLst/>
@@ -3548,7 +3548,7 @@
         <p:spPr>
           <a:xfrm>
             <a:off x="10921320" y="0"/>
-            <a:ext cx="1270080" cy="1371240"/>
+            <a:ext cx="1269360" cy="1370520"/>
           </a:xfrm>
           <a:prstGeom prst="rect">
             <a:avLst/>
@@ -3576,8 +3576,8 @@
         </p:blipFill>
         <p:spPr>
           <a:xfrm flipH="1" rot="16200000">
-            <a:off x="48600" y="5535000"/>
-            <a:ext cx="1270080" cy="1371240"/>
+            <a:off x="47880" y="5535000"/>
+            <a:ext cx="1269360" cy="1370520"/>
           </a:xfrm>
           <a:prstGeom prst="rect">
             <a:avLst/>
@@ -3596,7 +3596,7 @@
         <p:spPr>
           <a:xfrm>
             <a:off x="609120" y="240480"/>
-            <a:ext cx="10971360" cy="6302160"/>
+            <a:ext cx="10970640" cy="6301440"/>
           </a:xfrm>
           <a:prstGeom prst="roundRect">
             <a:avLst>
@@ -3675,7 +3675,7 @@
         <p:spPr>
           <a:xfrm>
             <a:off x="1265040" y="827640"/>
-            <a:ext cx="2795400" cy="859680"/>
+            <a:ext cx="2794680" cy="858960"/>
           </a:xfrm>
           <a:prstGeom prst="rect">
             <a:avLst/>
@@ -3737,7 +3737,7 @@
         <p:spPr>
           <a:xfrm>
             <a:off x="10760040" y="142200"/>
-            <a:ext cx="950400" cy="291240"/>
+            <a:ext cx="949680" cy="290520"/>
           </a:xfrm>
           <a:prstGeom prst="rect">
             <a:avLst/>
@@ -3766,7 +3766,7 @@
         <p:spPr>
           <a:xfrm>
             <a:off x="10921320" y="0"/>
-            <a:ext cx="1270080" cy="1371240"/>
+            <a:ext cx="1269360" cy="1370520"/>
           </a:xfrm>
           <a:prstGeom prst="rect">
             <a:avLst/>
@@ -3794,8 +3794,8 @@
         </p:blipFill>
         <p:spPr>
           <a:xfrm flipH="1" rot="16200000">
-            <a:off x="48600" y="5535000"/>
-            <a:ext cx="1270080" cy="1371240"/>
+            <a:off x="47880" y="5535000"/>
+            <a:ext cx="1269360" cy="1370520"/>
           </a:xfrm>
           <a:prstGeom prst="rect">
             <a:avLst/>
@@ -3818,7 +3818,7 @@
         <p:spPr>
           <a:xfrm>
             <a:off x="1333440" y="6352560"/>
-            <a:ext cx="7478280" cy="362880"/>
+            <a:ext cx="7477560" cy="362160"/>
           </a:xfrm>
           <a:prstGeom prst="rect">
             <a:avLst/>
@@ -3890,7 +3890,7 @@
         <p:spPr>
           <a:xfrm>
             <a:off x="8966160" y="6352560"/>
-            <a:ext cx="2741040" cy="362880"/>
+            <a:ext cx="2740320" cy="362160"/>
           </a:xfrm>
           <a:prstGeom prst="rect">
             <a:avLst/>
@@ -3933,7 +3933,7 @@
                 <a:tab algn="l" pos="0"/>
               </a:tabLst>
             </a:pPr>
-            <a:fld id="{45FA2F63-30A3-48F1-8ECC-888B7E2CEDEF}" type="slidenum">
+            <a:fld id="{88F45335-D14D-40D8-91D6-787D1A58C254}" type="slidenum">
               <a:rPr b="1" lang="ru-RU" sz="1600" spc="-1" strike="noStrike">
                 <a:solidFill>
                   <a:schemeClr val="dk1">
@@ -4005,7 +4005,7 @@
         <p:spPr>
           <a:xfrm>
             <a:off x="10760040" y="142200"/>
-            <a:ext cx="950400" cy="291240"/>
+            <a:ext cx="949680" cy="290520"/>
           </a:xfrm>
           <a:prstGeom prst="rect">
             <a:avLst/>
@@ -4034,7 +4034,7 @@
         <p:spPr>
           <a:xfrm>
             <a:off x="10921320" y="0"/>
-            <a:ext cx="1270080" cy="1371240"/>
+            <a:ext cx="1269360" cy="1370520"/>
           </a:xfrm>
           <a:prstGeom prst="rect">
             <a:avLst/>
@@ -4062,8 +4062,8 @@
         </p:blipFill>
         <p:spPr>
           <a:xfrm flipH="1" rot="16200000">
-            <a:off x="48600" y="5535000"/>
-            <a:ext cx="1270080" cy="1371240"/>
+            <a:off x="47880" y="5535000"/>
+            <a:ext cx="1269360" cy="1370520"/>
           </a:xfrm>
           <a:prstGeom prst="rect">
             <a:avLst/>
@@ -4086,7 +4086,7 @@
         <p:spPr>
           <a:xfrm>
             <a:off x="1333440" y="6352560"/>
-            <a:ext cx="7478280" cy="362880"/>
+            <a:ext cx="7477560" cy="362160"/>
           </a:xfrm>
           <a:prstGeom prst="rect">
             <a:avLst/>
@@ -4158,7 +4158,7 @@
         <p:spPr>
           <a:xfrm>
             <a:off x="8966160" y="6352560"/>
-            <a:ext cx="2741040" cy="362880"/>
+            <a:ext cx="2740320" cy="362160"/>
           </a:xfrm>
           <a:prstGeom prst="rect">
             <a:avLst/>
@@ -4201,7 +4201,7 @@
                 <a:tab algn="l" pos="0"/>
               </a:tabLst>
             </a:pPr>
-            <a:fld id="{59798F5A-8DCB-4B40-9078-9EB8BDB52066}" type="slidenum">
+            <a:fld id="{3CE7B35A-134D-4986-BC49-E66694C3A126}" type="slidenum">
               <a:rPr b="1" lang="ru-RU" sz="1600" spc="-1" strike="noStrike">
                 <a:solidFill>
                   <a:schemeClr val="dk1">
@@ -4273,7 +4273,7 @@
         <p:spPr>
           <a:xfrm>
             <a:off x="10760040" y="142200"/>
-            <a:ext cx="950400" cy="291240"/>
+            <a:ext cx="949680" cy="290520"/>
           </a:xfrm>
           <a:prstGeom prst="rect">
             <a:avLst/>
@@ -4302,7 +4302,7 @@
         <p:spPr>
           <a:xfrm>
             <a:off x="10921320" y="0"/>
-            <a:ext cx="1270080" cy="1371240"/>
+            <a:ext cx="1269360" cy="1370520"/>
           </a:xfrm>
           <a:prstGeom prst="rect">
             <a:avLst/>
@@ -4330,8 +4330,8 @@
         </p:blipFill>
         <p:spPr>
           <a:xfrm flipH="1" rot="16200000">
-            <a:off x="48600" y="5535000"/>
-            <a:ext cx="1270080" cy="1371240"/>
+            <a:off x="47880" y="5535000"/>
+            <a:ext cx="1269360" cy="1370520"/>
           </a:xfrm>
           <a:prstGeom prst="rect">
             <a:avLst/>
@@ -4354,7 +4354,7 @@
         <p:spPr>
           <a:xfrm>
             <a:off x="1333440" y="6352560"/>
-            <a:ext cx="7478280" cy="362880"/>
+            <a:ext cx="7477560" cy="362160"/>
           </a:xfrm>
           <a:prstGeom prst="rect">
             <a:avLst/>
@@ -4426,7 +4426,7 @@
         <p:spPr>
           <a:xfrm>
             <a:off x="8966160" y="6352560"/>
-            <a:ext cx="2741040" cy="362880"/>
+            <a:ext cx="2740320" cy="362160"/>
           </a:xfrm>
           <a:prstGeom prst="rect">
             <a:avLst/>
@@ -4469,7 +4469,7 @@
                 <a:tab algn="l" pos="0"/>
               </a:tabLst>
             </a:pPr>
-            <a:fld id="{5D9FC91A-4310-4B62-A1BE-A5F44D84D137}" type="slidenum">
+            <a:fld id="{AEBB1408-46F5-4A09-8641-C6431C5EF534}" type="slidenum">
               <a:rPr b="1" lang="ru-RU" sz="1600" spc="-1" strike="noStrike">
                 <a:solidFill>
                   <a:schemeClr val="dk1">
@@ -4541,7 +4541,7 @@
         <p:spPr>
           <a:xfrm>
             <a:off x="10760040" y="142200"/>
-            <a:ext cx="950400" cy="291240"/>
+            <a:ext cx="949680" cy="290520"/>
           </a:xfrm>
           <a:prstGeom prst="rect">
             <a:avLst/>
@@ -4570,7 +4570,7 @@
         <p:spPr>
           <a:xfrm>
             <a:off x="10921320" y="0"/>
-            <a:ext cx="1270080" cy="1371240"/>
+            <a:ext cx="1269360" cy="1370520"/>
           </a:xfrm>
           <a:prstGeom prst="rect">
             <a:avLst/>
@@ -4598,8 +4598,8 @@
         </p:blipFill>
         <p:spPr>
           <a:xfrm flipH="1" rot="16200000">
-            <a:off x="48600" y="5535000"/>
-            <a:ext cx="1270080" cy="1371240"/>
+            <a:off x="47880" y="5535000"/>
+            <a:ext cx="1269360" cy="1370520"/>
           </a:xfrm>
           <a:prstGeom prst="rect">
             <a:avLst/>
@@ -4618,7 +4618,7 @@
         <p:spPr>
           <a:xfrm>
             <a:off x="609120" y="240480"/>
-            <a:ext cx="10971360" cy="6302160"/>
+            <a:ext cx="10970640" cy="6301440"/>
           </a:xfrm>
           <a:prstGeom prst="roundRect">
             <a:avLst>
@@ -4697,7 +4697,7 @@
         <p:spPr>
           <a:xfrm>
             <a:off x="820800" y="368280"/>
-            <a:ext cx="3413880" cy="1740600"/>
+            <a:ext cx="3413160" cy="1739880"/>
           </a:xfrm>
           <a:prstGeom prst="rect">
             <a:avLst/>
@@ -4759,7 +4759,7 @@
         <p:spPr>
           <a:xfrm>
             <a:off x="10760040" y="142200"/>
-            <a:ext cx="950400" cy="291240"/>
+            <a:ext cx="949680" cy="290520"/>
           </a:xfrm>
           <a:prstGeom prst="rect">
             <a:avLst/>
@@ -4788,7 +4788,7 @@
         <p:spPr>
           <a:xfrm>
             <a:off x="10921320" y="0"/>
-            <a:ext cx="1270080" cy="1371240"/>
+            <a:ext cx="1269360" cy="1370520"/>
           </a:xfrm>
           <a:prstGeom prst="rect">
             <a:avLst/>
@@ -4816,8 +4816,8 @@
         </p:blipFill>
         <p:spPr>
           <a:xfrm flipH="1" rot="16200000">
-            <a:off x="48600" y="5535000"/>
-            <a:ext cx="1270080" cy="1371240"/>
+            <a:off x="47880" y="5535000"/>
+            <a:ext cx="1269360" cy="1370520"/>
           </a:xfrm>
           <a:prstGeom prst="rect">
             <a:avLst/>
@@ -4840,7 +4840,7 @@
         <p:spPr>
           <a:xfrm>
             <a:off x="1333440" y="6352560"/>
-            <a:ext cx="7478280" cy="362880"/>
+            <a:ext cx="7477560" cy="362160"/>
           </a:xfrm>
           <a:prstGeom prst="rect">
             <a:avLst/>
@@ -4912,7 +4912,7 @@
         <p:spPr>
           <a:xfrm>
             <a:off x="8966160" y="6352560"/>
-            <a:ext cx="2741040" cy="362880"/>
+            <a:ext cx="2740320" cy="362160"/>
           </a:xfrm>
           <a:prstGeom prst="rect">
             <a:avLst/>
@@ -4955,7 +4955,7 @@
                 <a:tab algn="l" pos="0"/>
               </a:tabLst>
             </a:pPr>
-            <a:fld id="{9BD2EBEC-A884-41EA-8FBF-F8322548BBB1}" type="slidenum">
+            <a:fld id="{6140CAC7-9AB3-48E4-A8E7-D07D05399FB0}" type="slidenum">
               <a:rPr b="1" lang="ru-RU" sz="1600" spc="-1" strike="noStrike">
                 <a:solidFill>
                   <a:schemeClr val="dk1">
@@ -5027,7 +5027,7 @@
         <p:spPr>
           <a:xfrm>
             <a:off x="10760040" y="142200"/>
-            <a:ext cx="950400" cy="291240"/>
+            <a:ext cx="949680" cy="290520"/>
           </a:xfrm>
           <a:prstGeom prst="rect">
             <a:avLst/>
@@ -5056,7 +5056,7 @@
         <p:spPr>
           <a:xfrm>
             <a:off x="10921320" y="0"/>
-            <a:ext cx="1270080" cy="1371240"/>
+            <a:ext cx="1269360" cy="1370520"/>
           </a:xfrm>
           <a:prstGeom prst="rect">
             <a:avLst/>
@@ -5084,8 +5084,8 @@
         </p:blipFill>
         <p:spPr>
           <a:xfrm flipH="1" rot="16200000">
-            <a:off x="48600" y="5535000"/>
-            <a:ext cx="1270080" cy="1371240"/>
+            <a:off x="47880" y="5535000"/>
+            <a:ext cx="1269360" cy="1370520"/>
           </a:xfrm>
           <a:prstGeom prst="rect">
             <a:avLst/>
@@ -5108,7 +5108,7 @@
         <p:spPr>
           <a:xfrm>
             <a:off x="1333440" y="6352560"/>
-            <a:ext cx="7478280" cy="362880"/>
+            <a:ext cx="7477560" cy="362160"/>
           </a:xfrm>
           <a:prstGeom prst="rect">
             <a:avLst/>
@@ -5180,7 +5180,7 @@
         <p:spPr>
           <a:xfrm>
             <a:off x="8966160" y="6352560"/>
-            <a:ext cx="2741040" cy="362880"/>
+            <a:ext cx="2740320" cy="362160"/>
           </a:xfrm>
           <a:prstGeom prst="rect">
             <a:avLst/>
@@ -5223,7 +5223,7 @@
                 <a:tab algn="l" pos="0"/>
               </a:tabLst>
             </a:pPr>
-            <a:fld id="{8D0CB1F1-1516-4048-ACB6-77CB92C9251A}" type="slidenum">
+            <a:fld id="{61154FD1-87EE-4A07-8312-895B9079287F}" type="slidenum">
               <a:rPr b="1" lang="ru-RU" sz="1600" spc="-1" strike="noStrike">
                 <a:solidFill>
                   <a:schemeClr val="dk1">
@@ -5295,7 +5295,7 @@
         <p:spPr>
           <a:xfrm>
             <a:off x="10760040" y="142200"/>
-            <a:ext cx="950400" cy="291240"/>
+            <a:ext cx="949680" cy="290520"/>
           </a:xfrm>
           <a:prstGeom prst="rect">
             <a:avLst/>
@@ -5324,7 +5324,7 @@
         <p:spPr>
           <a:xfrm>
             <a:off x="10921320" y="0"/>
-            <a:ext cx="1270080" cy="1371240"/>
+            <a:ext cx="1269360" cy="1370520"/>
           </a:xfrm>
           <a:prstGeom prst="rect">
             <a:avLst/>
@@ -5352,8 +5352,8 @@
         </p:blipFill>
         <p:spPr>
           <a:xfrm flipH="1" rot="16200000">
-            <a:off x="48600" y="5535000"/>
-            <a:ext cx="1270080" cy="1371240"/>
+            <a:off x="47880" y="5535000"/>
+            <a:ext cx="1269360" cy="1370520"/>
           </a:xfrm>
           <a:prstGeom prst="rect">
             <a:avLst/>
@@ -5376,7 +5376,7 @@
         <p:spPr>
           <a:xfrm>
             <a:off x="1333440" y="6352560"/>
-            <a:ext cx="7478280" cy="362880"/>
+            <a:ext cx="7477560" cy="362160"/>
           </a:xfrm>
           <a:prstGeom prst="rect">
             <a:avLst/>
@@ -5448,7 +5448,7 @@
         <p:spPr>
           <a:xfrm>
             <a:off x="8966160" y="6352560"/>
-            <a:ext cx="2741040" cy="362880"/>
+            <a:ext cx="2740320" cy="362160"/>
           </a:xfrm>
           <a:prstGeom prst="rect">
             <a:avLst/>
@@ -5491,7 +5491,7 @@
                 <a:tab algn="l" pos="0"/>
               </a:tabLst>
             </a:pPr>
-            <a:fld id="{4ADC6B07-AAB4-4C80-8565-8202FA2EADEC}" type="slidenum">
+            <a:fld id="{DC8CE20E-05CA-415F-BA55-D4A1AA044A4C}" type="slidenum">
               <a:rPr b="1" lang="ru-RU" sz="1600" spc="-1" strike="noStrike">
                 <a:solidFill>
                   <a:schemeClr val="dk1">
@@ -5563,7 +5563,7 @@
         <p:spPr>
           <a:xfrm>
             <a:off x="10760040" y="142200"/>
-            <a:ext cx="950400" cy="291240"/>
+            <a:ext cx="949680" cy="290520"/>
           </a:xfrm>
           <a:prstGeom prst="rect">
             <a:avLst/>
@@ -5592,7 +5592,7 @@
         <p:spPr>
           <a:xfrm>
             <a:off x="10921320" y="0"/>
-            <a:ext cx="1270080" cy="1371240"/>
+            <a:ext cx="1269360" cy="1370520"/>
           </a:xfrm>
           <a:prstGeom prst="rect">
             <a:avLst/>
@@ -5620,8 +5620,8 @@
         </p:blipFill>
         <p:spPr>
           <a:xfrm flipH="1" rot="16200000">
-            <a:off x="48600" y="5535000"/>
-            <a:ext cx="1270080" cy="1371240"/>
+            <a:off x="47880" y="5535000"/>
+            <a:ext cx="1269360" cy="1370520"/>
           </a:xfrm>
           <a:prstGeom prst="rect">
             <a:avLst/>
@@ -5644,7 +5644,7 @@
         <p:spPr>
           <a:xfrm>
             <a:off x="1333440" y="6352560"/>
-            <a:ext cx="7478280" cy="362880"/>
+            <a:ext cx="7477560" cy="362160"/>
           </a:xfrm>
           <a:prstGeom prst="rect">
             <a:avLst/>
@@ -5716,7 +5716,7 @@
         <p:spPr>
           <a:xfrm>
             <a:off x="8966160" y="6352560"/>
-            <a:ext cx="2741040" cy="362880"/>
+            <a:ext cx="2740320" cy="362160"/>
           </a:xfrm>
           <a:prstGeom prst="rect">
             <a:avLst/>
@@ -5759,7 +5759,7 @@
                 <a:tab algn="l" pos="0"/>
               </a:tabLst>
             </a:pPr>
-            <a:fld id="{760AF06F-F244-464C-8EEF-09F1DCAB985A}" type="slidenum">
+            <a:fld id="{3AC5427E-104C-4918-90DD-002922EB133C}" type="slidenum">
               <a:rPr b="1" lang="ru-RU" sz="1600" spc="-1" strike="noStrike">
                 <a:solidFill>
                   <a:schemeClr val="dk1">
@@ -5831,7 +5831,7 @@
         <p:spPr>
           <a:xfrm>
             <a:off x="10760040" y="142200"/>
-            <a:ext cx="950400" cy="291240"/>
+            <a:ext cx="949680" cy="290520"/>
           </a:xfrm>
           <a:prstGeom prst="rect">
             <a:avLst/>
@@ -5860,7 +5860,7 @@
         <p:spPr>
           <a:xfrm>
             <a:off x="10921320" y="0"/>
-            <a:ext cx="1270080" cy="1371240"/>
+            <a:ext cx="1269360" cy="1370520"/>
           </a:xfrm>
           <a:prstGeom prst="rect">
             <a:avLst/>
@@ -5888,8 +5888,8 @@
         </p:blipFill>
         <p:spPr>
           <a:xfrm flipH="1" rot="16200000">
-            <a:off x="48600" y="5535000"/>
-            <a:ext cx="1270080" cy="1371240"/>
+            <a:off x="47880" y="5535000"/>
+            <a:ext cx="1269360" cy="1370520"/>
           </a:xfrm>
           <a:prstGeom prst="rect">
             <a:avLst/>
@@ -5912,7 +5912,7 @@
         <p:spPr>
           <a:xfrm>
             <a:off x="1333440" y="6352560"/>
-            <a:ext cx="7478280" cy="362880"/>
+            <a:ext cx="7477560" cy="362160"/>
           </a:xfrm>
           <a:prstGeom prst="rect">
             <a:avLst/>
@@ -5984,7 +5984,7 @@
         <p:spPr>
           <a:xfrm>
             <a:off x="8966160" y="6352560"/>
-            <a:ext cx="2741040" cy="362880"/>
+            <a:ext cx="2740320" cy="362160"/>
           </a:xfrm>
           <a:prstGeom prst="rect">
             <a:avLst/>
@@ -6027,7 +6027,7 @@
                 <a:tab algn="l" pos="0"/>
               </a:tabLst>
             </a:pPr>
-            <a:fld id="{331122CA-A1D4-40CB-9E77-0097E6127EFC}" type="slidenum">
+            <a:fld id="{2547721D-5B71-48C2-B17D-65C1F56F4F69}" type="slidenum">
               <a:rPr b="1" lang="ru-RU" sz="1600" spc="-1" strike="noStrike">
                 <a:solidFill>
                   <a:schemeClr val="dk1">
@@ -6099,7 +6099,7 @@
         <p:spPr>
           <a:xfrm>
             <a:off x="10760040" y="142200"/>
-            <a:ext cx="950400" cy="291240"/>
+            <a:ext cx="949680" cy="290520"/>
           </a:xfrm>
           <a:prstGeom prst="rect">
             <a:avLst/>
@@ -6128,7 +6128,7 @@
         <p:spPr>
           <a:xfrm>
             <a:off x="10921320" y="0"/>
-            <a:ext cx="1270080" cy="1371240"/>
+            <a:ext cx="1269360" cy="1370520"/>
           </a:xfrm>
           <a:prstGeom prst="rect">
             <a:avLst/>
@@ -6156,8 +6156,8 @@
         </p:blipFill>
         <p:spPr>
           <a:xfrm flipH="1" rot="16200000">
-            <a:off x="48600" y="5535000"/>
-            <a:ext cx="1270080" cy="1371240"/>
+            <a:off x="47880" y="5535000"/>
+            <a:ext cx="1269360" cy="1370520"/>
           </a:xfrm>
           <a:prstGeom prst="rect">
             <a:avLst/>
@@ -6180,7 +6180,7 @@
         <p:spPr>
           <a:xfrm>
             <a:off x="1333440" y="6352560"/>
-            <a:ext cx="7478280" cy="362880"/>
+            <a:ext cx="7477560" cy="362160"/>
           </a:xfrm>
           <a:prstGeom prst="rect">
             <a:avLst/>
@@ -6252,7 +6252,7 @@
         <p:spPr>
           <a:xfrm>
             <a:off x="8966160" y="6352560"/>
-            <a:ext cx="2741040" cy="362880"/>
+            <a:ext cx="2740320" cy="362160"/>
           </a:xfrm>
           <a:prstGeom prst="rect">
             <a:avLst/>
@@ -6295,7 +6295,7 @@
                 <a:tab algn="l" pos="0"/>
               </a:tabLst>
             </a:pPr>
-            <a:fld id="{E4CC6330-8E03-46E6-A9A7-F378E304FE51}" type="slidenum">
+            <a:fld id="{75B3E4B2-CA5C-452F-91C4-7587D755D5C5}" type="slidenum">
               <a:rPr b="1" lang="ru-RU" sz="1600" spc="-1" strike="noStrike">
                 <a:solidFill>
                   <a:schemeClr val="dk1">
@@ -6367,7 +6367,7 @@
         <p:spPr>
           <a:xfrm>
             <a:off x="10760040" y="142200"/>
-            <a:ext cx="950400" cy="291240"/>
+            <a:ext cx="949680" cy="290520"/>
           </a:xfrm>
           <a:prstGeom prst="rect">
             <a:avLst/>
@@ -6396,7 +6396,7 @@
         <p:spPr>
           <a:xfrm>
             <a:off x="10921320" y="0"/>
-            <a:ext cx="1270080" cy="1371240"/>
+            <a:ext cx="1269360" cy="1370520"/>
           </a:xfrm>
           <a:prstGeom prst="rect">
             <a:avLst/>
@@ -6424,8 +6424,8 @@
         </p:blipFill>
         <p:spPr>
           <a:xfrm flipH="1" rot="16200000">
-            <a:off x="48600" y="5535000"/>
-            <a:ext cx="1270080" cy="1371240"/>
+            <a:off x="47880" y="5535000"/>
+            <a:ext cx="1269360" cy="1370520"/>
           </a:xfrm>
           <a:prstGeom prst="rect">
             <a:avLst/>
@@ -6448,7 +6448,7 @@
         <p:spPr>
           <a:xfrm>
             <a:off x="1333440" y="6352560"/>
-            <a:ext cx="7478280" cy="362880"/>
+            <a:ext cx="7477560" cy="362160"/>
           </a:xfrm>
           <a:prstGeom prst="rect">
             <a:avLst/>
@@ -6520,7 +6520,7 @@
         <p:spPr>
           <a:xfrm>
             <a:off x="8966160" y="6352560"/>
-            <a:ext cx="2741040" cy="362880"/>
+            <a:ext cx="2740320" cy="362160"/>
           </a:xfrm>
           <a:prstGeom prst="rect">
             <a:avLst/>
@@ -6563,7 +6563,7 @@
                 <a:tab algn="l" pos="0"/>
               </a:tabLst>
             </a:pPr>
-            <a:fld id="{E3D07C96-6B66-4B76-92E1-13746396D0A0}" type="slidenum">
+            <a:fld id="{5D68FB7E-2D2D-4F0E-9502-6AABEF9FD89F}" type="slidenum">
               <a:rPr b="1" lang="ru-RU" sz="1600" spc="-1" strike="noStrike">
                 <a:solidFill>
                   <a:schemeClr val="dk1">
@@ -6678,7 +6678,7 @@
         <p:spPr>
           <a:xfrm>
             <a:off x="4038480" y="6356520"/>
-            <a:ext cx="4110120" cy="360360"/>
+            <a:ext cx="4109400" cy="359640"/>
           </a:xfrm>
           <a:prstGeom prst="rect">
             <a:avLst/>
@@ -6750,7 +6750,7 @@
         <p:spPr>
           <a:xfrm>
             <a:off x="8610480" y="6356520"/>
-            <a:ext cx="2738520" cy="360360"/>
+            <a:ext cx="2737800" cy="359640"/>
           </a:xfrm>
           <a:prstGeom prst="rect">
             <a:avLst/>
@@ -6793,7 +6793,7 @@
                 <a:tab algn="l" pos="0"/>
               </a:tabLst>
             </a:pPr>
-            <a:fld id="{DA75E014-78A9-4FCE-832D-E1D8EEAE3BD5}" type="slidenum">
+            <a:fld id="{F3E26E10-40A9-4DD0-ABE9-0F3B5E3412DC}" type="slidenum">
               <a:rPr b="0" lang="ru-RU" sz="1200" spc="-1" strike="noStrike">
                 <a:solidFill>
                   <a:schemeClr val="dk1">
@@ -6826,7 +6826,7 @@
         <p:spPr>
           <a:xfrm>
             <a:off x="838080" y="6356520"/>
-            <a:ext cx="2738520" cy="360360"/>
+            <a:ext cx="2737800" cy="359640"/>
           </a:xfrm>
           <a:prstGeom prst="rect">
             <a:avLst/>
@@ -6925,7 +6925,7 @@
         <p:spPr>
           <a:xfrm>
             <a:off x="10760040" y="142200"/>
-            <a:ext cx="950400" cy="291240"/>
+            <a:ext cx="949680" cy="290520"/>
           </a:xfrm>
           <a:prstGeom prst="rect">
             <a:avLst/>
@@ -6954,7 +6954,7 @@
         <p:spPr>
           <a:xfrm>
             <a:off x="10921320" y="0"/>
-            <a:ext cx="1270080" cy="1371240"/>
+            <a:ext cx="1269360" cy="1370520"/>
           </a:xfrm>
           <a:prstGeom prst="rect">
             <a:avLst/>
@@ -6982,8 +6982,8 @@
         </p:blipFill>
         <p:spPr>
           <a:xfrm flipH="1" rot="16200000">
-            <a:off x="48600" y="5535000"/>
-            <a:ext cx="1270080" cy="1371240"/>
+            <a:off x="47880" y="5535000"/>
+            <a:ext cx="1269360" cy="1370520"/>
           </a:xfrm>
           <a:prstGeom prst="rect">
             <a:avLst/>
@@ -7006,7 +7006,7 @@
         <p:spPr>
           <a:xfrm>
             <a:off x="1333440" y="6352560"/>
-            <a:ext cx="7478280" cy="362880"/>
+            <a:ext cx="7477560" cy="362160"/>
           </a:xfrm>
           <a:prstGeom prst="rect">
             <a:avLst/>
@@ -7078,7 +7078,7 @@
         <p:spPr>
           <a:xfrm>
             <a:off x="8966160" y="6352560"/>
-            <a:ext cx="2741040" cy="362880"/>
+            <a:ext cx="2740320" cy="362160"/>
           </a:xfrm>
           <a:prstGeom prst="rect">
             <a:avLst/>
@@ -7121,7 +7121,7 @@
                 <a:tab algn="l" pos="0"/>
               </a:tabLst>
             </a:pPr>
-            <a:fld id="{040D2F26-CAF8-4C0C-842F-B575D3525C71}" type="slidenum">
+            <a:fld id="{6821C09A-5922-4F39-94D9-5B1BFFF0543D}" type="slidenum">
               <a:rPr b="1" lang="ru-RU" sz="1600" spc="-1" strike="noStrike">
                 <a:solidFill>
                   <a:schemeClr val="dk1">
@@ -7193,7 +7193,7 @@
         <p:spPr>
           <a:xfrm>
             <a:off x="10760040" y="142200"/>
-            <a:ext cx="950400" cy="291240"/>
+            <a:ext cx="949680" cy="290520"/>
           </a:xfrm>
           <a:prstGeom prst="rect">
             <a:avLst/>
@@ -7222,7 +7222,7 @@
         <p:spPr>
           <a:xfrm>
             <a:off x="10921320" y="0"/>
-            <a:ext cx="1270080" cy="1371240"/>
+            <a:ext cx="1269360" cy="1370520"/>
           </a:xfrm>
           <a:prstGeom prst="rect">
             <a:avLst/>
@@ -7250,8 +7250,8 @@
         </p:blipFill>
         <p:spPr>
           <a:xfrm flipH="1" rot="16200000">
-            <a:off x="48600" y="5535000"/>
-            <a:ext cx="1270080" cy="1371240"/>
+            <a:off x="47880" y="5535000"/>
+            <a:ext cx="1269360" cy="1370520"/>
           </a:xfrm>
           <a:prstGeom prst="rect">
             <a:avLst/>
@@ -7274,7 +7274,7 @@
         <p:spPr>
           <a:xfrm>
             <a:off x="1333440" y="6352560"/>
-            <a:ext cx="7478280" cy="362880"/>
+            <a:ext cx="7477560" cy="362160"/>
           </a:xfrm>
           <a:prstGeom prst="rect">
             <a:avLst/>
@@ -7346,7 +7346,7 @@
         <p:spPr>
           <a:xfrm>
             <a:off x="8966160" y="6352560"/>
-            <a:ext cx="2741040" cy="362880"/>
+            <a:ext cx="2740320" cy="362160"/>
           </a:xfrm>
           <a:prstGeom prst="rect">
             <a:avLst/>
@@ -7389,7 +7389,7 @@
                 <a:tab algn="l" pos="0"/>
               </a:tabLst>
             </a:pPr>
-            <a:fld id="{8433103F-5681-4AF5-9F91-8E2A98773C59}" type="slidenum">
+            <a:fld id="{B2B0C85A-7CC2-426D-911D-D7C01B25277D}" type="slidenum">
               <a:rPr b="1" lang="ru-RU" sz="1600" spc="-1" strike="noStrike">
                 <a:solidFill>
                   <a:schemeClr val="dk1">
@@ -7461,7 +7461,7 @@
         <p:spPr>
           <a:xfrm>
             <a:off x="10760040" y="142200"/>
-            <a:ext cx="950400" cy="291240"/>
+            <a:ext cx="949680" cy="290520"/>
           </a:xfrm>
           <a:prstGeom prst="rect">
             <a:avLst/>
@@ -7490,7 +7490,7 @@
         <p:spPr>
           <a:xfrm>
             <a:off x="10921320" y="0"/>
-            <a:ext cx="1270080" cy="1371240"/>
+            <a:ext cx="1269360" cy="1370520"/>
           </a:xfrm>
           <a:prstGeom prst="rect">
             <a:avLst/>
@@ -7518,8 +7518,8 @@
         </p:blipFill>
         <p:spPr>
           <a:xfrm flipH="1" rot="16200000">
-            <a:off x="48600" y="5535000"/>
-            <a:ext cx="1270080" cy="1371240"/>
+            <a:off x="47880" y="5535000"/>
+            <a:ext cx="1269360" cy="1370520"/>
           </a:xfrm>
           <a:prstGeom prst="rect">
             <a:avLst/>
@@ -7542,7 +7542,7 @@
         <p:spPr>
           <a:xfrm>
             <a:off x="1333440" y="6352560"/>
-            <a:ext cx="7478280" cy="362880"/>
+            <a:ext cx="7477560" cy="362160"/>
           </a:xfrm>
           <a:prstGeom prst="rect">
             <a:avLst/>
@@ -7614,7 +7614,7 @@
         <p:spPr>
           <a:xfrm>
             <a:off x="8966160" y="6352560"/>
-            <a:ext cx="2741040" cy="362880"/>
+            <a:ext cx="2740320" cy="362160"/>
           </a:xfrm>
           <a:prstGeom prst="rect">
             <a:avLst/>
@@ -7657,7 +7657,7 @@
                 <a:tab algn="l" pos="0"/>
               </a:tabLst>
             </a:pPr>
-            <a:fld id="{B06B6EE0-0833-45A8-AE08-0C05E5F6CA99}" type="slidenum">
+            <a:fld id="{03B97269-0CC4-4C2B-B655-2648CB6458AF}" type="slidenum">
               <a:rPr b="1" lang="ru-RU" sz="1600" spc="-1" strike="noStrike">
                 <a:solidFill>
                   <a:schemeClr val="dk1">
@@ -7729,7 +7729,7 @@
         <p:spPr>
           <a:xfrm>
             <a:off x="10760040" y="142200"/>
-            <a:ext cx="950400" cy="291240"/>
+            <a:ext cx="949680" cy="290520"/>
           </a:xfrm>
           <a:prstGeom prst="rect">
             <a:avLst/>
@@ -7758,7 +7758,7 @@
         <p:spPr>
           <a:xfrm>
             <a:off x="10921320" y="0"/>
-            <a:ext cx="1270080" cy="1371240"/>
+            <a:ext cx="1269360" cy="1370520"/>
           </a:xfrm>
           <a:prstGeom prst="rect">
             <a:avLst/>
@@ -7786,8 +7786,8 @@
         </p:blipFill>
         <p:spPr>
           <a:xfrm flipH="1" rot="16200000">
-            <a:off x="48600" y="5535000"/>
-            <a:ext cx="1270080" cy="1371240"/>
+            <a:off x="47880" y="5535000"/>
+            <a:ext cx="1269360" cy="1370520"/>
           </a:xfrm>
           <a:prstGeom prst="rect">
             <a:avLst/>
@@ -7810,7 +7810,7 @@
         <p:spPr>
           <a:xfrm>
             <a:off x="1333440" y="6352560"/>
-            <a:ext cx="7478280" cy="362880"/>
+            <a:ext cx="7477560" cy="362160"/>
           </a:xfrm>
           <a:prstGeom prst="rect">
             <a:avLst/>
@@ -7882,7 +7882,7 @@
         <p:spPr>
           <a:xfrm>
             <a:off x="8966160" y="6352560"/>
-            <a:ext cx="2741040" cy="362880"/>
+            <a:ext cx="2740320" cy="362160"/>
           </a:xfrm>
           <a:prstGeom prst="rect">
             <a:avLst/>
@@ -7925,7 +7925,7 @@
                 <a:tab algn="l" pos="0"/>
               </a:tabLst>
             </a:pPr>
-            <a:fld id="{A282763F-3048-4EED-A931-A64D148F0E31}" type="slidenum">
+            <a:fld id="{0AF5D6AF-04E1-4242-B42A-DBC5FBEDD77D}" type="slidenum">
               <a:rPr b="1" lang="ru-RU" sz="1600" spc="-1" strike="noStrike">
                 <a:solidFill>
                   <a:schemeClr val="dk1">
@@ -7997,7 +7997,7 @@
         <p:spPr>
           <a:xfrm>
             <a:off x="10760040" y="142200"/>
-            <a:ext cx="950400" cy="291240"/>
+            <a:ext cx="949680" cy="290520"/>
           </a:xfrm>
           <a:prstGeom prst="rect">
             <a:avLst/>
@@ -8026,7 +8026,7 @@
         <p:spPr>
           <a:xfrm>
             <a:off x="10921320" y="0"/>
-            <a:ext cx="1270080" cy="1371240"/>
+            <a:ext cx="1269360" cy="1370520"/>
           </a:xfrm>
           <a:prstGeom prst="rect">
             <a:avLst/>
@@ -8054,8 +8054,8 @@
         </p:blipFill>
         <p:spPr>
           <a:xfrm flipH="1" rot="16200000">
-            <a:off x="48600" y="5535000"/>
-            <a:ext cx="1270080" cy="1371240"/>
+            <a:off x="47880" y="5535000"/>
+            <a:ext cx="1269360" cy="1370520"/>
           </a:xfrm>
           <a:prstGeom prst="rect">
             <a:avLst/>
@@ -8078,7 +8078,7 @@
         <p:spPr>
           <a:xfrm>
             <a:off x="1333440" y="6352560"/>
-            <a:ext cx="7478280" cy="362880"/>
+            <a:ext cx="7477560" cy="362160"/>
           </a:xfrm>
           <a:prstGeom prst="rect">
             <a:avLst/>
@@ -8150,7 +8150,7 @@
         <p:spPr>
           <a:xfrm>
             <a:off x="8966160" y="6352560"/>
-            <a:ext cx="2741040" cy="362880"/>
+            <a:ext cx="2740320" cy="362160"/>
           </a:xfrm>
           <a:prstGeom prst="rect">
             <a:avLst/>
@@ -8193,7 +8193,7 @@
                 <a:tab algn="l" pos="0"/>
               </a:tabLst>
             </a:pPr>
-            <a:fld id="{0ACCFA92-4E1D-45CF-8C3A-AC6C8529DAF8}" type="slidenum">
+            <a:fld id="{0271A9C8-8DD1-4AE0-B951-8E68B5B0BCEB}" type="slidenum">
               <a:rPr b="1" lang="ru-RU" sz="1600" spc="-1" strike="noStrike">
                 <a:solidFill>
                   <a:schemeClr val="dk1">
@@ -8265,7 +8265,7 @@
         <p:spPr>
           <a:xfrm>
             <a:off x="10760040" y="142200"/>
-            <a:ext cx="950400" cy="291240"/>
+            <a:ext cx="949680" cy="290520"/>
           </a:xfrm>
           <a:prstGeom prst="rect">
             <a:avLst/>
@@ -8294,7 +8294,7 @@
         <p:spPr>
           <a:xfrm>
             <a:off x="10921320" y="0"/>
-            <a:ext cx="1270080" cy="1371240"/>
+            <a:ext cx="1269360" cy="1370520"/>
           </a:xfrm>
           <a:prstGeom prst="rect">
             <a:avLst/>
@@ -8322,8 +8322,8 @@
         </p:blipFill>
         <p:spPr>
           <a:xfrm flipH="1" rot="16200000">
-            <a:off x="48600" y="5535000"/>
-            <a:ext cx="1270080" cy="1371240"/>
+            <a:off x="47880" y="5535000"/>
+            <a:ext cx="1269360" cy="1370520"/>
           </a:xfrm>
           <a:prstGeom prst="rect">
             <a:avLst/>
@@ -8346,7 +8346,7 @@
         <p:spPr>
           <a:xfrm>
             <a:off x="1333440" y="6352560"/>
-            <a:ext cx="7478280" cy="362880"/>
+            <a:ext cx="7477560" cy="362160"/>
           </a:xfrm>
           <a:prstGeom prst="rect">
             <a:avLst/>
@@ -8418,7 +8418,7 @@
         <p:spPr>
           <a:xfrm>
             <a:off x="8966160" y="6352560"/>
-            <a:ext cx="2741040" cy="362880"/>
+            <a:ext cx="2740320" cy="362160"/>
           </a:xfrm>
           <a:prstGeom prst="rect">
             <a:avLst/>
@@ -8461,7 +8461,7 @@
                 <a:tab algn="l" pos="0"/>
               </a:tabLst>
             </a:pPr>
-            <a:fld id="{71DE46A9-9ECC-44F0-A7DC-8284B75AC3B6}" type="slidenum">
+            <a:fld id="{6540EA68-1B75-4664-83D4-B7BF36AEA4A1}" type="slidenum">
               <a:rPr b="1" lang="ru-RU" sz="1600" spc="-1" strike="noStrike">
                 <a:solidFill>
                   <a:schemeClr val="dk1">
@@ -8533,7 +8533,7 @@
         <p:spPr>
           <a:xfrm>
             <a:off x="10760040" y="142200"/>
-            <a:ext cx="950400" cy="291240"/>
+            <a:ext cx="949680" cy="290520"/>
           </a:xfrm>
           <a:prstGeom prst="rect">
             <a:avLst/>
@@ -8562,7 +8562,7 @@
         <p:spPr>
           <a:xfrm>
             <a:off x="10921320" y="0"/>
-            <a:ext cx="1270080" cy="1371240"/>
+            <a:ext cx="1269360" cy="1370520"/>
           </a:xfrm>
           <a:prstGeom prst="rect">
             <a:avLst/>
@@ -8590,8 +8590,8 @@
         </p:blipFill>
         <p:spPr>
           <a:xfrm flipH="1" rot="16200000">
-            <a:off x="48600" y="5535000"/>
-            <a:ext cx="1270080" cy="1371240"/>
+            <a:off x="47880" y="5535000"/>
+            <a:ext cx="1269360" cy="1370520"/>
           </a:xfrm>
           <a:prstGeom prst="rect">
             <a:avLst/>
@@ -8614,7 +8614,7 @@
         <p:spPr>
           <a:xfrm>
             <a:off x="1333440" y="6352560"/>
-            <a:ext cx="7478280" cy="362880"/>
+            <a:ext cx="7477560" cy="362160"/>
           </a:xfrm>
           <a:prstGeom prst="rect">
             <a:avLst/>
@@ -8686,7 +8686,7 @@
         <p:spPr>
           <a:xfrm>
             <a:off x="8966160" y="6352560"/>
-            <a:ext cx="2741040" cy="362880"/>
+            <a:ext cx="2740320" cy="362160"/>
           </a:xfrm>
           <a:prstGeom prst="rect">
             <a:avLst/>
@@ -8729,7 +8729,7 @@
                 <a:tab algn="l" pos="0"/>
               </a:tabLst>
             </a:pPr>
-            <a:fld id="{6F4D7913-24E6-4B6C-9D64-EC5878B15891}" type="slidenum">
+            <a:fld id="{170C8F35-431A-4775-908B-E5C178E7348D}" type="slidenum">
               <a:rPr b="1" lang="ru-RU" sz="1600" spc="-1" strike="noStrike">
                 <a:solidFill>
                   <a:schemeClr val="dk1">
@@ -8788,7 +8788,7 @@
         <p:spPr>
           <a:xfrm>
             <a:off x="3759120" y="5218920"/>
-            <a:ext cx="7821360" cy="744480"/>
+            <a:ext cx="7820640" cy="743760"/>
           </a:xfrm>
           <a:prstGeom prst="rect">
             <a:avLst/>
@@ -8858,6 +8858,77 @@
               <a:latin typeface="Arial"/>
             </a:endParaRPr>
           </a:p>
+          <a:p>
+            <a:pPr indent="0" defTabSz="914400">
+              <a:lnSpc>
+                <a:spcPct val="100000"/>
+              </a:lnSpc>
+              <a:buNone/>
+              <a:tabLst>
+                <a:tab algn="l" pos="0"/>
+              </a:tabLst>
+            </a:pPr>
+            <a:endParaRPr b="0" lang="ru-RU" sz="1600" spc="-1" strike="noStrike">
+              <a:solidFill>
+                <a:srgbClr val="000000"/>
+              </a:solidFill>
+              <a:latin typeface="Arial"/>
+            </a:endParaRPr>
+          </a:p>
+          <a:p>
+            <a:pPr indent="0" defTabSz="914400">
+              <a:lnSpc>
+                <a:spcPct val="100000"/>
+              </a:lnSpc>
+              <a:buNone/>
+              <a:tabLst>
+                <a:tab algn="l" pos="0"/>
+              </a:tabLst>
+            </a:pPr>
+            <a:r>
+              <a:rPr b="1" lang="ru-RU" sz="1600" spc="-1" strike="noStrike">
+                <a:solidFill>
+                  <a:schemeClr val="accent6"/>
+                </a:solidFill>
+                <a:latin typeface="Montserrat"/>
+              </a:rPr>
+              <a:t>Научный консультант:</a:t>
+            </a:r>
+            <a:endParaRPr b="0" lang="ru-RU" sz="1600" spc="-1" strike="noStrike">
+              <a:solidFill>
+                <a:srgbClr val="000000"/>
+              </a:solidFill>
+              <a:latin typeface="Arial"/>
+            </a:endParaRPr>
+          </a:p>
+          <a:p>
+            <a:pPr indent="0">
+              <a:lnSpc>
+                <a:spcPct val="100000"/>
+              </a:lnSpc>
+              <a:spcAft>
+                <a:spcPts val="516"/>
+              </a:spcAft>
+              <a:buNone/>
+            </a:pPr>
+            <a:r>
+              <a:rPr b="1" lang="ru-RU" sz="1600" spc="-1" strike="noStrike">
+                <a:solidFill>
+                  <a:schemeClr val="accent6"/>
+                </a:solidFill>
+                <a:latin typeface="Montserrat"/>
+                <a:ea typeface="Microsoft YaHei"/>
+              </a:rPr>
+              <a:t>ст. преподаватель Колобенина Дарья Сергеевна</a:t>
+            </a:r>
+            <a:endParaRPr b="0" lang="ru-RU" sz="1600" spc="-1" strike="noStrike" u="sng">
+              <a:solidFill>
+                <a:srgbClr val="000000"/>
+              </a:solidFill>
+              <a:uFillTx/>
+              <a:latin typeface="Arial"/>
+            </a:endParaRPr>
+          </a:p>
         </p:txBody>
       </p:sp>
       <p:sp>
@@ -8873,7 +8944,7 @@
         <p:spPr>
           <a:xfrm>
             <a:off x="3759120" y="4242240"/>
-            <a:ext cx="7821360" cy="771840"/>
+            <a:ext cx="7820640" cy="771120"/>
           </a:xfrm>
           <a:prstGeom prst="rect">
             <a:avLst/>
@@ -8978,56 +9049,13 @@
             <a:spLocks noGrp="1"/>
           </p:cNvSpPr>
           <p:nvPr>
-            <p:ph/>
-          </p:nvPr>
-        </p:nvSpPr>
-        <p:spPr>
-          <a:xfrm>
-            <a:off x="4776840" y="6168600"/>
-            <a:ext cx="2635920" cy="333000"/>
-          </a:xfrm>
-          <a:prstGeom prst="rect">
-            <a:avLst/>
-          </a:prstGeom>
-          <a:noFill/>
-          <a:ln w="0">
-            <a:noFill/>
-          </a:ln>
-        </p:spPr>
-        <p:txBody>
-          <a:bodyPr lIns="91440" rIns="91440" tIns="45720" bIns="45720" anchor="ctr">
-            <a:noAutofit/>
-          </a:bodyPr>
-          <a:p>
-            <a:pPr indent="0">
-              <a:spcBef>
-                <a:spcPts val="1417"/>
-              </a:spcBef>
-              <a:buNone/>
-            </a:pPr>
-            <a:endParaRPr b="0" lang="ru-RU" sz="1800" spc="-1" strike="noStrike">
-              <a:solidFill>
-                <a:srgbClr val="000000"/>
-              </a:solidFill>
-              <a:latin typeface="Arial"/>
-            </a:endParaRPr>
-          </a:p>
-        </p:txBody>
-      </p:sp>
-      <p:sp>
-        <p:nvSpPr>
-          <p:cNvPr id="129" name="PlaceHolder 4"/>
-          <p:cNvSpPr>
-            <a:spLocks noGrp="1"/>
-          </p:cNvSpPr>
-          <p:nvPr>
             <p:ph type="title"/>
           </p:nvPr>
         </p:nvSpPr>
         <p:spPr>
           <a:xfrm>
             <a:off x="3600000" y="1620000"/>
-            <a:ext cx="6921360" cy="1850400"/>
+            <a:ext cx="6920640" cy="1849680"/>
           </a:xfrm>
           <a:prstGeom prst="rect">
             <a:avLst/>
@@ -9064,7 +9092,7 @@
               </a:rPr>
               <a:t>Информационная система комплексной оценки надежности поставщиков</a:t>
             </a:r>
-            <a:endParaRPr b="1" lang="ru-RU" sz="4000" spc="-1" strike="noStrike">
+            <a:endParaRPr b="0" lang="ru-RU" sz="4000" spc="-1" strike="noStrike">
               <a:solidFill>
                 <a:srgbClr val="000000"/>
               </a:solidFill>
@@ -9103,104 +9131,9 @@
           <a:chExt cx="0" cy="0"/>
         </a:xfrm>
       </p:grpSpPr>
-      <p:sp>
-        <p:nvSpPr>
-          <p:cNvPr id="155" name="PlaceHolder 1"/>
-          <p:cNvSpPr>
-            <a:spLocks noGrp="1"/>
-          </p:cNvSpPr>
-          <p:nvPr>
-            <p:ph type="title"/>
-          </p:nvPr>
-        </p:nvSpPr>
-        <p:spPr>
-          <a:xfrm>
-            <a:off x="0" y="0"/>
-            <a:ext cx="11227680" cy="920880"/>
-          </a:xfrm>
-          <a:prstGeom prst="rect">
-            <a:avLst/>
-          </a:prstGeom>
-          <a:noFill/>
-          <a:ln w="0">
-            <a:noFill/>
-          </a:ln>
-        </p:spPr>
-        <p:txBody>
-          <a:bodyPr lIns="91440" rIns="91440" tIns="45720" bIns="45720" anchor="t">
-            <a:noAutofit/>
-          </a:bodyPr>
-          <a:p>
-            <a:pPr indent="0" defTabSz="914400">
-              <a:lnSpc>
-                <a:spcPct val="100000"/>
-              </a:lnSpc>
-              <a:buNone/>
-              <a:tabLst>
-                <a:tab algn="l" pos="0"/>
-              </a:tabLst>
-            </a:pPr>
-            <a:r>
-              <a:rPr b="1" lang="ru-RU" sz="3600" spc="-1" strike="noStrike">
-                <a:solidFill>
-                  <a:srgbClr val="332974"/>
-                </a:solidFill>
-                <a:latin typeface="Montserrat SemiBold"/>
-              </a:rPr>
-              <a:t>Архитектурное проектирование</a:t>
-            </a:r>
-            <a:endParaRPr b="0" lang="ru-RU" sz="3600" spc="-1" strike="noStrike">
-              <a:solidFill>
-                <a:srgbClr val="000000"/>
-              </a:solidFill>
-              <a:latin typeface="Arial"/>
-            </a:endParaRPr>
-          </a:p>
-        </p:txBody>
-      </p:sp>
-      <p:sp>
-        <p:nvSpPr>
-          <p:cNvPr id="156" name="PlaceHolder 2"/>
-          <p:cNvSpPr>
-            <a:spLocks noGrp="1"/>
-          </p:cNvSpPr>
-          <p:nvPr>
-            <p:ph type="ftr" idx="48"/>
-          </p:nvPr>
-        </p:nvSpPr>
-        <p:spPr>
-          <a:xfrm>
-            <a:off x="1333440" y="6352560"/>
-            <a:ext cx="7478280" cy="362880"/>
-          </a:xfrm>
-          <a:prstGeom prst="rect">
-            <a:avLst/>
-          </a:prstGeom>
-          <a:noFill/>
-          <a:ln w="0">
-            <a:noFill/>
-          </a:ln>
-        </p:spPr>
-        <p:txBody>
-          <a:bodyPr lIns="90000" rIns="90000" tIns="45000" bIns="45000" anchor="t">
-            <a:noAutofit/>
-          </a:bodyPr>
-          <a:p>
-            <a:pPr indent="0">
-              <a:buNone/>
-            </a:pPr>
-            <a:endParaRPr b="0" lang="ru-RU" sz="1400" spc="-1" strike="noStrike">
-              <a:solidFill>
-                <a:srgbClr val="000000"/>
-              </a:solidFill>
-              <a:latin typeface="Times New Roman"/>
-            </a:endParaRPr>
-          </a:p>
-        </p:txBody>
-      </p:sp>
       <p:pic>
         <p:nvPicPr>
-          <p:cNvPr id="157" name="" descr=""/>
+          <p:cNvPr id="153" name="" descr=""/>
           <p:cNvPicPr/>
           <p:nvPr/>
         </p:nvPicPr>
@@ -9210,8 +9143,8 @@
         </p:blipFill>
         <p:spPr>
           <a:xfrm>
-            <a:off x="2340360" y="1611720"/>
-            <a:ext cx="7555680" cy="4143960"/>
+            <a:off x="180000" y="936360"/>
+            <a:ext cx="10517400" cy="3203280"/>
           </a:xfrm>
           <a:prstGeom prst="rect">
             <a:avLst/>
@@ -9223,7 +9156,64 @@
       </p:pic>
       <p:sp>
         <p:nvSpPr>
-          <p:cNvPr id="4" name="PlaceHolder 3"/>
+          <p:cNvPr id="154" name="PlaceHolder 9"/>
+          <p:cNvSpPr/>
+          <p:nvPr/>
+        </p:nvSpPr>
+        <p:spPr>
+          <a:xfrm>
+            <a:off x="0" y="-36000"/>
+            <a:ext cx="7559640" cy="717840"/>
+          </a:xfrm>
+          <a:prstGeom prst="rect">
+            <a:avLst/>
+          </a:prstGeom>
+          <a:noFill/>
+          <a:ln w="0">
+            <a:noFill/>
+          </a:ln>
+        </p:spPr>
+        <p:style>
+          <a:lnRef idx="0"/>
+          <a:fillRef idx="0"/>
+          <a:effectRef idx="0"/>
+          <a:fontRef idx="minor"/>
+        </p:style>
+        <p:txBody>
+          <a:bodyPr lIns="90000" rIns="90000" tIns="45000" bIns="45000" anchor="ctr">
+            <a:noAutofit/>
+          </a:bodyPr>
+          <a:p>
+            <a:pPr algn="ctr">
+              <a:lnSpc>
+                <a:spcPct val="108000"/>
+              </a:lnSpc>
+              <a:tabLst>
+                <a:tab algn="l" pos="0"/>
+              </a:tabLst>
+            </a:pPr>
+            <a:r>
+              <a:rPr b="1" lang="ru-RU" sz="3600" spc="-1" strike="noStrike">
+                <a:solidFill>
+                  <a:srgbClr val="332974"/>
+                </a:solidFill>
+                <a:latin typeface="Montserrat SemiBold"/>
+                <a:ea typeface="Microsoft YaHei"/>
+              </a:rPr>
+              <a:t>Архитектура модуля FastAPI</a:t>
+            </a:r>
+            <a:endParaRPr b="0" lang="ru-RU" sz="3600" spc="-1" strike="noStrike">
+              <a:solidFill>
+                <a:srgbClr val="000000"/>
+              </a:solidFill>
+              <a:latin typeface="Arial"/>
+            </a:endParaRPr>
+          </a:p>
+        </p:txBody>
+      </p:sp>
+      <p:sp>
+        <p:nvSpPr>
+          <p:cNvPr id="2" name="PlaceHolder 1"/>
           <p:cNvSpPr>
             <a:spLocks noGrp="1"/>
           </p:cNvSpPr>
@@ -9235,7 +9225,7 @@
         <p:txBody>
           <a:bodyPr/>
           <a:p>
-            <a:fld id="{A31519F7-CBB4-443B-83BF-C75C14F76D51}" type="slidenum">
+            <a:fld id="{780ACE20-FDD2-4AEE-A0C9-B27E1D1D37DE}" type="slidenum">
               <a:t>10</a:t>
             </a:fld>
           </a:p>
@@ -9273,14 +9263,14 @@
       </p:grpSpPr>
       <p:sp>
         <p:nvSpPr>
-          <p:cNvPr id="158" name="PlaceHolder 5"/>
+          <p:cNvPr id="155" name="PlaceHolder 14"/>
           <p:cNvSpPr/>
           <p:nvPr/>
         </p:nvSpPr>
         <p:spPr>
           <a:xfrm>
             <a:off x="0" y="0"/>
-            <a:ext cx="7738560" cy="718560"/>
+            <a:ext cx="6479640" cy="717840"/>
           </a:xfrm>
           <a:prstGeom prst="rect">
             <a:avLst/>
@@ -9317,7 +9307,7 @@
                 <a:latin typeface="Montserrat SemiBold"/>
                 <a:ea typeface="Microsoft YaHei"/>
               </a:rPr>
-              <a:t>Архитектура Python-сервиса</a:t>
+              <a:t>Архитектура ИИ модели</a:t>
             </a:r>
             <a:endParaRPr b="0" lang="ru-RU" sz="3600" spc="-1" strike="noStrike">
               <a:solidFill>
@@ -9328,29 +9318,725 @@
           </a:p>
         </p:txBody>
       </p:sp>
-      <p:pic>
-        <p:nvPicPr>
-          <p:cNvPr id="159" name="" descr=""/>
-          <p:cNvPicPr/>
+      <p:sp>
+        <p:nvSpPr>
+          <p:cNvPr id="156" name=""/>
+          <p:cNvSpPr/>
           <p:nvPr/>
-        </p:nvPicPr>
-        <p:blipFill>
-          <a:blip r:embed="rId1"/>
-          <a:stretch/>
-        </p:blipFill>
+        </p:nvSpPr>
         <p:spPr>
           <a:xfrm>
-            <a:off x="4140360" y="1620360"/>
-            <a:ext cx="4135680" cy="4648320"/>
+            <a:off x="360000" y="867240"/>
+            <a:ext cx="5939640" cy="5848920"/>
           </a:xfrm>
           <a:prstGeom prst="rect">
             <a:avLst/>
           </a:prstGeom>
+          <a:noFill/>
           <a:ln w="0">
             <a:noFill/>
           </a:ln>
         </p:spPr>
-      </p:pic>
+        <p:style>
+          <a:lnRef idx="0"/>
+          <a:fillRef idx="0"/>
+          <a:effectRef idx="0"/>
+          <a:fontRef idx="minor"/>
+        </p:style>
+        <p:txBody>
+          <a:bodyPr lIns="90000" rIns="90000" tIns="45000" bIns="45000" anchor="t">
+            <a:noAutofit/>
+          </a:bodyPr>
+          <a:p>
+            <a:pPr>
+              <a:lnSpc>
+                <a:spcPct val="100000"/>
+              </a:lnSpc>
+              <a:spcBef>
+                <a:spcPts val="907"/>
+              </a:spcBef>
+              <a:spcAft>
+                <a:spcPts val="709"/>
+              </a:spcAft>
+            </a:pPr>
+            <a:r>
+              <a:rPr b="0" lang="ru-RU" sz="1400" spc="-1" strike="noStrike">
+                <a:solidFill>
+                  <a:srgbClr val="000000"/>
+                </a:solidFill>
+                <a:latin typeface="Montserrat SemiBold"/>
+              </a:rPr>
+              <a:t>1. Главный класс – SupplierRiskModel</a:t>
+            </a:r>
+            <a:endParaRPr b="0" lang="ru-RU" sz="1400" spc="-1" strike="noStrike">
+              <a:solidFill>
+                <a:srgbClr val="000000"/>
+              </a:solidFill>
+              <a:latin typeface="Arial"/>
+            </a:endParaRPr>
+          </a:p>
+          <a:p>
+            <a:pPr>
+              <a:lnSpc>
+                <a:spcPct val="100000"/>
+              </a:lnSpc>
+              <a:spcBef>
+                <a:spcPts val="907"/>
+              </a:spcBef>
+              <a:spcAft>
+                <a:spcPts val="709"/>
+              </a:spcAft>
+            </a:pPr>
+            <a:r>
+              <a:rPr b="0" lang="ru-RU" sz="1400" spc="-1" strike="noStrike">
+                <a:solidFill>
+                  <a:srgbClr val="000000"/>
+                </a:solidFill>
+                <a:latin typeface="Montserrat"/>
+              </a:rPr>
+              <a:t>    </a:t>
+            </a:r>
+            <a:r>
+              <a:rPr b="0" lang="ru-RU" sz="1400" spc="-1" strike="noStrike">
+                <a:solidFill>
+                  <a:srgbClr val="000000"/>
+                </a:solidFill>
+                <a:latin typeface="Montserrat"/>
+              </a:rPr>
+              <a:t>train_high_accuracy_model() – обучить модель</a:t>
+            </a:r>
+            <a:endParaRPr b="0" lang="ru-RU" sz="1400" spc="-1" strike="noStrike">
+              <a:solidFill>
+                <a:srgbClr val="000000"/>
+              </a:solidFill>
+              <a:latin typeface="Arial"/>
+            </a:endParaRPr>
+          </a:p>
+          <a:p>
+            <a:pPr>
+              <a:lnSpc>
+                <a:spcPct val="100000"/>
+              </a:lnSpc>
+              <a:spcBef>
+                <a:spcPts val="907"/>
+              </a:spcBef>
+              <a:spcAft>
+                <a:spcPts val="709"/>
+              </a:spcAft>
+            </a:pPr>
+            <a:r>
+              <a:rPr b="0" lang="ru-RU" sz="1400" spc="-1" strike="noStrike">
+                <a:solidFill>
+                  <a:srgbClr val="000000"/>
+                </a:solidFill>
+                <a:latin typeface="Montserrat"/>
+              </a:rPr>
+              <a:t>    </a:t>
+            </a:r>
+            <a:r>
+              <a:rPr b="0" lang="ru-RU" sz="1400" spc="-1" strike="noStrike">
+                <a:solidFill>
+                  <a:srgbClr val="000000"/>
+                </a:solidFill>
+                <a:latin typeface="Montserrat"/>
+              </a:rPr>
+              <a:t>predict_risk() – предсказать риск для нового поставщика</a:t>
+            </a:r>
+            <a:endParaRPr b="0" lang="ru-RU" sz="1400" spc="-1" strike="noStrike">
+              <a:solidFill>
+                <a:srgbClr val="000000"/>
+              </a:solidFill>
+              <a:latin typeface="Arial"/>
+            </a:endParaRPr>
+          </a:p>
+          <a:p>
+            <a:pPr>
+              <a:lnSpc>
+                <a:spcPct val="100000"/>
+              </a:lnSpc>
+              <a:spcBef>
+                <a:spcPts val="907"/>
+              </a:spcBef>
+              <a:spcAft>
+                <a:spcPts val="709"/>
+              </a:spcAft>
+            </a:pPr>
+            <a:r>
+              <a:rPr b="0" lang="ru-RU" sz="1400" spc="-1" strike="noStrike">
+                <a:solidFill>
+                  <a:srgbClr val="000000"/>
+                </a:solidFill>
+                <a:latin typeface="Montserrat"/>
+              </a:rPr>
+              <a:t>    </a:t>
+            </a:r>
+            <a:r>
+              <a:rPr b="0" lang="ru-RU" sz="1400" spc="-1" strike="noStrike">
+                <a:solidFill>
+                  <a:srgbClr val="000000"/>
+                </a:solidFill>
+                <a:latin typeface="Montserrat"/>
+              </a:rPr>
+              <a:t>save_model() / load_model() – сохранить и загрузить</a:t>
+            </a:r>
+            <a:endParaRPr b="0" lang="ru-RU" sz="1400" spc="-1" strike="noStrike">
+              <a:solidFill>
+                <a:srgbClr val="000000"/>
+              </a:solidFill>
+              <a:latin typeface="Arial"/>
+            </a:endParaRPr>
+          </a:p>
+          <a:p>
+            <a:pPr>
+              <a:lnSpc>
+                <a:spcPct val="100000"/>
+              </a:lnSpc>
+              <a:spcBef>
+                <a:spcPts val="907"/>
+              </a:spcBef>
+              <a:spcAft>
+                <a:spcPts val="709"/>
+              </a:spcAft>
+            </a:pPr>
+            <a:r>
+              <a:rPr b="0" lang="ru-RU" sz="1400" spc="-1" strike="noStrike">
+                <a:solidFill>
+                  <a:srgbClr val="000000"/>
+                </a:solidFill>
+                <a:latin typeface="Montserrat SemiBold"/>
+                <a:ea typeface="Microsoft YaHei"/>
+              </a:rPr>
+              <a:t>2. Тип модели</a:t>
+            </a:r>
+            <a:endParaRPr b="0" lang="ru-RU" sz="1400" spc="-1" strike="noStrike">
+              <a:solidFill>
+                <a:srgbClr val="000000"/>
+              </a:solidFill>
+              <a:latin typeface="Arial"/>
+            </a:endParaRPr>
+          </a:p>
+          <a:p>
+            <a:pPr>
+              <a:lnSpc>
+                <a:spcPct val="100000"/>
+              </a:lnSpc>
+              <a:spcBef>
+                <a:spcPts val="907"/>
+              </a:spcBef>
+              <a:spcAft>
+                <a:spcPts val="709"/>
+              </a:spcAft>
+            </a:pPr>
+            <a:r>
+              <a:rPr b="0" lang="ru-RU" sz="1400" spc="-1" strike="noStrike">
+                <a:solidFill>
+                  <a:srgbClr val="000000"/>
+                </a:solidFill>
+                <a:latin typeface="Montserrat"/>
+                <a:ea typeface="Microsoft YaHei"/>
+              </a:rPr>
+              <a:t>    </a:t>
+            </a:r>
+            <a:r>
+              <a:rPr b="0" lang="ru-RU" sz="1400" spc="-1" strike="noStrike">
+                <a:solidFill>
+                  <a:srgbClr val="000000"/>
+                </a:solidFill>
+                <a:latin typeface="Montserrat"/>
+                <a:ea typeface="Microsoft YaHei"/>
+              </a:rPr>
+              <a:t>Ансамблевый классификатор (StackingClassifier)</a:t>
+            </a:r>
+            <a:endParaRPr b="0" lang="ru-RU" sz="1400" spc="-1" strike="noStrike">
+              <a:solidFill>
+                <a:srgbClr val="000000"/>
+              </a:solidFill>
+              <a:latin typeface="Arial"/>
+            </a:endParaRPr>
+          </a:p>
+          <a:p>
+            <a:pPr>
+              <a:lnSpc>
+                <a:spcPct val="100000"/>
+              </a:lnSpc>
+              <a:spcBef>
+                <a:spcPts val="907"/>
+              </a:spcBef>
+              <a:spcAft>
+                <a:spcPts val="709"/>
+              </a:spcAft>
+            </a:pPr>
+            <a:r>
+              <a:rPr b="0" lang="ru-RU" sz="1400" spc="-1" strike="noStrike">
+                <a:solidFill>
+                  <a:srgbClr val="000000"/>
+                </a:solidFill>
+                <a:latin typeface="Montserrat"/>
+                <a:ea typeface="Microsoft YaHei"/>
+              </a:rPr>
+              <a:t>    </a:t>
+            </a:r>
+            <a:r>
+              <a:rPr b="0" lang="ru-RU" sz="1400" spc="-1" strike="noStrike">
+                <a:solidFill>
+                  <a:srgbClr val="000000"/>
+                </a:solidFill>
+                <a:latin typeface="Montserrat"/>
+                <a:ea typeface="Microsoft YaHei"/>
+              </a:rPr>
+              <a:t>Объединяет 4 алгоритма машинного обучения в один комплексный-алгоритм:</a:t>
+            </a:r>
+            <a:endParaRPr b="0" lang="ru-RU" sz="1400" spc="-1" strike="noStrike">
+              <a:solidFill>
+                <a:srgbClr val="000000"/>
+              </a:solidFill>
+              <a:latin typeface="Arial"/>
+            </a:endParaRPr>
+          </a:p>
+          <a:p>
+            <a:pPr lvl="2" marL="648000" indent="-216000">
+              <a:lnSpc>
+                <a:spcPct val="100000"/>
+              </a:lnSpc>
+              <a:spcBef>
+                <a:spcPts val="907"/>
+              </a:spcBef>
+              <a:spcAft>
+                <a:spcPts val="709"/>
+              </a:spcAft>
+              <a:buClr>
+                <a:srgbClr val="000000"/>
+              </a:buClr>
+              <a:buSzPct val="45000"/>
+              <a:buFont typeface="Wingdings" charset="2"/>
+              <a:buChar char=""/>
+            </a:pPr>
+            <a:r>
+              <a:rPr b="0" lang="ru-RU" sz="1400" spc="-1" strike="noStrike">
+                <a:solidFill>
+                  <a:srgbClr val="000000"/>
+                </a:solidFill>
+                <a:latin typeface="Montserrat"/>
+                <a:ea typeface="Microsoft YaHei"/>
+              </a:rPr>
+              <a:t>RandomForest (300 деревьев)</a:t>
+            </a:r>
+            <a:endParaRPr b="0" lang="ru-RU" sz="1400" spc="-1" strike="noStrike">
+              <a:solidFill>
+                <a:srgbClr val="000000"/>
+              </a:solidFill>
+              <a:latin typeface="Arial"/>
+            </a:endParaRPr>
+          </a:p>
+          <a:p>
+            <a:pPr lvl="2" marL="648000" indent="-216000">
+              <a:lnSpc>
+                <a:spcPct val="100000"/>
+              </a:lnSpc>
+              <a:spcBef>
+                <a:spcPts val="907"/>
+              </a:spcBef>
+              <a:spcAft>
+                <a:spcPts val="709"/>
+              </a:spcAft>
+              <a:buClr>
+                <a:srgbClr val="000000"/>
+              </a:buClr>
+              <a:buSzPct val="45000"/>
+              <a:buFont typeface="Wingdings" charset="2"/>
+              <a:buChar char=""/>
+            </a:pPr>
+            <a:r>
+              <a:rPr b="0" lang="ru-RU" sz="1400" spc="-1" strike="noStrike">
+                <a:solidFill>
+                  <a:srgbClr val="000000"/>
+                </a:solidFill>
+                <a:latin typeface="Montserrat"/>
+                <a:ea typeface="Microsoft YaHei"/>
+              </a:rPr>
+              <a:t>BalancedRandomForest (200 деревьев)</a:t>
+            </a:r>
+            <a:endParaRPr b="0" lang="ru-RU" sz="1400" spc="-1" strike="noStrike">
+              <a:solidFill>
+                <a:srgbClr val="000000"/>
+              </a:solidFill>
+              <a:latin typeface="Arial"/>
+            </a:endParaRPr>
+          </a:p>
+          <a:p>
+            <a:pPr lvl="2" marL="648000" indent="-216000">
+              <a:lnSpc>
+                <a:spcPct val="100000"/>
+              </a:lnSpc>
+              <a:spcBef>
+                <a:spcPts val="907"/>
+              </a:spcBef>
+              <a:spcAft>
+                <a:spcPts val="709"/>
+              </a:spcAft>
+              <a:buClr>
+                <a:srgbClr val="000000"/>
+              </a:buClr>
+              <a:buSzPct val="45000"/>
+              <a:buFont typeface="Wingdings" charset="2"/>
+              <a:buChar char=""/>
+            </a:pPr>
+            <a:r>
+              <a:rPr b="0" lang="ru-RU" sz="1400" spc="-1" strike="noStrike">
+                <a:solidFill>
+                  <a:srgbClr val="000000"/>
+                </a:solidFill>
+                <a:latin typeface="Montserrat"/>
+                <a:ea typeface="Microsoft YaHei"/>
+              </a:rPr>
+              <a:t>XGBoost (300 итераций)</a:t>
+            </a:r>
+            <a:endParaRPr b="0" lang="ru-RU" sz="1400" spc="-1" strike="noStrike">
+              <a:solidFill>
+                <a:srgbClr val="000000"/>
+              </a:solidFill>
+              <a:latin typeface="Arial"/>
+            </a:endParaRPr>
+          </a:p>
+          <a:p>
+            <a:pPr lvl="2" marL="648000" indent="-216000">
+              <a:lnSpc>
+                <a:spcPct val="100000"/>
+              </a:lnSpc>
+              <a:spcBef>
+                <a:spcPts val="907"/>
+              </a:spcBef>
+              <a:spcAft>
+                <a:spcPts val="709"/>
+              </a:spcAft>
+              <a:buClr>
+                <a:srgbClr val="000000"/>
+              </a:buClr>
+              <a:buSzPct val="45000"/>
+              <a:buFont typeface="Wingdings" charset="2"/>
+              <a:buChar char=""/>
+            </a:pPr>
+            <a:r>
+              <a:rPr b="0" lang="ru-RU" sz="1400" spc="-1" strike="noStrike">
+                <a:solidFill>
+                  <a:srgbClr val="000000"/>
+                </a:solidFill>
+                <a:latin typeface="Montserrat"/>
+                <a:ea typeface="Microsoft YaHei"/>
+              </a:rPr>
+              <a:t>GradientBoosting (300 итераций)</a:t>
+            </a:r>
+            <a:endParaRPr b="0" lang="ru-RU" sz="1400" spc="-1" strike="noStrike">
+              <a:solidFill>
+                <a:srgbClr val="000000"/>
+              </a:solidFill>
+              <a:latin typeface="Arial"/>
+            </a:endParaRPr>
+          </a:p>
+          <a:p>
+            <a:pPr lvl="2" marL="648000" indent="-216000">
+              <a:lnSpc>
+                <a:spcPct val="100000"/>
+              </a:lnSpc>
+              <a:spcBef>
+                <a:spcPts val="907"/>
+              </a:spcBef>
+              <a:spcAft>
+                <a:spcPts val="709"/>
+              </a:spcAft>
+              <a:buClr>
+                <a:srgbClr val="000000"/>
+              </a:buClr>
+              <a:buSzPct val="45000"/>
+              <a:buFont typeface="Wingdings" charset="2"/>
+              <a:buChar char=""/>
+            </a:pPr>
+            <a:r>
+              <a:rPr b="0" lang="ru-RU" sz="1400" spc="-1" strike="noStrike">
+                <a:solidFill>
+                  <a:srgbClr val="000000"/>
+                </a:solidFill>
+                <a:latin typeface="Montserrat"/>
+                <a:ea typeface="Microsoft YaHei"/>
+              </a:rPr>
+              <a:t>Далее данные попадают в Мета-модель LogisticRegression</a:t>
+            </a:r>
+            <a:endParaRPr b="0" lang="ru-RU" sz="1400" spc="-1" strike="noStrike">
+              <a:solidFill>
+                <a:srgbClr val="000000"/>
+              </a:solidFill>
+              <a:latin typeface="Arial"/>
+            </a:endParaRPr>
+          </a:p>
+          <a:p>
+            <a:pPr>
+              <a:lnSpc>
+                <a:spcPct val="100000"/>
+              </a:lnSpc>
+              <a:spcBef>
+                <a:spcPts val="1191"/>
+              </a:spcBef>
+              <a:spcAft>
+                <a:spcPts val="992"/>
+              </a:spcAft>
+            </a:pPr>
+            <a:endParaRPr b="0" lang="ru-RU" sz="1400" spc="-1" strike="noStrike">
+              <a:solidFill>
+                <a:srgbClr val="000000"/>
+              </a:solidFill>
+              <a:latin typeface="Arial"/>
+            </a:endParaRPr>
+          </a:p>
+        </p:txBody>
+      </p:sp>
+      <p:sp>
+        <p:nvSpPr>
+          <p:cNvPr id="157" name=""/>
+          <p:cNvSpPr/>
+          <p:nvPr/>
+        </p:nvSpPr>
+        <p:spPr>
+          <a:xfrm>
+            <a:off x="6300000" y="867240"/>
+            <a:ext cx="5399640" cy="5226120"/>
+          </a:xfrm>
+          <a:prstGeom prst="rect">
+            <a:avLst/>
+          </a:prstGeom>
+          <a:noFill/>
+          <a:ln w="0">
+            <a:noFill/>
+          </a:ln>
+        </p:spPr>
+        <p:style>
+          <a:lnRef idx="0"/>
+          <a:fillRef idx="0"/>
+          <a:effectRef idx="0"/>
+          <a:fontRef idx="minor"/>
+        </p:style>
+        <p:txBody>
+          <a:bodyPr lIns="90000" rIns="90000" tIns="45000" bIns="45000" anchor="t">
+            <a:noAutofit/>
+          </a:bodyPr>
+          <a:p>
+            <a:pPr>
+              <a:lnSpc>
+                <a:spcPct val="100000"/>
+              </a:lnSpc>
+              <a:spcBef>
+                <a:spcPts val="907"/>
+              </a:spcBef>
+              <a:spcAft>
+                <a:spcPts val="709"/>
+              </a:spcAft>
+            </a:pPr>
+            <a:r>
+              <a:rPr b="0" lang="ru-RU" sz="1400" spc="-1" strike="noStrike">
+                <a:solidFill>
+                  <a:srgbClr val="000000"/>
+                </a:solidFill>
+                <a:latin typeface="Montserrat SemiBold"/>
+              </a:rPr>
+              <a:t>3. Анализируемые признаки</a:t>
+            </a:r>
+            <a:endParaRPr b="0" lang="ru-RU" sz="1400" spc="-1" strike="noStrike">
+              <a:solidFill>
+                <a:srgbClr val="000000"/>
+              </a:solidFill>
+              <a:latin typeface="Arial"/>
+            </a:endParaRPr>
+          </a:p>
+          <a:p>
+            <a:pPr lvl="1" marL="432000" indent="-216000">
+              <a:lnSpc>
+                <a:spcPct val="100000"/>
+              </a:lnSpc>
+              <a:spcBef>
+                <a:spcPts val="907"/>
+              </a:spcBef>
+              <a:spcAft>
+                <a:spcPts val="709"/>
+              </a:spcAft>
+              <a:buClr>
+                <a:srgbClr val="000000"/>
+              </a:buClr>
+              <a:buSzPct val="45000"/>
+              <a:buFont typeface="Wingdings" charset="2"/>
+              <a:buChar char=""/>
+            </a:pPr>
+            <a:r>
+              <a:rPr b="0" lang="ru-RU" sz="1400" spc="-1" strike="noStrike">
+                <a:solidFill>
+                  <a:srgbClr val="000000"/>
+                </a:solidFill>
+                <a:latin typeface="Montserrat"/>
+              </a:rPr>
+              <a:t>Финансовые - Убытки, нулевая выручка, отсутствие прибыли</a:t>
+            </a:r>
+            <a:endParaRPr b="0" lang="ru-RU" sz="1400" spc="-1" strike="noStrike">
+              <a:solidFill>
+                <a:srgbClr val="000000"/>
+              </a:solidFill>
+              <a:latin typeface="Arial"/>
+            </a:endParaRPr>
+          </a:p>
+          <a:p>
+            <a:pPr lvl="1" marL="432000" indent="-216000">
+              <a:lnSpc>
+                <a:spcPct val="100000"/>
+              </a:lnSpc>
+              <a:spcBef>
+                <a:spcPts val="907"/>
+              </a:spcBef>
+              <a:spcAft>
+                <a:spcPts val="709"/>
+              </a:spcAft>
+              <a:buClr>
+                <a:srgbClr val="000000"/>
+              </a:buClr>
+              <a:buSzPct val="45000"/>
+              <a:buFont typeface="Wingdings" charset="2"/>
+              <a:buChar char=""/>
+            </a:pPr>
+            <a:r>
+              <a:rPr b="0" lang="ru-RU" sz="1400" spc="-1" strike="noStrike">
+                <a:solidFill>
+                  <a:srgbClr val="000000"/>
+                </a:solidFill>
+                <a:latin typeface="Montserrat"/>
+              </a:rPr>
+              <a:t>Юридические - Дела о банкротстве, исполнительные производства</a:t>
+            </a:r>
+            <a:endParaRPr b="0" lang="ru-RU" sz="1400" spc="-1" strike="noStrike">
+              <a:solidFill>
+                <a:srgbClr val="000000"/>
+              </a:solidFill>
+              <a:latin typeface="Arial"/>
+            </a:endParaRPr>
+          </a:p>
+          <a:p>
+            <a:pPr lvl="1" marL="432000" indent="-216000">
+              <a:lnSpc>
+                <a:spcPct val="100000"/>
+              </a:lnSpc>
+              <a:spcBef>
+                <a:spcPts val="907"/>
+              </a:spcBef>
+              <a:spcAft>
+                <a:spcPts val="709"/>
+              </a:spcAft>
+              <a:buClr>
+                <a:srgbClr val="000000"/>
+              </a:buClr>
+              <a:buSzPct val="45000"/>
+              <a:buFont typeface="Wingdings" charset="2"/>
+              <a:buChar char=""/>
+            </a:pPr>
+            <a:r>
+              <a:rPr b="0" lang="ru-RU" sz="1400" spc="-1" strike="noStrike">
+                <a:solidFill>
+                  <a:srgbClr val="000000"/>
+                </a:solidFill>
+                <a:latin typeface="Montserrat"/>
+              </a:rPr>
+              <a:t>Репутационные - Массовый адрес, массовый руководитель</a:t>
+            </a:r>
+            <a:endParaRPr b="0" lang="ru-RU" sz="1400" spc="-1" strike="noStrike">
+              <a:solidFill>
+                <a:srgbClr val="000000"/>
+              </a:solidFill>
+              <a:latin typeface="Arial"/>
+            </a:endParaRPr>
+          </a:p>
+          <a:p>
+            <a:pPr lvl="1" marL="432000" indent="-216000">
+              <a:lnSpc>
+                <a:spcPct val="100000"/>
+              </a:lnSpc>
+              <a:spcBef>
+                <a:spcPts val="907"/>
+              </a:spcBef>
+              <a:spcAft>
+                <a:spcPts val="709"/>
+              </a:spcAft>
+              <a:buClr>
+                <a:srgbClr val="000000"/>
+              </a:buClr>
+              <a:buSzPct val="45000"/>
+              <a:buFont typeface="Wingdings" charset="2"/>
+              <a:buChar char=""/>
+            </a:pPr>
+            <a:r>
+              <a:rPr b="0" lang="ru-RU" sz="1400" spc="-1" strike="noStrike">
+                <a:solidFill>
+                  <a:srgbClr val="000000"/>
+                </a:solidFill>
+                <a:latin typeface="Montserrat"/>
+              </a:rPr>
+              <a:t>Операционные - Налоговая задолженность, отсутствие отчетности</a:t>
+            </a:r>
+            <a:endParaRPr b="0" lang="ru-RU" sz="1400" spc="-1" strike="noStrike">
+              <a:solidFill>
+                <a:srgbClr val="000000"/>
+              </a:solidFill>
+              <a:latin typeface="Arial"/>
+            </a:endParaRPr>
+          </a:p>
+          <a:p>
+            <a:pPr lvl="1" marL="432000" indent="-216000">
+              <a:lnSpc>
+                <a:spcPct val="100000"/>
+              </a:lnSpc>
+              <a:spcBef>
+                <a:spcPts val="907"/>
+              </a:spcBef>
+              <a:spcAft>
+                <a:spcPts val="709"/>
+              </a:spcAft>
+              <a:buClr>
+                <a:srgbClr val="000000"/>
+              </a:buClr>
+              <a:buSzPct val="45000"/>
+              <a:buFont typeface="Wingdings" charset="2"/>
+              <a:buChar char=""/>
+            </a:pPr>
+            <a:r>
+              <a:rPr b="0" lang="ru-RU" sz="1400" spc="-1" strike="noStrike">
+                <a:solidFill>
+                  <a:srgbClr val="000000"/>
+                </a:solidFill>
+                <a:latin typeface="Montserrat"/>
+              </a:rPr>
+              <a:t>Временные - Возраст компании, недавняя активность</a:t>
+            </a:r>
+            <a:endParaRPr b="0" lang="ru-RU" sz="1400" spc="-1" strike="noStrike">
+              <a:solidFill>
+                <a:srgbClr val="000000"/>
+              </a:solidFill>
+              <a:latin typeface="Arial"/>
+            </a:endParaRPr>
+          </a:p>
+          <a:p>
+            <a:pPr>
+              <a:lnSpc>
+                <a:spcPct val="100000"/>
+              </a:lnSpc>
+              <a:spcBef>
+                <a:spcPts val="1191"/>
+              </a:spcBef>
+              <a:spcAft>
+                <a:spcPts val="992"/>
+              </a:spcAft>
+            </a:pPr>
+            <a:endParaRPr b="0" lang="ru-RU" sz="1400" spc="-1" strike="noStrike">
+              <a:solidFill>
+                <a:srgbClr val="000000"/>
+              </a:solidFill>
+              <a:latin typeface="Arial"/>
+            </a:endParaRPr>
+          </a:p>
+        </p:txBody>
+      </p:sp>
       <p:sp>
         <p:nvSpPr>
           <p:cNvPr id="2" name="PlaceHolder 1"/>
@@ -9365,7 +10051,7 @@
         <p:txBody>
           <a:bodyPr/>
           <a:p>
-            <a:fld id="{FDE61B0C-08E8-49F5-8A84-45F436119218}" type="slidenum">
+            <a:fld id="{B85FEB48-2C84-4CFE-89FA-A3D41CF7235F}" type="slidenum">
               <a:t>11</a:t>
             </a:fld>
           </a:p>
@@ -9403,7 +10089,7 @@
       </p:grpSpPr>
       <p:pic>
         <p:nvPicPr>
-          <p:cNvPr id="160" name="" descr=""/>
+          <p:cNvPr id="158" name="" descr=""/>
           <p:cNvPicPr/>
           <p:nvPr/>
         </p:nvPicPr>
@@ -9414,7 +10100,7 @@
         <p:spPr>
           <a:xfrm>
             <a:off x="3060000" y="985320"/>
-            <a:ext cx="6298560" cy="5673240"/>
+            <a:ext cx="6297840" cy="5672520"/>
           </a:xfrm>
           <a:prstGeom prst="rect">
             <a:avLst/>
@@ -9426,14 +10112,14 @@
       </p:pic>
       <p:sp>
         <p:nvSpPr>
-          <p:cNvPr id="161" name="Заголовок 8"/>
+          <p:cNvPr id="159" name="Заголовок 8"/>
           <p:cNvSpPr/>
           <p:nvPr/>
         </p:nvSpPr>
         <p:spPr>
           <a:xfrm>
             <a:off x="0" y="0"/>
-            <a:ext cx="11227680" cy="920880"/>
+            <a:ext cx="11226960" cy="920160"/>
           </a:xfrm>
           <a:prstGeom prst="rect">
             <a:avLst/>
@@ -9492,7 +10178,7 @@
         <p:txBody>
           <a:bodyPr/>
           <a:p>
-            <a:fld id="{E5501F62-4D55-45DF-A18B-E7E652942E2B}" type="slidenum">
+            <a:fld id="{C0DF463A-FE4C-48AF-A4B8-F26F6926A567}" type="slidenum">
               <a:t>12</a:t>
             </a:fld>
           </a:p>
@@ -9530,7 +10216,7 @@
       </p:grpSpPr>
       <p:sp>
         <p:nvSpPr>
-          <p:cNvPr id="162" name="PlaceHolder 1"/>
+          <p:cNvPr id="160" name="PlaceHolder 1"/>
           <p:cNvSpPr>
             <a:spLocks noGrp="1"/>
           </p:cNvSpPr>
@@ -9541,7 +10227,7 @@
         <p:spPr>
           <a:xfrm>
             <a:off x="0" y="0"/>
-            <a:ext cx="11227680" cy="920880"/>
+            <a:ext cx="11226960" cy="920160"/>
           </a:xfrm>
           <a:prstGeom prst="rect">
             <a:avLst/>
@@ -9585,18 +10271,18 @@
       </p:sp>
       <p:sp>
         <p:nvSpPr>
-          <p:cNvPr id="163" name="PlaceHolder 2"/>
+          <p:cNvPr id="161" name="PlaceHolder 2"/>
           <p:cNvSpPr>
             <a:spLocks noGrp="1"/>
           </p:cNvSpPr>
           <p:nvPr>
-            <p:ph type="ftr" idx="49"/>
+            <p:ph type="ftr" idx="47"/>
           </p:nvPr>
         </p:nvSpPr>
         <p:spPr>
           <a:xfrm>
             <a:off x="1333440" y="6352560"/>
-            <a:ext cx="7478280" cy="362880"/>
+            <a:ext cx="7477560" cy="362160"/>
           </a:xfrm>
           <a:prstGeom prst="rect">
             <a:avLst/>
@@ -9625,14 +10311,14 @@
       </p:sp>
       <p:sp>
         <p:nvSpPr>
-          <p:cNvPr id="164" name=""/>
+          <p:cNvPr id="162" name=""/>
           <p:cNvSpPr/>
           <p:nvPr/>
         </p:nvSpPr>
         <p:spPr>
           <a:xfrm>
             <a:off x="0" y="921600"/>
-            <a:ext cx="11579040" cy="546480"/>
+            <a:ext cx="11578320" cy="545760"/>
           </a:xfrm>
           <a:prstGeom prst="rect">
             <a:avLst/>
@@ -9678,7 +10364,7 @@
       </p:sp>
       <p:pic>
         <p:nvPicPr>
-          <p:cNvPr id="165" name="" descr=""/>
+          <p:cNvPr id="163" name="" descr=""/>
           <p:cNvPicPr/>
           <p:nvPr/>
         </p:nvPicPr>
@@ -9689,7 +10375,7 @@
         <p:spPr>
           <a:xfrm>
             <a:off x="1605960" y="2246760"/>
-            <a:ext cx="8112960" cy="4052160"/>
+            <a:ext cx="8112240" cy="4051440"/>
           </a:xfrm>
           <a:prstGeom prst="rect">
             <a:avLst/>
@@ -9713,7 +10399,7 @@
         <p:txBody>
           <a:bodyPr/>
           <a:p>
-            <a:fld id="{358FB8A1-F5FC-4075-9B01-0754548710A8}" type="slidenum">
+            <a:fld id="{F37D8A05-E1F0-48FF-8779-2112F448188A}" type="slidenum">
               <a:t>13</a:t>
             </a:fld>
           </a:p>
@@ -9751,14 +10437,14 @@
       </p:grpSpPr>
       <p:sp>
         <p:nvSpPr>
-          <p:cNvPr id="166" name="PlaceHolder 1"/>
+          <p:cNvPr id="164" name="PlaceHolder 1"/>
           <p:cNvSpPr/>
           <p:nvPr/>
         </p:nvSpPr>
         <p:spPr>
           <a:xfrm>
             <a:off x="0" y="0"/>
-            <a:ext cx="11158560" cy="817200"/>
+            <a:ext cx="11157840" cy="816480"/>
           </a:xfrm>
           <a:prstGeom prst="rect">
             <a:avLst/>
@@ -9807,7 +10493,7 @@
       </p:sp>
       <p:pic>
         <p:nvPicPr>
-          <p:cNvPr id="167" name="" descr=""/>
+          <p:cNvPr id="165" name="" descr=""/>
           <p:cNvPicPr/>
           <p:nvPr/>
         </p:nvPicPr>
@@ -9818,7 +10504,7 @@
         <p:spPr>
           <a:xfrm>
             <a:off x="502200" y="3240000"/>
-            <a:ext cx="11016720" cy="1714320"/>
+            <a:ext cx="11016000" cy="1713600"/>
           </a:xfrm>
           <a:prstGeom prst="rect">
             <a:avLst/>
@@ -9830,7 +10516,7 @@
       </p:pic>
       <p:pic>
         <p:nvPicPr>
-          <p:cNvPr id="168" name="" descr=""/>
+          <p:cNvPr id="166" name="" descr=""/>
           <p:cNvPicPr/>
           <p:nvPr/>
         </p:nvPicPr>
@@ -9841,7 +10527,7 @@
         <p:spPr>
           <a:xfrm>
             <a:off x="228240" y="1542600"/>
-            <a:ext cx="11830680" cy="1336320"/>
+            <a:ext cx="11829960" cy="1335600"/>
           </a:xfrm>
           <a:prstGeom prst="rect">
             <a:avLst/>
@@ -9865,7 +10551,7 @@
         <p:txBody>
           <a:bodyPr/>
           <a:p>
-            <a:fld id="{E0F79812-EF97-4D94-899D-971015F96B50}" type="slidenum">
+            <a:fld id="{50F69D52-C2D8-4B2C-92F6-DA0D778BF22A}" type="slidenum">
               <a:t>14</a:t>
             </a:fld>
           </a:p>
@@ -9903,14 +10589,14 @@
       </p:grpSpPr>
       <p:sp>
         <p:nvSpPr>
-          <p:cNvPr id="169" name="PlaceHolder 3"/>
+          <p:cNvPr id="167" name="PlaceHolder 3"/>
           <p:cNvSpPr/>
           <p:nvPr/>
         </p:nvSpPr>
         <p:spPr>
           <a:xfrm>
             <a:off x="0" y="0"/>
-            <a:ext cx="10078560" cy="600840"/>
+            <a:ext cx="10077840" cy="600120"/>
           </a:xfrm>
           <a:prstGeom prst="rect">
             <a:avLst/>
@@ -9959,7 +10645,7 @@
       </p:sp>
       <p:pic>
         <p:nvPicPr>
-          <p:cNvPr id="170" name="" descr=""/>
+          <p:cNvPr id="168" name="" descr=""/>
           <p:cNvPicPr/>
           <p:nvPr/>
         </p:nvPicPr>
@@ -9970,7 +10656,7 @@
         <p:spPr>
           <a:xfrm>
             <a:off x="360" y="1577880"/>
-            <a:ext cx="3970800" cy="4000680"/>
+            <a:ext cx="3970080" cy="3999960"/>
           </a:xfrm>
           <a:prstGeom prst="rect">
             <a:avLst/>
@@ -9982,7 +10668,7 @@
       </p:pic>
       <p:pic>
         <p:nvPicPr>
-          <p:cNvPr id="171" name="" descr=""/>
+          <p:cNvPr id="169" name="" descr=""/>
           <p:cNvPicPr/>
           <p:nvPr/>
         </p:nvPicPr>
@@ -9993,7 +10679,7 @@
         <p:spPr>
           <a:xfrm>
             <a:off x="4500000" y="2009160"/>
-            <a:ext cx="7402320" cy="3209400"/>
+            <a:ext cx="7401600" cy="3208680"/>
           </a:xfrm>
           <a:prstGeom prst="rect">
             <a:avLst/>
@@ -10017,7 +10703,7 @@
         <p:txBody>
           <a:bodyPr/>
           <a:p>
-            <a:fld id="{D6681F90-24C7-470B-A35D-97B2181F18DD}" type="slidenum">
+            <a:fld id="{3CEFE118-4FF7-401E-B85A-47A345EE9E53}" type="slidenum">
               <a:t>15</a:t>
             </a:fld>
           </a:p>
@@ -10055,7 +10741,7 @@
       </p:grpSpPr>
       <p:pic>
         <p:nvPicPr>
-          <p:cNvPr id="172" name="" descr=""/>
+          <p:cNvPr id="170" name="" descr=""/>
           <p:cNvPicPr/>
           <p:nvPr/>
         </p:nvPicPr>
@@ -10066,7 +10752,7 @@
         <p:spPr>
           <a:xfrm>
             <a:off x="3585240" y="1124640"/>
-            <a:ext cx="7393680" cy="2649600"/>
+            <a:ext cx="7392960" cy="2648880"/>
           </a:xfrm>
           <a:prstGeom prst="rect">
             <a:avLst/>
@@ -10078,7 +10764,7 @@
       </p:pic>
       <p:pic>
         <p:nvPicPr>
-          <p:cNvPr id="173" name="" descr=""/>
+          <p:cNvPr id="171" name="" descr=""/>
           <p:cNvPicPr/>
           <p:nvPr/>
         </p:nvPicPr>
@@ -10089,7 +10775,7 @@
         <p:spPr>
           <a:xfrm>
             <a:off x="3602520" y="4007880"/>
-            <a:ext cx="7354800" cy="2651040"/>
+            <a:ext cx="7354080" cy="2650320"/>
           </a:xfrm>
           <a:prstGeom prst="rect">
             <a:avLst/>
@@ -10101,14 +10787,14 @@
       </p:pic>
       <p:sp>
         <p:nvSpPr>
-          <p:cNvPr id="174" name="PlaceHolder 13"/>
+          <p:cNvPr id="172" name="PlaceHolder 13"/>
           <p:cNvSpPr/>
           <p:nvPr/>
         </p:nvSpPr>
         <p:spPr>
           <a:xfrm>
             <a:off x="0" y="0"/>
-            <a:ext cx="10078560" cy="600840"/>
+            <a:ext cx="10077840" cy="600120"/>
           </a:xfrm>
           <a:prstGeom prst="rect">
             <a:avLst/>
@@ -10157,7 +10843,7 @@
       </p:sp>
       <p:pic>
         <p:nvPicPr>
-          <p:cNvPr id="175" name="" descr=""/>
+          <p:cNvPr id="173" name="" descr=""/>
           <p:cNvPicPr/>
           <p:nvPr/>
         </p:nvPicPr>
@@ -10168,7 +10854,7 @@
         <p:spPr>
           <a:xfrm>
             <a:off x="77400" y="1165320"/>
-            <a:ext cx="3341520" cy="3153600"/>
+            <a:ext cx="3340800" cy="3152880"/>
           </a:xfrm>
           <a:prstGeom prst="rect">
             <a:avLst/>
@@ -10192,7 +10878,7 @@
         <p:txBody>
           <a:bodyPr/>
           <a:p>
-            <a:fld id="{2A702851-677F-48AF-89ED-007E108F89D9}" type="slidenum">
+            <a:fld id="{10F0E10B-403D-4061-A08E-E45039550298}" type="slidenum">
               <a:t>16</a:t>
             </a:fld>
           </a:p>
@@ -10230,14 +10916,14 @@
       </p:grpSpPr>
       <p:sp>
         <p:nvSpPr>
-          <p:cNvPr id="176" name="PlaceHolder 4"/>
+          <p:cNvPr id="174" name="PlaceHolder 4"/>
           <p:cNvSpPr/>
           <p:nvPr/>
         </p:nvSpPr>
         <p:spPr>
           <a:xfrm>
             <a:off x="643320" y="10080"/>
-            <a:ext cx="10899000" cy="1320840"/>
+            <a:ext cx="10898280" cy="1320120"/>
           </a:xfrm>
           <a:prstGeom prst="rect">
             <a:avLst/>
@@ -10277,7 +10963,7 @@
       </p:sp>
       <p:pic>
         <p:nvPicPr>
-          <p:cNvPr id="177" name="" descr=""/>
+          <p:cNvPr id="175" name="" descr=""/>
           <p:cNvPicPr/>
           <p:nvPr/>
         </p:nvPicPr>
@@ -10288,7 +10974,7 @@
         <p:spPr>
           <a:xfrm>
             <a:off x="3022200" y="1440000"/>
-            <a:ext cx="7596720" cy="1234800"/>
+            <a:ext cx="7596000" cy="1234080"/>
           </a:xfrm>
           <a:prstGeom prst="rect">
             <a:avLst/>
@@ -10300,7 +10986,7 @@
       </p:pic>
       <p:pic>
         <p:nvPicPr>
-          <p:cNvPr id="178" name="" descr=""/>
+          <p:cNvPr id="176" name="" descr=""/>
           <p:cNvPicPr/>
           <p:nvPr/>
         </p:nvPicPr>
@@ -10311,7 +10997,7 @@
         <p:spPr>
           <a:xfrm>
             <a:off x="3022200" y="2880000"/>
-            <a:ext cx="7447320" cy="2258280"/>
+            <a:ext cx="7446600" cy="2257560"/>
           </a:xfrm>
           <a:prstGeom prst="rect">
             <a:avLst/>
@@ -10323,14 +11009,14 @@
       </p:pic>
       <p:sp>
         <p:nvSpPr>
-          <p:cNvPr id="179" name=""/>
+          <p:cNvPr id="177" name=""/>
           <p:cNvSpPr/>
           <p:nvPr/>
         </p:nvSpPr>
         <p:spPr>
           <a:xfrm>
             <a:off x="0" y="0"/>
-            <a:ext cx="8677080" cy="734040"/>
+            <a:ext cx="8676360" cy="733320"/>
           </a:xfrm>
           <a:prstGeom prst="rect">
             <a:avLst/>
@@ -10377,7 +11063,7 @@
       </p:sp>
       <p:pic>
         <p:nvPicPr>
-          <p:cNvPr id="180" name="" descr=""/>
+          <p:cNvPr id="178" name="" descr=""/>
           <p:cNvPicPr/>
           <p:nvPr/>
         </p:nvPicPr>
@@ -10388,7 +11074,7 @@
         <p:spPr>
           <a:xfrm>
             <a:off x="0" y="1440000"/>
-            <a:ext cx="2865240" cy="3058920"/>
+            <a:ext cx="2864520" cy="3058200"/>
           </a:xfrm>
           <a:prstGeom prst="rect">
             <a:avLst/>
@@ -10412,7 +11098,7 @@
         <p:txBody>
           <a:bodyPr/>
           <a:p>
-            <a:fld id="{EF7B7E12-060E-4E99-B9C4-5D8FEDEE5B8C}" type="slidenum">
+            <a:fld id="{1435CB20-1CB7-46B0-954A-C26A400BA6B1}" type="slidenum">
               <a:t>17</a:t>
             </a:fld>
           </a:p>
@@ -10450,7 +11136,7 @@
       </p:grpSpPr>
       <p:sp>
         <p:nvSpPr>
-          <p:cNvPr id="181" name="PlaceHolder 1"/>
+          <p:cNvPr id="179" name="PlaceHolder 1"/>
           <p:cNvSpPr>
             <a:spLocks noGrp="1"/>
           </p:cNvSpPr>
@@ -10461,7 +11147,7 @@
         <p:spPr>
           <a:xfrm>
             <a:off x="0" y="0"/>
-            <a:ext cx="11227680" cy="920880"/>
+            <a:ext cx="11226960" cy="920160"/>
           </a:xfrm>
           <a:prstGeom prst="rect">
             <a:avLst/>
@@ -10505,18 +11191,18 @@
       </p:sp>
       <p:sp>
         <p:nvSpPr>
-          <p:cNvPr id="182" name="PlaceHolder 2"/>
+          <p:cNvPr id="180" name="PlaceHolder 2"/>
           <p:cNvSpPr>
             <a:spLocks noGrp="1"/>
           </p:cNvSpPr>
           <p:nvPr>
-            <p:ph type="ftr" idx="50"/>
+            <p:ph type="ftr" idx="48"/>
           </p:nvPr>
         </p:nvSpPr>
         <p:spPr>
           <a:xfrm>
             <a:off x="1333440" y="6352560"/>
-            <a:ext cx="7478280" cy="362880"/>
+            <a:ext cx="7477560" cy="362160"/>
           </a:xfrm>
           <a:prstGeom prst="rect">
             <a:avLst/>
@@ -10545,7 +11231,7 @@
       </p:sp>
       <p:graphicFrame>
         <p:nvGraphicFramePr>
-          <p:cNvPr id="183" name=""/>
+          <p:cNvPr id="181" name=""/>
           <p:cNvGraphicFramePr/>
           <p:nvPr/>
         </p:nvGraphicFramePr>
@@ -11149,7 +11835,7 @@
         <p:txBody>
           <a:bodyPr/>
           <a:p>
-            <a:fld id="{0A9D8CCA-79A4-4E91-814B-4FD80D8CBB8C}" type="slidenum">
+            <a:fld id="{564857BD-7442-4A08-96FF-BE647ABF06B0}" type="slidenum">
               <a:t>18</a:t>
             </a:fld>
           </a:p>
@@ -11187,7 +11873,7 @@
       </p:grpSpPr>
       <p:sp>
         <p:nvSpPr>
-          <p:cNvPr id="184" name="PlaceHolder 1"/>
+          <p:cNvPr id="182" name="PlaceHolder 1"/>
           <p:cNvSpPr>
             <a:spLocks noGrp="1"/>
           </p:cNvSpPr>
@@ -11198,7 +11884,7 @@
         <p:spPr>
           <a:xfrm>
             <a:off x="3759120" y="5218920"/>
-            <a:ext cx="7821360" cy="744480"/>
+            <a:ext cx="7820640" cy="743760"/>
           </a:xfrm>
           <a:prstGeom prst="rect">
             <a:avLst/>
@@ -11246,7 +11932,7 @@
       </p:sp>
       <p:sp>
         <p:nvSpPr>
-          <p:cNvPr id="185" name="PlaceHolder 2"/>
+          <p:cNvPr id="183" name="PlaceHolder 2"/>
           <p:cNvSpPr>
             <a:spLocks noGrp="1"/>
           </p:cNvSpPr>
@@ -11257,7 +11943,7 @@
         <p:spPr>
           <a:xfrm>
             <a:off x="3759120" y="4242240"/>
-            <a:ext cx="7821360" cy="771840"/>
+            <a:ext cx="7820640" cy="771120"/>
           </a:xfrm>
           <a:prstGeom prst="rect">
             <a:avLst/>
@@ -11357,7 +12043,7 @@
       </p:sp>
       <p:sp>
         <p:nvSpPr>
-          <p:cNvPr id="186" name="PlaceHolder 3"/>
+          <p:cNvPr id="184" name="PlaceHolder 3"/>
           <p:cNvSpPr>
             <a:spLocks noGrp="1"/>
           </p:cNvSpPr>
@@ -11368,7 +12054,7 @@
         <p:spPr>
           <a:xfrm>
             <a:off x="4776840" y="6168600"/>
-            <a:ext cx="2635920" cy="333000"/>
+            <a:ext cx="2635200" cy="332280"/>
           </a:xfrm>
           <a:prstGeom prst="rect">
             <a:avLst/>
@@ -11400,7 +12086,7 @@
       </p:sp>
       <p:sp>
         <p:nvSpPr>
-          <p:cNvPr id="187" name="PlaceHolder 4"/>
+          <p:cNvPr id="185" name="PlaceHolder 4"/>
           <p:cNvSpPr>
             <a:spLocks noGrp="1"/>
           </p:cNvSpPr>
@@ -11411,7 +12097,7 @@
         <p:spPr>
           <a:xfrm>
             <a:off x="3759120" y="2007000"/>
-            <a:ext cx="7821360" cy="2030400"/>
+            <a:ext cx="7820640" cy="2029680"/>
           </a:xfrm>
           <a:prstGeom prst="rect">
             <a:avLst/>
@@ -11448,7 +12134,7 @@
               </a:rPr>
               <a:t>Спасибо за внимание</a:t>
             </a:r>
-            <a:endParaRPr b="1" lang="ru-RU" sz="4000" spc="-1" strike="noStrike">
+            <a:endParaRPr b="0" lang="ru-RU" sz="4000" spc="-1" strike="noStrike">
               <a:solidFill>
                 <a:srgbClr val="000000"/>
               </a:solidFill>
@@ -11489,7 +12175,7 @@
       </p:grpSpPr>
       <p:sp>
         <p:nvSpPr>
-          <p:cNvPr id="130" name="PlaceHolder 1"/>
+          <p:cNvPr id="129" name="PlaceHolder 1"/>
           <p:cNvSpPr>
             <a:spLocks noGrp="1"/>
           </p:cNvSpPr>
@@ -11500,7 +12186,7 @@
         <p:spPr>
           <a:xfrm>
             <a:off x="0" y="0"/>
-            <a:ext cx="11227680" cy="920880"/>
+            <a:ext cx="11226960" cy="920160"/>
           </a:xfrm>
           <a:prstGeom prst="rect">
             <a:avLst/>
@@ -11544,54 +12230,14 @@
       </p:sp>
       <p:sp>
         <p:nvSpPr>
-          <p:cNvPr id="131" name="PlaceHolder 2"/>
-          <p:cNvSpPr>
-            <a:spLocks noGrp="1"/>
-          </p:cNvSpPr>
-          <p:nvPr>
-            <p:ph type="ftr" idx="45"/>
-          </p:nvPr>
-        </p:nvSpPr>
-        <p:spPr>
-          <a:xfrm>
-            <a:off x="1333440" y="6352560"/>
-            <a:ext cx="7478280" cy="362880"/>
-          </a:xfrm>
-          <a:prstGeom prst="rect">
-            <a:avLst/>
-          </a:prstGeom>
-          <a:noFill/>
-          <a:ln w="0">
-            <a:noFill/>
-          </a:ln>
-        </p:spPr>
-        <p:txBody>
-          <a:bodyPr lIns="90000" rIns="90000" tIns="45000" bIns="45000" anchor="t">
-            <a:noAutofit/>
-          </a:bodyPr>
-          <a:p>
-            <a:pPr indent="0">
-              <a:buNone/>
-            </a:pPr>
-            <a:endParaRPr b="0" lang="ru-RU" sz="1400" spc="-1" strike="noStrike">
-              <a:solidFill>
-                <a:srgbClr val="000000"/>
-              </a:solidFill>
-              <a:latin typeface="Times New Roman"/>
-            </a:endParaRPr>
-          </a:p>
-        </p:txBody>
-      </p:sp>
-      <p:sp>
-        <p:nvSpPr>
-          <p:cNvPr id="132" name="PlaceHolder 2"/>
+          <p:cNvPr id="130" name=""/>
           <p:cNvSpPr/>
           <p:nvPr/>
         </p:nvSpPr>
         <p:spPr>
           <a:xfrm>
-            <a:off x="277560" y="921960"/>
-            <a:ext cx="11241360" cy="4755600"/>
+            <a:off x="180000" y="920520"/>
+            <a:ext cx="8459640" cy="3974040"/>
           </a:xfrm>
           <a:prstGeom prst="rect">
             <a:avLst/>
@@ -11609,39 +12255,264 @@
         </p:style>
         <p:txBody>
           <a:bodyPr lIns="90000" rIns="90000" tIns="45000" bIns="45000" anchor="t">
-            <a:normAutofit fontScale="62222" lnSpcReduction="10000"/>
+            <a:noAutofit/>
           </a:bodyPr>
           <a:p>
             <a:pPr>
               <a:lnSpc>
                 <a:spcPct val="100000"/>
               </a:lnSpc>
-              <a:tabLst>
-                <a:tab algn="l" pos="0"/>
-              </a:tabLst>
             </a:pPr>
             <a:r>
-              <a:rPr b="0" lang="ru-RU" sz="4200" spc="-1" strike="noStrike">
+              <a:rPr b="1" lang="ru-RU" sz="1800" spc="-1" strike="noStrike">
                 <a:solidFill>
-                  <a:schemeClr val="dk1"/>
+                  <a:srgbClr val="332974"/>
                 </a:solidFill>
                 <a:latin typeface="Montserrat"/>
-                <a:ea typeface="Times New Roman"/>
               </a:rPr>
-              <a:t>Актуальность темы исследования обусловлена критической важностью выбора надежных поставщиков для обеспечения бесперебойной деятельности торговых предприятий в условиях современной рыночной нестабильности. Основная проблема заключается в противоречии между необходимостью быстрого принятия решений о закупках и трудоемкостью традиционных методов сбора и верификации информации о контрагентах, которая часто разрозненна и труднодоступна. . В связи с этим разработка программного модуля на основе интеллектуального анализа данных, позволяющего оперативно и объективно оценивать благонадежность поставщиков, является своевременным и практически значимым решением.</a:t>
+              <a:t>Основные проблемы в компании АО «РТК»:</a:t>
             </a:r>
-            <a:endParaRPr b="0" lang="ru-RU" sz="4200" spc="-1" strike="noStrike">
+            <a:endParaRPr b="0" lang="ru-RU" sz="1800" spc="-1" strike="noStrike">
               <a:solidFill>
                 <a:srgbClr val="000000"/>
               </a:solidFill>
               <a:latin typeface="Arial"/>
             </a:endParaRPr>
           </a:p>
+          <a:p>
+            <a:pPr>
+              <a:lnSpc>
+                <a:spcPct val="100000"/>
+              </a:lnSpc>
+            </a:pPr>
+            <a:endParaRPr b="0" lang="ru-RU" sz="1800" spc="-1" strike="noStrike">
+              <a:solidFill>
+                <a:srgbClr val="000000"/>
+              </a:solidFill>
+              <a:latin typeface="Arial"/>
+            </a:endParaRPr>
+          </a:p>
+          <a:p>
+            <a:pPr lvl="1" marL="432000" indent="-216000">
+              <a:lnSpc>
+                <a:spcPct val="100000"/>
+              </a:lnSpc>
+              <a:buClr>
+                <a:srgbClr val="000000"/>
+              </a:buClr>
+              <a:buSzPct val="45000"/>
+              <a:buFont typeface="Wingdings" charset="2"/>
+              <a:buChar char=""/>
+            </a:pPr>
+            <a:r>
+              <a:rPr b="0" lang="ru-RU" sz="1800" spc="-1" strike="noStrike">
+                <a:solidFill>
+                  <a:srgbClr val="332974"/>
+                </a:solidFill>
+                <a:latin typeface="Montserrat"/>
+              </a:rPr>
+              <a:t>Проверка одного поставщика в компании занимает часы или дни (ручной сбор данных)</a:t>
+            </a:r>
+            <a:endParaRPr b="0" lang="ru-RU" sz="1800" spc="-1" strike="noStrike">
+              <a:solidFill>
+                <a:srgbClr val="000000"/>
+              </a:solidFill>
+              <a:latin typeface="Arial"/>
+            </a:endParaRPr>
+          </a:p>
+          <a:p>
+            <a:pPr lvl="1" marL="432000" indent="-216000">
+              <a:lnSpc>
+                <a:spcPct val="100000"/>
+              </a:lnSpc>
+              <a:buClr>
+                <a:srgbClr val="000000"/>
+              </a:buClr>
+              <a:buSzPct val="45000"/>
+              <a:buFont typeface="Wingdings" charset="2"/>
+              <a:buChar char=""/>
+            </a:pPr>
+            <a:r>
+              <a:rPr b="0" lang="ru-RU" sz="1800" spc="-1" strike="noStrike">
+                <a:solidFill>
+                  <a:srgbClr val="332974"/>
+                </a:solidFill>
+                <a:latin typeface="Montserrat"/>
+              </a:rPr>
+              <a:t>Субъективность оценки — каждый сотрудник оценивает по-своему</a:t>
+            </a:r>
+            <a:endParaRPr b="0" lang="ru-RU" sz="1800" spc="-1" strike="noStrike">
+              <a:solidFill>
+                <a:srgbClr val="000000"/>
+              </a:solidFill>
+              <a:latin typeface="Arial"/>
+            </a:endParaRPr>
+          </a:p>
+          <a:p>
+            <a:pPr lvl="1" marL="432000" indent="-216000">
+              <a:lnSpc>
+                <a:spcPct val="100000"/>
+              </a:lnSpc>
+              <a:buClr>
+                <a:srgbClr val="000000"/>
+              </a:buClr>
+              <a:buSzPct val="45000"/>
+              <a:buFont typeface="Wingdings" charset="2"/>
+              <a:buChar char=""/>
+            </a:pPr>
+            <a:r>
+              <a:rPr b="0" lang="ru-RU" sz="1800" spc="-1" strike="noStrike">
+                <a:solidFill>
+                  <a:srgbClr val="332974"/>
+                </a:solidFill>
+                <a:latin typeface="Montserrat"/>
+              </a:rPr>
+              <a:t>Риск ошибок → выбор ненадёжного поставщика → финансовые потери</a:t>
+            </a:r>
+            <a:endParaRPr b="0" lang="ru-RU" sz="1800" spc="-1" strike="noStrike">
+              <a:solidFill>
+                <a:srgbClr val="000000"/>
+              </a:solidFill>
+              <a:latin typeface="Arial"/>
+            </a:endParaRPr>
+          </a:p>
+          <a:p>
+            <a:pPr>
+              <a:lnSpc>
+                <a:spcPct val="100000"/>
+              </a:lnSpc>
+            </a:pPr>
+            <a:endParaRPr b="0" lang="ru-RU" sz="1800" spc="-1" strike="noStrike">
+              <a:solidFill>
+                <a:srgbClr val="000000"/>
+              </a:solidFill>
+              <a:latin typeface="Arial"/>
+            </a:endParaRPr>
+          </a:p>
+          <a:p>
+            <a:pPr>
+              <a:lnSpc>
+                <a:spcPct val="100000"/>
+              </a:lnSpc>
+            </a:pPr>
+            <a:r>
+              <a:rPr b="1" lang="ru-RU" sz="1800" spc="-1" strike="noStrike">
+                <a:solidFill>
+                  <a:srgbClr val="332974"/>
+                </a:solidFill>
+                <a:latin typeface="Montserrat"/>
+              </a:rPr>
+              <a:t>Моё приложение:</a:t>
+            </a:r>
+            <a:endParaRPr b="0" lang="ru-RU" sz="1800" spc="-1" strike="noStrike">
+              <a:solidFill>
+                <a:srgbClr val="000000"/>
+              </a:solidFill>
+              <a:latin typeface="Arial"/>
+            </a:endParaRPr>
+          </a:p>
+          <a:p>
+            <a:pPr>
+              <a:lnSpc>
+                <a:spcPct val="100000"/>
+              </a:lnSpc>
+            </a:pPr>
+            <a:endParaRPr b="0" lang="ru-RU" sz="1800" spc="-1" strike="noStrike">
+              <a:solidFill>
+                <a:srgbClr val="000000"/>
+              </a:solidFill>
+              <a:latin typeface="Arial"/>
+            </a:endParaRPr>
+          </a:p>
+          <a:p>
+            <a:pPr marL="360000" indent="-216000">
+              <a:lnSpc>
+                <a:spcPct val="100000"/>
+              </a:lnSpc>
+              <a:buClr>
+                <a:srgbClr val="000000"/>
+              </a:buClr>
+              <a:buSzPct val="45000"/>
+              <a:buFont typeface="Wingdings" charset="2"/>
+              <a:buChar char=""/>
+            </a:pPr>
+            <a:r>
+              <a:rPr b="0" lang="ru-RU" sz="1800" spc="-1" strike="noStrike">
+                <a:solidFill>
+                  <a:srgbClr val="332974"/>
+                </a:solidFill>
+                <a:latin typeface="Montserrat"/>
+              </a:rPr>
+              <a:t>Сокращает время проверки до 1-2 минут</a:t>
+            </a:r>
+            <a:endParaRPr b="0" lang="ru-RU" sz="1800" spc="-1" strike="noStrike">
+              <a:solidFill>
+                <a:srgbClr val="000000"/>
+              </a:solidFill>
+              <a:latin typeface="Arial"/>
+            </a:endParaRPr>
+          </a:p>
+          <a:p>
+            <a:pPr marL="360000" indent="-216000">
+              <a:lnSpc>
+                <a:spcPct val="100000"/>
+              </a:lnSpc>
+              <a:buClr>
+                <a:srgbClr val="000000"/>
+              </a:buClr>
+              <a:buSzPct val="45000"/>
+              <a:buFont typeface="Wingdings" charset="2"/>
+              <a:buChar char=""/>
+            </a:pPr>
+            <a:r>
+              <a:rPr b="0" lang="ru-RU" sz="1800" spc="-1" strike="noStrike">
+                <a:solidFill>
+                  <a:srgbClr val="332974"/>
+                </a:solidFill>
+                <a:latin typeface="Montserrat"/>
+              </a:rPr>
+              <a:t>Даёт объективную оценку на основе ML-модели</a:t>
+            </a:r>
+            <a:endParaRPr b="0" lang="ru-RU" sz="1800" spc="-1" strike="noStrike">
+              <a:solidFill>
+                <a:srgbClr val="000000"/>
+              </a:solidFill>
+              <a:latin typeface="Arial"/>
+            </a:endParaRPr>
+          </a:p>
+          <a:p>
+            <a:pPr marL="360000" indent="-216000">
+              <a:lnSpc>
+                <a:spcPct val="100000"/>
+              </a:lnSpc>
+              <a:buClr>
+                <a:srgbClr val="000000"/>
+              </a:buClr>
+              <a:buSzPct val="45000"/>
+              <a:buFont typeface="Wingdings" charset="2"/>
+              <a:buChar char=""/>
+            </a:pPr>
+            <a:r>
+              <a:rPr b="0" lang="ru-RU" sz="1800" spc="-1" strike="noStrike">
+                <a:solidFill>
+                  <a:srgbClr val="332974"/>
+                </a:solidFill>
+                <a:latin typeface="Montserrat"/>
+              </a:rPr>
+              <a:t>Обеспечивает единый стандарт для всех поставщиков</a:t>
+            </a:r>
+            <a:endParaRPr b="0" lang="ru-RU" sz="1800" spc="-1" strike="noStrike">
+              <a:solidFill>
+                <a:srgbClr val="000000"/>
+              </a:solidFill>
+              <a:latin typeface="Arial"/>
+            </a:endParaRPr>
+          </a:p>
         </p:txBody>
       </p:sp>
       <p:sp>
         <p:nvSpPr>
-          <p:cNvPr id="4" name="PlaceHolder 3"/>
+          <p:cNvPr id="3" name="PlaceHolder 2"/>
           <p:cNvSpPr>
             <a:spLocks noGrp="1"/>
           </p:cNvSpPr>
@@ -11653,7 +12524,7 @@
         <p:txBody>
           <a:bodyPr/>
           <a:p>
-            <a:fld id="{5A668F5B-0CFF-46B4-A968-2C78E61CEDDC}" type="slidenum">
+            <a:fld id="{81A607EF-0CF5-45D5-A2F4-46BA4610CC1A}" type="slidenum">
               <a:t>2</a:t>
             </a:fld>
           </a:p>
@@ -11691,14 +12562,14 @@
       </p:grpSpPr>
       <p:sp>
         <p:nvSpPr>
-          <p:cNvPr id="133" name="PlaceHolder 8"/>
+          <p:cNvPr id="131" name="PlaceHolder 8"/>
           <p:cNvSpPr/>
           <p:nvPr/>
         </p:nvSpPr>
         <p:spPr>
           <a:xfrm>
             <a:off x="360" y="360"/>
-            <a:ext cx="11227680" cy="920880"/>
+            <a:ext cx="11226960" cy="920160"/>
           </a:xfrm>
           <a:prstGeom prst="rect">
             <a:avLst/>
@@ -11747,14 +12618,14 @@
       </p:sp>
       <p:sp>
         <p:nvSpPr>
-          <p:cNvPr id="134" name=""/>
+          <p:cNvPr id="132" name=""/>
           <p:cNvSpPr/>
           <p:nvPr/>
         </p:nvSpPr>
         <p:spPr>
           <a:xfrm>
             <a:off x="360000" y="1002960"/>
-            <a:ext cx="10773000" cy="975960"/>
+            <a:ext cx="10772280" cy="975240"/>
           </a:xfrm>
           <a:prstGeom prst="rect">
             <a:avLst/>
@@ -11831,14 +12702,14 @@
       </p:sp>
       <p:sp>
         <p:nvSpPr>
-          <p:cNvPr id="135" name="PlaceHolder 10"/>
+          <p:cNvPr id="133" name="PlaceHolder 10"/>
           <p:cNvSpPr/>
           <p:nvPr/>
         </p:nvSpPr>
         <p:spPr>
           <a:xfrm>
             <a:off x="0" y="2318040"/>
-            <a:ext cx="6727680" cy="920880"/>
+            <a:ext cx="6726960" cy="920160"/>
           </a:xfrm>
           <a:prstGeom prst="rect">
             <a:avLst/>
@@ -11885,14 +12756,14 @@
       </p:sp>
       <p:sp>
         <p:nvSpPr>
-          <p:cNvPr id="136" name=""/>
+          <p:cNvPr id="134" name=""/>
           <p:cNvSpPr/>
           <p:nvPr/>
         </p:nvSpPr>
         <p:spPr>
           <a:xfrm>
-            <a:off x="0" y="3060000"/>
-            <a:ext cx="10773000" cy="598680"/>
+            <a:off x="387360" y="3060000"/>
+            <a:ext cx="10772280" cy="597960"/>
           </a:xfrm>
           <a:prstGeom prst="rect">
             <a:avLst/>
@@ -11939,14 +12810,14 @@
       </p:sp>
       <p:sp>
         <p:nvSpPr>
-          <p:cNvPr id="137" name="PlaceHolder 11"/>
+          <p:cNvPr id="135" name="PlaceHolder 11"/>
           <p:cNvSpPr/>
           <p:nvPr/>
         </p:nvSpPr>
         <p:spPr>
           <a:xfrm>
             <a:off x="0" y="3834360"/>
-            <a:ext cx="11227680" cy="920880"/>
+            <a:ext cx="11226960" cy="920160"/>
           </a:xfrm>
           <a:prstGeom prst="rect">
             <a:avLst/>
@@ -11993,14 +12864,14 @@
       </p:sp>
       <p:sp>
         <p:nvSpPr>
-          <p:cNvPr id="138" name=""/>
+          <p:cNvPr id="136" name=""/>
           <p:cNvSpPr/>
           <p:nvPr/>
         </p:nvSpPr>
         <p:spPr>
           <a:xfrm>
             <a:off x="454680" y="4602960"/>
-            <a:ext cx="10773000" cy="680400"/>
+            <a:ext cx="10772280" cy="679680"/>
           </a:xfrm>
           <a:prstGeom prst="rect">
             <a:avLst/>
@@ -12058,7 +12929,7 @@
         <p:txBody>
           <a:bodyPr/>
           <a:p>
-            <a:fld id="{E3F0C389-A6DE-484D-AE4B-7B4E6CD9C39A}" type="slidenum">
+            <a:fld id="{C8756F6C-3FD9-4ECF-8618-AAD774E54E6D}" type="slidenum">
               <a:t>3</a:t>
             </a:fld>
           </a:p>
@@ -12096,14 +12967,14 @@
       </p:grpSpPr>
       <p:sp>
         <p:nvSpPr>
-          <p:cNvPr id="139" name="PlaceHolder 6"/>
+          <p:cNvPr id="137" name="PlaceHolder 6"/>
           <p:cNvSpPr/>
           <p:nvPr/>
         </p:nvSpPr>
         <p:spPr>
           <a:xfrm>
             <a:off x="0" y="0"/>
-            <a:ext cx="11158560" cy="1258560"/>
+            <a:ext cx="11157840" cy="1257840"/>
           </a:xfrm>
           <a:prstGeom prst="rect">
             <a:avLst/>
@@ -12152,7 +13023,7 @@
       </p:sp>
       <p:pic>
         <p:nvPicPr>
-          <p:cNvPr id="140" name="" descr=""/>
+          <p:cNvPr id="138" name="" descr=""/>
           <p:cNvPicPr/>
           <p:nvPr/>
         </p:nvPicPr>
@@ -12163,7 +13034,7 @@
         <p:spPr>
           <a:xfrm>
             <a:off x="6026760" y="1620000"/>
-            <a:ext cx="5671800" cy="3958560"/>
+            <a:ext cx="5671080" cy="3957840"/>
           </a:xfrm>
           <a:prstGeom prst="rect">
             <a:avLst/>
@@ -12175,7 +13046,7 @@
       </p:pic>
       <p:pic>
         <p:nvPicPr>
-          <p:cNvPr id="141" name="" descr=""/>
+          <p:cNvPr id="139" name="" descr=""/>
           <p:cNvPicPr/>
           <p:nvPr/>
         </p:nvPicPr>
@@ -12186,7 +13057,7 @@
         <p:spPr>
           <a:xfrm>
             <a:off x="720000" y="1620000"/>
-            <a:ext cx="5473440" cy="3958920"/>
+            <a:ext cx="5472720" cy="3958200"/>
           </a:xfrm>
           <a:prstGeom prst="rect">
             <a:avLst/>
@@ -12210,7 +13081,7 @@
         <p:txBody>
           <a:bodyPr/>
           <a:p>
-            <a:fld id="{8D1661C6-7A23-463F-A1B3-418541F3F309}" type="slidenum">
+            <a:fld id="{642184D2-C6B1-47DA-ACCC-F6B78006278B}" type="slidenum">
               <a:t>4</a:t>
             </a:fld>
           </a:p>
@@ -12248,14 +13119,14 @@
       </p:grpSpPr>
       <p:sp>
         <p:nvSpPr>
-          <p:cNvPr id="142" name="PlaceHolder 7"/>
+          <p:cNvPr id="140" name="PlaceHolder 7"/>
           <p:cNvSpPr/>
           <p:nvPr/>
         </p:nvSpPr>
         <p:spPr>
           <a:xfrm>
-            <a:off x="2160" y="0"/>
-            <a:ext cx="12056400" cy="961200"/>
+            <a:off x="3960" y="-180000"/>
+            <a:ext cx="12055680" cy="960480"/>
           </a:xfrm>
           <a:prstGeom prst="rect">
             <a:avLst/>
@@ -12304,7 +13175,7 @@
       </p:sp>
       <p:pic>
         <p:nvPicPr>
-          <p:cNvPr id="143" name="" descr=""/>
+          <p:cNvPr id="141" name="" descr=""/>
           <p:cNvPicPr/>
           <p:nvPr/>
         </p:nvPicPr>
@@ -12315,7 +13186,7 @@
         <p:spPr>
           <a:xfrm>
             <a:off x="2160000" y="1080000"/>
-            <a:ext cx="7558560" cy="5344560"/>
+            <a:ext cx="7557840" cy="5343840"/>
           </a:xfrm>
           <a:prstGeom prst="rect">
             <a:avLst/>
@@ -12339,7 +13210,7 @@
         <p:txBody>
           <a:bodyPr/>
           <a:p>
-            <a:fld id="{BC68B574-134D-4112-BE2A-3615041CA473}" type="slidenum">
+            <a:fld id="{3547D84A-1FB1-4A35-82ED-978D593ADFD3}" type="slidenum">
               <a:t>5</a:t>
             </a:fld>
           </a:p>
@@ -12377,7 +13248,7 @@
       </p:grpSpPr>
       <p:sp>
         <p:nvSpPr>
-          <p:cNvPr id="144" name="PlaceHolder 1"/>
+          <p:cNvPr id="142" name="PlaceHolder 1"/>
           <p:cNvSpPr>
             <a:spLocks noGrp="1"/>
           </p:cNvSpPr>
@@ -12388,7 +13259,7 @@
         <p:spPr>
           <a:xfrm>
             <a:off x="0" y="0"/>
-            <a:ext cx="11698560" cy="920880"/>
+            <a:ext cx="11697840" cy="920160"/>
           </a:xfrm>
           <a:prstGeom prst="rect">
             <a:avLst/>
@@ -12432,18 +13303,18 @@
       </p:sp>
       <p:sp>
         <p:nvSpPr>
-          <p:cNvPr id="145" name="PlaceHolder 2"/>
+          <p:cNvPr id="143" name="PlaceHolder 2"/>
           <p:cNvSpPr>
             <a:spLocks noGrp="1"/>
           </p:cNvSpPr>
           <p:nvPr>
-            <p:ph type="ftr" idx="46"/>
+            <p:ph type="ftr" idx="45"/>
           </p:nvPr>
         </p:nvSpPr>
         <p:spPr>
           <a:xfrm>
             <a:off x="1333440" y="6386400"/>
-            <a:ext cx="7478280" cy="362880"/>
+            <a:ext cx="7477560" cy="362160"/>
           </a:xfrm>
           <a:prstGeom prst="rect">
             <a:avLst/>
@@ -12472,7 +13343,7 @@
       </p:sp>
       <p:graphicFrame>
         <p:nvGraphicFramePr>
-          <p:cNvPr id="146" name="Объект 3"/>
+          <p:cNvPr id="144" name="Объект 3"/>
           <p:cNvGraphicFramePr/>
           <p:nvPr/>
         </p:nvGraphicFramePr>
@@ -15005,7 +15876,7 @@
         <p:txBody>
           <a:bodyPr/>
           <a:p>
-            <a:fld id="{9FD1F968-69E7-4426-8790-B3F21F4BFEA5}" type="slidenum">
+            <a:fld id="{B5C9B01F-784D-42ED-8660-97480F61E3E2}" type="slidenum">
               <a:t>6</a:t>
             </a:fld>
           </a:p>
@@ -15043,7 +15914,7 @@
       </p:grpSpPr>
       <p:sp>
         <p:nvSpPr>
-          <p:cNvPr id="147" name="PlaceHolder 1"/>
+          <p:cNvPr id="145" name="PlaceHolder 1"/>
           <p:cNvSpPr>
             <a:spLocks noGrp="1"/>
           </p:cNvSpPr>
@@ -15054,7 +15925,7 @@
         <p:spPr>
           <a:xfrm>
             <a:off x="0" y="0"/>
-            <a:ext cx="11227680" cy="920880"/>
+            <a:ext cx="11226960" cy="920160"/>
           </a:xfrm>
           <a:prstGeom prst="rect">
             <a:avLst/>
@@ -15098,54 +15969,14 @@
       </p:sp>
       <p:sp>
         <p:nvSpPr>
-          <p:cNvPr id="148" name="PlaceHolder 2"/>
-          <p:cNvSpPr>
-            <a:spLocks noGrp="1"/>
-          </p:cNvSpPr>
-          <p:nvPr>
-            <p:ph type="ftr" idx="47"/>
-          </p:nvPr>
-        </p:nvSpPr>
-        <p:spPr>
-          <a:xfrm>
-            <a:off x="1333440" y="6352560"/>
-            <a:ext cx="7478280" cy="362880"/>
-          </a:xfrm>
-          <a:prstGeom prst="rect">
-            <a:avLst/>
-          </a:prstGeom>
-          <a:noFill/>
-          <a:ln w="0">
-            <a:noFill/>
-          </a:ln>
-        </p:spPr>
-        <p:txBody>
-          <a:bodyPr lIns="90000" rIns="90000" tIns="45000" bIns="45000" anchor="t">
-            <a:noAutofit/>
-          </a:bodyPr>
-          <a:p>
-            <a:pPr indent="0">
-              <a:buNone/>
-            </a:pPr>
-            <a:endParaRPr b="0" lang="ru-RU" sz="1400" spc="-1" strike="noStrike">
-              <a:solidFill>
-                <a:srgbClr val="000000"/>
-              </a:solidFill>
-              <a:latin typeface="Times New Roman"/>
-            </a:endParaRPr>
-          </a:p>
-        </p:txBody>
-      </p:sp>
-      <p:sp>
-        <p:nvSpPr>
-          <p:cNvPr id="149" name=""/>
+          <p:cNvPr id="146" name=""/>
           <p:cNvSpPr/>
           <p:nvPr/>
         </p:nvSpPr>
         <p:spPr>
           <a:xfrm>
             <a:off x="141480" y="1088640"/>
-            <a:ext cx="5616720" cy="4695840"/>
+            <a:ext cx="5616000" cy="2331000"/>
           </a:xfrm>
           <a:prstGeom prst="rect">
             <a:avLst/>
@@ -15174,9 +16005,9 @@
             <a:r>
               <a:rPr b="1" lang="ru-RU" sz="1800" spc="-1" strike="noStrike">
                 <a:solidFill>
-                  <a:srgbClr val="000000"/>
+                  <a:srgbClr val="332974"/>
                 </a:solidFill>
-                <a:latin typeface="Arial"/>
+                <a:latin typeface="Montserrat"/>
               </a:rPr>
               <a:t>1. Платформа клиентского приложения</a:t>
             </a:r>
@@ -15196,11 +16027,20 @@
             <a:r>
               <a:rPr b="0" lang="ru-RU" sz="1800" spc="-1" strike="noStrike">
                 <a:solidFill>
-                  <a:srgbClr val="000000"/>
+                  <a:srgbClr val="332974"/>
                 </a:solidFill>
-                <a:latin typeface="Arial"/>
+                <a:latin typeface="Montserrat"/>
               </a:rPr>
-              <a:t>Выбрано: 1С:Предприятие 8.3</a:t>
+              <a:t>    </a:t>
+            </a:r>
+            <a:r>
+              <a:rPr b="0" lang="ru-RU" sz="1800" spc="-1" strike="noStrike">
+                <a:solidFill>
+                  <a:srgbClr val="332974"/>
+                </a:solidFill>
+                <a:latin typeface="Montserrat"/>
+              </a:rPr>
+              <a:t>1С:Предприятие 8.3</a:t>
             </a:r>
             <a:endParaRPr b="0" lang="ru-RU" sz="1800" spc="-1" strike="noStrike">
               <a:solidFill>
@@ -15229,13 +16069,44 @@
               </a:lnSpc>
             </a:pPr>
             <a:r>
+              <a:rPr b="1" lang="ru-RU" sz="1800" spc="-1" strike="noStrike">
+                <a:solidFill>
+                  <a:srgbClr val="332974"/>
+                </a:solidFill>
+                <a:latin typeface="Montserrat"/>
+              </a:rPr>
+              <a:t>2. Язык и среда разработки ML-сервиса</a:t>
+            </a:r>
+            <a:endParaRPr b="0" lang="ru-RU" sz="1800" spc="-1" strike="noStrike">
+              <a:solidFill>
+                <a:srgbClr val="000000"/>
+              </a:solidFill>
+              <a:latin typeface="Arial"/>
+            </a:endParaRPr>
+          </a:p>
+          <a:p>
+            <a:pPr>
+              <a:lnSpc>
+                <a:spcPct val="100000"/>
+              </a:lnSpc>
+            </a:pPr>
+            <a:r>
               <a:rPr b="0" lang="ru-RU" sz="1800" spc="-1" strike="noStrike">
                 <a:solidFill>
-                  <a:srgbClr val="000000"/>
+                  <a:srgbClr val="332974"/>
                 </a:solidFill>
-                <a:latin typeface="Arial"/>
+                <a:latin typeface="Montserrat"/>
               </a:rPr>
-              <a:t>Обоснование:</a:t>
+              <a:t>    </a:t>
+            </a:r>
+            <a:r>
+              <a:rPr b="0" lang="ru-RU" sz="1800" spc="-1" strike="noStrike">
+                <a:solidFill>
+                  <a:srgbClr val="332974"/>
+                </a:solidFill>
+                <a:latin typeface="Montserrat"/>
+              </a:rPr>
+              <a:t>Python 3.11+</a:t>
             </a:r>
             <a:endParaRPr b="0" lang="ru-RU" sz="1800" spc="-1" strike="noStrike">
               <a:solidFill>
@@ -15258,25 +16129,50 @@
             </a:endParaRPr>
           </a:p>
           <a:p>
-            <a:pPr marL="216000" indent="-216000">
+            <a:pPr>
               <a:lnSpc>
                 <a:spcPct val="100000"/>
               </a:lnSpc>
-              <a:buClr>
+            </a:pPr>
+            <a:r>
+              <a:rPr b="1" lang="ru-RU" sz="1800" spc="-1" strike="noStrike">
+                <a:solidFill>
+                  <a:srgbClr val="332974"/>
+                </a:solidFill>
+                <a:latin typeface="Montserrat"/>
+              </a:rPr>
+              <a:t>3. Библиотеки машинного обучения</a:t>
+            </a:r>
+            <a:endParaRPr b="0" lang="ru-RU" sz="1800" spc="-1" strike="noStrike">
+              <a:solidFill>
                 <a:srgbClr val="000000"/>
-              </a:buClr>
-              <a:buSzPct val="45000"/>
-              <a:buFont typeface="Wingdings" charset="2"/>
-              <a:buChar char=""/>
+              </a:solidFill>
+              <a:latin typeface="Arial"/>
+            </a:endParaRPr>
+          </a:p>
+          <a:p>
+            <a:pPr>
+              <a:lnSpc>
+                <a:spcPct val="100000"/>
+              </a:lnSpc>
             </a:pPr>
             <a:r>
               <a:rPr b="0" lang="ru-RU" sz="1800" spc="-1" strike="noStrike">
                 <a:solidFill>
-                  <a:srgbClr val="000000"/>
+                  <a:srgbClr val="332974"/>
                 </a:solidFill>
-                <a:latin typeface="Arial"/>
+                <a:latin typeface="Montserrat"/>
               </a:rPr>
-              <a:t>Интеграция с существующей учетной системой предприятия</a:t>
+              <a:t>    </a:t>
+            </a:r>
+            <a:r>
+              <a:rPr b="0" lang="ru-RU" sz="1800" spc="-1" strike="noStrike">
+                <a:solidFill>
+                  <a:srgbClr val="332974"/>
+                </a:solidFill>
+                <a:latin typeface="Montserrat"/>
+              </a:rPr>
+              <a:t>Scikit-learn, XGBoost, Imbalanced-learn</a:t>
             </a:r>
             <a:endParaRPr b="0" lang="ru-RU" sz="1800" spc="-1" strike="noStrike">
               <a:solidFill>
@@ -15298,169 +16194,18 @@
               <a:latin typeface="Arial"/>
             </a:endParaRPr>
           </a:p>
-          <a:p>
-            <a:pPr marL="216000" indent="-216000">
-              <a:lnSpc>
-                <a:spcPct val="100000"/>
-              </a:lnSpc>
-              <a:buClr>
-                <a:srgbClr val="000000"/>
-              </a:buClr>
-              <a:buSzPct val="45000"/>
-              <a:buFont typeface="Wingdings" charset="2"/>
-              <a:buChar char=""/>
-            </a:pPr>
-            <a:r>
-              <a:rPr b="0" lang="ru-RU" sz="1800" spc="-1" strike="noStrike">
-                <a:solidFill>
-                  <a:srgbClr val="000000"/>
-                </a:solidFill>
-                <a:latin typeface="Arial"/>
-              </a:rPr>
-              <a:t>Русскоязычный язык программирования, упрощающий разработку и поддержку</a:t>
-            </a:r>
-            <a:endParaRPr b="0" lang="ru-RU" sz="1800" spc="-1" strike="noStrike">
-              <a:solidFill>
-                <a:srgbClr val="000000"/>
-              </a:solidFill>
-              <a:latin typeface="Arial"/>
-            </a:endParaRPr>
-          </a:p>
-          <a:p>
-            <a:pPr>
-              <a:lnSpc>
-                <a:spcPct val="100000"/>
-              </a:lnSpc>
-            </a:pPr>
-            <a:endParaRPr b="0" lang="ru-RU" sz="1800" spc="-1" strike="noStrike">
-              <a:solidFill>
-                <a:srgbClr val="000000"/>
-              </a:solidFill>
-              <a:latin typeface="Arial"/>
-            </a:endParaRPr>
-          </a:p>
-          <a:p>
-            <a:pPr marL="216000" indent="-216000">
-              <a:lnSpc>
-                <a:spcPct val="100000"/>
-              </a:lnSpc>
-              <a:buClr>
-                <a:srgbClr val="000000"/>
-              </a:buClr>
-              <a:buSzPct val="45000"/>
-              <a:buFont typeface="Wingdings" charset="2"/>
-              <a:buChar char=""/>
-            </a:pPr>
-            <a:r>
-              <a:rPr b="0" lang="ru-RU" sz="1800" spc="-1" strike="noStrike">
-                <a:solidFill>
-                  <a:srgbClr val="000000"/>
-                </a:solidFill>
-                <a:latin typeface="Arial"/>
-              </a:rPr>
-              <a:t>Встроенные механизмы работы с табличными документами и отчетами</a:t>
-            </a:r>
-            <a:endParaRPr b="0" lang="ru-RU" sz="1800" spc="-1" strike="noStrike">
-              <a:solidFill>
-                <a:srgbClr val="000000"/>
-              </a:solidFill>
-              <a:latin typeface="Arial"/>
-            </a:endParaRPr>
-          </a:p>
-          <a:p>
-            <a:pPr>
-              <a:lnSpc>
-                <a:spcPct val="100000"/>
-              </a:lnSpc>
-            </a:pPr>
-            <a:endParaRPr b="0" lang="ru-RU" sz="1800" spc="-1" strike="noStrike">
-              <a:solidFill>
-                <a:srgbClr val="000000"/>
-              </a:solidFill>
-              <a:latin typeface="Arial"/>
-            </a:endParaRPr>
-          </a:p>
-          <a:p>
-            <a:pPr marL="216000" indent="-216000">
-              <a:lnSpc>
-                <a:spcPct val="100000"/>
-              </a:lnSpc>
-              <a:buClr>
-                <a:srgbClr val="000000"/>
-              </a:buClr>
-              <a:buSzPct val="45000"/>
-              <a:buFont typeface="Wingdings" charset="2"/>
-              <a:buChar char=""/>
-            </a:pPr>
-            <a:r>
-              <a:rPr b="0" lang="ru-RU" sz="1800" spc="-1" strike="noStrike">
-                <a:solidFill>
-                  <a:srgbClr val="000000"/>
-                </a:solidFill>
-                <a:latin typeface="Arial"/>
-              </a:rPr>
-              <a:t>Гибкая система разграничения прав доступа</a:t>
-            </a:r>
-            <a:endParaRPr b="0" lang="ru-RU" sz="1800" spc="-1" strike="noStrike">
-              <a:solidFill>
-                <a:srgbClr val="000000"/>
-              </a:solidFill>
-              <a:latin typeface="Arial"/>
-            </a:endParaRPr>
-          </a:p>
-          <a:p>
-            <a:pPr>
-              <a:lnSpc>
-                <a:spcPct val="100000"/>
-              </a:lnSpc>
-            </a:pPr>
-            <a:endParaRPr b="0" lang="ru-RU" sz="1800" spc="-1" strike="noStrike">
-              <a:solidFill>
-                <a:srgbClr val="000000"/>
-              </a:solidFill>
-              <a:latin typeface="Arial"/>
-            </a:endParaRPr>
-          </a:p>
-          <a:p>
-            <a:pPr marL="216000" indent="-216000">
-              <a:lnSpc>
-                <a:spcPct val="100000"/>
-              </a:lnSpc>
-              <a:buClr>
-                <a:srgbClr val="000000"/>
-              </a:buClr>
-              <a:buSzPct val="45000"/>
-              <a:buFont typeface="Wingdings" charset="2"/>
-              <a:buChar char=""/>
-            </a:pPr>
-            <a:r>
-              <a:rPr b="0" lang="ru-RU" sz="1800" spc="-1" strike="noStrike">
-                <a:solidFill>
-                  <a:srgbClr val="000000"/>
-                </a:solidFill>
-                <a:latin typeface="Arial"/>
-              </a:rPr>
-              <a:t>Возможность работы как в файловом, так и в клиент-серверном режиме</a:t>
-            </a:r>
-            <a:endParaRPr b="0" lang="ru-RU" sz="1800" spc="-1" strike="noStrike">
-              <a:solidFill>
-                <a:srgbClr val="000000"/>
-              </a:solidFill>
-              <a:latin typeface="Arial"/>
-            </a:endParaRPr>
-          </a:p>
         </p:txBody>
       </p:sp>
       <p:sp>
         <p:nvSpPr>
-          <p:cNvPr id="150" name=""/>
+          <p:cNvPr id="147" name=""/>
           <p:cNvSpPr/>
           <p:nvPr/>
         </p:nvSpPr>
         <p:spPr>
           <a:xfrm>
-            <a:off x="6120000" y="1062360"/>
-            <a:ext cx="4858200" cy="4695840"/>
+            <a:off x="5940000" y="1080000"/>
+            <a:ext cx="5616000" cy="2331000"/>
           </a:xfrm>
           <a:prstGeom prst="rect">
             <a:avLst/>
@@ -15489,11 +16234,11 @@
             <a:r>
               <a:rPr b="1" lang="ru-RU" sz="1800" spc="-1" strike="noStrike">
                 <a:solidFill>
-                  <a:srgbClr val="000000"/>
+                  <a:srgbClr val="332974"/>
                 </a:solidFill>
-                <a:latin typeface="Arial"/>
+                <a:latin typeface="Montserrat"/>
               </a:rPr>
-              <a:t>2. Язык и среда разработки ML-сервиса</a:t>
+              <a:t>4. Фреймворк для создания API</a:t>
             </a:r>
             <a:endParaRPr b="0" lang="ru-RU" sz="1800" spc="-1" strike="noStrike">
               <a:solidFill>
@@ -15511,11 +16256,20 @@
             <a:r>
               <a:rPr b="0" lang="ru-RU" sz="1800" spc="-1" strike="noStrike">
                 <a:solidFill>
-                  <a:srgbClr val="000000"/>
+                  <a:srgbClr val="332974"/>
                 </a:solidFill>
-                <a:latin typeface="Arial"/>
+                <a:latin typeface="Montserrat"/>
               </a:rPr>
-              <a:t>Выбрано: Python 3.11+</a:t>
+              <a:t>    </a:t>
+            </a:r>
+            <a:r>
+              <a:rPr b="0" lang="ru-RU" sz="1800" spc="-1" strike="noStrike">
+                <a:solidFill>
+                  <a:srgbClr val="332974"/>
+                </a:solidFill>
+                <a:latin typeface="Montserrat"/>
+              </a:rPr>
+              <a:t>FastAP</a:t>
             </a:r>
             <a:endParaRPr b="0" lang="ru-RU" sz="1800" spc="-1" strike="noStrike">
               <a:solidFill>
@@ -15544,13 +16298,44 @@
               </a:lnSpc>
             </a:pPr>
             <a:r>
+              <a:rPr b="1" lang="ru-RU" sz="1800" spc="-1" strike="noStrike">
+                <a:solidFill>
+                  <a:srgbClr val="332974"/>
+                </a:solidFill>
+                <a:latin typeface="Montserrat"/>
+              </a:rPr>
+              <a:t>5. HTTP-клиент для внешних запросов</a:t>
+            </a:r>
+            <a:endParaRPr b="0" lang="ru-RU" sz="1800" spc="-1" strike="noStrike">
+              <a:solidFill>
+                <a:srgbClr val="000000"/>
+              </a:solidFill>
+              <a:latin typeface="Arial"/>
+            </a:endParaRPr>
+          </a:p>
+          <a:p>
+            <a:pPr>
+              <a:lnSpc>
+                <a:spcPct val="100000"/>
+              </a:lnSpc>
+            </a:pPr>
+            <a:r>
               <a:rPr b="0" lang="ru-RU" sz="1800" spc="-1" strike="noStrike">
                 <a:solidFill>
-                  <a:srgbClr val="000000"/>
+                  <a:srgbClr val="332974"/>
                 </a:solidFill>
-                <a:latin typeface="Arial"/>
+                <a:latin typeface="Montserrat"/>
               </a:rPr>
-              <a:t>Обоснование:</a:t>
+              <a:t>    </a:t>
+            </a:r>
+            <a:r>
+              <a:rPr b="0" lang="ru-RU" sz="1800" spc="-1" strike="noStrike">
+                <a:solidFill>
+                  <a:srgbClr val="332974"/>
+                </a:solidFill>
+                <a:latin typeface="Montserrat"/>
+              </a:rPr>
+              <a:t>aiohttp</a:t>
             </a:r>
             <a:endParaRPr b="0" lang="ru-RU" sz="1800" spc="-1" strike="noStrike">
               <a:solidFill>
@@ -15573,25 +16358,19 @@
             </a:endParaRPr>
           </a:p>
           <a:p>
-            <a:pPr marL="216000" indent="-216000">
+            <a:pPr>
               <a:lnSpc>
                 <a:spcPct val="100000"/>
               </a:lnSpc>
-              <a:buClr>
-                <a:srgbClr val="000000"/>
-              </a:buClr>
-              <a:buSzPct val="45000"/>
-              <a:buFont typeface="Wingdings" charset="2"/>
-              <a:buChar char=""/>
             </a:pPr>
             <a:r>
-              <a:rPr b="0" lang="ru-RU" sz="1800" spc="-1" strike="noStrike">
+              <a:rPr b="1" lang="ru-RU" sz="1800" spc="-1" strike="noStrike">
                 <a:solidFill>
-                  <a:srgbClr val="000000"/>
+                  <a:srgbClr val="332974"/>
                 </a:solidFill>
-                <a:latin typeface="Arial"/>
+                <a:latin typeface="Montserrat"/>
               </a:rPr>
-              <a:t>Богатая экосистема библиотек для машинного обучения и анализа данных</a:t>
+              <a:t>6. Внешний API-сервис для получения данных</a:t>
             </a:r>
             <a:endParaRPr b="0" lang="ru-RU" sz="1800" spc="-1" strike="noStrike">
               <a:solidFill>
@@ -15606,33 +16385,23 @@
                 <a:spcPct val="100000"/>
               </a:lnSpc>
             </a:pPr>
-            <a:endParaRPr b="0" lang="ru-RU" sz="1800" spc="-1" strike="noStrike">
-              <a:solidFill>
-                <a:srgbClr val="000000"/>
-              </a:solidFill>
-              <a:latin typeface="Arial"/>
-            </a:endParaRPr>
-          </a:p>
-          <a:p>
-            <a:pPr marL="216000" indent="-216000">
-              <a:lnSpc>
-                <a:spcPct val="100000"/>
-              </a:lnSpc>
-              <a:buClr>
-                <a:srgbClr val="000000"/>
-              </a:buClr>
-              <a:buSzPct val="45000"/>
-              <a:buFont typeface="Wingdings" charset="2"/>
-              <a:buChar char=""/>
-            </a:pPr>
             <a:r>
               <a:rPr b="0" lang="ru-RU" sz="1800" spc="-1" strike="noStrike">
                 <a:solidFill>
-                  <a:srgbClr val="000000"/>
+                  <a:srgbClr val="332974"/>
                 </a:solidFill>
-                <a:latin typeface="Arial"/>
+                <a:latin typeface="Montserrat"/>
               </a:rPr>
-              <a:t>Простота интеграции с REST API</a:t>
+              <a:t>    </a:t>
+            </a:r>
+            <a:r>
+              <a:rPr b="0" lang="ru-RU" sz="1800" spc="-1" strike="noStrike">
+                <a:solidFill>
+                  <a:srgbClr val="332974"/>
+                </a:solidFill>
+                <a:latin typeface="Montserrat"/>
+              </a:rPr>
+              <a:t>API "Репутация"</a:t>
             </a:r>
             <a:endParaRPr b="0" lang="ru-RU" sz="1800" spc="-1" strike="noStrike">
               <a:solidFill>
@@ -15641,93 +16410,11 @@
               <a:latin typeface="Arial"/>
             </a:endParaRPr>
           </a:p>
-          <a:p>
-            <a:pPr>
-              <a:lnSpc>
-                <a:spcPct val="100000"/>
-              </a:lnSpc>
-            </a:pPr>
-            <a:endParaRPr b="0" lang="ru-RU" sz="1800" spc="-1" strike="noStrike">
-              <a:solidFill>
-                <a:srgbClr val="000000"/>
-              </a:solidFill>
-              <a:latin typeface="Arial"/>
-            </a:endParaRPr>
-          </a:p>
-          <a:p>
-            <a:pPr marL="216000" indent="-216000">
-              <a:lnSpc>
-                <a:spcPct val="100000"/>
-              </a:lnSpc>
-              <a:buClr>
-                <a:srgbClr val="000000"/>
-              </a:buClr>
-              <a:buSzPct val="45000"/>
-              <a:buFont typeface="Wingdings" charset="2"/>
-              <a:buChar char=""/>
-            </a:pPr>
-            <a:r>
-              <a:rPr b="0" lang="ru-RU" sz="1800" spc="-1" strike="noStrike">
-                <a:solidFill>
-                  <a:srgbClr val="000000"/>
-                </a:solidFill>
-                <a:latin typeface="Arial"/>
-              </a:rPr>
-              <a:t>Кроссплатформенность и возможность развертывания в различных средах</a:t>
-            </a:r>
-            <a:endParaRPr b="0" lang="ru-RU" sz="1800" spc="-1" strike="noStrike">
-              <a:solidFill>
-                <a:srgbClr val="000000"/>
-              </a:solidFill>
-              <a:latin typeface="Arial"/>
-            </a:endParaRPr>
-          </a:p>
-          <a:p>
-            <a:pPr>
-              <a:lnSpc>
-                <a:spcPct val="100000"/>
-              </a:lnSpc>
-            </a:pPr>
-            <a:endParaRPr b="0" lang="ru-RU" sz="1800" spc="-1" strike="noStrike">
-              <a:solidFill>
-                <a:srgbClr val="000000"/>
-              </a:solidFill>
-              <a:latin typeface="Arial"/>
-            </a:endParaRPr>
-          </a:p>
-          <a:p>
-            <a:pPr marL="216000" indent="-216000">
-              <a:lnSpc>
-                <a:spcPct val="100000"/>
-              </a:lnSpc>
-              <a:buClr>
-                <a:srgbClr val="000000"/>
-              </a:buClr>
-              <a:buSzPct val="45000"/>
-              <a:buFont typeface="Wingdings" charset="2"/>
-              <a:buChar char=""/>
-            </a:pPr>
-            <a:r>
-              <a:rPr b="0" lang="ru-RU" sz="1800" spc="-1" strike="noStrike">
-                <a:solidFill>
-                  <a:srgbClr val="000000"/>
-                </a:solidFill>
-                <a:latin typeface="Arial"/>
-              </a:rPr>
-              <a:t>Активное сообщество и обширная документация</a:t>
-            </a:r>
-            <a:endParaRPr b="0" lang="ru-RU" sz="1800" spc="-1" strike="noStrike">
-              <a:solidFill>
-                <a:srgbClr val="000000"/>
-              </a:solidFill>
-              <a:latin typeface="Arial"/>
-            </a:endParaRPr>
-          </a:p>
         </p:txBody>
       </p:sp>
       <p:sp>
         <p:nvSpPr>
-          <p:cNvPr id="4" name="PlaceHolder 3"/>
+          <p:cNvPr id="3" name="PlaceHolder 2"/>
           <p:cNvSpPr>
             <a:spLocks noGrp="1"/>
           </p:cNvSpPr>
@@ -15739,7 +16426,7 @@
         <p:txBody>
           <a:bodyPr/>
           <a:p>
-            <a:fld id="{C4A10015-B558-4F01-834B-903273752C84}" type="slidenum">
+            <a:fld id="{9E9EB8D9-2085-4595-A901-A2CBE0B53618}" type="slidenum">
               <a:t>7</a:t>
             </a:fld>
           </a:p>
@@ -15777,14 +16464,18 @@
       </p:grpSpPr>
       <p:sp>
         <p:nvSpPr>
-          <p:cNvPr id="151" name=""/>
-          <p:cNvSpPr/>
-          <p:nvPr/>
+          <p:cNvPr id="148" name="PlaceHolder 1"/>
+          <p:cNvSpPr>
+            <a:spLocks noGrp="1"/>
+          </p:cNvSpPr>
+          <p:nvPr>
+            <p:ph type="title"/>
+          </p:nvPr>
         </p:nvSpPr>
         <p:spPr>
           <a:xfrm>
-            <a:off x="214560" y="360000"/>
-            <a:ext cx="5363640" cy="5207760"/>
+            <a:off x="0" y="0"/>
+            <a:ext cx="11226960" cy="920160"/>
           </a:xfrm>
           <a:prstGeom prst="rect">
             <a:avLst/>
@@ -15794,271 +16485,52 @@
             <a:noFill/>
           </a:ln>
         </p:spPr>
-        <p:style>
-          <a:lnRef idx="0"/>
-          <a:fillRef idx="0"/>
-          <a:effectRef idx="0"/>
-          <a:fontRef idx="minor"/>
-        </p:style>
         <p:txBody>
-          <a:bodyPr lIns="90000" rIns="90000" tIns="45000" bIns="45000" anchor="t">
+          <a:bodyPr lIns="91440" rIns="91440" tIns="45720" bIns="45720" anchor="t">
             <a:noAutofit/>
           </a:bodyPr>
           <a:p>
-            <a:pPr>
+            <a:pPr indent="0" defTabSz="914400">
               <a:lnSpc>
                 <a:spcPct val="100000"/>
               </a:lnSpc>
+              <a:buNone/>
+              <a:tabLst>
+                <a:tab algn="l" pos="0"/>
+              </a:tabLst>
             </a:pPr>
             <a:r>
-              <a:rPr b="1" lang="ru-RU" sz="1800" spc="-1" strike="noStrike">
+              <a:rPr b="1" lang="ru-RU" sz="3600" spc="-1" strike="noStrike">
                 <a:solidFill>
-                  <a:srgbClr val="000000"/>
+                  <a:srgbClr val="332974"/>
                 </a:solidFill>
-                <a:latin typeface="Arial"/>
+                <a:latin typeface="Montserrat SemiBold"/>
               </a:rPr>
-              <a:t>3. Библиотеки машинного обучения</a:t>
+              <a:t>Архитектурное проектирование</a:t>
             </a:r>
-            <a:endParaRPr b="0" lang="ru-RU" sz="1800" spc="-1" strike="noStrike">
+            <a:endParaRPr b="0" lang="ru-RU" sz="3600" spc="-1" strike="noStrike">
               <a:solidFill>
                 <a:srgbClr val="000000"/>
               </a:solidFill>
               <a:latin typeface="Arial"/>
             </a:endParaRPr>
           </a:p>
-          <a:p>
-            <a:pPr>
-              <a:lnSpc>
-                <a:spcPct val="100000"/>
-              </a:lnSpc>
-            </a:pPr>
-            <a:r>
-              <a:rPr b="0" lang="ru-RU" sz="1800" spc="-1" strike="noStrike">
-                <a:solidFill>
-                  <a:srgbClr val="000000"/>
-                </a:solidFill>
-                <a:latin typeface="Arial"/>
-              </a:rPr>
-              <a:t>Выбраны: Scikit-learn, XGBoost, Imbalanced-learn</a:t>
-            </a:r>
-            <a:endParaRPr b="0" lang="ru-RU" sz="1800" spc="-1" strike="noStrike">
-              <a:solidFill>
-                <a:srgbClr val="000000"/>
-              </a:solidFill>
-              <a:latin typeface="Arial"/>
-            </a:endParaRPr>
-          </a:p>
-          <a:p>
-            <a:pPr>
-              <a:lnSpc>
-                <a:spcPct val="100000"/>
-              </a:lnSpc>
-            </a:pPr>
-            <a:endParaRPr b="0" lang="ru-RU" sz="1800" spc="-1" strike="noStrike">
-              <a:solidFill>
-                <a:srgbClr val="000000"/>
-              </a:solidFill>
-              <a:latin typeface="Arial"/>
-            </a:endParaRPr>
-          </a:p>
-          <a:p>
-            <a:pPr>
-              <a:lnSpc>
-                <a:spcPct val="100000"/>
-              </a:lnSpc>
-            </a:pPr>
-            <a:r>
-              <a:rPr b="0" lang="ru-RU" sz="1800" spc="-1" strike="noStrike">
-                <a:solidFill>
-                  <a:srgbClr val="000000"/>
-                </a:solidFill>
-                <a:latin typeface="Arial"/>
-              </a:rPr>
-              <a:t>Обоснование:</a:t>
-            </a:r>
-            <a:endParaRPr b="0" lang="ru-RU" sz="1800" spc="-1" strike="noStrike">
-              <a:solidFill>
-                <a:srgbClr val="000000"/>
-              </a:solidFill>
-              <a:latin typeface="Arial"/>
-            </a:endParaRPr>
-          </a:p>
-          <a:p>
-            <a:pPr>
-              <a:lnSpc>
-                <a:spcPct val="100000"/>
-              </a:lnSpc>
-            </a:pPr>
-            <a:endParaRPr b="0" lang="ru-RU" sz="1800" spc="-1" strike="noStrike">
-              <a:solidFill>
-                <a:srgbClr val="000000"/>
-              </a:solidFill>
-              <a:latin typeface="Arial"/>
-            </a:endParaRPr>
-          </a:p>
-          <a:p>
-            <a:pPr marL="216000" indent="-216000">
-              <a:lnSpc>
-                <a:spcPct val="100000"/>
-              </a:lnSpc>
-              <a:buClr>
-                <a:srgbClr val="000000"/>
-              </a:buClr>
-              <a:buSzPct val="45000"/>
-              <a:buFont typeface="Wingdings" charset="2"/>
-              <a:buChar char=""/>
-            </a:pPr>
-            <a:r>
-              <a:rPr b="0" lang="ru-RU" sz="1800" spc="-1" strike="noStrike">
-                <a:solidFill>
-                  <a:srgbClr val="000000"/>
-                </a:solidFill>
-                <a:latin typeface="Arial"/>
-              </a:rPr>
-              <a:t>Scikit-learn (базовые алгоритмы, предобработка, метрики) -стандарт де-факто для задач классификации с табличными данными</a:t>
-            </a:r>
-            <a:endParaRPr b="0" lang="ru-RU" sz="1800" spc="-1" strike="noStrike">
-              <a:solidFill>
-                <a:srgbClr val="000000"/>
-              </a:solidFill>
-              <a:latin typeface="Arial"/>
-            </a:endParaRPr>
-          </a:p>
-          <a:p>
-            <a:pPr>
-              <a:lnSpc>
-                <a:spcPct val="100000"/>
-              </a:lnSpc>
-            </a:pPr>
-            <a:endParaRPr b="0" lang="ru-RU" sz="1800" spc="-1" strike="noStrike">
-              <a:solidFill>
-                <a:srgbClr val="000000"/>
-              </a:solidFill>
-              <a:latin typeface="Arial"/>
-            </a:endParaRPr>
-          </a:p>
-          <a:p>
-            <a:pPr marL="216000" indent="-216000">
-              <a:lnSpc>
-                <a:spcPct val="100000"/>
-              </a:lnSpc>
-              <a:buClr>
-                <a:srgbClr val="000000"/>
-              </a:buClr>
-              <a:buSzPct val="45000"/>
-              <a:buFont typeface="Wingdings" charset="2"/>
-              <a:buChar char=""/>
-            </a:pPr>
-            <a:r>
-              <a:rPr b="0" lang="ru-RU" sz="1800" spc="-1" strike="noStrike">
-                <a:solidFill>
-                  <a:srgbClr val="000000"/>
-                </a:solidFill>
-                <a:latin typeface="Arial"/>
-              </a:rPr>
-              <a:t>XGBoost (градиентный бустинг) - высокая производительность, устойчивость к переобучению, хорошая интерпретируемость</a:t>
-            </a:r>
-            <a:endParaRPr b="0" lang="ru-RU" sz="1800" spc="-1" strike="noStrike">
-              <a:solidFill>
-                <a:srgbClr val="000000"/>
-              </a:solidFill>
-              <a:latin typeface="Arial"/>
-            </a:endParaRPr>
-          </a:p>
-          <a:p>
-            <a:pPr>
-              <a:lnSpc>
-                <a:spcPct val="100000"/>
-              </a:lnSpc>
-            </a:pPr>
-            <a:endParaRPr b="0" lang="ru-RU" sz="1800" spc="-1" strike="noStrike">
-              <a:solidFill>
-                <a:srgbClr val="000000"/>
-              </a:solidFill>
-              <a:latin typeface="Arial"/>
-            </a:endParaRPr>
-          </a:p>
-          <a:p>
-            <a:pPr marL="216000" indent="-216000">
-              <a:lnSpc>
-                <a:spcPct val="100000"/>
-              </a:lnSpc>
-              <a:buClr>
-                <a:srgbClr val="000000"/>
-              </a:buClr>
-              <a:buSzPct val="45000"/>
-              <a:buFont typeface="Wingdings" charset="2"/>
-              <a:buChar char=""/>
-            </a:pPr>
-            <a:r>
-              <a:rPr b="0" lang="ru-RU" sz="1800" spc="-1" strike="noStrike">
-                <a:solidFill>
-                  <a:srgbClr val="000000"/>
-                </a:solidFill>
-                <a:latin typeface="Arial"/>
-              </a:rPr>
-              <a:t>Imbalanced-learn (балансировка классов (SMOTE)) - решение проблемы дисбаланса классов в данных о рисках</a:t>
-            </a:r>
-            <a:endParaRPr b="0" lang="ru-RU" sz="1800" spc="-1" strike="noStrike">
-              <a:solidFill>
-                <a:srgbClr val="000000"/>
-              </a:solidFill>
-              <a:latin typeface="Arial"/>
-            </a:endParaRPr>
-          </a:p>
-          <a:p>
-            <a:pPr>
-              <a:lnSpc>
-                <a:spcPct val="100000"/>
-              </a:lnSpc>
-            </a:pPr>
-            <a:endParaRPr b="0" lang="ru-RU" sz="1800" spc="-1" strike="noStrike">
-              <a:solidFill>
-                <a:srgbClr val="000000"/>
-              </a:solidFill>
-              <a:latin typeface="Arial"/>
-            </a:endParaRPr>
-          </a:p>
-          <a:p>
-            <a:pPr marL="216000" indent="-216000">
-              <a:lnSpc>
-                <a:spcPct val="100000"/>
-              </a:lnSpc>
-              <a:buClr>
-                <a:srgbClr val="000000"/>
-              </a:buClr>
-              <a:buSzPct val="45000"/>
-              <a:buFont typeface="Wingdings" charset="2"/>
-              <a:buChar char=""/>
-            </a:pPr>
-            <a:r>
-              <a:rPr b="0" lang="ru-RU" sz="1800" spc="-1" strike="noStrike">
-                <a:solidFill>
-                  <a:srgbClr val="000000"/>
-                </a:solidFill>
-                <a:latin typeface="Arial"/>
-              </a:rPr>
-              <a:t>Joblib (сериализация модели) - эффективное сохранение и загрузка обученных моделей</a:t>
-            </a:r>
-            <a:endParaRPr b="0" lang="ru-RU" sz="1800" spc="-1" strike="noStrike">
-              <a:solidFill>
-                <a:srgbClr val="000000"/>
-              </a:solidFill>
-              <a:latin typeface="Arial"/>
-            </a:endParaRPr>
-          </a:p>
         </p:txBody>
       </p:sp>
       <p:sp>
         <p:nvSpPr>
-          <p:cNvPr id="152" name=""/>
-          <p:cNvSpPr/>
-          <p:nvPr/>
+          <p:cNvPr id="149" name="PlaceHolder 2"/>
+          <p:cNvSpPr>
+            <a:spLocks noGrp="1"/>
+          </p:cNvSpPr>
+          <p:nvPr>
+            <p:ph type="ftr" idx="46"/>
+          </p:nvPr>
         </p:nvSpPr>
         <p:spPr>
           <a:xfrm>
-            <a:off x="6351120" y="360000"/>
-            <a:ext cx="4447080" cy="2648160"/>
+            <a:off x="1333440" y="6352560"/>
+            <a:ext cx="7477560" cy="362160"/>
           </a:xfrm>
           <a:prstGeom prst="rect">
             <a:avLst/>
@@ -16068,223 +16540,49 @@
             <a:noFill/>
           </a:ln>
         </p:spPr>
-        <p:style>
-          <a:lnRef idx="0"/>
-          <a:fillRef idx="0"/>
-          <a:effectRef idx="0"/>
-          <a:fontRef idx="minor"/>
-        </p:style>
         <p:txBody>
           <a:bodyPr lIns="90000" rIns="90000" tIns="45000" bIns="45000" anchor="t">
             <a:noAutofit/>
           </a:bodyPr>
           <a:p>
-            <a:pPr>
-              <a:lnSpc>
-                <a:spcPct val="100000"/>
-              </a:lnSpc>
+            <a:pPr indent="0">
+              <a:buNone/>
             </a:pPr>
-            <a:r>
-              <a:rPr b="1" lang="ru-RU" sz="1800" spc="-1" strike="noStrike">
-                <a:solidFill>
-                  <a:srgbClr val="000000"/>
-                </a:solidFill>
-                <a:latin typeface="Arial"/>
-              </a:rPr>
-              <a:t>4. Фреймворк для создания API</a:t>
-            </a:r>
-            <a:endParaRPr b="0" lang="ru-RU" sz="1800" spc="-1" strike="noStrike">
+            <a:endParaRPr b="0" lang="ru-RU" sz="1400" spc="-1" strike="noStrike">
               <a:solidFill>
                 <a:srgbClr val="000000"/>
               </a:solidFill>
-              <a:latin typeface="Arial"/>
-            </a:endParaRPr>
-          </a:p>
-          <a:p>
-            <a:pPr>
-              <a:lnSpc>
-                <a:spcPct val="100000"/>
-              </a:lnSpc>
-            </a:pPr>
-            <a:r>
-              <a:rPr b="0" lang="ru-RU" sz="1800" spc="-1" strike="noStrike">
-                <a:solidFill>
-                  <a:srgbClr val="000000"/>
-                </a:solidFill>
-                <a:latin typeface="Arial"/>
-              </a:rPr>
-              <a:t>Выбран: FastAP</a:t>
-            </a:r>
-            <a:endParaRPr b="0" lang="ru-RU" sz="1800" spc="-1" strike="noStrike">
-              <a:solidFill>
-                <a:srgbClr val="000000"/>
-              </a:solidFill>
-              <a:latin typeface="Arial"/>
-            </a:endParaRPr>
-          </a:p>
-          <a:p>
-            <a:pPr>
-              <a:lnSpc>
-                <a:spcPct val="100000"/>
-              </a:lnSpc>
-            </a:pPr>
-            <a:endParaRPr b="0" lang="ru-RU" sz="1800" spc="-1" strike="noStrike">
-              <a:solidFill>
-                <a:srgbClr val="000000"/>
-              </a:solidFill>
-              <a:latin typeface="Arial"/>
-            </a:endParaRPr>
-          </a:p>
-          <a:p>
-            <a:pPr>
-              <a:lnSpc>
-                <a:spcPct val="100000"/>
-              </a:lnSpc>
-            </a:pPr>
-            <a:r>
-              <a:rPr b="0" lang="ru-RU" sz="1800" spc="-1" strike="noStrike">
-                <a:solidFill>
-                  <a:srgbClr val="000000"/>
-                </a:solidFill>
-                <a:latin typeface="Arial"/>
-              </a:rPr>
-              <a:t>Обоснование:</a:t>
-            </a:r>
-            <a:endParaRPr b="0" lang="ru-RU" sz="1800" spc="-1" strike="noStrike">
-              <a:solidFill>
-                <a:srgbClr val="000000"/>
-              </a:solidFill>
-              <a:latin typeface="Arial"/>
-            </a:endParaRPr>
-          </a:p>
-          <a:p>
-            <a:pPr>
-              <a:lnSpc>
-                <a:spcPct val="100000"/>
-              </a:lnSpc>
-            </a:pPr>
-            <a:endParaRPr b="0" lang="ru-RU" sz="1800" spc="-1" strike="noStrike">
-              <a:solidFill>
-                <a:srgbClr val="000000"/>
-              </a:solidFill>
-              <a:latin typeface="Arial"/>
-            </a:endParaRPr>
-          </a:p>
-          <a:p>
-            <a:pPr marL="216000" indent="-216000">
-              <a:lnSpc>
-                <a:spcPct val="100000"/>
-              </a:lnSpc>
-              <a:buClr>
-                <a:srgbClr val="000000"/>
-              </a:buClr>
-              <a:buSzPct val="45000"/>
-              <a:buFont typeface="Wingdings" charset="2"/>
-              <a:buChar char=""/>
-            </a:pPr>
-            <a:r>
-              <a:rPr b="0" lang="ru-RU" sz="1800" spc="-1" strike="noStrike">
-                <a:solidFill>
-                  <a:srgbClr val="000000"/>
-                </a:solidFill>
-                <a:latin typeface="Arial"/>
-              </a:rPr>
-              <a:t>Высокая производительность</a:t>
-            </a:r>
-            <a:endParaRPr b="0" lang="ru-RU" sz="1800" spc="-1" strike="noStrike">
-              <a:solidFill>
-                <a:srgbClr val="000000"/>
-              </a:solidFill>
-              <a:latin typeface="Arial"/>
-            </a:endParaRPr>
-          </a:p>
-          <a:p>
-            <a:pPr>
-              <a:lnSpc>
-                <a:spcPct val="100000"/>
-              </a:lnSpc>
-            </a:pPr>
-            <a:endParaRPr b="0" lang="ru-RU" sz="1800" spc="-1" strike="noStrike">
-              <a:solidFill>
-                <a:srgbClr val="000000"/>
-              </a:solidFill>
-              <a:latin typeface="Arial"/>
-            </a:endParaRPr>
-          </a:p>
-          <a:p>
-            <a:pPr marL="216000" indent="-216000">
-              <a:lnSpc>
-                <a:spcPct val="100000"/>
-              </a:lnSpc>
-              <a:buClr>
-                <a:srgbClr val="000000"/>
-              </a:buClr>
-              <a:buSzPct val="45000"/>
-              <a:buFont typeface="Wingdings" charset="2"/>
-              <a:buChar char=""/>
-            </a:pPr>
-            <a:r>
-              <a:rPr b="0" lang="ru-RU" sz="1800" spc="-1" strike="noStrike">
-                <a:solidFill>
-                  <a:srgbClr val="000000"/>
-                </a:solidFill>
-                <a:latin typeface="Arial"/>
-              </a:rPr>
-              <a:t>Автодокументация</a:t>
-            </a:r>
-            <a:endParaRPr b="0" lang="ru-RU" sz="1800" spc="-1" strike="noStrike">
-              <a:solidFill>
-                <a:srgbClr val="000000"/>
-              </a:solidFill>
-              <a:latin typeface="Arial"/>
-            </a:endParaRPr>
-          </a:p>
-          <a:p>
-            <a:pPr>
-              <a:lnSpc>
-                <a:spcPct val="100000"/>
-              </a:lnSpc>
-            </a:pPr>
-            <a:endParaRPr b="0" lang="ru-RU" sz="1800" spc="-1" strike="noStrike">
-              <a:solidFill>
-                <a:srgbClr val="000000"/>
-              </a:solidFill>
-              <a:latin typeface="Arial"/>
-            </a:endParaRPr>
-          </a:p>
-          <a:p>
-            <a:pPr marL="216000" indent="-216000">
-              <a:lnSpc>
-                <a:spcPct val="100000"/>
-              </a:lnSpc>
-              <a:buClr>
-                <a:srgbClr val="000000"/>
-              </a:buClr>
-              <a:buSzPct val="45000"/>
-              <a:buFont typeface="Wingdings" charset="2"/>
-              <a:buChar char=""/>
-            </a:pPr>
-            <a:r>
-              <a:rPr b="0" lang="ru-RU" sz="1800" spc="-1" strike="noStrike">
-                <a:solidFill>
-                  <a:srgbClr val="000000"/>
-                </a:solidFill>
-                <a:latin typeface="Arial"/>
-              </a:rPr>
-              <a:t>Асинхронность из коробки</a:t>
-            </a:r>
-            <a:endParaRPr b="0" lang="ru-RU" sz="1800" spc="-1" strike="noStrike">
-              <a:solidFill>
-                <a:srgbClr val="000000"/>
-              </a:solidFill>
-              <a:latin typeface="Arial"/>
+              <a:latin typeface="Times New Roman"/>
             </a:endParaRPr>
           </a:p>
         </p:txBody>
       </p:sp>
+      <p:pic>
+        <p:nvPicPr>
+          <p:cNvPr id="150" name="" descr=""/>
+          <p:cNvPicPr/>
+          <p:nvPr/>
+        </p:nvPicPr>
+        <p:blipFill>
+          <a:blip r:embed="rId1"/>
+          <a:stretch/>
+        </p:blipFill>
+        <p:spPr>
+          <a:xfrm>
+            <a:off x="2340360" y="1611720"/>
+            <a:ext cx="7554960" cy="4143240"/>
+          </a:xfrm>
+          <a:prstGeom prst="rect">
+            <a:avLst/>
+          </a:prstGeom>
+          <a:ln w="0">
+            <a:noFill/>
+          </a:ln>
+        </p:spPr>
+      </p:pic>
       <p:sp>
         <p:nvSpPr>
-          <p:cNvPr id="2" name="PlaceHolder 1"/>
+          <p:cNvPr id="4" name="PlaceHolder 3"/>
           <p:cNvSpPr>
             <a:spLocks noGrp="1"/>
           </p:cNvSpPr>
@@ -16296,7 +16594,7 @@
         <p:txBody>
           <a:bodyPr/>
           <a:p>
-            <a:fld id="{50172B82-2FA1-464E-8E59-6170B6524344}" type="slidenum">
+            <a:fld id="{0CFBAD07-F329-41AA-B97B-CA7C2D84C0D1}" type="slidenum">
               <a:t>8</a:t>
             </a:fld>
           </a:p>
@@ -16334,14 +16632,14 @@
       </p:grpSpPr>
       <p:sp>
         <p:nvSpPr>
-          <p:cNvPr id="153" name=""/>
+          <p:cNvPr id="151" name="PlaceHolder 5"/>
           <p:cNvSpPr/>
           <p:nvPr/>
         </p:nvSpPr>
         <p:spPr>
           <a:xfrm>
-            <a:off x="266760" y="360000"/>
-            <a:ext cx="4771440" cy="5172840"/>
+            <a:off x="-76320" y="0"/>
+            <a:ext cx="7737840" cy="717840"/>
           </a:xfrm>
           <a:prstGeom prst="rect">
             <a:avLst/>
@@ -16358,404 +16656,60 @@
           <a:fontRef idx="minor"/>
         </p:style>
         <p:txBody>
-          <a:bodyPr lIns="90000" rIns="90000" tIns="45000" bIns="45000" anchor="t">
+          <a:bodyPr lIns="90000" rIns="90000" tIns="45000" bIns="45000" anchor="ctr">
             <a:noAutofit/>
           </a:bodyPr>
           <a:p>
-            <a:pPr>
+            <a:pPr algn="ctr">
               <a:lnSpc>
-                <a:spcPct val="100000"/>
+                <a:spcPct val="108000"/>
               </a:lnSpc>
+              <a:tabLst>
+                <a:tab algn="l" pos="0"/>
+              </a:tabLst>
             </a:pPr>
             <a:r>
-              <a:rPr b="1" lang="ru-RU" sz="1800" spc="-1" strike="noStrike">
+              <a:rPr b="1" lang="ru-RU" sz="3600" spc="-1" strike="noStrike">
                 <a:solidFill>
-                  <a:srgbClr val="000000"/>
+                  <a:srgbClr val="332974"/>
                 </a:solidFill>
-                <a:latin typeface="Arial"/>
+                <a:latin typeface="Montserrat SemiBold"/>
+                <a:ea typeface="Microsoft YaHei"/>
               </a:rPr>
-              <a:t>5. HTTP-клиент для внешних запросов</a:t>
+              <a:t>Архитектура Python-сервиса</a:t>
             </a:r>
-            <a:endParaRPr b="0" lang="ru-RU" sz="1800" spc="-1" strike="noStrike">
+            <a:endParaRPr b="0" lang="ru-RU" sz="3600" spc="-1" strike="noStrike">
               <a:solidFill>
                 <a:srgbClr val="000000"/>
               </a:solidFill>
               <a:latin typeface="Arial"/>
             </a:endParaRPr>
           </a:p>
-          <a:p>
-            <a:pPr>
-              <a:lnSpc>
-                <a:spcPct val="100000"/>
-              </a:lnSpc>
-            </a:pPr>
-            <a:r>
-              <a:rPr b="0" lang="ru-RU" sz="1800" spc="-1" strike="noStrike">
-                <a:solidFill>
-                  <a:srgbClr val="000000"/>
-                </a:solidFill>
-                <a:latin typeface="Arial"/>
-              </a:rPr>
-              <a:t>Выбрана: aiohttp</a:t>
-            </a:r>
-            <a:endParaRPr b="0" lang="ru-RU" sz="1800" spc="-1" strike="noStrike">
-              <a:solidFill>
-                <a:srgbClr val="000000"/>
-              </a:solidFill>
-              <a:latin typeface="Arial"/>
-            </a:endParaRPr>
-          </a:p>
-          <a:p>
-            <a:pPr>
-              <a:lnSpc>
-                <a:spcPct val="100000"/>
-              </a:lnSpc>
-            </a:pPr>
-            <a:r>
-              <a:rPr b="0" lang="ru-RU" sz="1800" spc="-1" strike="noStrike">
-                <a:solidFill>
-                  <a:srgbClr val="000000"/>
-                </a:solidFill>
-                <a:latin typeface="Arial"/>
-              </a:rPr>
-              <a:t>Обоснование:</a:t>
-            </a:r>
-            <a:endParaRPr b="0" lang="ru-RU" sz="1800" spc="-1" strike="noStrike">
-              <a:solidFill>
-                <a:srgbClr val="000000"/>
-              </a:solidFill>
-              <a:latin typeface="Arial"/>
-            </a:endParaRPr>
-          </a:p>
-          <a:p>
-            <a:pPr marL="216000" indent="-216000">
-              <a:lnSpc>
-                <a:spcPct val="100000"/>
-              </a:lnSpc>
-              <a:spcBef>
-                <a:spcPts val="1191"/>
-              </a:spcBef>
-              <a:spcAft>
-                <a:spcPts val="992"/>
-              </a:spcAft>
-              <a:buClr>
-                <a:srgbClr val="000000"/>
-              </a:buClr>
-              <a:buSzPct val="45000"/>
-              <a:buFont typeface="Wingdings" charset="2"/>
-              <a:buChar char=""/>
-            </a:pPr>
-            <a:r>
-              <a:rPr b="0" lang="ru-RU" sz="1800" spc="-1" strike="noStrike">
-                <a:solidFill>
-                  <a:srgbClr val="000000"/>
-                </a:solidFill>
-                <a:latin typeface="Arial"/>
-              </a:rPr>
-              <a:t>Асинхронная работа, не блокирующая основной поток FastAPI</a:t>
-            </a:r>
-            <a:endParaRPr b="0" lang="ru-RU" sz="1800" spc="-1" strike="noStrike">
-              <a:solidFill>
-                <a:srgbClr val="000000"/>
-              </a:solidFill>
-              <a:latin typeface="Arial"/>
-            </a:endParaRPr>
-          </a:p>
-          <a:p>
-            <a:pPr marL="216000" indent="-216000">
-              <a:lnSpc>
-                <a:spcPct val="100000"/>
-              </a:lnSpc>
-              <a:spcBef>
-                <a:spcPts val="1191"/>
-              </a:spcBef>
-              <a:spcAft>
-                <a:spcPts val="992"/>
-              </a:spcAft>
-              <a:buClr>
-                <a:srgbClr val="000000"/>
-              </a:buClr>
-              <a:buSzPct val="45000"/>
-              <a:buFont typeface="Wingdings" charset="2"/>
-              <a:buChar char=""/>
-            </a:pPr>
-            <a:r>
-              <a:rPr b="0" lang="ru-RU" sz="1800" spc="-1" strike="noStrike">
-                <a:solidFill>
-                  <a:srgbClr val="000000"/>
-                </a:solidFill>
-                <a:latin typeface="Arial"/>
-              </a:rPr>
-              <a:t>Удобная работа с заголовками и параметрами</a:t>
-            </a:r>
-            <a:endParaRPr b="0" lang="ru-RU" sz="1800" spc="-1" strike="noStrike">
-              <a:solidFill>
-                <a:srgbClr val="000000"/>
-              </a:solidFill>
-              <a:latin typeface="Arial"/>
-            </a:endParaRPr>
-          </a:p>
-          <a:p>
-            <a:pPr marL="216000" indent="-216000">
-              <a:lnSpc>
-                <a:spcPct val="100000"/>
-              </a:lnSpc>
-              <a:spcBef>
-                <a:spcPts val="1191"/>
-              </a:spcBef>
-              <a:spcAft>
-                <a:spcPts val="992"/>
-              </a:spcAft>
-              <a:buClr>
-                <a:srgbClr val="000000"/>
-              </a:buClr>
-              <a:buSzPct val="45000"/>
-              <a:buFont typeface="Wingdings" charset="2"/>
-              <a:buChar char=""/>
-            </a:pPr>
-            <a:r>
-              <a:rPr b="0" lang="ru-RU" sz="1800" spc="-1" strike="noStrike">
-                <a:solidFill>
-                  <a:srgbClr val="000000"/>
-                </a:solidFill>
-                <a:latin typeface="Arial"/>
-              </a:rPr>
-              <a:t>Встроенная обработка таймаутов и повторных попыток</a:t>
-            </a:r>
-            <a:endParaRPr b="0" lang="ru-RU" sz="1800" spc="-1" strike="noStrike">
-              <a:solidFill>
-                <a:srgbClr val="000000"/>
-              </a:solidFill>
-              <a:latin typeface="Arial"/>
-            </a:endParaRPr>
-          </a:p>
-          <a:p>
-            <a:pPr marL="216000" indent="-216000">
-              <a:lnSpc>
-                <a:spcPct val="100000"/>
-              </a:lnSpc>
-              <a:spcBef>
-                <a:spcPts val="1191"/>
-              </a:spcBef>
-              <a:spcAft>
-                <a:spcPts val="992"/>
-              </a:spcAft>
-              <a:buClr>
-                <a:srgbClr val="000000"/>
-              </a:buClr>
-              <a:buSzPct val="45000"/>
-              <a:buFont typeface="Wingdings" charset="2"/>
-              <a:buChar char=""/>
-            </a:pPr>
-            <a:r>
-              <a:rPr b="0" lang="ru-RU" sz="1800" spc="-1" strike="noStrike">
-                <a:solidFill>
-                  <a:srgbClr val="000000"/>
-                </a:solidFill>
-                <a:latin typeface="Arial"/>
-              </a:rPr>
-              <a:t>Поддержка сессий для переиспользования соединений</a:t>
-            </a:r>
-            <a:endParaRPr b="0" lang="ru-RU" sz="1800" spc="-1" strike="noStrike">
-              <a:solidFill>
-                <a:srgbClr val="000000"/>
-              </a:solidFill>
-              <a:latin typeface="Arial"/>
-            </a:endParaRPr>
-          </a:p>
-          <a:p>
-            <a:pPr>
-              <a:lnSpc>
-                <a:spcPct val="100000"/>
-              </a:lnSpc>
-            </a:pPr>
-            <a:endParaRPr b="0" lang="ru-RU" sz="1800" spc="-1" strike="noStrike">
-              <a:solidFill>
-                <a:srgbClr val="000000"/>
-              </a:solidFill>
-              <a:latin typeface="Arial"/>
-            </a:endParaRPr>
-          </a:p>
         </p:txBody>
       </p:sp>
-      <p:sp>
-        <p:nvSpPr>
-          <p:cNvPr id="154" name=""/>
-          <p:cNvSpPr/>
+      <p:pic>
+        <p:nvPicPr>
+          <p:cNvPr id="152" name="" descr=""/>
+          <p:cNvPicPr/>
           <p:nvPr/>
-        </p:nvSpPr>
+        </p:nvPicPr>
+        <p:blipFill>
+          <a:blip r:embed="rId1"/>
+          <a:stretch/>
+        </p:blipFill>
         <p:spPr>
           <a:xfrm>
-            <a:off x="5580000" y="360000"/>
-            <a:ext cx="5702400" cy="5218200"/>
+            <a:off x="4140360" y="1620360"/>
+            <a:ext cx="4134960" cy="4647600"/>
           </a:xfrm>
           <a:prstGeom prst="rect">
             <a:avLst/>
           </a:prstGeom>
-          <a:noFill/>
           <a:ln w="0">
             <a:noFill/>
           </a:ln>
         </p:spPr>
-        <p:style>
-          <a:lnRef idx="0"/>
-          <a:fillRef idx="0"/>
-          <a:effectRef idx="0"/>
-          <a:fontRef idx="minor"/>
-        </p:style>
-        <p:txBody>
-          <a:bodyPr lIns="90000" rIns="90000" tIns="45000" bIns="45000" anchor="t">
-            <a:noAutofit/>
-          </a:bodyPr>
-          <a:p>
-            <a:pPr>
-              <a:lnSpc>
-                <a:spcPct val="100000"/>
-              </a:lnSpc>
-            </a:pPr>
-            <a:r>
-              <a:rPr b="1" lang="ru-RU" sz="1800" spc="-1" strike="noStrike">
-                <a:solidFill>
-                  <a:srgbClr val="000000"/>
-                </a:solidFill>
-                <a:latin typeface="Arial"/>
-              </a:rPr>
-              <a:t>6. Внешний API-сервис для получения данных</a:t>
-            </a:r>
-            <a:endParaRPr b="0" lang="ru-RU" sz="1800" spc="-1" strike="noStrike">
-              <a:solidFill>
-                <a:srgbClr val="000000"/>
-              </a:solidFill>
-              <a:latin typeface="Arial"/>
-            </a:endParaRPr>
-          </a:p>
-          <a:p>
-            <a:pPr>
-              <a:lnSpc>
-                <a:spcPct val="100000"/>
-              </a:lnSpc>
-            </a:pPr>
-            <a:r>
-              <a:rPr b="0" lang="ru-RU" sz="1800" spc="-1" strike="noStrike">
-                <a:solidFill>
-                  <a:srgbClr val="000000"/>
-                </a:solidFill>
-                <a:latin typeface="Arial"/>
-              </a:rPr>
-              <a:t>Выбран: API "Репутация"</a:t>
-            </a:r>
-            <a:endParaRPr b="0" lang="ru-RU" sz="1800" spc="-1" strike="noStrike">
-              <a:solidFill>
-                <a:srgbClr val="000000"/>
-              </a:solidFill>
-              <a:latin typeface="Arial"/>
-            </a:endParaRPr>
-          </a:p>
-          <a:p>
-            <a:pPr>
-              <a:lnSpc>
-                <a:spcPct val="100000"/>
-              </a:lnSpc>
-            </a:pPr>
-            <a:r>
-              <a:rPr b="0" lang="ru-RU" sz="1800" spc="-1" strike="noStrike">
-                <a:solidFill>
-                  <a:srgbClr val="000000"/>
-                </a:solidFill>
-                <a:latin typeface="Arial"/>
-              </a:rPr>
-              <a:t>Обоснование:</a:t>
-            </a:r>
-            <a:endParaRPr b="0" lang="ru-RU" sz="1800" spc="-1" strike="noStrike">
-              <a:solidFill>
-                <a:srgbClr val="000000"/>
-              </a:solidFill>
-              <a:latin typeface="Arial"/>
-            </a:endParaRPr>
-          </a:p>
-          <a:p>
-            <a:pPr marL="216000" indent="-216000">
-              <a:lnSpc>
-                <a:spcPct val="100000"/>
-              </a:lnSpc>
-              <a:spcBef>
-                <a:spcPts val="1191"/>
-              </a:spcBef>
-              <a:spcAft>
-                <a:spcPts val="992"/>
-              </a:spcAft>
-              <a:buClr>
-                <a:srgbClr val="000000"/>
-              </a:buClr>
-              <a:buSzPct val="45000"/>
-              <a:buFont typeface="Wingdings" charset="2"/>
-              <a:buChar char=""/>
-            </a:pPr>
-            <a:r>
-              <a:rPr b="0" lang="ru-RU" sz="1800" spc="-1" strike="noStrike">
-                <a:solidFill>
-                  <a:srgbClr val="000000"/>
-                </a:solidFill>
-                <a:latin typeface="Arial"/>
-              </a:rPr>
-              <a:t>Модель оплаты - 2,5 руб/запрос</a:t>
-            </a:r>
-            <a:endParaRPr b="0" lang="ru-RU" sz="1800" spc="-1" strike="noStrike">
-              <a:solidFill>
-                <a:srgbClr val="000000"/>
-              </a:solidFill>
-              <a:latin typeface="Arial"/>
-            </a:endParaRPr>
-          </a:p>
-          <a:p>
-            <a:pPr marL="216000" indent="-216000">
-              <a:lnSpc>
-                <a:spcPct val="100000"/>
-              </a:lnSpc>
-              <a:spcBef>
-                <a:spcPts val="1191"/>
-              </a:spcBef>
-              <a:spcAft>
-                <a:spcPts val="992"/>
-              </a:spcAft>
-              <a:buClr>
-                <a:srgbClr val="000000"/>
-              </a:buClr>
-              <a:buSzPct val="45000"/>
-              <a:buFont typeface="Wingdings" charset="2"/>
-              <a:buChar char=""/>
-            </a:pPr>
-            <a:r>
-              <a:rPr b="0" lang="ru-RU" sz="1800" spc="-1" strike="noStrike">
-                <a:solidFill>
-                  <a:srgbClr val="000000"/>
-                </a:solidFill>
-                <a:latin typeface="Arial"/>
-              </a:rPr>
-              <a:t>Высокая экономическая эффективность для МСП</a:t>
-            </a:r>
-            <a:endParaRPr b="0" lang="ru-RU" sz="1800" spc="-1" strike="noStrike">
-              <a:solidFill>
-                <a:srgbClr val="000000"/>
-              </a:solidFill>
-              <a:latin typeface="Arial"/>
-            </a:endParaRPr>
-          </a:p>
-          <a:p>
-            <a:pPr>
-              <a:lnSpc>
-                <a:spcPct val="100000"/>
-              </a:lnSpc>
-            </a:pPr>
-            <a:endParaRPr b="0" lang="ru-RU" sz="1800" spc="-1" strike="noStrike">
-              <a:solidFill>
-                <a:srgbClr val="000000"/>
-              </a:solidFill>
-              <a:latin typeface="Arial"/>
-            </a:endParaRPr>
-          </a:p>
-        </p:txBody>
-      </p:sp>
+      </p:pic>
       <p:sp>
         <p:nvSpPr>
           <p:cNvPr id="2" name="PlaceHolder 1"/>
@@ -16770,7 +16724,7 @@
         <p:txBody>
           <a:bodyPr/>
           <a:p>
-            <a:fld id="{0A1DA40D-3662-4647-B668-1E3E97C3D579}" type="slidenum">
+            <a:fld id="{945CE1AD-4691-4930-BBD8-9180F5E67D05}" type="slidenum">
               <a:t>9</a:t>
             </a:fld>
           </a:p>

--- a/Презентация.pptx
+++ b/Презентация.pptx
@@ -48,7 +48,6 @@
     <p:sldId id="271" r:id="rId41"/>
     <p:sldId id="272" r:id="rId42"/>
     <p:sldId id="273" r:id="rId43"/>
-    <p:sldId id="274" r:id="rId44"/>
   </p:sldIdLst>
   <p:sldSz cx="12192000" cy="6858000"/>
   <p:notesSz cx="6858000" cy="9144000"/>
@@ -379,7 +378,7 @@
             <a:pPr indent="0" algn="r">
               <a:buNone/>
             </a:pPr>
-            <a:fld id="{BF8422A3-24B2-43CD-AED8-7CB66880806F}" type="slidenum">
+            <a:fld id="{AF00880D-44EE-43A1-8CD7-825C6F8DC4BA}" type="slidenum">
               <a:rPr b="0" lang="ru-RU" sz="1400" spc="-1" strike="noStrike">
                 <a:solidFill>
                   <a:srgbClr val="000000"/>
@@ -422,7 +421,7 @@
       </p:grpSpPr>
       <p:sp>
         <p:nvSpPr>
-          <p:cNvPr id="186" name="PlaceHolder 1"/>
+          <p:cNvPr id="183" name="PlaceHolder 1"/>
           <p:cNvSpPr>
             <a:spLocks noGrp="1"/>
           </p:cNvSpPr>
@@ -433,7 +432,7 @@
         <p:spPr>
           <a:xfrm>
             <a:off x="685800" y="1143000"/>
-            <a:ext cx="5483520" cy="3083400"/>
+            <a:ext cx="5483160" cy="3083040"/>
           </a:xfrm>
           <a:prstGeom prst="rect">
             <a:avLst/>
@@ -445,7 +444,7 @@
       </p:sp>
       <p:sp>
         <p:nvSpPr>
-          <p:cNvPr id="187" name="PlaceHolder 2"/>
+          <p:cNvPr id="184" name="PlaceHolder 2"/>
           <p:cNvSpPr>
             <a:spLocks noGrp="1"/>
           </p:cNvSpPr>
@@ -456,7 +455,7 @@
         <p:spPr>
           <a:xfrm>
             <a:off x="685800" y="4400640"/>
-            <a:ext cx="5483520" cy="3597480"/>
+            <a:ext cx="5483160" cy="3597120"/>
           </a:xfrm>
           <a:prstGeom prst="rect">
             <a:avLst/>
@@ -526,18 +525,18 @@
       </p:sp>
       <p:sp>
         <p:nvSpPr>
-          <p:cNvPr id="188" name="PlaceHolder 3"/>
+          <p:cNvPr id="185" name="PlaceHolder 3"/>
           <p:cNvSpPr>
             <a:spLocks noGrp="1"/>
           </p:cNvSpPr>
           <p:nvPr>
-            <p:ph type="sldNum" idx="49"/>
+            <p:ph type="sldNum" idx="48"/>
           </p:nvPr>
         </p:nvSpPr>
         <p:spPr>
           <a:xfrm>
             <a:off x="3884760" y="8685360"/>
-            <a:ext cx="2968920" cy="455760"/>
+            <a:ext cx="2968560" cy="455400"/>
           </a:xfrm>
           <a:prstGeom prst="rect">
             <a:avLst/>
@@ -578,7 +577,7 @@
                 <a:tab algn="l" pos="0"/>
               </a:tabLst>
             </a:pPr>
-            <a:fld id="{5345CD0D-7EF1-4152-9003-DD84F89930E1}" type="slidenum">
+            <a:fld id="{0CF19B5C-A6A9-42AC-A12A-B6A907C5272D}" type="slidenum">
               <a:rPr b="0" lang="ru-RU" sz="1200" spc="-1" strike="noStrike">
                 <a:solidFill>
                   <a:srgbClr val="000000"/>
@@ -601,7 +600,7 @@
 </p:notes>
 </file>
 
-<file path=ppt/notesSlides/notesSlide19.xml><?xml version="1.0" encoding="utf-8"?>
+<file path=ppt/notesSlides/notesSlide18.xml><?xml version="1.0" encoding="utf-8"?>
 <p:notes xmlns:a="http://schemas.openxmlformats.org/drawingml/2006/main" xmlns:p="http://schemas.openxmlformats.org/presentationml/2006/main" xmlns:r="http://schemas.openxmlformats.org/officeDocument/2006/relationships" xmlns:p14="http://schemas.microsoft.com/office/powerpoint/2010/main" xmlns:p15="http://schemas.microsoft.com/office/powerpoint/2012/main" xmlns:mc="http://schemas.openxmlformats.org/markup-compatibility/2006">
   <p:cSld>
     <p:spTree>
@@ -620,7 +619,7 @@
       </p:grpSpPr>
       <p:sp>
         <p:nvSpPr>
-          <p:cNvPr id="189" name="PlaceHolder 1"/>
+          <p:cNvPr id="186" name="PlaceHolder 1"/>
           <p:cNvSpPr>
             <a:spLocks noGrp="1"/>
           </p:cNvSpPr>
@@ -631,7 +630,7 @@
         <p:spPr>
           <a:xfrm>
             <a:off x="685800" y="1143000"/>
-            <a:ext cx="5483520" cy="3083400"/>
+            <a:ext cx="5483160" cy="3083040"/>
           </a:xfrm>
           <a:prstGeom prst="rect">
             <a:avLst/>
@@ -643,7 +642,7 @@
       </p:sp>
       <p:sp>
         <p:nvSpPr>
-          <p:cNvPr id="190" name="PlaceHolder 2"/>
+          <p:cNvPr id="187" name="PlaceHolder 2"/>
           <p:cNvSpPr>
             <a:spLocks noGrp="1"/>
           </p:cNvSpPr>
@@ -654,7 +653,7 @@
         <p:spPr>
           <a:xfrm>
             <a:off x="685800" y="4400640"/>
-            <a:ext cx="5483520" cy="3597480"/>
+            <a:ext cx="5483160" cy="3597120"/>
           </a:xfrm>
           <a:prstGeom prst="rect">
             <a:avLst/>
@@ -698,18 +697,18 @@
       </p:sp>
       <p:sp>
         <p:nvSpPr>
-          <p:cNvPr id="191" name="PlaceHolder 3"/>
+          <p:cNvPr id="188" name="PlaceHolder 3"/>
           <p:cNvSpPr>
             <a:spLocks noGrp="1"/>
           </p:cNvSpPr>
           <p:nvPr>
-            <p:ph type="sldNum" idx="50"/>
+            <p:ph type="sldNum" idx="49"/>
           </p:nvPr>
         </p:nvSpPr>
         <p:spPr>
           <a:xfrm>
             <a:off x="3884760" y="8685360"/>
-            <a:ext cx="2968920" cy="455760"/>
+            <a:ext cx="2968560" cy="455400"/>
           </a:xfrm>
           <a:prstGeom prst="rect">
             <a:avLst/>
@@ -750,7 +749,7 @@
                 <a:tab algn="l" pos="0"/>
               </a:tabLst>
             </a:pPr>
-            <a:fld id="{0E31F1E7-86FA-4A27-BF78-EFF232B5F519}" type="slidenum">
+            <a:fld id="{3FA21ED0-1468-42E7-9A31-3EE73796C51A}" type="slidenum">
               <a:rPr b="0" lang="ru-RU" sz="1200" spc="-1" strike="noStrike">
                 <a:solidFill>
                   <a:srgbClr val="000000"/>
@@ -846,7 +845,7 @@
         <p:txBody>
           <a:bodyPr/>
           <a:p>
-            <a:fld id="{8837AA72-C54E-496A-9A1D-DE11845C2A94}" type="slidenum">
+            <a:fld id="{370F5452-F70B-47EC-95C8-A65075175D89}" type="slidenum">
               <a:t>&lt;#&gt;</a:t>
             </a:fld>
           </a:p>
@@ -908,7 +907,7 @@
         <p:txBody>
           <a:bodyPr/>
           <a:p>
-            <a:fld id="{6D29F847-6513-4998-B67C-F71A6DD4ED0A}" type="slidenum">
+            <a:fld id="{B4983EBD-D3B4-4097-879D-43AE706A616C}" type="slidenum">
               <a:t>&lt;#&gt;</a:t>
             </a:fld>
           </a:p>
@@ -992,7 +991,7 @@
         <p:txBody>
           <a:bodyPr/>
           <a:p>
-            <a:fld id="{E1AE1369-3AA8-4823-90B7-EEF8DABB80A5}" type="slidenum">
+            <a:fld id="{0ADC5CF0-FECD-4778-81C5-D790939148AB}" type="slidenum">
               <a:t>&lt;#&gt;</a:t>
             </a:fld>
           </a:p>
@@ -1054,7 +1053,7 @@
         <p:txBody>
           <a:bodyPr/>
           <a:p>
-            <a:fld id="{D1E3A616-56C1-4332-92D8-698B20A00F22}" type="slidenum">
+            <a:fld id="{AB1EABCC-29B3-4D6A-9C67-A6902C4FFDAB}" type="slidenum">
               <a:t>&lt;#&gt;</a:t>
             </a:fld>
           </a:p>
@@ -1116,7 +1115,7 @@
         <p:txBody>
           <a:bodyPr/>
           <a:p>
-            <a:fld id="{45B2274D-D661-4B4C-94AB-D167ED724F39}" type="slidenum">
+            <a:fld id="{1E603371-2BA6-4BDE-81F4-87CCFDFE2753}" type="slidenum">
               <a:t>&lt;#&gt;</a:t>
             </a:fld>
           </a:p>
@@ -1200,7 +1199,7 @@
         <p:txBody>
           <a:bodyPr/>
           <a:p>
-            <a:fld id="{90257BF7-5208-4D81-B46B-2E8DA87271E8}" type="slidenum">
+            <a:fld id="{D6D221F5-EC16-40B7-BE65-56A2B405DB99}" type="slidenum">
               <a:t>&lt;#&gt;</a:t>
             </a:fld>
           </a:p>
@@ -1262,7 +1261,7 @@
         <p:txBody>
           <a:bodyPr/>
           <a:p>
-            <a:fld id="{2B81EF3F-9EF0-45D4-82FB-935C9FAA97B1}" type="slidenum">
+            <a:fld id="{FB1466FB-C86C-4314-827E-6E25D7FA153C}" type="slidenum">
               <a:t>&lt;#&gt;</a:t>
             </a:fld>
           </a:p>
@@ -1324,7 +1323,7 @@
         <p:txBody>
           <a:bodyPr/>
           <a:p>
-            <a:fld id="{511B05FA-EFC7-489D-848A-764558128B5E}" type="slidenum">
+            <a:fld id="{3657763D-51A0-4520-BB57-91E329A62781}" type="slidenum">
               <a:t>&lt;#&gt;</a:t>
             </a:fld>
           </a:p>
@@ -1386,7 +1385,7 @@
         <p:txBody>
           <a:bodyPr/>
           <a:p>
-            <a:fld id="{9AFAA896-C695-4E07-89B2-E60D6F22AD96}" type="slidenum">
+            <a:fld id="{526FDBDE-9F58-4E05-85C2-7CAB36F563CD}" type="slidenum">
               <a:t>&lt;#&gt;</a:t>
             </a:fld>
           </a:p>
@@ -1448,7 +1447,7 @@
         <p:txBody>
           <a:bodyPr/>
           <a:p>
-            <a:fld id="{D42BD790-7236-4DA4-8ABA-5150E5650772}" type="slidenum">
+            <a:fld id="{D78F6061-ED32-4C96-B905-FD908CAA5620}" type="slidenum">
               <a:t>&lt;#&gt;</a:t>
             </a:fld>
           </a:p>
@@ -1510,7 +1509,7 @@
         <p:txBody>
           <a:bodyPr/>
           <a:p>
-            <a:fld id="{57184803-7C3D-4C77-8AAD-783F4E77890D}" type="slidenum">
+            <a:fld id="{91ED97D1-DA7E-43AE-9EB0-C5A303B73BEA}" type="slidenum">
               <a:t>&lt;#&gt;</a:t>
             </a:fld>
           </a:p>
@@ -1572,7 +1571,7 @@
         <p:txBody>
           <a:bodyPr/>
           <a:p>
-            <a:fld id="{F04AB7EC-B282-4360-873E-DFE3B88D0E8C}" type="slidenum">
+            <a:fld id="{7C054E37-663C-48F9-8610-6723DA2592E9}" type="slidenum">
               <a:t>&lt;#&gt;</a:t>
             </a:fld>
           </a:p>
@@ -1714,7 +1713,7 @@
         <p:txBody>
           <a:bodyPr/>
           <a:p>
-            <a:fld id="{3512E404-C665-4EFD-91C1-A20B6F1128CA}" type="slidenum">
+            <a:fld id="{DF24E04C-EDF6-4410-AEE8-7BFA479D79E9}" type="slidenum">
               <a:t>&lt;#&gt;</a:t>
             </a:fld>
           </a:p>
@@ -1797,7 +1796,7 @@
         <p:txBody>
           <a:bodyPr/>
           <a:p>
-            <a:fld id="{C93984B9-8195-4A49-BD1E-26CD393D0174}" type="slidenum">
+            <a:fld id="{5A601D01-31BC-4CF8-9182-123FFE4D8E0E}" type="slidenum">
               <a:t>&lt;#&gt;</a:t>
             </a:fld>
           </a:p>
@@ -1859,7 +1858,7 @@
         <p:txBody>
           <a:bodyPr/>
           <a:p>
-            <a:fld id="{3D60FB58-B5E5-4FD6-BF0A-4450A5C37CEC}" type="slidenum">
+            <a:fld id="{5D3B8813-765E-42F0-BE86-32D0D6EF29D4}" type="slidenum">
               <a:t>&lt;#&gt;</a:t>
             </a:fld>
           </a:p>
@@ -1921,7 +1920,7 @@
         <p:txBody>
           <a:bodyPr/>
           <a:p>
-            <a:fld id="{4E5F3CA8-0A08-42DC-952D-686C663D749A}" type="slidenum">
+            <a:fld id="{D699BA9A-39B0-40F5-BC12-6A8DDEBCEDD7}" type="slidenum">
               <a:t>&lt;#&gt;</a:t>
             </a:fld>
           </a:p>
@@ -1983,7 +1982,7 @@
         <p:txBody>
           <a:bodyPr/>
           <a:p>
-            <a:fld id="{53B3CC7E-BF38-4C9F-999C-A8054794DD41}" type="slidenum">
+            <a:fld id="{E6A38912-AB9F-40EA-A54C-E89D7C658993}" type="slidenum">
               <a:t>&lt;#&gt;</a:t>
             </a:fld>
           </a:p>
@@ -2045,7 +2044,7 @@
         <p:txBody>
           <a:bodyPr/>
           <a:p>
-            <a:fld id="{5DF8F557-618B-4ACF-B48B-17F4800BEB74}" type="slidenum">
+            <a:fld id="{88B92B19-71DE-407B-8792-19A3B85A4C56}" type="slidenum">
               <a:t>&lt;#&gt;</a:t>
             </a:fld>
           </a:p>
@@ -2107,7 +2106,7 @@
         <p:txBody>
           <a:bodyPr/>
           <a:p>
-            <a:fld id="{07133831-A43E-4E04-B8DA-3996FEE5FEBC}" type="slidenum">
+            <a:fld id="{42A541A9-0CC3-4165-92BC-16D56E28F658}" type="slidenum">
               <a:t>&lt;#&gt;</a:t>
             </a:fld>
           </a:p>
@@ -2169,7 +2168,7 @@
         <p:txBody>
           <a:bodyPr/>
           <a:p>
-            <a:fld id="{570D0438-F318-4053-9820-8864F4E3B835}" type="slidenum">
+            <a:fld id="{A4B7E115-26E6-43C7-9487-79010F936AEE}" type="slidenum">
               <a:t>&lt;#&gt;</a:t>
             </a:fld>
           </a:p>
@@ -2223,7 +2222,7 @@
         <p:spPr>
           <a:xfrm>
             <a:off x="10760040" y="142200"/>
-            <a:ext cx="949680" cy="290520"/>
+            <a:ext cx="949320" cy="290160"/>
           </a:xfrm>
           <a:prstGeom prst="rect">
             <a:avLst/>
@@ -2252,7 +2251,7 @@
         <p:spPr>
           <a:xfrm>
             <a:off x="10921320" y="0"/>
-            <a:ext cx="1269360" cy="1370520"/>
+            <a:ext cx="1269000" cy="1370160"/>
           </a:xfrm>
           <a:prstGeom prst="rect">
             <a:avLst/>
@@ -2280,8 +2279,8 @@
         </p:blipFill>
         <p:spPr>
           <a:xfrm flipH="1" rot="16200000">
-            <a:off x="47880" y="5535000"/>
-            <a:ext cx="1269360" cy="1370520"/>
+            <a:off x="47520" y="5535000"/>
+            <a:ext cx="1269000" cy="1370160"/>
           </a:xfrm>
           <a:prstGeom prst="rect">
             <a:avLst/>
@@ -2300,7 +2299,7 @@
         <p:spPr>
           <a:xfrm>
             <a:off x="609120" y="240480"/>
-            <a:ext cx="10970640" cy="6301440"/>
+            <a:ext cx="10970280" cy="6301080"/>
           </a:xfrm>
           <a:prstGeom prst="roundRect">
             <a:avLst>
@@ -2373,7 +2372,7 @@
         <p:spPr>
           <a:xfrm>
             <a:off x="609120" y="240480"/>
-            <a:ext cx="4125960" cy="2083680"/>
+            <a:ext cx="4125600" cy="2083320"/>
           </a:xfrm>
           <a:prstGeom prst="rect">
             <a:avLst/>
@@ -2709,7 +2708,7 @@
         <p:spPr>
           <a:xfrm>
             <a:off x="10760040" y="142200"/>
-            <a:ext cx="949680" cy="290520"/>
+            <a:ext cx="949320" cy="290160"/>
           </a:xfrm>
           <a:prstGeom prst="rect">
             <a:avLst/>
@@ -2738,7 +2737,7 @@
         <p:spPr>
           <a:xfrm>
             <a:off x="10921320" y="0"/>
-            <a:ext cx="1269360" cy="1370520"/>
+            <a:ext cx="1269000" cy="1370160"/>
           </a:xfrm>
           <a:prstGeom prst="rect">
             <a:avLst/>
@@ -2766,8 +2765,8 @@
         </p:blipFill>
         <p:spPr>
           <a:xfrm flipH="1" rot="16200000">
-            <a:off x="47880" y="5535000"/>
-            <a:ext cx="1269360" cy="1370520"/>
+            <a:off x="47520" y="5535000"/>
+            <a:ext cx="1269000" cy="1370160"/>
           </a:xfrm>
           <a:prstGeom prst="rect">
             <a:avLst/>
@@ -2790,7 +2789,7 @@
         <p:spPr>
           <a:xfrm>
             <a:off x="1333440" y="6352560"/>
-            <a:ext cx="7477560" cy="362160"/>
+            <a:ext cx="7477200" cy="361800"/>
           </a:xfrm>
           <a:prstGeom prst="rect">
             <a:avLst/>
@@ -2862,7 +2861,7 @@
         <p:spPr>
           <a:xfrm>
             <a:off x="8966160" y="6352560"/>
-            <a:ext cx="2740320" cy="362160"/>
+            <a:ext cx="2739960" cy="361800"/>
           </a:xfrm>
           <a:prstGeom prst="rect">
             <a:avLst/>
@@ -2905,7 +2904,7 @@
                 <a:tab algn="l" pos="0"/>
               </a:tabLst>
             </a:pPr>
-            <a:fld id="{2A26E631-7794-4E5C-98D9-0684136F021E}" type="slidenum">
+            <a:fld id="{4CC866CA-3238-44F8-B86F-81D025A3D8EA}" type="slidenum">
               <a:rPr b="1" lang="ru-RU" sz="1600" spc="-1" strike="noStrike">
                 <a:solidFill>
                   <a:schemeClr val="dk1">
@@ -2977,7 +2976,7 @@
         <p:spPr>
           <a:xfrm>
             <a:off x="10760040" y="142200"/>
-            <a:ext cx="949680" cy="290520"/>
+            <a:ext cx="949320" cy="290160"/>
           </a:xfrm>
           <a:prstGeom prst="rect">
             <a:avLst/>
@@ -3006,7 +3005,7 @@
         <p:spPr>
           <a:xfrm>
             <a:off x="10921320" y="0"/>
-            <a:ext cx="1269360" cy="1370520"/>
+            <a:ext cx="1269000" cy="1370160"/>
           </a:xfrm>
           <a:prstGeom prst="rect">
             <a:avLst/>
@@ -3034,8 +3033,8 @@
         </p:blipFill>
         <p:spPr>
           <a:xfrm flipH="1" rot="16200000">
-            <a:off x="47880" y="5535000"/>
-            <a:ext cx="1269360" cy="1370520"/>
+            <a:off x="47520" y="5535000"/>
+            <a:ext cx="1269000" cy="1370160"/>
           </a:xfrm>
           <a:prstGeom prst="rect">
             <a:avLst/>
@@ -3058,7 +3057,7 @@
         <p:spPr>
           <a:xfrm>
             <a:off x="1333440" y="6352560"/>
-            <a:ext cx="7477560" cy="362160"/>
+            <a:ext cx="7477200" cy="361800"/>
           </a:xfrm>
           <a:prstGeom prst="rect">
             <a:avLst/>
@@ -3130,7 +3129,7 @@
         <p:spPr>
           <a:xfrm>
             <a:off x="8966160" y="6352560"/>
-            <a:ext cx="2740320" cy="362160"/>
+            <a:ext cx="2739960" cy="361800"/>
           </a:xfrm>
           <a:prstGeom prst="rect">
             <a:avLst/>
@@ -3173,7 +3172,7 @@
                 <a:tab algn="l" pos="0"/>
               </a:tabLst>
             </a:pPr>
-            <a:fld id="{882146B0-1F60-4938-811B-E101CC347081}" type="slidenum">
+            <a:fld id="{3A5D6F35-1569-416C-8C15-E683993C28A5}" type="slidenum">
               <a:rPr b="1" lang="ru-RU" sz="1600" spc="-1" strike="noStrike">
                 <a:solidFill>
                   <a:schemeClr val="dk1">
@@ -3519,7 +3518,7 @@
         <p:spPr>
           <a:xfrm>
             <a:off x="10760040" y="142200"/>
-            <a:ext cx="949680" cy="290520"/>
+            <a:ext cx="949320" cy="290160"/>
           </a:xfrm>
           <a:prstGeom prst="rect">
             <a:avLst/>
@@ -3548,7 +3547,7 @@
         <p:spPr>
           <a:xfrm>
             <a:off x="10921320" y="0"/>
-            <a:ext cx="1269360" cy="1370520"/>
+            <a:ext cx="1269000" cy="1370160"/>
           </a:xfrm>
           <a:prstGeom prst="rect">
             <a:avLst/>
@@ -3576,8 +3575,8 @@
         </p:blipFill>
         <p:spPr>
           <a:xfrm flipH="1" rot="16200000">
-            <a:off x="47880" y="5535000"/>
-            <a:ext cx="1269360" cy="1370520"/>
+            <a:off x="47520" y="5535000"/>
+            <a:ext cx="1269000" cy="1370160"/>
           </a:xfrm>
           <a:prstGeom prst="rect">
             <a:avLst/>
@@ -3596,7 +3595,7 @@
         <p:spPr>
           <a:xfrm>
             <a:off x="609120" y="240480"/>
-            <a:ext cx="10970640" cy="6301440"/>
+            <a:ext cx="10970280" cy="6301080"/>
           </a:xfrm>
           <a:prstGeom prst="roundRect">
             <a:avLst>
@@ -3675,7 +3674,7 @@
         <p:spPr>
           <a:xfrm>
             <a:off x="1265040" y="827640"/>
-            <a:ext cx="2794680" cy="858960"/>
+            <a:ext cx="2794320" cy="858600"/>
           </a:xfrm>
           <a:prstGeom prst="rect">
             <a:avLst/>
@@ -3737,7 +3736,7 @@
         <p:spPr>
           <a:xfrm>
             <a:off x="10760040" y="142200"/>
-            <a:ext cx="949680" cy="290520"/>
+            <a:ext cx="949320" cy="290160"/>
           </a:xfrm>
           <a:prstGeom prst="rect">
             <a:avLst/>
@@ -3766,7 +3765,7 @@
         <p:spPr>
           <a:xfrm>
             <a:off x="10921320" y="0"/>
-            <a:ext cx="1269360" cy="1370520"/>
+            <a:ext cx="1269000" cy="1370160"/>
           </a:xfrm>
           <a:prstGeom prst="rect">
             <a:avLst/>
@@ -3794,8 +3793,8 @@
         </p:blipFill>
         <p:spPr>
           <a:xfrm flipH="1" rot="16200000">
-            <a:off x="47880" y="5535000"/>
-            <a:ext cx="1269360" cy="1370520"/>
+            <a:off x="47520" y="5535000"/>
+            <a:ext cx="1269000" cy="1370160"/>
           </a:xfrm>
           <a:prstGeom prst="rect">
             <a:avLst/>
@@ -3818,7 +3817,7 @@
         <p:spPr>
           <a:xfrm>
             <a:off x="1333440" y="6352560"/>
-            <a:ext cx="7477560" cy="362160"/>
+            <a:ext cx="7477200" cy="361800"/>
           </a:xfrm>
           <a:prstGeom prst="rect">
             <a:avLst/>
@@ -3890,7 +3889,7 @@
         <p:spPr>
           <a:xfrm>
             <a:off x="8966160" y="6352560"/>
-            <a:ext cx="2740320" cy="362160"/>
+            <a:ext cx="2739960" cy="361800"/>
           </a:xfrm>
           <a:prstGeom prst="rect">
             <a:avLst/>
@@ -3933,7 +3932,7 @@
                 <a:tab algn="l" pos="0"/>
               </a:tabLst>
             </a:pPr>
-            <a:fld id="{88F45335-D14D-40D8-91D6-787D1A58C254}" type="slidenum">
+            <a:fld id="{B0B9F55C-E687-46D7-9D53-2F37BA168D27}" type="slidenum">
               <a:rPr b="1" lang="ru-RU" sz="1600" spc="-1" strike="noStrike">
                 <a:solidFill>
                   <a:schemeClr val="dk1">
@@ -4005,7 +4004,7 @@
         <p:spPr>
           <a:xfrm>
             <a:off x="10760040" y="142200"/>
-            <a:ext cx="949680" cy="290520"/>
+            <a:ext cx="949320" cy="290160"/>
           </a:xfrm>
           <a:prstGeom prst="rect">
             <a:avLst/>
@@ -4034,7 +4033,7 @@
         <p:spPr>
           <a:xfrm>
             <a:off x="10921320" y="0"/>
-            <a:ext cx="1269360" cy="1370520"/>
+            <a:ext cx="1269000" cy="1370160"/>
           </a:xfrm>
           <a:prstGeom prst="rect">
             <a:avLst/>
@@ -4062,8 +4061,8 @@
         </p:blipFill>
         <p:spPr>
           <a:xfrm flipH="1" rot="16200000">
-            <a:off x="47880" y="5535000"/>
-            <a:ext cx="1269360" cy="1370520"/>
+            <a:off x="47520" y="5535000"/>
+            <a:ext cx="1269000" cy="1370160"/>
           </a:xfrm>
           <a:prstGeom prst="rect">
             <a:avLst/>
@@ -4086,7 +4085,7 @@
         <p:spPr>
           <a:xfrm>
             <a:off x="1333440" y="6352560"/>
-            <a:ext cx="7477560" cy="362160"/>
+            <a:ext cx="7477200" cy="361800"/>
           </a:xfrm>
           <a:prstGeom prst="rect">
             <a:avLst/>
@@ -4158,7 +4157,7 @@
         <p:spPr>
           <a:xfrm>
             <a:off x="8966160" y="6352560"/>
-            <a:ext cx="2740320" cy="362160"/>
+            <a:ext cx="2739960" cy="361800"/>
           </a:xfrm>
           <a:prstGeom prst="rect">
             <a:avLst/>
@@ -4201,7 +4200,7 @@
                 <a:tab algn="l" pos="0"/>
               </a:tabLst>
             </a:pPr>
-            <a:fld id="{3CE7B35A-134D-4986-BC49-E66694C3A126}" type="slidenum">
+            <a:fld id="{7D5EF9DD-56BD-4ABB-85FD-C3B69F186B65}" type="slidenum">
               <a:rPr b="1" lang="ru-RU" sz="1600" spc="-1" strike="noStrike">
                 <a:solidFill>
                   <a:schemeClr val="dk1">
@@ -4273,7 +4272,7 @@
         <p:spPr>
           <a:xfrm>
             <a:off x="10760040" y="142200"/>
-            <a:ext cx="949680" cy="290520"/>
+            <a:ext cx="949320" cy="290160"/>
           </a:xfrm>
           <a:prstGeom prst="rect">
             <a:avLst/>
@@ -4302,7 +4301,7 @@
         <p:spPr>
           <a:xfrm>
             <a:off x="10921320" y="0"/>
-            <a:ext cx="1269360" cy="1370520"/>
+            <a:ext cx="1269000" cy="1370160"/>
           </a:xfrm>
           <a:prstGeom prst="rect">
             <a:avLst/>
@@ -4330,8 +4329,8 @@
         </p:blipFill>
         <p:spPr>
           <a:xfrm flipH="1" rot="16200000">
-            <a:off x="47880" y="5535000"/>
-            <a:ext cx="1269360" cy="1370520"/>
+            <a:off x="47520" y="5535000"/>
+            <a:ext cx="1269000" cy="1370160"/>
           </a:xfrm>
           <a:prstGeom prst="rect">
             <a:avLst/>
@@ -4354,7 +4353,7 @@
         <p:spPr>
           <a:xfrm>
             <a:off x="1333440" y="6352560"/>
-            <a:ext cx="7477560" cy="362160"/>
+            <a:ext cx="7477200" cy="361800"/>
           </a:xfrm>
           <a:prstGeom prst="rect">
             <a:avLst/>
@@ -4426,7 +4425,7 @@
         <p:spPr>
           <a:xfrm>
             <a:off x="8966160" y="6352560"/>
-            <a:ext cx="2740320" cy="362160"/>
+            <a:ext cx="2739960" cy="361800"/>
           </a:xfrm>
           <a:prstGeom prst="rect">
             <a:avLst/>
@@ -4469,7 +4468,7 @@
                 <a:tab algn="l" pos="0"/>
               </a:tabLst>
             </a:pPr>
-            <a:fld id="{AEBB1408-46F5-4A09-8641-C6431C5EF534}" type="slidenum">
+            <a:fld id="{2EBE3EAC-972B-4B80-AC43-26CC64EBFFE5}" type="slidenum">
               <a:rPr b="1" lang="ru-RU" sz="1600" spc="-1" strike="noStrike">
                 <a:solidFill>
                   <a:schemeClr val="dk1">
@@ -4541,7 +4540,7 @@
         <p:spPr>
           <a:xfrm>
             <a:off x="10760040" y="142200"/>
-            <a:ext cx="949680" cy="290520"/>
+            <a:ext cx="949320" cy="290160"/>
           </a:xfrm>
           <a:prstGeom prst="rect">
             <a:avLst/>
@@ -4570,7 +4569,7 @@
         <p:spPr>
           <a:xfrm>
             <a:off x="10921320" y="0"/>
-            <a:ext cx="1269360" cy="1370520"/>
+            <a:ext cx="1269000" cy="1370160"/>
           </a:xfrm>
           <a:prstGeom prst="rect">
             <a:avLst/>
@@ -4598,8 +4597,8 @@
         </p:blipFill>
         <p:spPr>
           <a:xfrm flipH="1" rot="16200000">
-            <a:off x="47880" y="5535000"/>
-            <a:ext cx="1269360" cy="1370520"/>
+            <a:off x="47520" y="5535000"/>
+            <a:ext cx="1269000" cy="1370160"/>
           </a:xfrm>
           <a:prstGeom prst="rect">
             <a:avLst/>
@@ -4618,7 +4617,7 @@
         <p:spPr>
           <a:xfrm>
             <a:off x="609120" y="240480"/>
-            <a:ext cx="10970640" cy="6301440"/>
+            <a:ext cx="10970280" cy="6301080"/>
           </a:xfrm>
           <a:prstGeom prst="roundRect">
             <a:avLst>
@@ -4697,7 +4696,7 @@
         <p:spPr>
           <a:xfrm>
             <a:off x="820800" y="368280"/>
-            <a:ext cx="3413160" cy="1739880"/>
+            <a:ext cx="3412800" cy="1739520"/>
           </a:xfrm>
           <a:prstGeom prst="rect">
             <a:avLst/>
@@ -4759,7 +4758,7 @@
         <p:spPr>
           <a:xfrm>
             <a:off x="10760040" y="142200"/>
-            <a:ext cx="949680" cy="290520"/>
+            <a:ext cx="949320" cy="290160"/>
           </a:xfrm>
           <a:prstGeom prst="rect">
             <a:avLst/>
@@ -4788,7 +4787,7 @@
         <p:spPr>
           <a:xfrm>
             <a:off x="10921320" y="0"/>
-            <a:ext cx="1269360" cy="1370520"/>
+            <a:ext cx="1269000" cy="1370160"/>
           </a:xfrm>
           <a:prstGeom prst="rect">
             <a:avLst/>
@@ -4816,8 +4815,8 @@
         </p:blipFill>
         <p:spPr>
           <a:xfrm flipH="1" rot="16200000">
-            <a:off x="47880" y="5535000"/>
-            <a:ext cx="1269360" cy="1370520"/>
+            <a:off x="47520" y="5535000"/>
+            <a:ext cx="1269000" cy="1370160"/>
           </a:xfrm>
           <a:prstGeom prst="rect">
             <a:avLst/>
@@ -4840,7 +4839,7 @@
         <p:spPr>
           <a:xfrm>
             <a:off x="1333440" y="6352560"/>
-            <a:ext cx="7477560" cy="362160"/>
+            <a:ext cx="7477200" cy="361800"/>
           </a:xfrm>
           <a:prstGeom prst="rect">
             <a:avLst/>
@@ -4912,7 +4911,7 @@
         <p:spPr>
           <a:xfrm>
             <a:off x="8966160" y="6352560"/>
-            <a:ext cx="2740320" cy="362160"/>
+            <a:ext cx="2739960" cy="361800"/>
           </a:xfrm>
           <a:prstGeom prst="rect">
             <a:avLst/>
@@ -4955,7 +4954,7 @@
                 <a:tab algn="l" pos="0"/>
               </a:tabLst>
             </a:pPr>
-            <a:fld id="{6140CAC7-9AB3-48E4-A8E7-D07D05399FB0}" type="slidenum">
+            <a:fld id="{E8B19105-9D34-4560-B333-88F09D5BBAA0}" type="slidenum">
               <a:rPr b="1" lang="ru-RU" sz="1600" spc="-1" strike="noStrike">
                 <a:solidFill>
                   <a:schemeClr val="dk1">
@@ -5027,7 +5026,7 @@
         <p:spPr>
           <a:xfrm>
             <a:off x="10760040" y="142200"/>
-            <a:ext cx="949680" cy="290520"/>
+            <a:ext cx="949320" cy="290160"/>
           </a:xfrm>
           <a:prstGeom prst="rect">
             <a:avLst/>
@@ -5056,7 +5055,7 @@
         <p:spPr>
           <a:xfrm>
             <a:off x="10921320" y="0"/>
-            <a:ext cx="1269360" cy="1370520"/>
+            <a:ext cx="1269000" cy="1370160"/>
           </a:xfrm>
           <a:prstGeom prst="rect">
             <a:avLst/>
@@ -5084,8 +5083,8 @@
         </p:blipFill>
         <p:spPr>
           <a:xfrm flipH="1" rot="16200000">
-            <a:off x="47880" y="5535000"/>
-            <a:ext cx="1269360" cy="1370520"/>
+            <a:off x="47520" y="5535000"/>
+            <a:ext cx="1269000" cy="1370160"/>
           </a:xfrm>
           <a:prstGeom prst="rect">
             <a:avLst/>
@@ -5108,7 +5107,7 @@
         <p:spPr>
           <a:xfrm>
             <a:off x="1333440" y="6352560"/>
-            <a:ext cx="7477560" cy="362160"/>
+            <a:ext cx="7477200" cy="361800"/>
           </a:xfrm>
           <a:prstGeom prst="rect">
             <a:avLst/>
@@ -5180,7 +5179,7 @@
         <p:spPr>
           <a:xfrm>
             <a:off x="8966160" y="6352560"/>
-            <a:ext cx="2740320" cy="362160"/>
+            <a:ext cx="2739960" cy="361800"/>
           </a:xfrm>
           <a:prstGeom prst="rect">
             <a:avLst/>
@@ -5223,7 +5222,7 @@
                 <a:tab algn="l" pos="0"/>
               </a:tabLst>
             </a:pPr>
-            <a:fld id="{61154FD1-87EE-4A07-8312-895B9079287F}" type="slidenum">
+            <a:fld id="{15B7F20C-4B48-48BE-8E46-18CE3D2CA740}" type="slidenum">
               <a:rPr b="1" lang="ru-RU" sz="1600" spc="-1" strike="noStrike">
                 <a:solidFill>
                   <a:schemeClr val="dk1">
@@ -5295,7 +5294,7 @@
         <p:spPr>
           <a:xfrm>
             <a:off x="10760040" y="142200"/>
-            <a:ext cx="949680" cy="290520"/>
+            <a:ext cx="949320" cy="290160"/>
           </a:xfrm>
           <a:prstGeom prst="rect">
             <a:avLst/>
@@ -5324,7 +5323,7 @@
         <p:spPr>
           <a:xfrm>
             <a:off x="10921320" y="0"/>
-            <a:ext cx="1269360" cy="1370520"/>
+            <a:ext cx="1269000" cy="1370160"/>
           </a:xfrm>
           <a:prstGeom prst="rect">
             <a:avLst/>
@@ -5352,8 +5351,8 @@
         </p:blipFill>
         <p:spPr>
           <a:xfrm flipH="1" rot="16200000">
-            <a:off x="47880" y="5535000"/>
-            <a:ext cx="1269360" cy="1370520"/>
+            <a:off x="47520" y="5535000"/>
+            <a:ext cx="1269000" cy="1370160"/>
           </a:xfrm>
           <a:prstGeom prst="rect">
             <a:avLst/>
@@ -5376,7 +5375,7 @@
         <p:spPr>
           <a:xfrm>
             <a:off x="1333440" y="6352560"/>
-            <a:ext cx="7477560" cy="362160"/>
+            <a:ext cx="7477200" cy="361800"/>
           </a:xfrm>
           <a:prstGeom prst="rect">
             <a:avLst/>
@@ -5448,7 +5447,7 @@
         <p:spPr>
           <a:xfrm>
             <a:off x="8966160" y="6352560"/>
-            <a:ext cx="2740320" cy="362160"/>
+            <a:ext cx="2739960" cy="361800"/>
           </a:xfrm>
           <a:prstGeom prst="rect">
             <a:avLst/>
@@ -5491,7 +5490,7 @@
                 <a:tab algn="l" pos="0"/>
               </a:tabLst>
             </a:pPr>
-            <a:fld id="{DC8CE20E-05CA-415F-BA55-D4A1AA044A4C}" type="slidenum">
+            <a:fld id="{7620C55C-7C49-49D3-A2FA-E38F51041968}" type="slidenum">
               <a:rPr b="1" lang="ru-RU" sz="1600" spc="-1" strike="noStrike">
                 <a:solidFill>
                   <a:schemeClr val="dk1">
@@ -5563,7 +5562,7 @@
         <p:spPr>
           <a:xfrm>
             <a:off x="10760040" y="142200"/>
-            <a:ext cx="949680" cy="290520"/>
+            <a:ext cx="949320" cy="290160"/>
           </a:xfrm>
           <a:prstGeom prst="rect">
             <a:avLst/>
@@ -5592,7 +5591,7 @@
         <p:spPr>
           <a:xfrm>
             <a:off x="10921320" y="0"/>
-            <a:ext cx="1269360" cy="1370520"/>
+            <a:ext cx="1269000" cy="1370160"/>
           </a:xfrm>
           <a:prstGeom prst="rect">
             <a:avLst/>
@@ -5620,8 +5619,8 @@
         </p:blipFill>
         <p:spPr>
           <a:xfrm flipH="1" rot="16200000">
-            <a:off x="47880" y="5535000"/>
-            <a:ext cx="1269360" cy="1370520"/>
+            <a:off x="47520" y="5535000"/>
+            <a:ext cx="1269000" cy="1370160"/>
           </a:xfrm>
           <a:prstGeom prst="rect">
             <a:avLst/>
@@ -5644,7 +5643,7 @@
         <p:spPr>
           <a:xfrm>
             <a:off x="1333440" y="6352560"/>
-            <a:ext cx="7477560" cy="362160"/>
+            <a:ext cx="7477200" cy="361800"/>
           </a:xfrm>
           <a:prstGeom prst="rect">
             <a:avLst/>
@@ -5716,7 +5715,7 @@
         <p:spPr>
           <a:xfrm>
             <a:off x="8966160" y="6352560"/>
-            <a:ext cx="2740320" cy="362160"/>
+            <a:ext cx="2739960" cy="361800"/>
           </a:xfrm>
           <a:prstGeom prst="rect">
             <a:avLst/>
@@ -5759,7 +5758,7 @@
                 <a:tab algn="l" pos="0"/>
               </a:tabLst>
             </a:pPr>
-            <a:fld id="{3AC5427E-104C-4918-90DD-002922EB133C}" type="slidenum">
+            <a:fld id="{EAB38D43-EFC8-4AB8-B137-93017F00253C}" type="slidenum">
               <a:rPr b="1" lang="ru-RU" sz="1600" spc="-1" strike="noStrike">
                 <a:solidFill>
                   <a:schemeClr val="dk1">
@@ -5831,7 +5830,7 @@
         <p:spPr>
           <a:xfrm>
             <a:off x="10760040" y="142200"/>
-            <a:ext cx="949680" cy="290520"/>
+            <a:ext cx="949320" cy="290160"/>
           </a:xfrm>
           <a:prstGeom prst="rect">
             <a:avLst/>
@@ -5860,7 +5859,7 @@
         <p:spPr>
           <a:xfrm>
             <a:off x="10921320" y="0"/>
-            <a:ext cx="1269360" cy="1370520"/>
+            <a:ext cx="1269000" cy="1370160"/>
           </a:xfrm>
           <a:prstGeom prst="rect">
             <a:avLst/>
@@ -5888,8 +5887,8 @@
         </p:blipFill>
         <p:spPr>
           <a:xfrm flipH="1" rot="16200000">
-            <a:off x="47880" y="5535000"/>
-            <a:ext cx="1269360" cy="1370520"/>
+            <a:off x="47520" y="5535000"/>
+            <a:ext cx="1269000" cy="1370160"/>
           </a:xfrm>
           <a:prstGeom prst="rect">
             <a:avLst/>
@@ -5912,7 +5911,7 @@
         <p:spPr>
           <a:xfrm>
             <a:off x="1333440" y="6352560"/>
-            <a:ext cx="7477560" cy="362160"/>
+            <a:ext cx="7477200" cy="361800"/>
           </a:xfrm>
           <a:prstGeom prst="rect">
             <a:avLst/>
@@ -5984,7 +5983,7 @@
         <p:spPr>
           <a:xfrm>
             <a:off x="8966160" y="6352560"/>
-            <a:ext cx="2740320" cy="362160"/>
+            <a:ext cx="2739960" cy="361800"/>
           </a:xfrm>
           <a:prstGeom prst="rect">
             <a:avLst/>
@@ -6027,7 +6026,7 @@
                 <a:tab algn="l" pos="0"/>
               </a:tabLst>
             </a:pPr>
-            <a:fld id="{2547721D-5B71-48C2-B17D-65C1F56F4F69}" type="slidenum">
+            <a:fld id="{264CBB26-B56B-4484-A3F8-9508A4844C96}" type="slidenum">
               <a:rPr b="1" lang="ru-RU" sz="1600" spc="-1" strike="noStrike">
                 <a:solidFill>
                   <a:schemeClr val="dk1">
@@ -6099,7 +6098,7 @@
         <p:spPr>
           <a:xfrm>
             <a:off x="10760040" y="142200"/>
-            <a:ext cx="949680" cy="290520"/>
+            <a:ext cx="949320" cy="290160"/>
           </a:xfrm>
           <a:prstGeom prst="rect">
             <a:avLst/>
@@ -6128,7 +6127,7 @@
         <p:spPr>
           <a:xfrm>
             <a:off x="10921320" y="0"/>
-            <a:ext cx="1269360" cy="1370520"/>
+            <a:ext cx="1269000" cy="1370160"/>
           </a:xfrm>
           <a:prstGeom prst="rect">
             <a:avLst/>
@@ -6156,8 +6155,8 @@
         </p:blipFill>
         <p:spPr>
           <a:xfrm flipH="1" rot="16200000">
-            <a:off x="47880" y="5535000"/>
-            <a:ext cx="1269360" cy="1370520"/>
+            <a:off x="47520" y="5535000"/>
+            <a:ext cx="1269000" cy="1370160"/>
           </a:xfrm>
           <a:prstGeom prst="rect">
             <a:avLst/>
@@ -6180,7 +6179,7 @@
         <p:spPr>
           <a:xfrm>
             <a:off x="1333440" y="6352560"/>
-            <a:ext cx="7477560" cy="362160"/>
+            <a:ext cx="7477200" cy="361800"/>
           </a:xfrm>
           <a:prstGeom prst="rect">
             <a:avLst/>
@@ -6252,7 +6251,7 @@
         <p:spPr>
           <a:xfrm>
             <a:off x="8966160" y="6352560"/>
-            <a:ext cx="2740320" cy="362160"/>
+            <a:ext cx="2739960" cy="361800"/>
           </a:xfrm>
           <a:prstGeom prst="rect">
             <a:avLst/>
@@ -6295,7 +6294,7 @@
                 <a:tab algn="l" pos="0"/>
               </a:tabLst>
             </a:pPr>
-            <a:fld id="{75B3E4B2-CA5C-452F-91C4-7587D755D5C5}" type="slidenum">
+            <a:fld id="{934550F7-47ED-4336-B6A6-BAC367CA938B}" type="slidenum">
               <a:rPr b="1" lang="ru-RU" sz="1600" spc="-1" strike="noStrike">
                 <a:solidFill>
                   <a:schemeClr val="dk1">
@@ -6367,7 +6366,7 @@
         <p:spPr>
           <a:xfrm>
             <a:off x="10760040" y="142200"/>
-            <a:ext cx="949680" cy="290520"/>
+            <a:ext cx="949320" cy="290160"/>
           </a:xfrm>
           <a:prstGeom prst="rect">
             <a:avLst/>
@@ -6396,7 +6395,7 @@
         <p:spPr>
           <a:xfrm>
             <a:off x="10921320" y="0"/>
-            <a:ext cx="1269360" cy="1370520"/>
+            <a:ext cx="1269000" cy="1370160"/>
           </a:xfrm>
           <a:prstGeom prst="rect">
             <a:avLst/>
@@ -6424,8 +6423,8 @@
         </p:blipFill>
         <p:spPr>
           <a:xfrm flipH="1" rot="16200000">
-            <a:off x="47880" y="5535000"/>
-            <a:ext cx="1269360" cy="1370520"/>
+            <a:off x="47520" y="5535000"/>
+            <a:ext cx="1269000" cy="1370160"/>
           </a:xfrm>
           <a:prstGeom prst="rect">
             <a:avLst/>
@@ -6448,7 +6447,7 @@
         <p:spPr>
           <a:xfrm>
             <a:off x="1333440" y="6352560"/>
-            <a:ext cx="7477560" cy="362160"/>
+            <a:ext cx="7477200" cy="361800"/>
           </a:xfrm>
           <a:prstGeom prst="rect">
             <a:avLst/>
@@ -6520,7 +6519,7 @@
         <p:spPr>
           <a:xfrm>
             <a:off x="8966160" y="6352560"/>
-            <a:ext cx="2740320" cy="362160"/>
+            <a:ext cx="2739960" cy="361800"/>
           </a:xfrm>
           <a:prstGeom prst="rect">
             <a:avLst/>
@@ -6563,7 +6562,7 @@
                 <a:tab algn="l" pos="0"/>
               </a:tabLst>
             </a:pPr>
-            <a:fld id="{5D68FB7E-2D2D-4F0E-9502-6AABEF9FD89F}" type="slidenum">
+            <a:fld id="{630A7511-A81B-46FE-A236-92614CF9FA0F}" type="slidenum">
               <a:rPr b="1" lang="ru-RU" sz="1600" spc="-1" strike="noStrike">
                 <a:solidFill>
                   <a:schemeClr val="dk1">
@@ -6678,7 +6677,7 @@
         <p:spPr>
           <a:xfrm>
             <a:off x="4038480" y="6356520"/>
-            <a:ext cx="4109400" cy="359640"/>
+            <a:ext cx="4109040" cy="359280"/>
           </a:xfrm>
           <a:prstGeom prst="rect">
             <a:avLst/>
@@ -6750,7 +6749,7 @@
         <p:spPr>
           <a:xfrm>
             <a:off x="8610480" y="6356520"/>
-            <a:ext cx="2737800" cy="359640"/>
+            <a:ext cx="2737440" cy="359280"/>
           </a:xfrm>
           <a:prstGeom prst="rect">
             <a:avLst/>
@@ -6793,7 +6792,7 @@
                 <a:tab algn="l" pos="0"/>
               </a:tabLst>
             </a:pPr>
-            <a:fld id="{F3E26E10-40A9-4DD0-ABE9-0F3B5E3412DC}" type="slidenum">
+            <a:fld id="{4927D0BC-3E15-4B17-9DFF-4FC9019FB36A}" type="slidenum">
               <a:rPr b="0" lang="ru-RU" sz="1200" spc="-1" strike="noStrike">
                 <a:solidFill>
                   <a:schemeClr val="dk1">
@@ -6826,7 +6825,7 @@
         <p:spPr>
           <a:xfrm>
             <a:off x="838080" y="6356520"/>
-            <a:ext cx="2737800" cy="359640"/>
+            <a:ext cx="2737440" cy="359280"/>
           </a:xfrm>
           <a:prstGeom prst="rect">
             <a:avLst/>
@@ -6925,7 +6924,7 @@
         <p:spPr>
           <a:xfrm>
             <a:off x="10760040" y="142200"/>
-            <a:ext cx="949680" cy="290520"/>
+            <a:ext cx="949320" cy="290160"/>
           </a:xfrm>
           <a:prstGeom prst="rect">
             <a:avLst/>
@@ -6954,7 +6953,7 @@
         <p:spPr>
           <a:xfrm>
             <a:off x="10921320" y="0"/>
-            <a:ext cx="1269360" cy="1370520"/>
+            <a:ext cx="1269000" cy="1370160"/>
           </a:xfrm>
           <a:prstGeom prst="rect">
             <a:avLst/>
@@ -6982,8 +6981,8 @@
         </p:blipFill>
         <p:spPr>
           <a:xfrm flipH="1" rot="16200000">
-            <a:off x="47880" y="5535000"/>
-            <a:ext cx="1269360" cy="1370520"/>
+            <a:off x="47520" y="5535000"/>
+            <a:ext cx="1269000" cy="1370160"/>
           </a:xfrm>
           <a:prstGeom prst="rect">
             <a:avLst/>
@@ -7006,7 +7005,7 @@
         <p:spPr>
           <a:xfrm>
             <a:off x="1333440" y="6352560"/>
-            <a:ext cx="7477560" cy="362160"/>
+            <a:ext cx="7477200" cy="361800"/>
           </a:xfrm>
           <a:prstGeom prst="rect">
             <a:avLst/>
@@ -7078,7 +7077,7 @@
         <p:spPr>
           <a:xfrm>
             <a:off x="8966160" y="6352560"/>
-            <a:ext cx="2740320" cy="362160"/>
+            <a:ext cx="2739960" cy="361800"/>
           </a:xfrm>
           <a:prstGeom prst="rect">
             <a:avLst/>
@@ -7121,7 +7120,7 @@
                 <a:tab algn="l" pos="0"/>
               </a:tabLst>
             </a:pPr>
-            <a:fld id="{6821C09A-5922-4F39-94D9-5B1BFFF0543D}" type="slidenum">
+            <a:fld id="{906B1F20-9193-4076-AA9D-3A042A59D9F6}" type="slidenum">
               <a:rPr b="1" lang="ru-RU" sz="1600" spc="-1" strike="noStrike">
                 <a:solidFill>
                   <a:schemeClr val="dk1">
@@ -7193,7 +7192,7 @@
         <p:spPr>
           <a:xfrm>
             <a:off x="10760040" y="142200"/>
-            <a:ext cx="949680" cy="290520"/>
+            <a:ext cx="949320" cy="290160"/>
           </a:xfrm>
           <a:prstGeom prst="rect">
             <a:avLst/>
@@ -7222,7 +7221,7 @@
         <p:spPr>
           <a:xfrm>
             <a:off x="10921320" y="0"/>
-            <a:ext cx="1269360" cy="1370520"/>
+            <a:ext cx="1269000" cy="1370160"/>
           </a:xfrm>
           <a:prstGeom prst="rect">
             <a:avLst/>
@@ -7250,8 +7249,8 @@
         </p:blipFill>
         <p:spPr>
           <a:xfrm flipH="1" rot="16200000">
-            <a:off x="47880" y="5535000"/>
-            <a:ext cx="1269360" cy="1370520"/>
+            <a:off x="47520" y="5535000"/>
+            <a:ext cx="1269000" cy="1370160"/>
           </a:xfrm>
           <a:prstGeom prst="rect">
             <a:avLst/>
@@ -7274,7 +7273,7 @@
         <p:spPr>
           <a:xfrm>
             <a:off x="1333440" y="6352560"/>
-            <a:ext cx="7477560" cy="362160"/>
+            <a:ext cx="7477200" cy="361800"/>
           </a:xfrm>
           <a:prstGeom prst="rect">
             <a:avLst/>
@@ -7346,7 +7345,7 @@
         <p:spPr>
           <a:xfrm>
             <a:off x="8966160" y="6352560"/>
-            <a:ext cx="2740320" cy="362160"/>
+            <a:ext cx="2739960" cy="361800"/>
           </a:xfrm>
           <a:prstGeom prst="rect">
             <a:avLst/>
@@ -7389,7 +7388,7 @@
                 <a:tab algn="l" pos="0"/>
               </a:tabLst>
             </a:pPr>
-            <a:fld id="{B2B0C85A-7CC2-426D-911D-D7C01B25277D}" type="slidenum">
+            <a:fld id="{79F61C58-6332-4CDF-85A1-9C2832B8A922}" type="slidenum">
               <a:rPr b="1" lang="ru-RU" sz="1600" spc="-1" strike="noStrike">
                 <a:solidFill>
                   <a:schemeClr val="dk1">
@@ -7461,7 +7460,7 @@
         <p:spPr>
           <a:xfrm>
             <a:off x="10760040" y="142200"/>
-            <a:ext cx="949680" cy="290520"/>
+            <a:ext cx="949320" cy="290160"/>
           </a:xfrm>
           <a:prstGeom prst="rect">
             <a:avLst/>
@@ -7490,7 +7489,7 @@
         <p:spPr>
           <a:xfrm>
             <a:off x="10921320" y="0"/>
-            <a:ext cx="1269360" cy="1370520"/>
+            <a:ext cx="1269000" cy="1370160"/>
           </a:xfrm>
           <a:prstGeom prst="rect">
             <a:avLst/>
@@ -7518,8 +7517,8 @@
         </p:blipFill>
         <p:spPr>
           <a:xfrm flipH="1" rot="16200000">
-            <a:off x="47880" y="5535000"/>
-            <a:ext cx="1269360" cy="1370520"/>
+            <a:off x="47520" y="5535000"/>
+            <a:ext cx="1269000" cy="1370160"/>
           </a:xfrm>
           <a:prstGeom prst="rect">
             <a:avLst/>
@@ -7542,7 +7541,7 @@
         <p:spPr>
           <a:xfrm>
             <a:off x="1333440" y="6352560"/>
-            <a:ext cx="7477560" cy="362160"/>
+            <a:ext cx="7477200" cy="361800"/>
           </a:xfrm>
           <a:prstGeom prst="rect">
             <a:avLst/>
@@ -7614,7 +7613,7 @@
         <p:spPr>
           <a:xfrm>
             <a:off x="8966160" y="6352560"/>
-            <a:ext cx="2740320" cy="362160"/>
+            <a:ext cx="2739960" cy="361800"/>
           </a:xfrm>
           <a:prstGeom prst="rect">
             <a:avLst/>
@@ -7657,7 +7656,7 @@
                 <a:tab algn="l" pos="0"/>
               </a:tabLst>
             </a:pPr>
-            <a:fld id="{03B97269-0CC4-4C2B-B655-2648CB6458AF}" type="slidenum">
+            <a:fld id="{8694A231-7226-47E8-8587-508B27B40591}" type="slidenum">
               <a:rPr b="1" lang="ru-RU" sz="1600" spc="-1" strike="noStrike">
                 <a:solidFill>
                   <a:schemeClr val="dk1">
@@ -7729,7 +7728,7 @@
         <p:spPr>
           <a:xfrm>
             <a:off x="10760040" y="142200"/>
-            <a:ext cx="949680" cy="290520"/>
+            <a:ext cx="949320" cy="290160"/>
           </a:xfrm>
           <a:prstGeom prst="rect">
             <a:avLst/>
@@ -7758,7 +7757,7 @@
         <p:spPr>
           <a:xfrm>
             <a:off x="10921320" y="0"/>
-            <a:ext cx="1269360" cy="1370520"/>
+            <a:ext cx="1269000" cy="1370160"/>
           </a:xfrm>
           <a:prstGeom prst="rect">
             <a:avLst/>
@@ -7786,8 +7785,8 @@
         </p:blipFill>
         <p:spPr>
           <a:xfrm flipH="1" rot="16200000">
-            <a:off x="47880" y="5535000"/>
-            <a:ext cx="1269360" cy="1370520"/>
+            <a:off x="47520" y="5535000"/>
+            <a:ext cx="1269000" cy="1370160"/>
           </a:xfrm>
           <a:prstGeom prst="rect">
             <a:avLst/>
@@ -7810,7 +7809,7 @@
         <p:spPr>
           <a:xfrm>
             <a:off x="1333440" y="6352560"/>
-            <a:ext cx="7477560" cy="362160"/>
+            <a:ext cx="7477200" cy="361800"/>
           </a:xfrm>
           <a:prstGeom prst="rect">
             <a:avLst/>
@@ -7882,7 +7881,7 @@
         <p:spPr>
           <a:xfrm>
             <a:off x="8966160" y="6352560"/>
-            <a:ext cx="2740320" cy="362160"/>
+            <a:ext cx="2739960" cy="361800"/>
           </a:xfrm>
           <a:prstGeom prst="rect">
             <a:avLst/>
@@ -7925,7 +7924,7 @@
                 <a:tab algn="l" pos="0"/>
               </a:tabLst>
             </a:pPr>
-            <a:fld id="{0AF5D6AF-04E1-4242-B42A-DBC5FBEDD77D}" type="slidenum">
+            <a:fld id="{37650A27-2B51-4BFC-B38D-BDF8A1C472ED}" type="slidenum">
               <a:rPr b="1" lang="ru-RU" sz="1600" spc="-1" strike="noStrike">
                 <a:solidFill>
                   <a:schemeClr val="dk1">
@@ -7997,7 +7996,7 @@
         <p:spPr>
           <a:xfrm>
             <a:off x="10760040" y="142200"/>
-            <a:ext cx="949680" cy="290520"/>
+            <a:ext cx="949320" cy="290160"/>
           </a:xfrm>
           <a:prstGeom prst="rect">
             <a:avLst/>
@@ -8026,7 +8025,7 @@
         <p:spPr>
           <a:xfrm>
             <a:off x="10921320" y="0"/>
-            <a:ext cx="1269360" cy="1370520"/>
+            <a:ext cx="1269000" cy="1370160"/>
           </a:xfrm>
           <a:prstGeom prst="rect">
             <a:avLst/>
@@ -8054,8 +8053,8 @@
         </p:blipFill>
         <p:spPr>
           <a:xfrm flipH="1" rot="16200000">
-            <a:off x="47880" y="5535000"/>
-            <a:ext cx="1269360" cy="1370520"/>
+            <a:off x="47520" y="5535000"/>
+            <a:ext cx="1269000" cy="1370160"/>
           </a:xfrm>
           <a:prstGeom prst="rect">
             <a:avLst/>
@@ -8078,7 +8077,7 @@
         <p:spPr>
           <a:xfrm>
             <a:off x="1333440" y="6352560"/>
-            <a:ext cx="7477560" cy="362160"/>
+            <a:ext cx="7477200" cy="361800"/>
           </a:xfrm>
           <a:prstGeom prst="rect">
             <a:avLst/>
@@ -8150,7 +8149,7 @@
         <p:spPr>
           <a:xfrm>
             <a:off x="8966160" y="6352560"/>
-            <a:ext cx="2740320" cy="362160"/>
+            <a:ext cx="2739960" cy="361800"/>
           </a:xfrm>
           <a:prstGeom prst="rect">
             <a:avLst/>
@@ -8193,7 +8192,7 @@
                 <a:tab algn="l" pos="0"/>
               </a:tabLst>
             </a:pPr>
-            <a:fld id="{0271A9C8-8DD1-4AE0-B951-8E68B5B0BCEB}" type="slidenum">
+            <a:fld id="{5C160BFD-EFBD-410F-948D-DED124BD0913}" type="slidenum">
               <a:rPr b="1" lang="ru-RU" sz="1600" spc="-1" strike="noStrike">
                 <a:solidFill>
                   <a:schemeClr val="dk1">
@@ -8265,7 +8264,7 @@
         <p:spPr>
           <a:xfrm>
             <a:off x="10760040" y="142200"/>
-            <a:ext cx="949680" cy="290520"/>
+            <a:ext cx="949320" cy="290160"/>
           </a:xfrm>
           <a:prstGeom prst="rect">
             <a:avLst/>
@@ -8294,7 +8293,7 @@
         <p:spPr>
           <a:xfrm>
             <a:off x="10921320" y="0"/>
-            <a:ext cx="1269360" cy="1370520"/>
+            <a:ext cx="1269000" cy="1370160"/>
           </a:xfrm>
           <a:prstGeom prst="rect">
             <a:avLst/>
@@ -8322,8 +8321,8 @@
         </p:blipFill>
         <p:spPr>
           <a:xfrm flipH="1" rot="16200000">
-            <a:off x="47880" y="5535000"/>
-            <a:ext cx="1269360" cy="1370520"/>
+            <a:off x="47520" y="5535000"/>
+            <a:ext cx="1269000" cy="1370160"/>
           </a:xfrm>
           <a:prstGeom prst="rect">
             <a:avLst/>
@@ -8346,7 +8345,7 @@
         <p:spPr>
           <a:xfrm>
             <a:off x="1333440" y="6352560"/>
-            <a:ext cx="7477560" cy="362160"/>
+            <a:ext cx="7477200" cy="361800"/>
           </a:xfrm>
           <a:prstGeom prst="rect">
             <a:avLst/>
@@ -8418,7 +8417,7 @@
         <p:spPr>
           <a:xfrm>
             <a:off x="8966160" y="6352560"/>
-            <a:ext cx="2740320" cy="362160"/>
+            <a:ext cx="2739960" cy="361800"/>
           </a:xfrm>
           <a:prstGeom prst="rect">
             <a:avLst/>
@@ -8461,7 +8460,7 @@
                 <a:tab algn="l" pos="0"/>
               </a:tabLst>
             </a:pPr>
-            <a:fld id="{6540EA68-1B75-4664-83D4-B7BF36AEA4A1}" type="slidenum">
+            <a:fld id="{72A04601-C6EF-45BE-A000-82888EE84F69}" type="slidenum">
               <a:rPr b="1" lang="ru-RU" sz="1600" spc="-1" strike="noStrike">
                 <a:solidFill>
                   <a:schemeClr val="dk1">
@@ -8533,7 +8532,7 @@
         <p:spPr>
           <a:xfrm>
             <a:off x="10760040" y="142200"/>
-            <a:ext cx="949680" cy="290520"/>
+            <a:ext cx="949320" cy="290160"/>
           </a:xfrm>
           <a:prstGeom prst="rect">
             <a:avLst/>
@@ -8562,7 +8561,7 @@
         <p:spPr>
           <a:xfrm>
             <a:off x="10921320" y="0"/>
-            <a:ext cx="1269360" cy="1370520"/>
+            <a:ext cx="1269000" cy="1370160"/>
           </a:xfrm>
           <a:prstGeom prst="rect">
             <a:avLst/>
@@ -8590,8 +8589,8 @@
         </p:blipFill>
         <p:spPr>
           <a:xfrm flipH="1" rot="16200000">
-            <a:off x="47880" y="5535000"/>
-            <a:ext cx="1269360" cy="1370520"/>
+            <a:off x="47520" y="5535000"/>
+            <a:ext cx="1269000" cy="1370160"/>
           </a:xfrm>
           <a:prstGeom prst="rect">
             <a:avLst/>
@@ -8614,7 +8613,7 @@
         <p:spPr>
           <a:xfrm>
             <a:off x="1333440" y="6352560"/>
-            <a:ext cx="7477560" cy="362160"/>
+            <a:ext cx="7477200" cy="361800"/>
           </a:xfrm>
           <a:prstGeom prst="rect">
             <a:avLst/>
@@ -8686,7 +8685,7 @@
         <p:spPr>
           <a:xfrm>
             <a:off x="8966160" y="6352560"/>
-            <a:ext cx="2740320" cy="362160"/>
+            <a:ext cx="2739960" cy="361800"/>
           </a:xfrm>
           <a:prstGeom prst="rect">
             <a:avLst/>
@@ -8729,7 +8728,7 @@
                 <a:tab algn="l" pos="0"/>
               </a:tabLst>
             </a:pPr>
-            <a:fld id="{170C8F35-431A-4775-908B-E5C178E7348D}" type="slidenum">
+            <a:fld id="{6248B1B5-71B9-4B33-94E2-1D97519170F5}" type="slidenum">
               <a:rPr b="1" lang="ru-RU" sz="1600" spc="-1" strike="noStrike">
                 <a:solidFill>
                   <a:schemeClr val="dk1">
@@ -8788,7 +8787,7 @@
         <p:spPr>
           <a:xfrm>
             <a:off x="3759120" y="5218920"/>
-            <a:ext cx="7820640" cy="743760"/>
+            <a:ext cx="7820280" cy="743400"/>
           </a:xfrm>
           <a:prstGeom prst="rect">
             <a:avLst/>
@@ -8902,7 +8901,7 @@
             </a:endParaRPr>
           </a:p>
           <a:p>
-            <a:pPr indent="0">
+            <a:pPr indent="0" defTabSz="914400">
               <a:lnSpc>
                 <a:spcPct val="100000"/>
               </a:lnSpc>
@@ -8910,6 +8909,9 @@
                 <a:spcPts val="516"/>
               </a:spcAft>
               <a:buNone/>
+              <a:tabLst>
+                <a:tab algn="l" pos="0"/>
+              </a:tabLst>
             </a:pPr>
             <a:r>
               <a:rPr b="1" lang="ru-RU" sz="1600" spc="-1" strike="noStrike">
@@ -8921,11 +8923,10 @@
               </a:rPr>
               <a:t>ст. преподаватель Колобенина Дарья Сергеевна</a:t>
             </a:r>
-            <a:endParaRPr b="0" lang="ru-RU" sz="1600" spc="-1" strike="noStrike" u="sng">
+            <a:endParaRPr b="0" lang="ru-RU" sz="1600" spc="-1" strike="noStrike">
               <a:solidFill>
                 <a:srgbClr val="000000"/>
               </a:solidFill>
-              <a:uFillTx/>
               <a:latin typeface="Arial"/>
             </a:endParaRPr>
           </a:p>
@@ -8944,7 +8945,7 @@
         <p:spPr>
           <a:xfrm>
             <a:off x="3759120" y="4242240"/>
-            <a:ext cx="7820640" cy="771120"/>
+            <a:ext cx="7820280" cy="770760"/>
           </a:xfrm>
           <a:prstGeom prst="rect">
             <a:avLst/>
@@ -9055,7 +9056,7 @@
         <p:spPr>
           <a:xfrm>
             <a:off x="3600000" y="1620000"/>
-            <a:ext cx="6920640" cy="1849680"/>
+            <a:ext cx="6920280" cy="1849320"/>
           </a:xfrm>
           <a:prstGeom prst="rect">
             <a:avLst/>
@@ -9131,39 +9132,16 @@
           <a:chExt cx="0" cy="0"/>
         </a:xfrm>
       </p:grpSpPr>
-      <p:pic>
-        <p:nvPicPr>
-          <p:cNvPr id="153" name="" descr=""/>
-          <p:cNvPicPr/>
-          <p:nvPr/>
-        </p:nvPicPr>
-        <p:blipFill>
-          <a:blip r:embed="rId1"/>
-          <a:stretch/>
-        </p:blipFill>
-        <p:spPr>
-          <a:xfrm>
-            <a:off x="180000" y="936360"/>
-            <a:ext cx="10517400" cy="3203280"/>
-          </a:xfrm>
-          <a:prstGeom prst="rect">
-            <a:avLst/>
-          </a:prstGeom>
-          <a:ln w="0">
-            <a:noFill/>
-          </a:ln>
-        </p:spPr>
-      </p:pic>
       <p:sp>
         <p:nvSpPr>
-          <p:cNvPr id="154" name="PlaceHolder 9"/>
+          <p:cNvPr id="152" name="PlaceHolder 14"/>
           <p:cNvSpPr/>
           <p:nvPr/>
         </p:nvSpPr>
         <p:spPr>
           <a:xfrm>
-            <a:off x="0" y="-36000"/>
-            <a:ext cx="7559640" cy="717840"/>
+            <a:off x="0" y="0"/>
+            <a:ext cx="6479280" cy="717480"/>
           </a:xfrm>
           <a:prstGeom prst="rect">
             <a:avLst/>
@@ -9200,9 +9178,728 @@
                 <a:latin typeface="Montserrat SemiBold"/>
                 <a:ea typeface="Microsoft YaHei"/>
               </a:rPr>
-              <a:t>Архитектура модуля FastAPI</a:t>
+              <a:t>Архитектура ИИ модели</a:t>
             </a:r>
             <a:endParaRPr b="0" lang="ru-RU" sz="3600" spc="-1" strike="noStrike">
+              <a:solidFill>
+                <a:srgbClr val="000000"/>
+              </a:solidFill>
+              <a:latin typeface="Arial"/>
+            </a:endParaRPr>
+          </a:p>
+        </p:txBody>
+      </p:sp>
+      <p:sp>
+        <p:nvSpPr>
+          <p:cNvPr id="153" name=""/>
+          <p:cNvSpPr/>
+          <p:nvPr/>
+        </p:nvSpPr>
+        <p:spPr>
+          <a:xfrm>
+            <a:off x="360000" y="867240"/>
+            <a:ext cx="5939280" cy="5848560"/>
+          </a:xfrm>
+          <a:prstGeom prst="rect">
+            <a:avLst/>
+          </a:prstGeom>
+          <a:noFill/>
+          <a:ln w="0">
+            <a:noFill/>
+          </a:ln>
+        </p:spPr>
+        <p:style>
+          <a:lnRef idx="0"/>
+          <a:fillRef idx="0"/>
+          <a:effectRef idx="0"/>
+          <a:fontRef idx="minor"/>
+        </p:style>
+        <p:txBody>
+          <a:bodyPr lIns="90000" rIns="90000" tIns="45000" bIns="45000" anchor="t">
+            <a:noAutofit/>
+          </a:bodyPr>
+          <a:p>
+            <a:pPr>
+              <a:lnSpc>
+                <a:spcPct val="100000"/>
+              </a:lnSpc>
+              <a:spcBef>
+                <a:spcPts val="907"/>
+              </a:spcBef>
+              <a:spcAft>
+                <a:spcPts val="709"/>
+              </a:spcAft>
+            </a:pPr>
+            <a:r>
+              <a:rPr b="0" lang="ru-RU" sz="1400" spc="-1" strike="noStrike">
+                <a:solidFill>
+                  <a:srgbClr val="000000"/>
+                </a:solidFill>
+                <a:latin typeface="Montserrat SemiBold"/>
+              </a:rPr>
+              <a:t>1. Главный класс – SupplierRiskModel</a:t>
+            </a:r>
+            <a:endParaRPr b="0" lang="ru-RU" sz="1400" spc="-1" strike="noStrike">
+              <a:solidFill>
+                <a:srgbClr val="000000"/>
+              </a:solidFill>
+              <a:latin typeface="Arial"/>
+            </a:endParaRPr>
+          </a:p>
+          <a:p>
+            <a:pPr>
+              <a:lnSpc>
+                <a:spcPct val="100000"/>
+              </a:lnSpc>
+              <a:spcBef>
+                <a:spcPts val="907"/>
+              </a:spcBef>
+              <a:spcAft>
+                <a:spcPts val="709"/>
+              </a:spcAft>
+            </a:pPr>
+            <a:r>
+              <a:rPr b="0" lang="ru-RU" sz="1400" spc="-1" strike="noStrike">
+                <a:solidFill>
+                  <a:srgbClr val="000000"/>
+                </a:solidFill>
+                <a:latin typeface="Montserrat"/>
+              </a:rPr>
+              <a:t>    </a:t>
+            </a:r>
+            <a:r>
+              <a:rPr b="0" lang="ru-RU" sz="1400" spc="-1" strike="noStrike">
+                <a:solidFill>
+                  <a:srgbClr val="000000"/>
+                </a:solidFill>
+                <a:latin typeface="Montserrat"/>
+              </a:rPr>
+              <a:t>train_high_accuracy_model() – обучить модель</a:t>
+            </a:r>
+            <a:endParaRPr b="0" lang="ru-RU" sz="1400" spc="-1" strike="noStrike">
+              <a:solidFill>
+                <a:srgbClr val="000000"/>
+              </a:solidFill>
+              <a:latin typeface="Arial"/>
+            </a:endParaRPr>
+          </a:p>
+          <a:p>
+            <a:pPr>
+              <a:lnSpc>
+                <a:spcPct val="100000"/>
+              </a:lnSpc>
+              <a:spcBef>
+                <a:spcPts val="907"/>
+              </a:spcBef>
+              <a:spcAft>
+                <a:spcPts val="709"/>
+              </a:spcAft>
+            </a:pPr>
+            <a:r>
+              <a:rPr b="0" lang="ru-RU" sz="1400" spc="-1" strike="noStrike">
+                <a:solidFill>
+                  <a:srgbClr val="000000"/>
+                </a:solidFill>
+                <a:latin typeface="Montserrat"/>
+              </a:rPr>
+              <a:t>    </a:t>
+            </a:r>
+            <a:r>
+              <a:rPr b="0" lang="ru-RU" sz="1400" spc="-1" strike="noStrike">
+                <a:solidFill>
+                  <a:srgbClr val="000000"/>
+                </a:solidFill>
+                <a:latin typeface="Montserrat"/>
+              </a:rPr>
+              <a:t>predict_risk() – предсказать риск для нового поставщика</a:t>
+            </a:r>
+            <a:endParaRPr b="0" lang="ru-RU" sz="1400" spc="-1" strike="noStrike">
+              <a:solidFill>
+                <a:srgbClr val="000000"/>
+              </a:solidFill>
+              <a:latin typeface="Arial"/>
+            </a:endParaRPr>
+          </a:p>
+          <a:p>
+            <a:pPr>
+              <a:lnSpc>
+                <a:spcPct val="100000"/>
+              </a:lnSpc>
+              <a:spcBef>
+                <a:spcPts val="907"/>
+              </a:spcBef>
+              <a:spcAft>
+                <a:spcPts val="709"/>
+              </a:spcAft>
+            </a:pPr>
+            <a:r>
+              <a:rPr b="0" lang="ru-RU" sz="1400" spc="-1" strike="noStrike">
+                <a:solidFill>
+                  <a:srgbClr val="000000"/>
+                </a:solidFill>
+                <a:latin typeface="Montserrat"/>
+              </a:rPr>
+              <a:t>    </a:t>
+            </a:r>
+            <a:r>
+              <a:rPr b="0" lang="ru-RU" sz="1400" spc="-1" strike="noStrike">
+                <a:solidFill>
+                  <a:srgbClr val="000000"/>
+                </a:solidFill>
+                <a:latin typeface="Montserrat"/>
+              </a:rPr>
+              <a:t>save_model() / load_model() – сохранить и загрузить</a:t>
+            </a:r>
+            <a:endParaRPr b="0" lang="ru-RU" sz="1400" spc="-1" strike="noStrike">
+              <a:solidFill>
+                <a:srgbClr val="000000"/>
+              </a:solidFill>
+              <a:latin typeface="Arial"/>
+            </a:endParaRPr>
+          </a:p>
+          <a:p>
+            <a:pPr>
+              <a:lnSpc>
+                <a:spcPct val="100000"/>
+              </a:lnSpc>
+              <a:spcBef>
+                <a:spcPts val="907"/>
+              </a:spcBef>
+              <a:spcAft>
+                <a:spcPts val="709"/>
+              </a:spcAft>
+            </a:pPr>
+            <a:r>
+              <a:rPr b="0" lang="ru-RU" sz="1400" spc="-1" strike="noStrike">
+                <a:solidFill>
+                  <a:srgbClr val="000000"/>
+                </a:solidFill>
+                <a:latin typeface="Montserrat SemiBold"/>
+                <a:ea typeface="Microsoft YaHei"/>
+              </a:rPr>
+              <a:t>2. Тип модели</a:t>
+            </a:r>
+            <a:endParaRPr b="0" lang="ru-RU" sz="1400" spc="-1" strike="noStrike">
+              <a:solidFill>
+                <a:srgbClr val="000000"/>
+              </a:solidFill>
+              <a:latin typeface="Arial"/>
+            </a:endParaRPr>
+          </a:p>
+          <a:p>
+            <a:pPr>
+              <a:lnSpc>
+                <a:spcPct val="100000"/>
+              </a:lnSpc>
+              <a:spcBef>
+                <a:spcPts val="907"/>
+              </a:spcBef>
+              <a:spcAft>
+                <a:spcPts val="709"/>
+              </a:spcAft>
+            </a:pPr>
+            <a:r>
+              <a:rPr b="0" lang="ru-RU" sz="1400" spc="-1" strike="noStrike">
+                <a:solidFill>
+                  <a:srgbClr val="000000"/>
+                </a:solidFill>
+                <a:latin typeface="Montserrat"/>
+                <a:ea typeface="Microsoft YaHei"/>
+              </a:rPr>
+              <a:t>    </a:t>
+            </a:r>
+            <a:r>
+              <a:rPr b="0" lang="ru-RU" sz="1400" spc="-1" strike="noStrike">
+                <a:solidFill>
+                  <a:srgbClr val="000000"/>
+                </a:solidFill>
+                <a:latin typeface="Montserrat"/>
+                <a:ea typeface="Microsoft YaHei"/>
+              </a:rPr>
+              <a:t>Ансамблевый классификатор (StackingClassifier)</a:t>
+            </a:r>
+            <a:endParaRPr b="0" lang="ru-RU" sz="1400" spc="-1" strike="noStrike">
+              <a:solidFill>
+                <a:srgbClr val="000000"/>
+              </a:solidFill>
+              <a:latin typeface="Arial"/>
+            </a:endParaRPr>
+          </a:p>
+          <a:p>
+            <a:pPr>
+              <a:lnSpc>
+                <a:spcPct val="100000"/>
+              </a:lnSpc>
+              <a:spcBef>
+                <a:spcPts val="907"/>
+              </a:spcBef>
+              <a:spcAft>
+                <a:spcPts val="709"/>
+              </a:spcAft>
+            </a:pPr>
+            <a:r>
+              <a:rPr b="0" lang="ru-RU" sz="1400" spc="-1" strike="noStrike">
+                <a:solidFill>
+                  <a:srgbClr val="000000"/>
+                </a:solidFill>
+                <a:latin typeface="Montserrat"/>
+                <a:ea typeface="Microsoft YaHei"/>
+              </a:rPr>
+              <a:t>    </a:t>
+            </a:r>
+            <a:r>
+              <a:rPr b="0" lang="ru-RU" sz="1400" spc="-1" strike="noStrike">
+                <a:solidFill>
+                  <a:srgbClr val="000000"/>
+                </a:solidFill>
+                <a:latin typeface="Montserrat"/>
+                <a:ea typeface="Microsoft YaHei"/>
+              </a:rPr>
+              <a:t>Объединяет 4 алгоритма машинного обучения в один комплексный-алгоритм:</a:t>
+            </a:r>
+            <a:endParaRPr b="0" lang="ru-RU" sz="1400" spc="-1" strike="noStrike">
+              <a:solidFill>
+                <a:srgbClr val="000000"/>
+              </a:solidFill>
+              <a:latin typeface="Arial"/>
+            </a:endParaRPr>
+          </a:p>
+          <a:p>
+            <a:pPr lvl="2" marL="648000" indent="-216000">
+              <a:lnSpc>
+                <a:spcPct val="100000"/>
+              </a:lnSpc>
+              <a:spcBef>
+                <a:spcPts val="907"/>
+              </a:spcBef>
+              <a:spcAft>
+                <a:spcPts val="709"/>
+              </a:spcAft>
+              <a:buClr>
+                <a:srgbClr val="000000"/>
+              </a:buClr>
+              <a:buSzPct val="45000"/>
+              <a:buFont typeface="Wingdings" charset="2"/>
+              <a:buChar char=""/>
+            </a:pPr>
+            <a:r>
+              <a:rPr b="0" lang="ru-RU" sz="1400" spc="-1" strike="noStrike">
+                <a:solidFill>
+                  <a:srgbClr val="000000"/>
+                </a:solidFill>
+                <a:latin typeface="Montserrat"/>
+                <a:ea typeface="Microsoft YaHei"/>
+              </a:rPr>
+              <a:t>RandomForest (300 деревьев)</a:t>
+            </a:r>
+            <a:endParaRPr b="0" lang="ru-RU" sz="1400" spc="-1" strike="noStrike">
+              <a:solidFill>
+                <a:srgbClr val="000000"/>
+              </a:solidFill>
+              <a:latin typeface="Arial"/>
+            </a:endParaRPr>
+          </a:p>
+          <a:p>
+            <a:pPr lvl="2" marL="648000" indent="-216000">
+              <a:lnSpc>
+                <a:spcPct val="100000"/>
+              </a:lnSpc>
+              <a:spcBef>
+                <a:spcPts val="907"/>
+              </a:spcBef>
+              <a:spcAft>
+                <a:spcPts val="709"/>
+              </a:spcAft>
+              <a:buClr>
+                <a:srgbClr val="000000"/>
+              </a:buClr>
+              <a:buSzPct val="45000"/>
+              <a:buFont typeface="Wingdings" charset="2"/>
+              <a:buChar char=""/>
+            </a:pPr>
+            <a:r>
+              <a:rPr b="0" lang="ru-RU" sz="1400" spc="-1" strike="noStrike">
+                <a:solidFill>
+                  <a:srgbClr val="000000"/>
+                </a:solidFill>
+                <a:latin typeface="Montserrat"/>
+                <a:ea typeface="Microsoft YaHei"/>
+              </a:rPr>
+              <a:t>BalancedRandomForest (200 деревьев)</a:t>
+            </a:r>
+            <a:endParaRPr b="0" lang="ru-RU" sz="1400" spc="-1" strike="noStrike">
+              <a:solidFill>
+                <a:srgbClr val="000000"/>
+              </a:solidFill>
+              <a:latin typeface="Arial"/>
+            </a:endParaRPr>
+          </a:p>
+          <a:p>
+            <a:pPr lvl="2" marL="648000" indent="-216000">
+              <a:lnSpc>
+                <a:spcPct val="100000"/>
+              </a:lnSpc>
+              <a:spcBef>
+                <a:spcPts val="907"/>
+              </a:spcBef>
+              <a:spcAft>
+                <a:spcPts val="709"/>
+              </a:spcAft>
+              <a:buClr>
+                <a:srgbClr val="000000"/>
+              </a:buClr>
+              <a:buSzPct val="45000"/>
+              <a:buFont typeface="Wingdings" charset="2"/>
+              <a:buChar char=""/>
+            </a:pPr>
+            <a:r>
+              <a:rPr b="0" lang="ru-RU" sz="1400" spc="-1" strike="noStrike">
+                <a:solidFill>
+                  <a:srgbClr val="000000"/>
+                </a:solidFill>
+                <a:latin typeface="Montserrat"/>
+                <a:ea typeface="Microsoft YaHei"/>
+              </a:rPr>
+              <a:t>XGBoost (300 итераций)</a:t>
+            </a:r>
+            <a:endParaRPr b="0" lang="ru-RU" sz="1400" spc="-1" strike="noStrike">
+              <a:solidFill>
+                <a:srgbClr val="000000"/>
+              </a:solidFill>
+              <a:latin typeface="Arial"/>
+            </a:endParaRPr>
+          </a:p>
+          <a:p>
+            <a:pPr lvl="2" marL="648000" indent="-216000">
+              <a:lnSpc>
+                <a:spcPct val="100000"/>
+              </a:lnSpc>
+              <a:spcBef>
+                <a:spcPts val="907"/>
+              </a:spcBef>
+              <a:spcAft>
+                <a:spcPts val="709"/>
+              </a:spcAft>
+              <a:buClr>
+                <a:srgbClr val="000000"/>
+              </a:buClr>
+              <a:buSzPct val="45000"/>
+              <a:buFont typeface="Wingdings" charset="2"/>
+              <a:buChar char=""/>
+            </a:pPr>
+            <a:r>
+              <a:rPr b="0" lang="ru-RU" sz="1400" spc="-1" strike="noStrike">
+                <a:solidFill>
+                  <a:srgbClr val="000000"/>
+                </a:solidFill>
+                <a:latin typeface="Montserrat"/>
+                <a:ea typeface="Microsoft YaHei"/>
+              </a:rPr>
+              <a:t>GradientBoosting (300 итераций)</a:t>
+            </a:r>
+            <a:endParaRPr b="0" lang="ru-RU" sz="1400" spc="-1" strike="noStrike">
+              <a:solidFill>
+                <a:srgbClr val="000000"/>
+              </a:solidFill>
+              <a:latin typeface="Arial"/>
+            </a:endParaRPr>
+          </a:p>
+          <a:p>
+            <a:pPr lvl="2" marL="648000" indent="-216000">
+              <a:lnSpc>
+                <a:spcPct val="100000"/>
+              </a:lnSpc>
+              <a:spcBef>
+                <a:spcPts val="907"/>
+              </a:spcBef>
+              <a:spcAft>
+                <a:spcPts val="709"/>
+              </a:spcAft>
+              <a:buClr>
+                <a:srgbClr val="000000"/>
+              </a:buClr>
+              <a:buSzPct val="45000"/>
+              <a:buFont typeface="Wingdings" charset="2"/>
+              <a:buChar char=""/>
+            </a:pPr>
+            <a:r>
+              <a:rPr b="0" lang="ru-RU" sz="1400" spc="-1" strike="noStrike">
+                <a:solidFill>
+                  <a:srgbClr val="000000"/>
+                </a:solidFill>
+                <a:latin typeface="Montserrat"/>
+                <a:ea typeface="Microsoft YaHei"/>
+              </a:rPr>
+              <a:t>Далее данные попадают в Мета-модель LogisticRegression</a:t>
+            </a:r>
+            <a:endParaRPr b="0" lang="ru-RU" sz="1400" spc="-1" strike="noStrike">
+              <a:solidFill>
+                <a:srgbClr val="000000"/>
+              </a:solidFill>
+              <a:latin typeface="Arial"/>
+            </a:endParaRPr>
+          </a:p>
+          <a:p>
+            <a:pPr>
+              <a:lnSpc>
+                <a:spcPct val="100000"/>
+              </a:lnSpc>
+              <a:spcBef>
+                <a:spcPts val="1191"/>
+              </a:spcBef>
+              <a:spcAft>
+                <a:spcPts val="992"/>
+              </a:spcAft>
+            </a:pPr>
+            <a:endParaRPr b="0" lang="ru-RU" sz="1400" spc="-1" strike="noStrike">
+              <a:solidFill>
+                <a:srgbClr val="000000"/>
+              </a:solidFill>
+              <a:latin typeface="Arial"/>
+            </a:endParaRPr>
+          </a:p>
+        </p:txBody>
+      </p:sp>
+      <p:sp>
+        <p:nvSpPr>
+          <p:cNvPr id="154" name=""/>
+          <p:cNvSpPr/>
+          <p:nvPr/>
+        </p:nvSpPr>
+        <p:spPr>
+          <a:xfrm>
+            <a:off x="6300000" y="867240"/>
+            <a:ext cx="5399280" cy="5225760"/>
+          </a:xfrm>
+          <a:prstGeom prst="rect">
+            <a:avLst/>
+          </a:prstGeom>
+          <a:noFill/>
+          <a:ln w="0">
+            <a:noFill/>
+          </a:ln>
+        </p:spPr>
+        <p:style>
+          <a:lnRef idx="0"/>
+          <a:fillRef idx="0"/>
+          <a:effectRef idx="0"/>
+          <a:fontRef idx="minor"/>
+        </p:style>
+        <p:txBody>
+          <a:bodyPr lIns="90000" rIns="90000" tIns="45000" bIns="45000" anchor="t">
+            <a:noAutofit/>
+          </a:bodyPr>
+          <a:p>
+            <a:pPr>
+              <a:lnSpc>
+                <a:spcPct val="100000"/>
+              </a:lnSpc>
+              <a:spcBef>
+                <a:spcPts val="907"/>
+              </a:spcBef>
+              <a:spcAft>
+                <a:spcPts val="709"/>
+              </a:spcAft>
+            </a:pPr>
+            <a:r>
+              <a:rPr b="0" lang="ru-RU" sz="1400" spc="-1" strike="noStrike">
+                <a:solidFill>
+                  <a:srgbClr val="000000"/>
+                </a:solidFill>
+                <a:latin typeface="Montserrat SemiBold"/>
+              </a:rPr>
+              <a:t>3. Анализируемые признаки</a:t>
+            </a:r>
+            <a:endParaRPr b="0" lang="ru-RU" sz="1400" spc="-1" strike="noStrike">
+              <a:solidFill>
+                <a:srgbClr val="000000"/>
+              </a:solidFill>
+              <a:latin typeface="Arial"/>
+            </a:endParaRPr>
+          </a:p>
+          <a:p>
+            <a:pPr lvl="1" marL="432000" indent="-216000">
+              <a:lnSpc>
+                <a:spcPct val="100000"/>
+              </a:lnSpc>
+              <a:spcBef>
+                <a:spcPts val="907"/>
+              </a:spcBef>
+              <a:spcAft>
+                <a:spcPts val="709"/>
+              </a:spcAft>
+              <a:buClr>
+                <a:srgbClr val="000000"/>
+              </a:buClr>
+              <a:buSzPct val="45000"/>
+              <a:buFont typeface="Wingdings" charset="2"/>
+              <a:buChar char=""/>
+            </a:pPr>
+            <a:r>
+              <a:rPr b="0" lang="ru-RU" sz="1400" spc="-1" strike="noStrike">
+                <a:solidFill>
+                  <a:srgbClr val="000000"/>
+                </a:solidFill>
+                <a:latin typeface="Montserrat"/>
+              </a:rPr>
+              <a:t>Финансовые - Убытки, нулевая выручка, отсутствие прибыли</a:t>
+            </a:r>
+            <a:endParaRPr b="0" lang="ru-RU" sz="1400" spc="-1" strike="noStrike">
+              <a:solidFill>
+                <a:srgbClr val="000000"/>
+              </a:solidFill>
+              <a:latin typeface="Arial"/>
+            </a:endParaRPr>
+          </a:p>
+          <a:p>
+            <a:pPr lvl="1" marL="432000" indent="-216000">
+              <a:lnSpc>
+                <a:spcPct val="100000"/>
+              </a:lnSpc>
+              <a:spcBef>
+                <a:spcPts val="907"/>
+              </a:spcBef>
+              <a:spcAft>
+                <a:spcPts val="709"/>
+              </a:spcAft>
+              <a:buClr>
+                <a:srgbClr val="000000"/>
+              </a:buClr>
+              <a:buSzPct val="45000"/>
+              <a:buFont typeface="Wingdings" charset="2"/>
+              <a:buChar char=""/>
+            </a:pPr>
+            <a:r>
+              <a:rPr b="0" lang="ru-RU" sz="1400" spc="-1" strike="noStrike">
+                <a:solidFill>
+                  <a:srgbClr val="000000"/>
+                </a:solidFill>
+                <a:latin typeface="Montserrat"/>
+              </a:rPr>
+              <a:t>Юридические - Дела о банкротстве, исполнительные производства</a:t>
+            </a:r>
+            <a:endParaRPr b="0" lang="ru-RU" sz="1400" spc="-1" strike="noStrike">
+              <a:solidFill>
+                <a:srgbClr val="000000"/>
+              </a:solidFill>
+              <a:latin typeface="Arial"/>
+            </a:endParaRPr>
+          </a:p>
+          <a:p>
+            <a:pPr lvl="1" marL="432000" indent="-216000">
+              <a:lnSpc>
+                <a:spcPct val="100000"/>
+              </a:lnSpc>
+              <a:spcBef>
+                <a:spcPts val="907"/>
+              </a:spcBef>
+              <a:spcAft>
+                <a:spcPts val="709"/>
+              </a:spcAft>
+              <a:buClr>
+                <a:srgbClr val="000000"/>
+              </a:buClr>
+              <a:buSzPct val="45000"/>
+              <a:buFont typeface="Wingdings" charset="2"/>
+              <a:buChar char=""/>
+            </a:pPr>
+            <a:r>
+              <a:rPr b="0" lang="ru-RU" sz="1400" spc="-1" strike="noStrike">
+                <a:solidFill>
+                  <a:srgbClr val="000000"/>
+                </a:solidFill>
+                <a:latin typeface="Montserrat"/>
+              </a:rPr>
+              <a:t>Репутационные - Массовый адрес, массовый руководитель</a:t>
+            </a:r>
+            <a:endParaRPr b="0" lang="ru-RU" sz="1400" spc="-1" strike="noStrike">
+              <a:solidFill>
+                <a:srgbClr val="000000"/>
+              </a:solidFill>
+              <a:latin typeface="Arial"/>
+            </a:endParaRPr>
+          </a:p>
+          <a:p>
+            <a:pPr lvl="1" marL="432000" indent="-216000">
+              <a:lnSpc>
+                <a:spcPct val="100000"/>
+              </a:lnSpc>
+              <a:spcBef>
+                <a:spcPts val="907"/>
+              </a:spcBef>
+              <a:spcAft>
+                <a:spcPts val="709"/>
+              </a:spcAft>
+              <a:buClr>
+                <a:srgbClr val="000000"/>
+              </a:buClr>
+              <a:buSzPct val="45000"/>
+              <a:buFont typeface="Wingdings" charset="2"/>
+              <a:buChar char=""/>
+            </a:pPr>
+            <a:r>
+              <a:rPr b="0" lang="ru-RU" sz="1400" spc="-1" strike="noStrike">
+                <a:solidFill>
+                  <a:srgbClr val="000000"/>
+                </a:solidFill>
+                <a:latin typeface="Montserrat"/>
+              </a:rPr>
+              <a:t>Операционные - Налоговая задолженность, отсутствие отчетности</a:t>
+            </a:r>
+            <a:endParaRPr b="0" lang="ru-RU" sz="1400" spc="-1" strike="noStrike">
+              <a:solidFill>
+                <a:srgbClr val="000000"/>
+              </a:solidFill>
+              <a:latin typeface="Arial"/>
+            </a:endParaRPr>
+          </a:p>
+          <a:p>
+            <a:pPr lvl="1" marL="432000" indent="-216000">
+              <a:lnSpc>
+                <a:spcPct val="100000"/>
+              </a:lnSpc>
+              <a:spcBef>
+                <a:spcPts val="907"/>
+              </a:spcBef>
+              <a:spcAft>
+                <a:spcPts val="709"/>
+              </a:spcAft>
+              <a:buClr>
+                <a:srgbClr val="000000"/>
+              </a:buClr>
+              <a:buSzPct val="45000"/>
+              <a:buFont typeface="Wingdings" charset="2"/>
+              <a:buChar char=""/>
+            </a:pPr>
+            <a:r>
+              <a:rPr b="0" lang="ru-RU" sz="1400" spc="-1" strike="noStrike">
+                <a:solidFill>
+                  <a:srgbClr val="000000"/>
+                </a:solidFill>
+                <a:latin typeface="Montserrat"/>
+              </a:rPr>
+              <a:t>Временные - Возраст компании, недавняя активность</a:t>
+            </a:r>
+            <a:endParaRPr b="0" lang="ru-RU" sz="1400" spc="-1" strike="noStrike">
+              <a:solidFill>
+                <a:srgbClr val="000000"/>
+              </a:solidFill>
+              <a:latin typeface="Arial"/>
+            </a:endParaRPr>
+          </a:p>
+          <a:p>
+            <a:pPr>
+              <a:lnSpc>
+                <a:spcPct val="100000"/>
+              </a:lnSpc>
+              <a:spcBef>
+                <a:spcPts val="1191"/>
+              </a:spcBef>
+              <a:spcAft>
+                <a:spcPts val="992"/>
+              </a:spcAft>
+            </a:pPr>
+            <a:endParaRPr b="0" lang="ru-RU" sz="1400" spc="-1" strike="noStrike">
               <a:solidFill>
                 <a:srgbClr val="000000"/>
               </a:solidFill>
@@ -9225,7 +9922,7 @@
         <p:txBody>
           <a:bodyPr/>
           <a:p>
-            <a:fld id="{780ACE20-FDD2-4AEE-A0C9-B27E1D1D37DE}" type="slidenum">
+            <a:fld id="{B48DF89B-35E6-4A12-83B0-96DD5D147B95}" type="slidenum">
               <a:t>10</a:t>
             </a:fld>
           </a:p>
@@ -9261,73 +9958,39 @@
           <a:chExt cx="0" cy="0"/>
         </a:xfrm>
       </p:grpSpPr>
+      <p:pic>
+        <p:nvPicPr>
+          <p:cNvPr id="155" name="" descr=""/>
+          <p:cNvPicPr/>
+          <p:nvPr/>
+        </p:nvPicPr>
+        <p:blipFill>
+          <a:blip r:embed="rId1"/>
+          <a:stretch/>
+        </p:blipFill>
+        <p:spPr>
+          <a:xfrm>
+            <a:off x="3060000" y="985320"/>
+            <a:ext cx="6297480" cy="5672160"/>
+          </a:xfrm>
+          <a:prstGeom prst="rect">
+            <a:avLst/>
+          </a:prstGeom>
+          <a:ln w="0">
+            <a:noFill/>
+          </a:ln>
+        </p:spPr>
+      </p:pic>
       <p:sp>
         <p:nvSpPr>
-          <p:cNvPr id="155" name="PlaceHolder 14"/>
+          <p:cNvPr id="156" name="Заголовок 8"/>
           <p:cNvSpPr/>
           <p:nvPr/>
         </p:nvSpPr>
         <p:spPr>
           <a:xfrm>
             <a:off x="0" y="0"/>
-            <a:ext cx="6479640" cy="717840"/>
-          </a:xfrm>
-          <a:prstGeom prst="rect">
-            <a:avLst/>
-          </a:prstGeom>
-          <a:noFill/>
-          <a:ln w="0">
-            <a:noFill/>
-          </a:ln>
-        </p:spPr>
-        <p:style>
-          <a:lnRef idx="0"/>
-          <a:fillRef idx="0"/>
-          <a:effectRef idx="0"/>
-          <a:fontRef idx="minor"/>
-        </p:style>
-        <p:txBody>
-          <a:bodyPr lIns="90000" rIns="90000" tIns="45000" bIns="45000" anchor="ctr">
-            <a:noAutofit/>
-          </a:bodyPr>
-          <a:p>
-            <a:pPr algn="ctr">
-              <a:lnSpc>
-                <a:spcPct val="108000"/>
-              </a:lnSpc>
-              <a:tabLst>
-                <a:tab algn="l" pos="0"/>
-              </a:tabLst>
-            </a:pPr>
-            <a:r>
-              <a:rPr b="1" lang="ru-RU" sz="3600" spc="-1" strike="noStrike">
-                <a:solidFill>
-                  <a:srgbClr val="332974"/>
-                </a:solidFill>
-                <a:latin typeface="Montserrat SemiBold"/>
-                <a:ea typeface="Microsoft YaHei"/>
-              </a:rPr>
-              <a:t>Архитектура ИИ модели</a:t>
-            </a:r>
-            <a:endParaRPr b="0" lang="ru-RU" sz="3600" spc="-1" strike="noStrike">
-              <a:solidFill>
-                <a:srgbClr val="000000"/>
-              </a:solidFill>
-              <a:latin typeface="Arial"/>
-            </a:endParaRPr>
-          </a:p>
-        </p:txBody>
-      </p:sp>
-      <p:sp>
-        <p:nvSpPr>
-          <p:cNvPr id="156" name=""/>
-          <p:cNvSpPr/>
-          <p:nvPr/>
-        </p:nvSpPr>
-        <p:spPr>
-          <a:xfrm>
-            <a:off x="360000" y="867240"/>
-            <a:ext cx="5939640" cy="5848920"/>
+            <a:ext cx="11226600" cy="919800"/>
           </a:xfrm>
           <a:prstGeom prst="rect">
             <a:avLst/>
@@ -9352,683 +10015,18 @@
               <a:lnSpc>
                 <a:spcPct val="100000"/>
               </a:lnSpc>
-              <a:spcBef>
-                <a:spcPts val="907"/>
-              </a:spcBef>
-              <a:spcAft>
-                <a:spcPts val="709"/>
-              </a:spcAft>
             </a:pPr>
             <a:r>
-              <a:rPr b="0" lang="ru-RU" sz="1400" spc="-1" strike="noStrike">
-                <a:solidFill>
-                  <a:srgbClr val="000000"/>
+              <a:rPr b="1" lang="ru-RU" sz="3600" spc="-1" strike="noStrike">
+                <a:solidFill>
+                  <a:srgbClr val="332974"/>
                 </a:solidFill>
                 <a:latin typeface="Montserrat SemiBold"/>
+                <a:ea typeface="Calibri"/>
               </a:rPr>
-              <a:t>1. Главный класс – SupplierRiskModel</a:t>
+              <a:t>Инфологическая модель БД</a:t>
             </a:r>
-            <a:endParaRPr b="0" lang="ru-RU" sz="1400" spc="-1" strike="noStrike">
-              <a:solidFill>
-                <a:srgbClr val="000000"/>
-              </a:solidFill>
-              <a:latin typeface="Arial"/>
-            </a:endParaRPr>
-          </a:p>
-          <a:p>
-            <a:pPr>
-              <a:lnSpc>
-                <a:spcPct val="100000"/>
-              </a:lnSpc>
-              <a:spcBef>
-                <a:spcPts val="907"/>
-              </a:spcBef>
-              <a:spcAft>
-                <a:spcPts val="709"/>
-              </a:spcAft>
-            </a:pPr>
-            <a:r>
-              <a:rPr b="0" lang="ru-RU" sz="1400" spc="-1" strike="noStrike">
-                <a:solidFill>
-                  <a:srgbClr val="000000"/>
-                </a:solidFill>
-                <a:latin typeface="Montserrat"/>
-              </a:rPr>
-              <a:t>    </a:t>
-            </a:r>
-            <a:r>
-              <a:rPr b="0" lang="ru-RU" sz="1400" spc="-1" strike="noStrike">
-                <a:solidFill>
-                  <a:srgbClr val="000000"/>
-                </a:solidFill>
-                <a:latin typeface="Montserrat"/>
-              </a:rPr>
-              <a:t>train_high_accuracy_model() – обучить модель</a:t>
-            </a:r>
-            <a:endParaRPr b="0" lang="ru-RU" sz="1400" spc="-1" strike="noStrike">
-              <a:solidFill>
-                <a:srgbClr val="000000"/>
-              </a:solidFill>
-              <a:latin typeface="Arial"/>
-            </a:endParaRPr>
-          </a:p>
-          <a:p>
-            <a:pPr>
-              <a:lnSpc>
-                <a:spcPct val="100000"/>
-              </a:lnSpc>
-              <a:spcBef>
-                <a:spcPts val="907"/>
-              </a:spcBef>
-              <a:spcAft>
-                <a:spcPts val="709"/>
-              </a:spcAft>
-            </a:pPr>
-            <a:r>
-              <a:rPr b="0" lang="ru-RU" sz="1400" spc="-1" strike="noStrike">
-                <a:solidFill>
-                  <a:srgbClr val="000000"/>
-                </a:solidFill>
-                <a:latin typeface="Montserrat"/>
-              </a:rPr>
-              <a:t>    </a:t>
-            </a:r>
-            <a:r>
-              <a:rPr b="0" lang="ru-RU" sz="1400" spc="-1" strike="noStrike">
-                <a:solidFill>
-                  <a:srgbClr val="000000"/>
-                </a:solidFill>
-                <a:latin typeface="Montserrat"/>
-              </a:rPr>
-              <a:t>predict_risk() – предсказать риск для нового поставщика</a:t>
-            </a:r>
-            <a:endParaRPr b="0" lang="ru-RU" sz="1400" spc="-1" strike="noStrike">
-              <a:solidFill>
-                <a:srgbClr val="000000"/>
-              </a:solidFill>
-              <a:latin typeface="Arial"/>
-            </a:endParaRPr>
-          </a:p>
-          <a:p>
-            <a:pPr>
-              <a:lnSpc>
-                <a:spcPct val="100000"/>
-              </a:lnSpc>
-              <a:spcBef>
-                <a:spcPts val="907"/>
-              </a:spcBef>
-              <a:spcAft>
-                <a:spcPts val="709"/>
-              </a:spcAft>
-            </a:pPr>
-            <a:r>
-              <a:rPr b="0" lang="ru-RU" sz="1400" spc="-1" strike="noStrike">
-                <a:solidFill>
-                  <a:srgbClr val="000000"/>
-                </a:solidFill>
-                <a:latin typeface="Montserrat"/>
-              </a:rPr>
-              <a:t>    </a:t>
-            </a:r>
-            <a:r>
-              <a:rPr b="0" lang="ru-RU" sz="1400" spc="-1" strike="noStrike">
-                <a:solidFill>
-                  <a:srgbClr val="000000"/>
-                </a:solidFill>
-                <a:latin typeface="Montserrat"/>
-              </a:rPr>
-              <a:t>save_model() / load_model() – сохранить и загрузить</a:t>
-            </a:r>
-            <a:endParaRPr b="0" lang="ru-RU" sz="1400" spc="-1" strike="noStrike">
-              <a:solidFill>
-                <a:srgbClr val="000000"/>
-              </a:solidFill>
-              <a:latin typeface="Arial"/>
-            </a:endParaRPr>
-          </a:p>
-          <a:p>
-            <a:pPr>
-              <a:lnSpc>
-                <a:spcPct val="100000"/>
-              </a:lnSpc>
-              <a:spcBef>
-                <a:spcPts val="907"/>
-              </a:spcBef>
-              <a:spcAft>
-                <a:spcPts val="709"/>
-              </a:spcAft>
-            </a:pPr>
-            <a:r>
-              <a:rPr b="0" lang="ru-RU" sz="1400" spc="-1" strike="noStrike">
-                <a:solidFill>
-                  <a:srgbClr val="000000"/>
-                </a:solidFill>
-                <a:latin typeface="Montserrat SemiBold"/>
-                <a:ea typeface="Microsoft YaHei"/>
-              </a:rPr>
-              <a:t>2. Тип модели</a:t>
-            </a:r>
-            <a:endParaRPr b="0" lang="ru-RU" sz="1400" spc="-1" strike="noStrike">
-              <a:solidFill>
-                <a:srgbClr val="000000"/>
-              </a:solidFill>
-              <a:latin typeface="Arial"/>
-            </a:endParaRPr>
-          </a:p>
-          <a:p>
-            <a:pPr>
-              <a:lnSpc>
-                <a:spcPct val="100000"/>
-              </a:lnSpc>
-              <a:spcBef>
-                <a:spcPts val="907"/>
-              </a:spcBef>
-              <a:spcAft>
-                <a:spcPts val="709"/>
-              </a:spcAft>
-            </a:pPr>
-            <a:r>
-              <a:rPr b="0" lang="ru-RU" sz="1400" spc="-1" strike="noStrike">
-                <a:solidFill>
-                  <a:srgbClr val="000000"/>
-                </a:solidFill>
-                <a:latin typeface="Montserrat"/>
-                <a:ea typeface="Microsoft YaHei"/>
-              </a:rPr>
-              <a:t>    </a:t>
-            </a:r>
-            <a:r>
-              <a:rPr b="0" lang="ru-RU" sz="1400" spc="-1" strike="noStrike">
-                <a:solidFill>
-                  <a:srgbClr val="000000"/>
-                </a:solidFill>
-                <a:latin typeface="Montserrat"/>
-                <a:ea typeface="Microsoft YaHei"/>
-              </a:rPr>
-              <a:t>Ансамблевый классификатор (StackingClassifier)</a:t>
-            </a:r>
-            <a:endParaRPr b="0" lang="ru-RU" sz="1400" spc="-1" strike="noStrike">
-              <a:solidFill>
-                <a:srgbClr val="000000"/>
-              </a:solidFill>
-              <a:latin typeface="Arial"/>
-            </a:endParaRPr>
-          </a:p>
-          <a:p>
-            <a:pPr>
-              <a:lnSpc>
-                <a:spcPct val="100000"/>
-              </a:lnSpc>
-              <a:spcBef>
-                <a:spcPts val="907"/>
-              </a:spcBef>
-              <a:spcAft>
-                <a:spcPts val="709"/>
-              </a:spcAft>
-            </a:pPr>
-            <a:r>
-              <a:rPr b="0" lang="ru-RU" sz="1400" spc="-1" strike="noStrike">
-                <a:solidFill>
-                  <a:srgbClr val="000000"/>
-                </a:solidFill>
-                <a:latin typeface="Montserrat"/>
-                <a:ea typeface="Microsoft YaHei"/>
-              </a:rPr>
-              <a:t>    </a:t>
-            </a:r>
-            <a:r>
-              <a:rPr b="0" lang="ru-RU" sz="1400" spc="-1" strike="noStrike">
-                <a:solidFill>
-                  <a:srgbClr val="000000"/>
-                </a:solidFill>
-                <a:latin typeface="Montserrat"/>
-                <a:ea typeface="Microsoft YaHei"/>
-              </a:rPr>
-              <a:t>Объединяет 4 алгоритма машинного обучения в один комплексный-алгоритм:</a:t>
-            </a:r>
-            <a:endParaRPr b="0" lang="ru-RU" sz="1400" spc="-1" strike="noStrike">
-              <a:solidFill>
-                <a:srgbClr val="000000"/>
-              </a:solidFill>
-              <a:latin typeface="Arial"/>
-            </a:endParaRPr>
-          </a:p>
-          <a:p>
-            <a:pPr lvl="2" marL="648000" indent="-216000">
-              <a:lnSpc>
-                <a:spcPct val="100000"/>
-              </a:lnSpc>
-              <a:spcBef>
-                <a:spcPts val="907"/>
-              </a:spcBef>
-              <a:spcAft>
-                <a:spcPts val="709"/>
-              </a:spcAft>
-              <a:buClr>
-                <a:srgbClr val="000000"/>
-              </a:buClr>
-              <a:buSzPct val="45000"/>
-              <a:buFont typeface="Wingdings" charset="2"/>
-              <a:buChar char=""/>
-            </a:pPr>
-            <a:r>
-              <a:rPr b="0" lang="ru-RU" sz="1400" spc="-1" strike="noStrike">
-                <a:solidFill>
-                  <a:srgbClr val="000000"/>
-                </a:solidFill>
-                <a:latin typeface="Montserrat"/>
-                <a:ea typeface="Microsoft YaHei"/>
-              </a:rPr>
-              <a:t>RandomForest (300 деревьев)</a:t>
-            </a:r>
-            <a:endParaRPr b="0" lang="ru-RU" sz="1400" spc="-1" strike="noStrike">
-              <a:solidFill>
-                <a:srgbClr val="000000"/>
-              </a:solidFill>
-              <a:latin typeface="Arial"/>
-            </a:endParaRPr>
-          </a:p>
-          <a:p>
-            <a:pPr lvl="2" marL="648000" indent="-216000">
-              <a:lnSpc>
-                <a:spcPct val="100000"/>
-              </a:lnSpc>
-              <a:spcBef>
-                <a:spcPts val="907"/>
-              </a:spcBef>
-              <a:spcAft>
-                <a:spcPts val="709"/>
-              </a:spcAft>
-              <a:buClr>
-                <a:srgbClr val="000000"/>
-              </a:buClr>
-              <a:buSzPct val="45000"/>
-              <a:buFont typeface="Wingdings" charset="2"/>
-              <a:buChar char=""/>
-            </a:pPr>
-            <a:r>
-              <a:rPr b="0" lang="ru-RU" sz="1400" spc="-1" strike="noStrike">
-                <a:solidFill>
-                  <a:srgbClr val="000000"/>
-                </a:solidFill>
-                <a:latin typeface="Montserrat"/>
-                <a:ea typeface="Microsoft YaHei"/>
-              </a:rPr>
-              <a:t>BalancedRandomForest (200 деревьев)</a:t>
-            </a:r>
-            <a:endParaRPr b="0" lang="ru-RU" sz="1400" spc="-1" strike="noStrike">
-              <a:solidFill>
-                <a:srgbClr val="000000"/>
-              </a:solidFill>
-              <a:latin typeface="Arial"/>
-            </a:endParaRPr>
-          </a:p>
-          <a:p>
-            <a:pPr lvl="2" marL="648000" indent="-216000">
-              <a:lnSpc>
-                <a:spcPct val="100000"/>
-              </a:lnSpc>
-              <a:spcBef>
-                <a:spcPts val="907"/>
-              </a:spcBef>
-              <a:spcAft>
-                <a:spcPts val="709"/>
-              </a:spcAft>
-              <a:buClr>
-                <a:srgbClr val="000000"/>
-              </a:buClr>
-              <a:buSzPct val="45000"/>
-              <a:buFont typeface="Wingdings" charset="2"/>
-              <a:buChar char=""/>
-            </a:pPr>
-            <a:r>
-              <a:rPr b="0" lang="ru-RU" sz="1400" spc="-1" strike="noStrike">
-                <a:solidFill>
-                  <a:srgbClr val="000000"/>
-                </a:solidFill>
-                <a:latin typeface="Montserrat"/>
-                <a:ea typeface="Microsoft YaHei"/>
-              </a:rPr>
-              <a:t>XGBoost (300 итераций)</a:t>
-            </a:r>
-            <a:endParaRPr b="0" lang="ru-RU" sz="1400" spc="-1" strike="noStrike">
-              <a:solidFill>
-                <a:srgbClr val="000000"/>
-              </a:solidFill>
-              <a:latin typeface="Arial"/>
-            </a:endParaRPr>
-          </a:p>
-          <a:p>
-            <a:pPr lvl="2" marL="648000" indent="-216000">
-              <a:lnSpc>
-                <a:spcPct val="100000"/>
-              </a:lnSpc>
-              <a:spcBef>
-                <a:spcPts val="907"/>
-              </a:spcBef>
-              <a:spcAft>
-                <a:spcPts val="709"/>
-              </a:spcAft>
-              <a:buClr>
-                <a:srgbClr val="000000"/>
-              </a:buClr>
-              <a:buSzPct val="45000"/>
-              <a:buFont typeface="Wingdings" charset="2"/>
-              <a:buChar char=""/>
-            </a:pPr>
-            <a:r>
-              <a:rPr b="0" lang="ru-RU" sz="1400" spc="-1" strike="noStrike">
-                <a:solidFill>
-                  <a:srgbClr val="000000"/>
-                </a:solidFill>
-                <a:latin typeface="Montserrat"/>
-                <a:ea typeface="Microsoft YaHei"/>
-              </a:rPr>
-              <a:t>GradientBoosting (300 итераций)</a:t>
-            </a:r>
-            <a:endParaRPr b="0" lang="ru-RU" sz="1400" spc="-1" strike="noStrike">
-              <a:solidFill>
-                <a:srgbClr val="000000"/>
-              </a:solidFill>
-              <a:latin typeface="Arial"/>
-            </a:endParaRPr>
-          </a:p>
-          <a:p>
-            <a:pPr lvl="2" marL="648000" indent="-216000">
-              <a:lnSpc>
-                <a:spcPct val="100000"/>
-              </a:lnSpc>
-              <a:spcBef>
-                <a:spcPts val="907"/>
-              </a:spcBef>
-              <a:spcAft>
-                <a:spcPts val="709"/>
-              </a:spcAft>
-              <a:buClr>
-                <a:srgbClr val="000000"/>
-              </a:buClr>
-              <a:buSzPct val="45000"/>
-              <a:buFont typeface="Wingdings" charset="2"/>
-              <a:buChar char=""/>
-            </a:pPr>
-            <a:r>
-              <a:rPr b="0" lang="ru-RU" sz="1400" spc="-1" strike="noStrike">
-                <a:solidFill>
-                  <a:srgbClr val="000000"/>
-                </a:solidFill>
-                <a:latin typeface="Montserrat"/>
-                <a:ea typeface="Microsoft YaHei"/>
-              </a:rPr>
-              <a:t>Далее данные попадают в Мета-модель LogisticRegression</a:t>
-            </a:r>
-            <a:endParaRPr b="0" lang="ru-RU" sz="1400" spc="-1" strike="noStrike">
-              <a:solidFill>
-                <a:srgbClr val="000000"/>
-              </a:solidFill>
-              <a:latin typeface="Arial"/>
-            </a:endParaRPr>
-          </a:p>
-          <a:p>
-            <a:pPr>
-              <a:lnSpc>
-                <a:spcPct val="100000"/>
-              </a:lnSpc>
-              <a:spcBef>
-                <a:spcPts val="1191"/>
-              </a:spcBef>
-              <a:spcAft>
-                <a:spcPts val="992"/>
-              </a:spcAft>
-            </a:pPr>
-            <a:endParaRPr b="0" lang="ru-RU" sz="1400" spc="-1" strike="noStrike">
-              <a:solidFill>
-                <a:srgbClr val="000000"/>
-              </a:solidFill>
-              <a:latin typeface="Arial"/>
-            </a:endParaRPr>
-          </a:p>
-        </p:txBody>
-      </p:sp>
-      <p:sp>
-        <p:nvSpPr>
-          <p:cNvPr id="157" name=""/>
-          <p:cNvSpPr/>
-          <p:nvPr/>
-        </p:nvSpPr>
-        <p:spPr>
-          <a:xfrm>
-            <a:off x="6300000" y="867240"/>
-            <a:ext cx="5399640" cy="5226120"/>
-          </a:xfrm>
-          <a:prstGeom prst="rect">
-            <a:avLst/>
-          </a:prstGeom>
-          <a:noFill/>
-          <a:ln w="0">
-            <a:noFill/>
-          </a:ln>
-        </p:spPr>
-        <p:style>
-          <a:lnRef idx="0"/>
-          <a:fillRef idx="0"/>
-          <a:effectRef idx="0"/>
-          <a:fontRef idx="minor"/>
-        </p:style>
-        <p:txBody>
-          <a:bodyPr lIns="90000" rIns="90000" tIns="45000" bIns="45000" anchor="t">
-            <a:noAutofit/>
-          </a:bodyPr>
-          <a:p>
-            <a:pPr>
-              <a:lnSpc>
-                <a:spcPct val="100000"/>
-              </a:lnSpc>
-              <a:spcBef>
-                <a:spcPts val="907"/>
-              </a:spcBef>
-              <a:spcAft>
-                <a:spcPts val="709"/>
-              </a:spcAft>
-            </a:pPr>
-            <a:r>
-              <a:rPr b="0" lang="ru-RU" sz="1400" spc="-1" strike="noStrike">
-                <a:solidFill>
-                  <a:srgbClr val="000000"/>
-                </a:solidFill>
-                <a:latin typeface="Montserrat SemiBold"/>
-              </a:rPr>
-              <a:t>3. Анализируемые признаки</a:t>
-            </a:r>
-            <a:endParaRPr b="0" lang="ru-RU" sz="1400" spc="-1" strike="noStrike">
-              <a:solidFill>
-                <a:srgbClr val="000000"/>
-              </a:solidFill>
-              <a:latin typeface="Arial"/>
-            </a:endParaRPr>
-          </a:p>
-          <a:p>
-            <a:pPr lvl="1" marL="432000" indent="-216000">
-              <a:lnSpc>
-                <a:spcPct val="100000"/>
-              </a:lnSpc>
-              <a:spcBef>
-                <a:spcPts val="907"/>
-              </a:spcBef>
-              <a:spcAft>
-                <a:spcPts val="709"/>
-              </a:spcAft>
-              <a:buClr>
-                <a:srgbClr val="000000"/>
-              </a:buClr>
-              <a:buSzPct val="45000"/>
-              <a:buFont typeface="Wingdings" charset="2"/>
-              <a:buChar char=""/>
-            </a:pPr>
-            <a:r>
-              <a:rPr b="0" lang="ru-RU" sz="1400" spc="-1" strike="noStrike">
-                <a:solidFill>
-                  <a:srgbClr val="000000"/>
-                </a:solidFill>
-                <a:latin typeface="Montserrat"/>
-              </a:rPr>
-              <a:t>Финансовые - Убытки, нулевая выручка, отсутствие прибыли</a:t>
-            </a:r>
-            <a:endParaRPr b="0" lang="ru-RU" sz="1400" spc="-1" strike="noStrike">
-              <a:solidFill>
-                <a:srgbClr val="000000"/>
-              </a:solidFill>
-              <a:latin typeface="Arial"/>
-            </a:endParaRPr>
-          </a:p>
-          <a:p>
-            <a:pPr lvl="1" marL="432000" indent="-216000">
-              <a:lnSpc>
-                <a:spcPct val="100000"/>
-              </a:lnSpc>
-              <a:spcBef>
-                <a:spcPts val="907"/>
-              </a:spcBef>
-              <a:spcAft>
-                <a:spcPts val="709"/>
-              </a:spcAft>
-              <a:buClr>
-                <a:srgbClr val="000000"/>
-              </a:buClr>
-              <a:buSzPct val="45000"/>
-              <a:buFont typeface="Wingdings" charset="2"/>
-              <a:buChar char=""/>
-            </a:pPr>
-            <a:r>
-              <a:rPr b="0" lang="ru-RU" sz="1400" spc="-1" strike="noStrike">
-                <a:solidFill>
-                  <a:srgbClr val="000000"/>
-                </a:solidFill>
-                <a:latin typeface="Montserrat"/>
-              </a:rPr>
-              <a:t>Юридические - Дела о банкротстве, исполнительные производства</a:t>
-            </a:r>
-            <a:endParaRPr b="0" lang="ru-RU" sz="1400" spc="-1" strike="noStrike">
-              <a:solidFill>
-                <a:srgbClr val="000000"/>
-              </a:solidFill>
-              <a:latin typeface="Arial"/>
-            </a:endParaRPr>
-          </a:p>
-          <a:p>
-            <a:pPr lvl="1" marL="432000" indent="-216000">
-              <a:lnSpc>
-                <a:spcPct val="100000"/>
-              </a:lnSpc>
-              <a:spcBef>
-                <a:spcPts val="907"/>
-              </a:spcBef>
-              <a:spcAft>
-                <a:spcPts val="709"/>
-              </a:spcAft>
-              <a:buClr>
-                <a:srgbClr val="000000"/>
-              </a:buClr>
-              <a:buSzPct val="45000"/>
-              <a:buFont typeface="Wingdings" charset="2"/>
-              <a:buChar char=""/>
-            </a:pPr>
-            <a:r>
-              <a:rPr b="0" lang="ru-RU" sz="1400" spc="-1" strike="noStrike">
-                <a:solidFill>
-                  <a:srgbClr val="000000"/>
-                </a:solidFill>
-                <a:latin typeface="Montserrat"/>
-              </a:rPr>
-              <a:t>Репутационные - Массовый адрес, массовый руководитель</a:t>
-            </a:r>
-            <a:endParaRPr b="0" lang="ru-RU" sz="1400" spc="-1" strike="noStrike">
-              <a:solidFill>
-                <a:srgbClr val="000000"/>
-              </a:solidFill>
-              <a:latin typeface="Arial"/>
-            </a:endParaRPr>
-          </a:p>
-          <a:p>
-            <a:pPr lvl="1" marL="432000" indent="-216000">
-              <a:lnSpc>
-                <a:spcPct val="100000"/>
-              </a:lnSpc>
-              <a:spcBef>
-                <a:spcPts val="907"/>
-              </a:spcBef>
-              <a:spcAft>
-                <a:spcPts val="709"/>
-              </a:spcAft>
-              <a:buClr>
-                <a:srgbClr val="000000"/>
-              </a:buClr>
-              <a:buSzPct val="45000"/>
-              <a:buFont typeface="Wingdings" charset="2"/>
-              <a:buChar char=""/>
-            </a:pPr>
-            <a:r>
-              <a:rPr b="0" lang="ru-RU" sz="1400" spc="-1" strike="noStrike">
-                <a:solidFill>
-                  <a:srgbClr val="000000"/>
-                </a:solidFill>
-                <a:latin typeface="Montserrat"/>
-              </a:rPr>
-              <a:t>Операционные - Налоговая задолженность, отсутствие отчетности</a:t>
-            </a:r>
-            <a:endParaRPr b="0" lang="ru-RU" sz="1400" spc="-1" strike="noStrike">
-              <a:solidFill>
-                <a:srgbClr val="000000"/>
-              </a:solidFill>
-              <a:latin typeface="Arial"/>
-            </a:endParaRPr>
-          </a:p>
-          <a:p>
-            <a:pPr lvl="1" marL="432000" indent="-216000">
-              <a:lnSpc>
-                <a:spcPct val="100000"/>
-              </a:lnSpc>
-              <a:spcBef>
-                <a:spcPts val="907"/>
-              </a:spcBef>
-              <a:spcAft>
-                <a:spcPts val="709"/>
-              </a:spcAft>
-              <a:buClr>
-                <a:srgbClr val="000000"/>
-              </a:buClr>
-              <a:buSzPct val="45000"/>
-              <a:buFont typeface="Wingdings" charset="2"/>
-              <a:buChar char=""/>
-            </a:pPr>
-            <a:r>
-              <a:rPr b="0" lang="ru-RU" sz="1400" spc="-1" strike="noStrike">
-                <a:solidFill>
-                  <a:srgbClr val="000000"/>
-                </a:solidFill>
-                <a:latin typeface="Montserrat"/>
-              </a:rPr>
-              <a:t>Временные - Возраст компании, недавняя активность</a:t>
-            </a:r>
-            <a:endParaRPr b="0" lang="ru-RU" sz="1400" spc="-1" strike="noStrike">
-              <a:solidFill>
-                <a:srgbClr val="000000"/>
-              </a:solidFill>
-              <a:latin typeface="Arial"/>
-            </a:endParaRPr>
-          </a:p>
-          <a:p>
-            <a:pPr>
-              <a:lnSpc>
-                <a:spcPct val="100000"/>
-              </a:lnSpc>
-              <a:spcBef>
-                <a:spcPts val="1191"/>
-              </a:spcBef>
-              <a:spcAft>
-                <a:spcPts val="992"/>
-              </a:spcAft>
-            </a:pPr>
-            <a:endParaRPr b="0" lang="ru-RU" sz="1400" spc="-1" strike="noStrike">
+            <a:endParaRPr b="0" lang="ru-RU" sz="3600" spc="-1" strike="noStrike">
               <a:solidFill>
                 <a:srgbClr val="000000"/>
               </a:solidFill>
@@ -10051,7 +10049,7 @@
         <p:txBody>
           <a:bodyPr/>
           <a:p>
-            <a:fld id="{B85FEB48-2C84-4CFE-89FA-A3D41CF7235F}" type="slidenum">
+            <a:fld id="{36DFAAE6-4AC0-4753-A01E-6D80DF95A58B}" type="slidenum">
               <a:t>11</a:t>
             </a:fld>
           </a:p>
@@ -10087,39 +10085,111 @@
           <a:chExt cx="0" cy="0"/>
         </a:xfrm>
       </p:grpSpPr>
-      <p:pic>
-        <p:nvPicPr>
-          <p:cNvPr id="158" name="" descr=""/>
-          <p:cNvPicPr/>
-          <p:nvPr/>
-        </p:nvPicPr>
-        <p:blipFill>
-          <a:blip r:embed="rId1"/>
-          <a:stretch/>
-        </p:blipFill>
-        <p:spPr>
-          <a:xfrm>
-            <a:off x="3060000" y="985320"/>
-            <a:ext cx="6297840" cy="5672520"/>
-          </a:xfrm>
-          <a:prstGeom prst="rect">
-            <a:avLst/>
-          </a:prstGeom>
-          <a:ln w="0">
-            <a:noFill/>
-          </a:ln>
-        </p:spPr>
-      </p:pic>
       <p:sp>
         <p:nvSpPr>
-          <p:cNvPr id="159" name="Заголовок 8"/>
+          <p:cNvPr id="157" name="PlaceHolder 1"/>
+          <p:cNvSpPr>
+            <a:spLocks noGrp="1"/>
+          </p:cNvSpPr>
+          <p:nvPr>
+            <p:ph type="title"/>
+          </p:nvPr>
+        </p:nvSpPr>
+        <p:spPr>
+          <a:xfrm>
+            <a:off x="0" y="0"/>
+            <a:ext cx="11226600" cy="919800"/>
+          </a:xfrm>
+          <a:prstGeom prst="rect">
+            <a:avLst/>
+          </a:prstGeom>
+          <a:noFill/>
+          <a:ln w="0">
+            <a:noFill/>
+          </a:ln>
+        </p:spPr>
+        <p:txBody>
+          <a:bodyPr lIns="91440" rIns="91440" tIns="45720" bIns="45720" anchor="t">
+            <a:noAutofit/>
+          </a:bodyPr>
+          <a:p>
+            <a:pPr indent="0" defTabSz="914400">
+              <a:lnSpc>
+                <a:spcPct val="100000"/>
+              </a:lnSpc>
+              <a:buNone/>
+              <a:tabLst>
+                <a:tab algn="l" pos="0"/>
+              </a:tabLst>
+            </a:pPr>
+            <a:r>
+              <a:rPr b="1" lang="ru-RU" sz="3600" spc="-1" strike="noStrike">
+                <a:solidFill>
+                  <a:srgbClr val="332974"/>
+                </a:solidFill>
+                <a:latin typeface="Montserrat SemiBold"/>
+              </a:rPr>
+              <a:t>Программная реализация</a:t>
+            </a:r>
+            <a:endParaRPr b="0" lang="ru-RU" sz="3600" spc="-1" strike="noStrike">
+              <a:solidFill>
+                <a:srgbClr val="000000"/>
+              </a:solidFill>
+              <a:latin typeface="Arial"/>
+            </a:endParaRPr>
+          </a:p>
+        </p:txBody>
+      </p:sp>
+      <p:sp>
+        <p:nvSpPr>
+          <p:cNvPr id="158" name="PlaceHolder 2"/>
+          <p:cNvSpPr>
+            <a:spLocks noGrp="1"/>
+          </p:cNvSpPr>
+          <p:nvPr>
+            <p:ph type="ftr" idx="46"/>
+          </p:nvPr>
+        </p:nvSpPr>
+        <p:spPr>
+          <a:xfrm>
+            <a:off x="1333440" y="6352560"/>
+            <a:ext cx="7477200" cy="361800"/>
+          </a:xfrm>
+          <a:prstGeom prst="rect">
+            <a:avLst/>
+          </a:prstGeom>
+          <a:noFill/>
+          <a:ln w="0">
+            <a:noFill/>
+          </a:ln>
+        </p:spPr>
+        <p:txBody>
+          <a:bodyPr lIns="90000" rIns="90000" tIns="45000" bIns="45000" anchor="t">
+            <a:noAutofit/>
+          </a:bodyPr>
+          <a:p>
+            <a:pPr indent="0">
+              <a:buNone/>
+            </a:pPr>
+            <a:endParaRPr b="0" lang="ru-RU" sz="1400" spc="-1" strike="noStrike">
+              <a:solidFill>
+                <a:srgbClr val="000000"/>
+              </a:solidFill>
+              <a:latin typeface="Times New Roman"/>
+            </a:endParaRPr>
+          </a:p>
+        </p:txBody>
+      </p:sp>
+      <p:sp>
+        <p:nvSpPr>
+          <p:cNvPr id="159" name=""/>
           <p:cNvSpPr/>
           <p:nvPr/>
         </p:nvSpPr>
         <p:spPr>
           <a:xfrm>
-            <a:off x="0" y="0"/>
-            <a:ext cx="11226960" cy="920160"/>
+            <a:off x="0" y="921600"/>
+            <a:ext cx="11577960" cy="545400"/>
           </a:xfrm>
           <a:prstGeom prst="rect">
             <a:avLst/>
@@ -10151,9 +10221,8 @@
                   <a:srgbClr val="332974"/>
                 </a:solidFill>
                 <a:latin typeface="Montserrat SemiBold"/>
-                <a:ea typeface="Calibri"/>
               </a:rPr>
-              <a:t>Инфологическая модель БД</a:t>
+              <a:t>Структура метаданных информационной системы</a:t>
             </a:r>
             <a:endParaRPr b="0" lang="ru-RU" sz="3600" spc="-1" strike="noStrike">
               <a:solidFill>
@@ -10164,9 +10233,32 @@
           </a:p>
         </p:txBody>
       </p:sp>
+      <p:pic>
+        <p:nvPicPr>
+          <p:cNvPr id="160" name="" descr=""/>
+          <p:cNvPicPr/>
+          <p:nvPr/>
+        </p:nvPicPr>
+        <p:blipFill>
+          <a:blip r:embed="rId1"/>
+          <a:stretch/>
+        </p:blipFill>
+        <p:spPr>
+          <a:xfrm>
+            <a:off x="1605960" y="2246760"/>
+            <a:ext cx="8111880" cy="4051080"/>
+          </a:xfrm>
+          <a:prstGeom prst="rect">
+            <a:avLst/>
+          </a:prstGeom>
+          <a:ln w="0">
+            <a:noFill/>
+          </a:ln>
+        </p:spPr>
+      </p:pic>
       <p:sp>
         <p:nvSpPr>
-          <p:cNvPr id="2" name="PlaceHolder 1"/>
+          <p:cNvPr id="4" name="PlaceHolder 3"/>
           <p:cNvSpPr>
             <a:spLocks noGrp="1"/>
           </p:cNvSpPr>
@@ -10178,7 +10270,7 @@
         <p:txBody>
           <a:bodyPr/>
           <a:p>
-            <a:fld id="{C0DF463A-FE4C-48AF-A4B8-F26F6926A567}" type="slidenum">
+            <a:fld id="{DB398A2F-1CA6-40EB-B67F-ABF084189F53}" type="slidenum">
               <a:t>12</a:t>
             </a:fld>
           </a:p>
@@ -10216,109 +10308,14 @@
       </p:grpSpPr>
       <p:sp>
         <p:nvSpPr>
-          <p:cNvPr id="160" name="PlaceHolder 1"/>
-          <p:cNvSpPr>
-            <a:spLocks noGrp="1"/>
-          </p:cNvSpPr>
-          <p:nvPr>
-            <p:ph type="title"/>
-          </p:nvPr>
-        </p:nvSpPr>
-        <p:spPr>
-          <a:xfrm>
-            <a:off x="0" y="0"/>
-            <a:ext cx="11226960" cy="920160"/>
-          </a:xfrm>
-          <a:prstGeom prst="rect">
-            <a:avLst/>
-          </a:prstGeom>
-          <a:noFill/>
-          <a:ln w="0">
-            <a:noFill/>
-          </a:ln>
-        </p:spPr>
-        <p:txBody>
-          <a:bodyPr lIns="91440" rIns="91440" tIns="45720" bIns="45720" anchor="t">
-            <a:noAutofit/>
-          </a:bodyPr>
-          <a:p>
-            <a:pPr indent="0" defTabSz="914400">
-              <a:lnSpc>
-                <a:spcPct val="100000"/>
-              </a:lnSpc>
-              <a:buNone/>
-              <a:tabLst>
-                <a:tab algn="l" pos="0"/>
-              </a:tabLst>
-            </a:pPr>
-            <a:r>
-              <a:rPr b="1" lang="ru-RU" sz="3600" spc="-1" strike="noStrike">
-                <a:solidFill>
-                  <a:srgbClr val="332974"/>
-                </a:solidFill>
-                <a:latin typeface="Montserrat SemiBold"/>
-              </a:rPr>
-              <a:t>Программная реализация</a:t>
-            </a:r>
-            <a:endParaRPr b="0" lang="ru-RU" sz="3600" spc="-1" strike="noStrike">
-              <a:solidFill>
-                <a:srgbClr val="000000"/>
-              </a:solidFill>
-              <a:latin typeface="Arial"/>
-            </a:endParaRPr>
-          </a:p>
-        </p:txBody>
-      </p:sp>
-      <p:sp>
-        <p:nvSpPr>
-          <p:cNvPr id="161" name="PlaceHolder 2"/>
-          <p:cNvSpPr>
-            <a:spLocks noGrp="1"/>
-          </p:cNvSpPr>
-          <p:nvPr>
-            <p:ph type="ftr" idx="47"/>
-          </p:nvPr>
-        </p:nvSpPr>
-        <p:spPr>
-          <a:xfrm>
-            <a:off x="1333440" y="6352560"/>
-            <a:ext cx="7477560" cy="362160"/>
-          </a:xfrm>
-          <a:prstGeom prst="rect">
-            <a:avLst/>
-          </a:prstGeom>
-          <a:noFill/>
-          <a:ln w="0">
-            <a:noFill/>
-          </a:ln>
-        </p:spPr>
-        <p:txBody>
-          <a:bodyPr lIns="90000" rIns="90000" tIns="45000" bIns="45000" anchor="t">
-            <a:noAutofit/>
-          </a:bodyPr>
-          <a:p>
-            <a:pPr indent="0">
-              <a:buNone/>
-            </a:pPr>
-            <a:endParaRPr b="0" lang="ru-RU" sz="1400" spc="-1" strike="noStrike">
-              <a:solidFill>
-                <a:srgbClr val="000000"/>
-              </a:solidFill>
-              <a:latin typeface="Times New Roman"/>
-            </a:endParaRPr>
-          </a:p>
-        </p:txBody>
-      </p:sp>
-      <p:sp>
-        <p:nvSpPr>
-          <p:cNvPr id="162" name=""/>
+          <p:cNvPr id="161" name="PlaceHolder 1"/>
           <p:cNvSpPr/>
           <p:nvPr/>
         </p:nvSpPr>
         <p:spPr>
           <a:xfrm>
-            <a:off x="0" y="921600"/>
-            <a:ext cx="11578320" cy="545760"/>
+            <a:off x="0" y="0"/>
+            <a:ext cx="11157480" cy="816120"/>
           </a:xfrm>
           <a:prstGeom prst="rect">
             <a:avLst/>
@@ -10335,14 +10332,17 @@
           <a:fontRef idx="minor"/>
         </p:style>
         <p:txBody>
-          <a:bodyPr lIns="90000" rIns="90000" tIns="45000" bIns="45000" anchor="t">
-            <a:noAutofit/>
+          <a:bodyPr lIns="90000" rIns="90000" tIns="45000" bIns="45000" anchor="ctr">
+            <a:normAutofit/>
           </a:bodyPr>
           <a:p>
-            <a:pPr>
+            <a:pPr algn="ctr" defTabSz="457200">
               <a:lnSpc>
                 <a:spcPct val="100000"/>
               </a:lnSpc>
+              <a:tabLst>
+                <a:tab algn="l" pos="0"/>
+              </a:tabLst>
             </a:pPr>
             <a:r>
               <a:rPr b="1" lang="ru-RU" sz="3600" spc="-1" strike="noStrike">
@@ -10351,7 +10351,7 @@
                 </a:solidFill>
                 <a:latin typeface="Montserrat SemiBold"/>
               </a:rPr>
-              <a:t>Структура метаданных информационной системы</a:t>
+              <a:t>Добавление поставщиков и групп товаров</a:t>
             </a:r>
             <a:endParaRPr b="0" lang="ru-RU" sz="3600" spc="-1" strike="noStrike">
               <a:solidFill>
@@ -10362,6 +10362,29 @@
           </a:p>
         </p:txBody>
       </p:sp>
+      <p:pic>
+        <p:nvPicPr>
+          <p:cNvPr id="162" name="" descr=""/>
+          <p:cNvPicPr/>
+          <p:nvPr/>
+        </p:nvPicPr>
+        <p:blipFill>
+          <a:blip r:embed="rId1"/>
+          <a:stretch/>
+        </p:blipFill>
+        <p:spPr>
+          <a:xfrm>
+            <a:off x="502200" y="3240000"/>
+            <a:ext cx="11015640" cy="1713240"/>
+          </a:xfrm>
+          <a:prstGeom prst="rect">
+            <a:avLst/>
+          </a:prstGeom>
+          <a:ln w="0">
+            <a:noFill/>
+          </a:ln>
+        </p:spPr>
+      </p:pic>
       <p:pic>
         <p:nvPicPr>
           <p:cNvPr id="163" name="" descr=""/>
@@ -10369,13 +10392,13 @@
           <p:nvPr/>
         </p:nvPicPr>
         <p:blipFill>
-          <a:blip r:embed="rId1"/>
+          <a:blip r:embed="rId2"/>
           <a:stretch/>
         </p:blipFill>
         <p:spPr>
           <a:xfrm>
-            <a:off x="1605960" y="2246760"/>
-            <a:ext cx="8112240" cy="4051440"/>
+            <a:off x="228240" y="1542600"/>
+            <a:ext cx="11829600" cy="1335240"/>
           </a:xfrm>
           <a:prstGeom prst="rect">
             <a:avLst/>
@@ -10387,7 +10410,7 @@
       </p:pic>
       <p:sp>
         <p:nvSpPr>
-          <p:cNvPr id="4" name="PlaceHolder 3"/>
+          <p:cNvPr id="2" name="PlaceHolder 1"/>
           <p:cNvSpPr>
             <a:spLocks noGrp="1"/>
           </p:cNvSpPr>
@@ -10399,7 +10422,7 @@
         <p:txBody>
           <a:bodyPr/>
           <a:p>
-            <a:fld id="{F37D8A05-E1F0-48FF-8779-2112F448188A}" type="slidenum">
+            <a:fld id="{8D965555-DBF9-4AE1-BEB9-667432CFA3B4}" type="slidenum">
               <a:t>13</a:t>
             </a:fld>
           </a:p>
@@ -10437,14 +10460,14 @@
       </p:grpSpPr>
       <p:sp>
         <p:nvSpPr>
-          <p:cNvPr id="164" name="PlaceHolder 1"/>
+          <p:cNvPr id="164" name="PlaceHolder 3"/>
           <p:cNvSpPr/>
           <p:nvPr/>
         </p:nvSpPr>
         <p:spPr>
           <a:xfrm>
             <a:off x="0" y="0"/>
-            <a:ext cx="11157840" cy="816480"/>
+            <a:ext cx="10077480" cy="599760"/>
           </a:xfrm>
           <a:prstGeom prst="rect">
             <a:avLst/>
@@ -10462,7 +10485,7 @@
         </p:style>
         <p:txBody>
           <a:bodyPr lIns="90000" rIns="90000" tIns="45000" bIns="45000" anchor="ctr">
-            <a:normAutofit/>
+            <a:noAutofit/>
           </a:bodyPr>
           <a:p>
             <a:pPr algn="ctr" defTabSz="457200">
@@ -10480,7 +10503,7 @@
                 </a:solidFill>
                 <a:latin typeface="Montserrat SemiBold"/>
               </a:rPr>
-              <a:t>Добавление поставщиков и групп товаров</a:t>
+              <a:t>Формирование выборки поставщиков</a:t>
             </a:r>
             <a:endParaRPr b="0" lang="ru-RU" sz="3600" spc="-1" strike="noStrike">
               <a:solidFill>
@@ -10503,8 +10526,8 @@
         </p:blipFill>
         <p:spPr>
           <a:xfrm>
-            <a:off x="502200" y="3240000"/>
-            <a:ext cx="11016000" cy="1713600"/>
+            <a:off x="360" y="1577880"/>
+            <a:ext cx="3969720" cy="3999600"/>
           </a:xfrm>
           <a:prstGeom prst="rect">
             <a:avLst/>
@@ -10526,8 +10549,8 @@
         </p:blipFill>
         <p:spPr>
           <a:xfrm>
-            <a:off x="228240" y="1542600"/>
-            <a:ext cx="11829960" cy="1335600"/>
+            <a:off x="4500000" y="2009160"/>
+            <a:ext cx="7401240" cy="3208320"/>
           </a:xfrm>
           <a:prstGeom prst="rect">
             <a:avLst/>
@@ -10551,7 +10574,7 @@
         <p:txBody>
           <a:bodyPr/>
           <a:p>
-            <a:fld id="{50F69D52-C2D8-4B2C-92F6-DA0D778BF22A}" type="slidenum">
+            <a:fld id="{D7CADFCB-D703-4B41-8D7B-76C87D80BF1F}" type="slidenum">
               <a:t>14</a:t>
             </a:fld>
           </a:p>
@@ -10587,16 +10610,62 @@
           <a:chExt cx="0" cy="0"/>
         </a:xfrm>
       </p:grpSpPr>
+      <p:pic>
+        <p:nvPicPr>
+          <p:cNvPr id="167" name="" descr=""/>
+          <p:cNvPicPr/>
+          <p:nvPr/>
+        </p:nvPicPr>
+        <p:blipFill>
+          <a:blip r:embed="rId1"/>
+          <a:stretch/>
+        </p:blipFill>
+        <p:spPr>
+          <a:xfrm>
+            <a:off x="3585240" y="1124640"/>
+            <a:ext cx="7392600" cy="2648520"/>
+          </a:xfrm>
+          <a:prstGeom prst="rect">
+            <a:avLst/>
+          </a:prstGeom>
+          <a:ln w="0">
+            <a:noFill/>
+          </a:ln>
+        </p:spPr>
+      </p:pic>
+      <p:pic>
+        <p:nvPicPr>
+          <p:cNvPr id="168" name="" descr=""/>
+          <p:cNvPicPr/>
+          <p:nvPr/>
+        </p:nvPicPr>
+        <p:blipFill>
+          <a:blip r:embed="rId2"/>
+          <a:stretch/>
+        </p:blipFill>
+        <p:spPr>
+          <a:xfrm>
+            <a:off x="3602520" y="4007880"/>
+            <a:ext cx="7353720" cy="2649960"/>
+          </a:xfrm>
+          <a:prstGeom prst="rect">
+            <a:avLst/>
+          </a:prstGeom>
+          <a:ln w="0">
+            <a:noFill/>
+          </a:ln>
+        </p:spPr>
+      </p:pic>
       <p:sp>
         <p:nvSpPr>
-          <p:cNvPr id="167" name="PlaceHolder 3"/>
+          <p:cNvPr id="169" name="PlaceHolder 13"/>
           <p:cNvSpPr/>
           <p:nvPr/>
         </p:nvSpPr>
         <p:spPr>
           <a:xfrm>
             <a:off x="0" y="0"/>
-            <a:ext cx="10077840" cy="600120"/>
+            <a:ext cx="10077480" cy="599760"/>
           </a:xfrm>
           <a:prstGeom prst="rect">
             <a:avLst/>
@@ -10617,7 +10686,7 @@
             <a:noAutofit/>
           </a:bodyPr>
           <a:p>
-            <a:pPr algn="ctr" defTabSz="457200">
+            <a:pPr defTabSz="457200">
               <a:lnSpc>
                 <a:spcPct val="100000"/>
               </a:lnSpc>
@@ -10632,7 +10701,7 @@
                 </a:solidFill>
                 <a:latin typeface="Montserrat SemiBold"/>
               </a:rPr>
-              <a:t>Формирование выборки поставщиков</a:t>
+              <a:t>Анализ выборки</a:t>
             </a:r>
             <a:endParaRPr b="0" lang="ru-RU" sz="3600" spc="-1" strike="noStrike">
               <a:solidFill>
@@ -10645,41 +10714,18 @@
       </p:sp>
       <p:pic>
         <p:nvPicPr>
-          <p:cNvPr id="168" name="" descr=""/>
+          <p:cNvPr id="170" name="" descr=""/>
           <p:cNvPicPr/>
           <p:nvPr/>
         </p:nvPicPr>
         <p:blipFill>
-          <a:blip r:embed="rId1"/>
+          <a:blip r:embed="rId3"/>
           <a:stretch/>
         </p:blipFill>
         <p:spPr>
           <a:xfrm>
-            <a:off x="360" y="1577880"/>
-            <a:ext cx="3970080" cy="3999960"/>
-          </a:xfrm>
-          <a:prstGeom prst="rect">
-            <a:avLst/>
-          </a:prstGeom>
-          <a:ln w="0">
-            <a:noFill/>
-          </a:ln>
-        </p:spPr>
-      </p:pic>
-      <p:pic>
-        <p:nvPicPr>
-          <p:cNvPr id="169" name="" descr=""/>
-          <p:cNvPicPr/>
-          <p:nvPr/>
-        </p:nvPicPr>
-        <p:blipFill>
-          <a:blip r:embed="rId2"/>
-          <a:stretch/>
-        </p:blipFill>
-        <p:spPr>
-          <a:xfrm>
-            <a:off x="4500000" y="2009160"/>
-            <a:ext cx="7401600" cy="3208680"/>
+            <a:off x="77400" y="1165320"/>
+            <a:ext cx="3340440" cy="3152520"/>
           </a:xfrm>
           <a:prstGeom prst="rect">
             <a:avLst/>
@@ -10703,7 +10749,7 @@
         <p:txBody>
           <a:bodyPr/>
           <a:p>
-            <a:fld id="{3CEFE118-4FF7-401E-B85A-47A345EE9E53}" type="slidenum">
+            <a:fld id="{1188033E-1E19-48BC-8DA3-2925BC8B34C7}" type="slidenum">
               <a:t>15</a:t>
             </a:fld>
           </a:p>
@@ -10739,62 +10785,16 @@
           <a:chExt cx="0" cy="0"/>
         </a:xfrm>
       </p:grpSpPr>
-      <p:pic>
-        <p:nvPicPr>
-          <p:cNvPr id="170" name="" descr=""/>
-          <p:cNvPicPr/>
-          <p:nvPr/>
-        </p:nvPicPr>
-        <p:blipFill>
-          <a:blip r:embed="rId1"/>
-          <a:stretch/>
-        </p:blipFill>
-        <p:spPr>
-          <a:xfrm>
-            <a:off x="3585240" y="1124640"/>
-            <a:ext cx="7392960" cy="2648880"/>
-          </a:xfrm>
-          <a:prstGeom prst="rect">
-            <a:avLst/>
-          </a:prstGeom>
-          <a:ln w="0">
-            <a:noFill/>
-          </a:ln>
-        </p:spPr>
-      </p:pic>
-      <p:pic>
-        <p:nvPicPr>
-          <p:cNvPr id="171" name="" descr=""/>
-          <p:cNvPicPr/>
-          <p:nvPr/>
-        </p:nvPicPr>
-        <p:blipFill>
-          <a:blip r:embed="rId2"/>
-          <a:stretch/>
-        </p:blipFill>
-        <p:spPr>
-          <a:xfrm>
-            <a:off x="3602520" y="4007880"/>
-            <a:ext cx="7354080" cy="2650320"/>
-          </a:xfrm>
-          <a:prstGeom prst="rect">
-            <a:avLst/>
-          </a:prstGeom>
-          <a:ln w="0">
-            <a:noFill/>
-          </a:ln>
-        </p:spPr>
-      </p:pic>
       <p:sp>
         <p:nvSpPr>
-          <p:cNvPr id="172" name="PlaceHolder 13"/>
+          <p:cNvPr id="171" name="PlaceHolder 4"/>
           <p:cNvSpPr/>
           <p:nvPr/>
         </p:nvSpPr>
         <p:spPr>
           <a:xfrm>
-            <a:off x="0" y="0"/>
-            <a:ext cx="10077840" cy="600120"/>
+            <a:off x="643320" y="10080"/>
+            <a:ext cx="10897920" cy="1319760"/>
           </a:xfrm>
           <a:prstGeom prst="rect">
             <a:avLst/>
@@ -10815,7 +10815,7 @@
             <a:noAutofit/>
           </a:bodyPr>
           <a:p>
-            <a:pPr defTabSz="457200">
+            <a:pPr algn="ctr">
               <a:lnSpc>
                 <a:spcPct val="100000"/>
               </a:lnSpc>
@@ -10823,24 +10823,38 @@
                 <a:tab algn="l" pos="0"/>
               </a:tabLst>
             </a:pPr>
-            <a:r>
-              <a:rPr b="1" lang="ru-RU" sz="3600" spc="-1" strike="noStrike">
-                <a:solidFill>
-                  <a:srgbClr val="332974"/>
-                </a:solidFill>
-                <a:latin typeface="Montserrat SemiBold"/>
-              </a:rPr>
-              <a:t>Анализ выборки</a:t>
-            </a:r>
             <a:endParaRPr b="0" lang="ru-RU" sz="3600" spc="-1" strike="noStrike">
               <a:solidFill>
-                <a:srgbClr val="000000"/>
+                <a:srgbClr val="332974"/>
               </a:solidFill>
-              <a:latin typeface="Arial"/>
+              <a:latin typeface="Montserrat SemiBold"/>
             </a:endParaRPr>
           </a:p>
         </p:txBody>
       </p:sp>
+      <p:pic>
+        <p:nvPicPr>
+          <p:cNvPr id="172" name="" descr=""/>
+          <p:cNvPicPr/>
+          <p:nvPr/>
+        </p:nvPicPr>
+        <p:blipFill>
+          <a:blip r:embed="rId1"/>
+          <a:stretch/>
+        </p:blipFill>
+        <p:spPr>
+          <a:xfrm>
+            <a:off x="3022200" y="1440000"/>
+            <a:ext cx="7595640" cy="1233720"/>
+          </a:xfrm>
+          <a:prstGeom prst="rect">
+            <a:avLst/>
+          </a:prstGeom>
+          <a:ln w="0">
+            <a:noFill/>
+          </a:ln>
+        </p:spPr>
+      </p:pic>
       <p:pic>
         <p:nvPicPr>
           <p:cNvPr id="173" name="" descr=""/>
@@ -10848,13 +10862,90 @@
           <p:nvPr/>
         </p:nvPicPr>
         <p:blipFill>
+          <a:blip r:embed="rId2"/>
+          <a:stretch/>
+        </p:blipFill>
+        <p:spPr>
+          <a:xfrm>
+            <a:off x="3022200" y="2880000"/>
+            <a:ext cx="7446240" cy="2257200"/>
+          </a:xfrm>
+          <a:prstGeom prst="rect">
+            <a:avLst/>
+          </a:prstGeom>
+          <a:ln w="0">
+            <a:noFill/>
+          </a:ln>
+        </p:spPr>
+      </p:pic>
+      <p:sp>
+        <p:nvSpPr>
+          <p:cNvPr id="174" name=""/>
+          <p:cNvSpPr/>
+          <p:nvPr/>
+        </p:nvSpPr>
+        <p:spPr>
+          <a:xfrm>
+            <a:off x="0" y="0"/>
+            <a:ext cx="8676000" cy="732960"/>
+          </a:xfrm>
+          <a:prstGeom prst="rect">
+            <a:avLst/>
+          </a:prstGeom>
+          <a:noFill/>
+          <a:ln w="0">
+            <a:noFill/>
+          </a:ln>
+        </p:spPr>
+        <p:style>
+          <a:lnRef idx="0"/>
+          <a:fillRef idx="0"/>
+          <a:effectRef idx="0"/>
+          <a:fontRef idx="minor"/>
+        </p:style>
+        <p:txBody>
+          <a:bodyPr lIns="90000" rIns="90000" tIns="45000" bIns="45000" anchor="t">
+            <a:noAutofit/>
+          </a:bodyPr>
+          <a:p>
+            <a:pPr>
+              <a:lnSpc>
+                <a:spcPct val="100000"/>
+              </a:lnSpc>
+            </a:pPr>
+            <a:r>
+              <a:rPr b="1" lang="ru-RU" sz="3600" spc="-1" strike="noStrike">
+                <a:solidFill>
+                  <a:srgbClr val="332974"/>
+                </a:solidFill>
+                <a:latin typeface="Montserrat SemiBold"/>
+                <a:ea typeface="Microsoft YaHei"/>
+              </a:rPr>
+              <a:t>Сохранение результатов оценки</a:t>
+            </a:r>
+            <a:endParaRPr b="0" lang="ru-RU" sz="3600" spc="-1" strike="noStrike">
+              <a:solidFill>
+                <a:srgbClr val="000000"/>
+              </a:solidFill>
+              <a:latin typeface="Arial"/>
+            </a:endParaRPr>
+          </a:p>
+        </p:txBody>
+      </p:sp>
+      <p:pic>
+        <p:nvPicPr>
+          <p:cNvPr id="175" name="" descr=""/>
+          <p:cNvPicPr/>
+          <p:nvPr/>
+        </p:nvPicPr>
+        <p:blipFill>
           <a:blip r:embed="rId3"/>
           <a:stretch/>
         </p:blipFill>
         <p:spPr>
           <a:xfrm>
-            <a:off x="77400" y="1165320"/>
-            <a:ext cx="3340800" cy="3152880"/>
+            <a:off x="0" y="1440000"/>
+            <a:ext cx="2864160" cy="3057840"/>
           </a:xfrm>
           <a:prstGeom prst="rect">
             <a:avLst/>
@@ -10878,7 +10969,7 @@
         <p:txBody>
           <a:bodyPr/>
           <a:p>
-            <a:fld id="{10F0E10B-403D-4061-A08E-E45039550298}" type="slidenum">
+            <a:fld id="{FA520103-9D0D-4183-B6C2-414C50C686BB}" type="slidenum">
               <a:t>16</a:t>
             </a:fld>
           </a:p>
@@ -10916,227 +11007,7 @@
       </p:grpSpPr>
       <p:sp>
         <p:nvSpPr>
-          <p:cNvPr id="174" name="PlaceHolder 4"/>
-          <p:cNvSpPr/>
-          <p:nvPr/>
-        </p:nvSpPr>
-        <p:spPr>
-          <a:xfrm>
-            <a:off x="643320" y="10080"/>
-            <a:ext cx="10898280" cy="1320120"/>
-          </a:xfrm>
-          <a:prstGeom prst="rect">
-            <a:avLst/>
-          </a:prstGeom>
-          <a:noFill/>
-          <a:ln w="0">
-            <a:noFill/>
-          </a:ln>
-        </p:spPr>
-        <p:style>
-          <a:lnRef idx="0"/>
-          <a:fillRef idx="0"/>
-          <a:effectRef idx="0"/>
-          <a:fontRef idx="minor"/>
-        </p:style>
-        <p:txBody>
-          <a:bodyPr lIns="90000" rIns="90000" tIns="45000" bIns="45000" anchor="ctr">
-            <a:noAutofit/>
-          </a:bodyPr>
-          <a:p>
-            <a:pPr algn="ctr">
-              <a:lnSpc>
-                <a:spcPct val="100000"/>
-              </a:lnSpc>
-              <a:tabLst>
-                <a:tab algn="l" pos="0"/>
-              </a:tabLst>
-            </a:pPr>
-            <a:endParaRPr b="0" lang="ru-RU" sz="3600" spc="-1" strike="noStrike">
-              <a:solidFill>
-                <a:srgbClr val="332974"/>
-              </a:solidFill>
-              <a:latin typeface="Montserrat SemiBold"/>
-            </a:endParaRPr>
-          </a:p>
-        </p:txBody>
-      </p:sp>
-      <p:pic>
-        <p:nvPicPr>
-          <p:cNvPr id="175" name="" descr=""/>
-          <p:cNvPicPr/>
-          <p:nvPr/>
-        </p:nvPicPr>
-        <p:blipFill>
-          <a:blip r:embed="rId1"/>
-          <a:stretch/>
-        </p:blipFill>
-        <p:spPr>
-          <a:xfrm>
-            <a:off x="3022200" y="1440000"/>
-            <a:ext cx="7596000" cy="1234080"/>
-          </a:xfrm>
-          <a:prstGeom prst="rect">
-            <a:avLst/>
-          </a:prstGeom>
-          <a:ln w="0">
-            <a:noFill/>
-          </a:ln>
-        </p:spPr>
-      </p:pic>
-      <p:pic>
-        <p:nvPicPr>
-          <p:cNvPr id="176" name="" descr=""/>
-          <p:cNvPicPr/>
-          <p:nvPr/>
-        </p:nvPicPr>
-        <p:blipFill>
-          <a:blip r:embed="rId2"/>
-          <a:stretch/>
-        </p:blipFill>
-        <p:spPr>
-          <a:xfrm>
-            <a:off x="3022200" y="2880000"/>
-            <a:ext cx="7446600" cy="2257560"/>
-          </a:xfrm>
-          <a:prstGeom prst="rect">
-            <a:avLst/>
-          </a:prstGeom>
-          <a:ln w="0">
-            <a:noFill/>
-          </a:ln>
-        </p:spPr>
-      </p:pic>
-      <p:sp>
-        <p:nvSpPr>
-          <p:cNvPr id="177" name=""/>
-          <p:cNvSpPr/>
-          <p:nvPr/>
-        </p:nvSpPr>
-        <p:spPr>
-          <a:xfrm>
-            <a:off x="0" y="0"/>
-            <a:ext cx="8676360" cy="733320"/>
-          </a:xfrm>
-          <a:prstGeom prst="rect">
-            <a:avLst/>
-          </a:prstGeom>
-          <a:noFill/>
-          <a:ln w="0">
-            <a:noFill/>
-          </a:ln>
-        </p:spPr>
-        <p:style>
-          <a:lnRef idx="0"/>
-          <a:fillRef idx="0"/>
-          <a:effectRef idx="0"/>
-          <a:fontRef idx="minor"/>
-        </p:style>
-        <p:txBody>
-          <a:bodyPr lIns="90000" rIns="90000" tIns="45000" bIns="45000" anchor="t">
-            <a:noAutofit/>
-          </a:bodyPr>
-          <a:p>
-            <a:pPr>
-              <a:lnSpc>
-                <a:spcPct val="100000"/>
-              </a:lnSpc>
-            </a:pPr>
-            <a:r>
-              <a:rPr b="1" lang="ru-RU" sz="3600" spc="-1" strike="noStrike">
-                <a:solidFill>
-                  <a:srgbClr val="332974"/>
-                </a:solidFill>
-                <a:latin typeface="Montserrat SemiBold"/>
-                <a:ea typeface="Microsoft YaHei"/>
-              </a:rPr>
-              <a:t>Сохранение результатов оценки</a:t>
-            </a:r>
-            <a:endParaRPr b="0" lang="ru-RU" sz="3600" spc="-1" strike="noStrike">
-              <a:solidFill>
-                <a:srgbClr val="000000"/>
-              </a:solidFill>
-              <a:latin typeface="Arial"/>
-            </a:endParaRPr>
-          </a:p>
-        </p:txBody>
-      </p:sp>
-      <p:pic>
-        <p:nvPicPr>
-          <p:cNvPr id="178" name="" descr=""/>
-          <p:cNvPicPr/>
-          <p:nvPr/>
-        </p:nvPicPr>
-        <p:blipFill>
-          <a:blip r:embed="rId3"/>
-          <a:stretch/>
-        </p:blipFill>
-        <p:spPr>
-          <a:xfrm>
-            <a:off x="0" y="1440000"/>
-            <a:ext cx="2864520" cy="3058200"/>
-          </a:xfrm>
-          <a:prstGeom prst="rect">
-            <a:avLst/>
-          </a:prstGeom>
-          <a:ln w="0">
-            <a:noFill/>
-          </a:ln>
-        </p:spPr>
-      </p:pic>
-      <p:sp>
-        <p:nvSpPr>
-          <p:cNvPr id="2" name="PlaceHolder 1"/>
-          <p:cNvSpPr>
-            <a:spLocks noGrp="1"/>
-          </p:cNvSpPr>
-          <p:nvPr>
-            <p:ph type="sldNum" idx="20"/>
-          </p:nvPr>
-        </p:nvSpPr>
-        <p:spPr/>
-        <p:txBody>
-          <a:bodyPr/>
-          <a:p>
-            <a:fld id="{1435CB20-1CB7-46B0-954A-C26A400BA6B1}" type="slidenum">
-              <a:t>17</a:t>
-            </a:fld>
-          </a:p>
-        </p:txBody>
-      </p:sp>
-    </p:spTree>
-  </p:cSld>
-  <mc:AlternateContent>
-    <mc:Choice Requires="p14">
-      <p:transition spd="slow" p14:dur="2000"/>
-    </mc:Choice>
-    <mc:Fallback>
-      <p:transition spd="slow"/>
-    </mc:Fallback>
-  </mc:AlternateContent>
-</p:sld>
-</file>
-
-<file path=ppt/slides/slide18.xml><?xml version="1.0" encoding="utf-8"?>
-<p:sld xmlns:a="http://schemas.openxmlformats.org/drawingml/2006/main" xmlns:p="http://schemas.openxmlformats.org/presentationml/2006/main" xmlns:r="http://schemas.openxmlformats.org/officeDocument/2006/relationships" xmlns:p14="http://schemas.microsoft.com/office/powerpoint/2010/main" xmlns:p15="http://schemas.microsoft.com/office/powerpoint/2012/main" xmlns:mc="http://schemas.openxmlformats.org/markup-compatibility/2006">
-  <p:cSld>
-    <p:spTree>
-      <p:nvGrpSpPr>
-        <p:cNvPr id="1" name=""/>
-        <p:cNvGrpSpPr/>
-        <p:nvPr/>
-      </p:nvGrpSpPr>
-      <p:grpSpPr>
-        <a:xfrm>
-          <a:off x="0" y="0"/>
-          <a:ext cx="0" cy="0"/>
-          <a:chOff x="0" y="0"/>
-          <a:chExt cx="0" cy="0"/>
-        </a:xfrm>
-      </p:grpSpPr>
-      <p:sp>
-        <p:nvSpPr>
-          <p:cNvPr id="179" name="PlaceHolder 1"/>
+          <p:cNvPr id="176" name="PlaceHolder 1"/>
           <p:cNvSpPr>
             <a:spLocks noGrp="1"/>
           </p:cNvSpPr>
@@ -11147,7 +11018,7 @@
         <p:spPr>
           <a:xfrm>
             <a:off x="0" y="0"/>
-            <a:ext cx="11226960" cy="920160"/>
+            <a:ext cx="11226600" cy="919800"/>
           </a:xfrm>
           <a:prstGeom prst="rect">
             <a:avLst/>
@@ -11191,18 +11062,18 @@
       </p:sp>
       <p:sp>
         <p:nvSpPr>
-          <p:cNvPr id="180" name="PlaceHolder 2"/>
+          <p:cNvPr id="177" name="PlaceHolder 2"/>
           <p:cNvSpPr>
             <a:spLocks noGrp="1"/>
           </p:cNvSpPr>
           <p:nvPr>
-            <p:ph type="ftr" idx="48"/>
+            <p:ph type="ftr" idx="47"/>
           </p:nvPr>
         </p:nvSpPr>
         <p:spPr>
           <a:xfrm>
             <a:off x="1333440" y="6352560"/>
-            <a:ext cx="7477560" cy="362160"/>
+            <a:ext cx="7477200" cy="361800"/>
           </a:xfrm>
           <a:prstGeom prst="rect">
             <a:avLst/>
@@ -11231,7 +11102,7 @@
       </p:sp>
       <p:graphicFrame>
         <p:nvGraphicFramePr>
-          <p:cNvPr id="181" name=""/>
+          <p:cNvPr id="178" name=""/>
           <p:cNvGraphicFramePr/>
           <p:nvPr/>
         </p:nvGraphicFramePr>
@@ -11835,8 +11706,8 @@
         <p:txBody>
           <a:bodyPr/>
           <a:p>
-            <a:fld id="{564857BD-7442-4A08-96FF-BE647ABF06B0}" type="slidenum">
-              <a:t>18</a:t>
+            <a:fld id="{A6C52429-8862-4369-BC8C-FC376021F33A}" type="slidenum">
+              <a:t>17</a:t>
             </a:fld>
           </a:p>
         </p:txBody>
@@ -11854,7 +11725,7 @@
 </p:sld>
 </file>
 
-<file path=ppt/slides/slide19.xml><?xml version="1.0" encoding="utf-8"?>
+<file path=ppt/slides/slide18.xml><?xml version="1.0" encoding="utf-8"?>
 <p:sld xmlns:a="http://schemas.openxmlformats.org/drawingml/2006/main" xmlns:p="http://schemas.openxmlformats.org/presentationml/2006/main" xmlns:r="http://schemas.openxmlformats.org/officeDocument/2006/relationships" xmlns:p14="http://schemas.microsoft.com/office/powerpoint/2010/main" xmlns:p15="http://schemas.microsoft.com/office/powerpoint/2012/main" xmlns:mc="http://schemas.openxmlformats.org/markup-compatibility/2006">
   <p:cSld>
     <p:spTree>
@@ -11873,7 +11744,7 @@
       </p:grpSpPr>
       <p:sp>
         <p:nvSpPr>
-          <p:cNvPr id="182" name="PlaceHolder 1"/>
+          <p:cNvPr id="179" name="PlaceHolder 1"/>
           <p:cNvSpPr>
             <a:spLocks noGrp="1"/>
           </p:cNvSpPr>
@@ -11884,7 +11755,7 @@
         <p:spPr>
           <a:xfrm>
             <a:off x="3759120" y="5218920"/>
-            <a:ext cx="7820640" cy="743760"/>
+            <a:ext cx="7820280" cy="743400"/>
           </a:xfrm>
           <a:prstGeom prst="rect">
             <a:avLst/>
@@ -11932,7 +11803,7 @@
       </p:sp>
       <p:sp>
         <p:nvSpPr>
-          <p:cNvPr id="183" name="PlaceHolder 2"/>
+          <p:cNvPr id="180" name="PlaceHolder 2"/>
           <p:cNvSpPr>
             <a:spLocks noGrp="1"/>
           </p:cNvSpPr>
@@ -11943,7 +11814,7 @@
         <p:spPr>
           <a:xfrm>
             <a:off x="3759120" y="4242240"/>
-            <a:ext cx="7820640" cy="771120"/>
+            <a:ext cx="7820280" cy="770760"/>
           </a:xfrm>
           <a:prstGeom prst="rect">
             <a:avLst/>
@@ -12043,7 +11914,7 @@
       </p:sp>
       <p:sp>
         <p:nvSpPr>
-          <p:cNvPr id="184" name="PlaceHolder 3"/>
+          <p:cNvPr id="181" name="PlaceHolder 3"/>
           <p:cNvSpPr>
             <a:spLocks noGrp="1"/>
           </p:cNvSpPr>
@@ -12054,7 +11925,7 @@
         <p:spPr>
           <a:xfrm>
             <a:off x="4776840" y="6168600"/>
-            <a:ext cx="2635200" cy="332280"/>
+            <a:ext cx="2634840" cy="331920"/>
           </a:xfrm>
           <a:prstGeom prst="rect">
             <a:avLst/>
@@ -12086,7 +11957,7 @@
       </p:sp>
       <p:sp>
         <p:nvSpPr>
-          <p:cNvPr id="185" name="PlaceHolder 4"/>
+          <p:cNvPr id="182" name="PlaceHolder 4"/>
           <p:cNvSpPr>
             <a:spLocks noGrp="1"/>
           </p:cNvSpPr>
@@ -12097,7 +11968,7 @@
         <p:spPr>
           <a:xfrm>
             <a:off x="3759120" y="2007000"/>
-            <a:ext cx="7820640" cy="2029680"/>
+            <a:ext cx="7820280" cy="2029320"/>
           </a:xfrm>
           <a:prstGeom prst="rect">
             <a:avLst/>
@@ -12186,7 +12057,7 @@
         <p:spPr>
           <a:xfrm>
             <a:off x="0" y="0"/>
-            <a:ext cx="11226960" cy="920160"/>
+            <a:ext cx="11226600" cy="919800"/>
           </a:xfrm>
           <a:prstGeom prst="rect">
             <a:avLst/>
@@ -12237,7 +12108,7 @@
         <p:spPr>
           <a:xfrm>
             <a:off x="180000" y="920520"/>
-            <a:ext cx="8459640" cy="3974040"/>
+            <a:ext cx="8459280" cy="3973680"/>
           </a:xfrm>
           <a:prstGeom prst="rect">
             <a:avLst/>
@@ -12524,7 +12395,7 @@
         <p:txBody>
           <a:bodyPr/>
           <a:p>
-            <a:fld id="{81A607EF-0CF5-45D5-A2F4-46BA4610CC1A}" type="slidenum">
+            <a:fld id="{D7949B53-2FE1-4B3C-ABA2-12A86E6B93B4}" type="slidenum">
               <a:t>2</a:t>
             </a:fld>
           </a:p>
@@ -12569,7 +12440,7 @@
         <p:spPr>
           <a:xfrm>
             <a:off x="360" y="360"/>
-            <a:ext cx="11226960" cy="920160"/>
+            <a:ext cx="11226600" cy="919800"/>
           </a:xfrm>
           <a:prstGeom prst="rect">
             <a:avLst/>
@@ -12625,7 +12496,7 @@
         <p:spPr>
           <a:xfrm>
             <a:off x="360000" y="1002960"/>
-            <a:ext cx="10772280" cy="975240"/>
+            <a:ext cx="10771920" cy="974880"/>
           </a:xfrm>
           <a:prstGeom prst="rect">
             <a:avLst/>
@@ -12709,7 +12580,7 @@
         <p:spPr>
           <a:xfrm>
             <a:off x="0" y="2318040"/>
-            <a:ext cx="6726960" cy="920160"/>
+            <a:ext cx="6726600" cy="919800"/>
           </a:xfrm>
           <a:prstGeom prst="rect">
             <a:avLst/>
@@ -12763,7 +12634,7 @@
         <p:spPr>
           <a:xfrm>
             <a:off x="387360" y="3060000"/>
-            <a:ext cx="10772280" cy="597960"/>
+            <a:ext cx="10771920" cy="597600"/>
           </a:xfrm>
           <a:prstGeom prst="rect">
             <a:avLst/>
@@ -12817,7 +12688,7 @@
         <p:spPr>
           <a:xfrm>
             <a:off x="0" y="3834360"/>
-            <a:ext cx="11226960" cy="920160"/>
+            <a:ext cx="11226600" cy="919800"/>
           </a:xfrm>
           <a:prstGeom prst="rect">
             <a:avLst/>
@@ -12871,7 +12742,7 @@
         <p:spPr>
           <a:xfrm>
             <a:off x="454680" y="4602960"/>
-            <a:ext cx="10772280" cy="679680"/>
+            <a:ext cx="10771920" cy="679320"/>
           </a:xfrm>
           <a:prstGeom prst="rect">
             <a:avLst/>
@@ -12929,7 +12800,7 @@
         <p:txBody>
           <a:bodyPr/>
           <a:p>
-            <a:fld id="{C8756F6C-3FD9-4ECF-8618-AAD774E54E6D}" type="slidenum">
+            <a:fld id="{062BA560-C587-40A6-841E-4694A6714FF0}" type="slidenum">
               <a:t>3</a:t>
             </a:fld>
           </a:p>
@@ -12974,7 +12845,7 @@
         <p:spPr>
           <a:xfrm>
             <a:off x="0" y="0"/>
-            <a:ext cx="11157840" cy="1257840"/>
+            <a:ext cx="11157480" cy="1257480"/>
           </a:xfrm>
           <a:prstGeom prst="rect">
             <a:avLst/>
@@ -13034,7 +12905,7 @@
         <p:spPr>
           <a:xfrm>
             <a:off x="6026760" y="1620000"/>
-            <a:ext cx="5671080" cy="3957840"/>
+            <a:ext cx="5670720" cy="3957480"/>
           </a:xfrm>
           <a:prstGeom prst="rect">
             <a:avLst/>
@@ -13057,7 +12928,7 @@
         <p:spPr>
           <a:xfrm>
             <a:off x="720000" y="1620000"/>
-            <a:ext cx="5472720" cy="3958200"/>
+            <a:ext cx="5472360" cy="3957840"/>
           </a:xfrm>
           <a:prstGeom prst="rect">
             <a:avLst/>
@@ -13081,7 +12952,7 @@
         <p:txBody>
           <a:bodyPr/>
           <a:p>
-            <a:fld id="{642184D2-C6B1-47DA-ACCC-F6B78006278B}" type="slidenum">
+            <a:fld id="{BEC0828A-E780-46CB-ADB5-5ADB7FAAE45F}" type="slidenum">
               <a:t>4</a:t>
             </a:fld>
           </a:p>
@@ -13126,7 +12997,7 @@
         <p:spPr>
           <a:xfrm>
             <a:off x="3960" y="-180000"/>
-            <a:ext cx="12055680" cy="960480"/>
+            <a:ext cx="12055320" cy="960120"/>
           </a:xfrm>
           <a:prstGeom prst="rect">
             <a:avLst/>
@@ -13186,7 +13057,7 @@
         <p:spPr>
           <a:xfrm>
             <a:off x="2160000" y="1080000"/>
-            <a:ext cx="7557840" cy="5343840"/>
+            <a:ext cx="7557480" cy="5343480"/>
           </a:xfrm>
           <a:prstGeom prst="rect">
             <a:avLst/>
@@ -13210,7 +13081,7 @@
         <p:txBody>
           <a:bodyPr/>
           <a:p>
-            <a:fld id="{3547D84A-1FB1-4A35-82ED-978D593ADFD3}" type="slidenum">
+            <a:fld id="{32F0DD78-B0DD-4E16-8C72-313A8300CFD7}" type="slidenum">
               <a:t>5</a:t>
             </a:fld>
           </a:p>
@@ -13259,7 +13130,7 @@
         <p:spPr>
           <a:xfrm>
             <a:off x="0" y="0"/>
-            <a:ext cx="11697840" cy="920160"/>
+            <a:ext cx="11226600" cy="919800"/>
           </a:xfrm>
           <a:prstGeom prst="rect">
             <a:avLst/>
@@ -13286,11 +13157,11 @@
             <a:r>
               <a:rPr b="1" lang="ru-RU" sz="3600" spc="-1" strike="noStrike">
                 <a:solidFill>
-                  <a:schemeClr val="dk1"/>
+                  <a:srgbClr val="332974"/>
                 </a:solidFill>
                 <a:latin typeface="Montserrat SemiBold"/>
               </a:rPr>
-              <a:t>Сравнительный анализ готовых решений</a:t>
+              <a:t>Выбранные технические решения</a:t>
             </a:r>
             <a:endParaRPr b="0" lang="ru-RU" sz="3600" spc="-1" strike="noStrike">
               <a:solidFill>
@@ -13303,18 +13174,14 @@
       </p:sp>
       <p:sp>
         <p:nvSpPr>
-          <p:cNvPr id="143" name="PlaceHolder 2"/>
-          <p:cNvSpPr>
-            <a:spLocks noGrp="1"/>
-          </p:cNvSpPr>
-          <p:nvPr>
-            <p:ph type="ftr" idx="45"/>
-          </p:nvPr>
+          <p:cNvPr id="143" name=""/>
+          <p:cNvSpPr/>
+          <p:nvPr/>
         </p:nvSpPr>
         <p:spPr>
           <a:xfrm>
-            <a:off x="1333440" y="6386400"/>
-            <a:ext cx="7477560" cy="362160"/>
+            <a:off x="141480" y="1088640"/>
+            <a:ext cx="5615640" cy="2330640"/>
           </a:xfrm>
           <a:prstGeom prst="rect">
             <a:avLst/>
@@ -13324,2547 +13191,435 @@
             <a:noFill/>
           </a:ln>
         </p:spPr>
+        <p:style>
+          <a:lnRef idx="0"/>
+          <a:fillRef idx="0"/>
+          <a:effectRef idx="0"/>
+          <a:fontRef idx="minor"/>
+        </p:style>
         <p:txBody>
           <a:bodyPr lIns="90000" rIns="90000" tIns="45000" bIns="45000" anchor="t">
             <a:noAutofit/>
           </a:bodyPr>
           <a:p>
-            <a:pPr indent="0">
-              <a:buNone/>
+            <a:pPr>
+              <a:lnSpc>
+                <a:spcPct val="100000"/>
+              </a:lnSpc>
             </a:pPr>
-            <a:endParaRPr b="0" lang="ru-RU" sz="1400" spc="-1" strike="noStrike">
+            <a:r>
+              <a:rPr b="1" lang="ru-RU" sz="1800" spc="-1" strike="noStrike">
+                <a:solidFill>
+                  <a:srgbClr val="332974"/>
+                </a:solidFill>
+                <a:latin typeface="Montserrat"/>
+              </a:rPr>
+              <a:t>1. Платформа клиентского приложения</a:t>
+            </a:r>
+            <a:endParaRPr b="0" lang="ru-RU" sz="1800" spc="-1" strike="noStrike">
               <a:solidFill>
                 <a:srgbClr val="000000"/>
               </a:solidFill>
-              <a:latin typeface="Times New Roman"/>
+              <a:latin typeface="Arial"/>
+            </a:endParaRPr>
+          </a:p>
+          <a:p>
+            <a:pPr>
+              <a:lnSpc>
+                <a:spcPct val="100000"/>
+              </a:lnSpc>
+            </a:pPr>
+            <a:r>
+              <a:rPr b="0" lang="ru-RU" sz="1800" spc="-1" strike="noStrike">
+                <a:solidFill>
+                  <a:srgbClr val="332974"/>
+                </a:solidFill>
+                <a:latin typeface="Montserrat"/>
+              </a:rPr>
+              <a:t>    </a:t>
+            </a:r>
+            <a:r>
+              <a:rPr b="0" lang="ru-RU" sz="1800" spc="-1" strike="noStrike">
+                <a:solidFill>
+                  <a:srgbClr val="332974"/>
+                </a:solidFill>
+                <a:latin typeface="Montserrat"/>
+              </a:rPr>
+              <a:t>1С:Предприятие 8.3</a:t>
+            </a:r>
+            <a:endParaRPr b="0" lang="ru-RU" sz="1800" spc="-1" strike="noStrike">
+              <a:solidFill>
+                <a:srgbClr val="000000"/>
+              </a:solidFill>
+              <a:latin typeface="Arial"/>
+            </a:endParaRPr>
+          </a:p>
+          <a:p>
+            <a:pPr>
+              <a:lnSpc>
+                <a:spcPct val="100000"/>
+              </a:lnSpc>
+            </a:pPr>
+            <a:endParaRPr b="0" lang="ru-RU" sz="1800" spc="-1" strike="noStrike">
+              <a:solidFill>
+                <a:srgbClr val="000000"/>
+              </a:solidFill>
+              <a:latin typeface="Arial"/>
+            </a:endParaRPr>
+          </a:p>
+          <a:p>
+            <a:pPr>
+              <a:lnSpc>
+                <a:spcPct val="100000"/>
+              </a:lnSpc>
+            </a:pPr>
+            <a:r>
+              <a:rPr b="1" lang="ru-RU" sz="1800" spc="-1" strike="noStrike">
+                <a:solidFill>
+                  <a:srgbClr val="332974"/>
+                </a:solidFill>
+                <a:latin typeface="Montserrat"/>
+              </a:rPr>
+              <a:t>2. Язык и среда разработки ML-сервиса</a:t>
+            </a:r>
+            <a:endParaRPr b="0" lang="ru-RU" sz="1800" spc="-1" strike="noStrike">
+              <a:solidFill>
+                <a:srgbClr val="000000"/>
+              </a:solidFill>
+              <a:latin typeface="Arial"/>
+            </a:endParaRPr>
+          </a:p>
+          <a:p>
+            <a:pPr>
+              <a:lnSpc>
+                <a:spcPct val="100000"/>
+              </a:lnSpc>
+            </a:pPr>
+            <a:r>
+              <a:rPr b="0" lang="ru-RU" sz="1800" spc="-1" strike="noStrike">
+                <a:solidFill>
+                  <a:srgbClr val="332974"/>
+                </a:solidFill>
+                <a:latin typeface="Montserrat"/>
+              </a:rPr>
+              <a:t>    </a:t>
+            </a:r>
+            <a:r>
+              <a:rPr b="0" lang="ru-RU" sz="1800" spc="-1" strike="noStrike">
+                <a:solidFill>
+                  <a:srgbClr val="332974"/>
+                </a:solidFill>
+                <a:latin typeface="Montserrat"/>
+              </a:rPr>
+              <a:t>Python 3.11+</a:t>
+            </a:r>
+            <a:endParaRPr b="0" lang="ru-RU" sz="1800" spc="-1" strike="noStrike">
+              <a:solidFill>
+                <a:srgbClr val="000000"/>
+              </a:solidFill>
+              <a:latin typeface="Arial"/>
+            </a:endParaRPr>
+          </a:p>
+          <a:p>
+            <a:pPr>
+              <a:lnSpc>
+                <a:spcPct val="100000"/>
+              </a:lnSpc>
+            </a:pPr>
+            <a:endParaRPr b="0" lang="ru-RU" sz="1800" spc="-1" strike="noStrike">
+              <a:solidFill>
+                <a:srgbClr val="000000"/>
+              </a:solidFill>
+              <a:latin typeface="Arial"/>
+            </a:endParaRPr>
+          </a:p>
+          <a:p>
+            <a:pPr>
+              <a:lnSpc>
+                <a:spcPct val="100000"/>
+              </a:lnSpc>
+            </a:pPr>
+            <a:r>
+              <a:rPr b="1" lang="ru-RU" sz="1800" spc="-1" strike="noStrike">
+                <a:solidFill>
+                  <a:srgbClr val="332974"/>
+                </a:solidFill>
+                <a:latin typeface="Montserrat"/>
+              </a:rPr>
+              <a:t>3. Библиотеки машинного обучения</a:t>
+            </a:r>
+            <a:endParaRPr b="0" lang="ru-RU" sz="1800" spc="-1" strike="noStrike">
+              <a:solidFill>
+                <a:srgbClr val="000000"/>
+              </a:solidFill>
+              <a:latin typeface="Arial"/>
+            </a:endParaRPr>
+          </a:p>
+          <a:p>
+            <a:pPr>
+              <a:lnSpc>
+                <a:spcPct val="100000"/>
+              </a:lnSpc>
+            </a:pPr>
+            <a:r>
+              <a:rPr b="0" lang="ru-RU" sz="1800" spc="-1" strike="noStrike">
+                <a:solidFill>
+                  <a:srgbClr val="332974"/>
+                </a:solidFill>
+                <a:latin typeface="Montserrat"/>
+              </a:rPr>
+              <a:t>    </a:t>
+            </a:r>
+            <a:r>
+              <a:rPr b="0" lang="ru-RU" sz="1800" spc="-1" strike="noStrike">
+                <a:solidFill>
+                  <a:srgbClr val="332974"/>
+                </a:solidFill>
+                <a:latin typeface="Montserrat"/>
+              </a:rPr>
+              <a:t>Scikit-learn, XGBoost, Imbalanced-learn</a:t>
+            </a:r>
+            <a:endParaRPr b="0" lang="ru-RU" sz="1800" spc="-1" strike="noStrike">
+              <a:solidFill>
+                <a:srgbClr val="000000"/>
+              </a:solidFill>
+              <a:latin typeface="Arial"/>
+            </a:endParaRPr>
+          </a:p>
+          <a:p>
+            <a:pPr>
+              <a:lnSpc>
+                <a:spcPct val="100000"/>
+              </a:lnSpc>
+            </a:pPr>
+            <a:endParaRPr b="0" lang="ru-RU" sz="1800" spc="-1" strike="noStrike">
+              <a:solidFill>
+                <a:srgbClr val="000000"/>
+              </a:solidFill>
+              <a:latin typeface="Arial"/>
             </a:endParaRPr>
           </a:p>
         </p:txBody>
       </p:sp>
-      <p:graphicFrame>
-        <p:nvGraphicFramePr>
-          <p:cNvPr id="144" name="Объект 3"/>
-          <p:cNvGraphicFramePr/>
-          <p:nvPr/>
-        </p:nvGraphicFramePr>
-        <p:xfrm>
-          <a:off x="1469520" y="972360"/>
-          <a:ext cx="9148680" cy="4384800"/>
-        </p:xfrm>
-        <a:graphic>
-          <a:graphicData uri="http://schemas.openxmlformats.org/drawingml/2006/table">
-            <a:tbl>
-              <a:tblPr/>
-              <a:tblGrid>
-                <a:gridCol w="1887120"/>
-                <a:gridCol w="1884960"/>
-                <a:gridCol w="1883160"/>
-                <a:gridCol w="1622520"/>
-                <a:gridCol w="1871280"/>
-              </a:tblGrid>
-              <a:tr h="821880">
-                <a:tc>
-                  <a:txBody>
-                    <a:bodyPr lIns="44640" rIns="44640" anchor="ctr">
-                      <a:noAutofit/>
-                    </a:bodyPr>
-                    <a:p>
-                      <a:pPr algn="ctr" defTabSz="457200">
-                        <a:lnSpc>
-                          <a:spcPct val="107000"/>
-                        </a:lnSpc>
-                        <a:tabLst>
-                          <a:tab algn="l" pos="630720"/>
-                        </a:tabLst>
-                      </a:pPr>
-                      <a:r>
-                        <a:rPr b="1" lang="ru-RU" sz="1200" spc="-1" strike="noStrike">
-                          <a:solidFill>
-                            <a:schemeClr val="lt1"/>
-                          </a:solidFill>
-                          <a:latin typeface="Century Gothic"/>
-                        </a:rPr>
-                        <a:t>Название системы \</a:t>
-                      </a:r>
-                      <a:endParaRPr b="0" lang="ru-RU" sz="1200" spc="-1" strike="noStrike">
-                        <a:solidFill>
-                          <a:srgbClr val="ffffff"/>
-                        </a:solidFill>
-                        <a:latin typeface="Arial"/>
-                      </a:endParaRPr>
-                    </a:p>
-                    <a:p>
-                      <a:pPr algn="ctr" defTabSz="457200">
-                        <a:lnSpc>
-                          <a:spcPct val="107000"/>
-                        </a:lnSpc>
-                        <a:tabLst>
-                          <a:tab algn="l" pos="630720"/>
-                        </a:tabLst>
-                      </a:pPr>
-                      <a:r>
-                        <a:rPr b="1" lang="ru-RU" sz="1200" spc="-1" strike="noStrike">
-                          <a:solidFill>
-                            <a:schemeClr val="lt1"/>
-                          </a:solidFill>
-                          <a:latin typeface="Century Gothic"/>
-                        </a:rPr>
-                        <a:t>Критерии</a:t>
-                      </a:r>
-                      <a:endParaRPr b="0" lang="ru-RU" sz="1200" spc="-1" strike="noStrike">
-                        <a:solidFill>
-                          <a:srgbClr val="ffffff"/>
-                        </a:solidFill>
-                        <a:latin typeface="Arial"/>
-                      </a:endParaRPr>
-                    </a:p>
-                  </a:txBody>
-                  <a:tcPr anchor="ctr" marL="44640" marR="44640">
-                    <a:lnL w="12240">
-                      <a:solidFill>
-                        <a:srgbClr val="ffffff"/>
-                      </a:solidFill>
-                      <a:prstDash val="solid"/>
-                    </a:lnL>
-                    <a:lnR w="12240">
-                      <a:solidFill>
-                        <a:srgbClr val="ffffff"/>
-                      </a:solidFill>
-                      <a:prstDash val="solid"/>
-                    </a:lnR>
-                    <a:lnT w="12240">
-                      <a:solidFill>
-                        <a:srgbClr val="ffffff"/>
-                      </a:solidFill>
-                      <a:prstDash val="solid"/>
-                    </a:lnT>
-                    <a:lnB w="38160">
-                      <a:solidFill>
-                        <a:srgbClr val="ffffff"/>
-                      </a:solidFill>
-                      <a:prstDash val="solid"/>
-                    </a:lnB>
-                    <a:solidFill>
-                      <a:srgbClr val="332974"/>
-                    </a:solidFill>
-                  </a:tcPr>
-                </a:tc>
-                <a:tc>
-                  <a:txBody>
-                    <a:bodyPr lIns="44640" rIns="44640" anchor="ctr">
-                      <a:noAutofit/>
-                    </a:bodyPr>
-                    <a:p>
-                      <a:pPr algn="ctr" defTabSz="457200">
-                        <a:lnSpc>
-                          <a:spcPct val="107000"/>
-                        </a:lnSpc>
-                      </a:pPr>
-                      <a:r>
-                        <a:rPr b="1" lang="ru-RU" sz="1200" spc="-1" strike="noStrike">
-                          <a:solidFill>
-                            <a:schemeClr val="lt1"/>
-                          </a:solidFill>
-                          <a:latin typeface="Century Gothic"/>
-                        </a:rPr>
-                        <a:t>PLUSSELL</a:t>
-                      </a:r>
-                      <a:endParaRPr b="0" lang="ru-RU" sz="1200" spc="-1" strike="noStrike">
-                        <a:solidFill>
-                          <a:srgbClr val="ffffff"/>
-                        </a:solidFill>
-                        <a:latin typeface="Arial"/>
-                      </a:endParaRPr>
-                    </a:p>
-                  </a:txBody>
-                  <a:tcPr anchor="ctr" marL="44640" marR="44640">
-                    <a:lnL w="12240">
-                      <a:solidFill>
-                        <a:srgbClr val="ffffff"/>
-                      </a:solidFill>
-                      <a:prstDash val="solid"/>
-                    </a:lnL>
-                    <a:lnR w="12240">
-                      <a:solidFill>
-                        <a:srgbClr val="ffffff"/>
-                      </a:solidFill>
-                      <a:prstDash val="solid"/>
-                    </a:lnR>
-                    <a:lnT w="12240">
-                      <a:solidFill>
-                        <a:srgbClr val="ffffff"/>
-                      </a:solidFill>
-                      <a:prstDash val="solid"/>
-                    </a:lnT>
-                    <a:lnB w="38160">
-                      <a:solidFill>
-                        <a:srgbClr val="ffffff"/>
-                      </a:solidFill>
-                      <a:prstDash val="solid"/>
-                    </a:lnB>
-                    <a:solidFill>
-                      <a:srgbClr val="332974"/>
-                    </a:solidFill>
-                  </a:tcPr>
-                </a:tc>
-                <a:tc>
-                  <a:txBody>
-                    <a:bodyPr lIns="44640" rIns="44640" anchor="ctr">
-                      <a:noAutofit/>
-                    </a:bodyPr>
-                    <a:p>
-                      <a:pPr algn="ctr" defTabSz="457200">
-                        <a:lnSpc>
-                          <a:spcPct val="107000"/>
-                        </a:lnSpc>
-                      </a:pPr>
-                      <a:r>
-                        <a:rPr b="1" lang="ru-RU" sz="1200" spc="-1" strike="noStrike">
-                          <a:solidFill>
-                            <a:schemeClr val="lt1"/>
-                          </a:solidFill>
-                          <a:latin typeface="Century Gothic"/>
-                        </a:rPr>
-                        <a:t>SAP Ariba</a:t>
-                      </a:r>
-                      <a:endParaRPr b="0" lang="ru-RU" sz="1200" spc="-1" strike="noStrike">
-                        <a:solidFill>
-                          <a:srgbClr val="ffffff"/>
-                        </a:solidFill>
-                        <a:latin typeface="Arial"/>
-                      </a:endParaRPr>
-                    </a:p>
-                  </a:txBody>
-                  <a:tcPr anchor="ctr" marL="44640" marR="44640">
-                    <a:lnL w="12240">
-                      <a:solidFill>
-                        <a:srgbClr val="ffffff"/>
-                      </a:solidFill>
-                      <a:prstDash val="solid"/>
-                    </a:lnL>
-                    <a:lnR w="12240">
-                      <a:solidFill>
-                        <a:srgbClr val="ffffff"/>
-                      </a:solidFill>
-                      <a:prstDash val="solid"/>
-                    </a:lnR>
-                    <a:lnT w="12240">
-                      <a:solidFill>
-                        <a:srgbClr val="ffffff"/>
-                      </a:solidFill>
-                      <a:prstDash val="solid"/>
-                    </a:lnT>
-                    <a:lnB w="38160">
-                      <a:solidFill>
-                        <a:srgbClr val="ffffff"/>
-                      </a:solidFill>
-                      <a:prstDash val="solid"/>
-                    </a:lnB>
-                    <a:solidFill>
-                      <a:srgbClr val="332974"/>
-                    </a:solidFill>
-                  </a:tcPr>
-                </a:tc>
-                <a:tc>
-                  <a:txBody>
-                    <a:bodyPr lIns="44640" rIns="44640" anchor="ctr">
-                      <a:noAutofit/>
-                    </a:bodyPr>
-                    <a:p>
-                      <a:pPr algn="ctr" defTabSz="457200">
-                        <a:lnSpc>
-                          <a:spcPct val="107000"/>
-                        </a:lnSpc>
-                      </a:pPr>
-                      <a:r>
-                        <a:rPr b="1" lang="ru-RU" sz="1200" spc="-1" strike="noStrike">
-                          <a:solidFill>
-                            <a:schemeClr val="lt1"/>
-                          </a:solidFill>
-                          <a:latin typeface="Century Gothic"/>
-                        </a:rPr>
-                        <a:t>iTender SRM</a:t>
-                      </a:r>
-                      <a:endParaRPr b="0" lang="ru-RU" sz="1200" spc="-1" strike="noStrike">
-                        <a:solidFill>
-                          <a:srgbClr val="ffffff"/>
-                        </a:solidFill>
-                        <a:latin typeface="Arial"/>
-                      </a:endParaRPr>
-                    </a:p>
-                  </a:txBody>
-                  <a:tcPr anchor="ctr" marL="44640" marR="44640">
-                    <a:lnL w="12240">
-                      <a:solidFill>
-                        <a:srgbClr val="ffffff"/>
-                      </a:solidFill>
-                      <a:prstDash val="solid"/>
-                    </a:lnL>
-                    <a:lnR w="12240">
-                      <a:solidFill>
-                        <a:srgbClr val="ffffff"/>
-                      </a:solidFill>
-                      <a:prstDash val="solid"/>
-                    </a:lnR>
-                    <a:lnT w="12240">
-                      <a:solidFill>
-                        <a:srgbClr val="ffffff"/>
-                      </a:solidFill>
-                      <a:prstDash val="solid"/>
-                    </a:lnT>
-                    <a:lnB w="38160">
-                      <a:solidFill>
-                        <a:srgbClr val="ffffff"/>
-                      </a:solidFill>
-                      <a:prstDash val="solid"/>
-                    </a:lnB>
-                    <a:solidFill>
-                      <a:srgbClr val="332974"/>
-                    </a:solidFill>
-                  </a:tcPr>
-                </a:tc>
-                <a:tc>
-                  <a:txBody>
-                    <a:bodyPr lIns="44640" rIns="44640" anchor="ctr">
-                      <a:noAutofit/>
-                    </a:bodyPr>
-                    <a:p>
-                      <a:pPr algn="ctr" defTabSz="457200">
-                        <a:lnSpc>
-                          <a:spcPct val="107000"/>
-                        </a:lnSpc>
-                        <a:tabLst>
-                          <a:tab algn="l" pos="630720"/>
-                        </a:tabLst>
-                      </a:pPr>
-                      <a:r>
-                        <a:rPr b="1" lang="ru-RU" sz="1200" spc="-1" strike="noStrike">
-                          <a:solidFill>
-                            <a:schemeClr val="lt1"/>
-                          </a:solidFill>
-                          <a:latin typeface="Century Gothic"/>
-                        </a:rPr>
-                        <a:t>Разработка собственной информационной системы</a:t>
-                      </a:r>
-                      <a:endParaRPr b="0" lang="ru-RU" sz="1200" spc="-1" strike="noStrike">
-                        <a:solidFill>
-                          <a:srgbClr val="ffffff"/>
-                        </a:solidFill>
-                        <a:latin typeface="Arial"/>
-                      </a:endParaRPr>
-                    </a:p>
-                  </a:txBody>
-                  <a:tcPr anchor="ctr" marL="44640" marR="44640">
-                    <a:lnL w="12240">
-                      <a:solidFill>
-                        <a:srgbClr val="ffffff"/>
-                      </a:solidFill>
-                      <a:prstDash val="solid"/>
-                    </a:lnL>
-                    <a:lnR w="12240">
-                      <a:solidFill>
-                        <a:srgbClr val="ffffff"/>
-                      </a:solidFill>
-                      <a:prstDash val="solid"/>
-                    </a:lnR>
-                    <a:lnT w="12240">
-                      <a:solidFill>
-                        <a:srgbClr val="ffffff"/>
-                      </a:solidFill>
-                      <a:prstDash val="solid"/>
-                    </a:lnT>
-                    <a:lnB w="38160">
-                      <a:solidFill>
-                        <a:srgbClr val="ffffff"/>
-                      </a:solidFill>
-                      <a:prstDash val="solid"/>
-                    </a:lnB>
-                    <a:solidFill>
-                      <a:srgbClr val="332974"/>
-                    </a:solidFill>
-                  </a:tcPr>
-                </a:tc>
-              </a:tr>
-              <a:tr h="274320">
-                <a:tc>
-                  <a:txBody>
-                    <a:bodyPr lIns="44640" rIns="44640" anchor="ctr">
-                      <a:noAutofit/>
-                    </a:bodyPr>
-                    <a:p>
-                      <a:pPr algn="ctr" defTabSz="457200">
-                        <a:lnSpc>
-                          <a:spcPct val="107000"/>
-                        </a:lnSpc>
-                        <a:tabLst>
-                          <a:tab algn="l" pos="630720"/>
-                        </a:tabLst>
-                      </a:pPr>
-                      <a:r>
-                        <a:rPr b="1" lang="ru-RU" sz="1200" spc="-1" strike="noStrike">
-                          <a:solidFill>
-                            <a:schemeClr val="lt1"/>
-                          </a:solidFill>
-                          <a:latin typeface="Century Gothic"/>
-                        </a:rPr>
-                        <a:t>1</a:t>
-                      </a:r>
-                      <a:endParaRPr b="0" lang="ru-RU" sz="1200" spc="-1" strike="noStrike">
-                        <a:solidFill>
-                          <a:srgbClr val="ffffff"/>
-                        </a:solidFill>
-                        <a:latin typeface="Arial"/>
-                      </a:endParaRPr>
-                    </a:p>
-                  </a:txBody>
-                  <a:tcPr anchor="ctr" marL="44640" marR="44640">
-                    <a:lnL w="12240">
-                      <a:solidFill>
-                        <a:srgbClr val="ffffff"/>
-                      </a:solidFill>
-                      <a:prstDash val="solid"/>
-                    </a:lnL>
-                    <a:lnR w="12240">
-                      <a:solidFill>
-                        <a:srgbClr val="ffffff"/>
-                      </a:solidFill>
-                      <a:prstDash val="solid"/>
-                    </a:lnR>
-                    <a:lnT w="12240">
-                      <a:solidFill>
-                        <a:srgbClr val="ffffff"/>
-                      </a:solidFill>
-                      <a:prstDash val="solid"/>
-                    </a:lnT>
-                    <a:lnB w="12240">
-                      <a:solidFill>
-                        <a:srgbClr val="ffffff"/>
-                      </a:solidFill>
-                      <a:prstDash val="solid"/>
-                    </a:lnB>
-                    <a:solidFill>
-                      <a:srgbClr val="332974"/>
-                    </a:solidFill>
-                  </a:tcPr>
-                </a:tc>
-                <a:tc>
-                  <a:txBody>
-                    <a:bodyPr lIns="44640" rIns="44640" anchor="ctr">
-                      <a:noAutofit/>
-                    </a:bodyPr>
-                    <a:p>
-                      <a:pPr algn="ctr" defTabSz="457200">
-                        <a:lnSpc>
-                          <a:spcPct val="107000"/>
-                        </a:lnSpc>
-                        <a:tabLst>
-                          <a:tab algn="l" pos="630720"/>
-                        </a:tabLst>
-                      </a:pPr>
-                      <a:r>
-                        <a:rPr b="0" lang="ru-RU" sz="1200" spc="-1" strike="noStrike">
-                          <a:solidFill>
-                            <a:schemeClr val="dk1"/>
-                          </a:solidFill>
-                          <a:latin typeface="Century Gothic"/>
-                        </a:rPr>
-                        <a:t>2</a:t>
-                      </a:r>
-                      <a:endParaRPr b="0" lang="ru-RU" sz="1200" spc="-1" strike="noStrike">
-                        <a:solidFill>
-                          <a:srgbClr val="000000"/>
-                        </a:solidFill>
-                        <a:latin typeface="Arial"/>
-                      </a:endParaRPr>
-                    </a:p>
-                  </a:txBody>
-                  <a:tcPr anchor="ctr" marL="44640" marR="44640">
-                    <a:lnL w="12240">
-                      <a:solidFill>
-                        <a:srgbClr val="ffffff"/>
-                      </a:solidFill>
-                      <a:prstDash val="solid"/>
-                    </a:lnL>
-                    <a:lnR w="12240">
-                      <a:solidFill>
-                        <a:srgbClr val="ffffff"/>
-                      </a:solidFill>
-                      <a:prstDash val="solid"/>
-                    </a:lnR>
-                    <a:lnT w="12240">
-                      <a:solidFill>
-                        <a:srgbClr val="ffffff"/>
-                      </a:solidFill>
-                      <a:prstDash val="solid"/>
-                    </a:lnT>
-                    <a:lnB w="12240">
-                      <a:solidFill>
-                        <a:srgbClr val="ffffff"/>
-                      </a:solidFill>
-                      <a:prstDash val="solid"/>
-                    </a:lnB>
-                    <a:solidFill>
-                      <a:srgbClr val="dedce6"/>
-                    </a:solidFill>
-                  </a:tcPr>
-                </a:tc>
-                <a:tc>
-                  <a:txBody>
-                    <a:bodyPr lIns="44640" rIns="44640" anchor="ctr">
-                      <a:noAutofit/>
-                    </a:bodyPr>
-                    <a:p>
-                      <a:pPr algn="ctr" defTabSz="457200">
-                        <a:lnSpc>
-                          <a:spcPct val="107000"/>
-                        </a:lnSpc>
-                        <a:tabLst>
-                          <a:tab algn="l" pos="630720"/>
-                        </a:tabLst>
-                      </a:pPr>
-                      <a:r>
-                        <a:rPr b="0" lang="ru-RU" sz="1200" spc="-1" strike="noStrike">
-                          <a:solidFill>
-                            <a:schemeClr val="dk1"/>
-                          </a:solidFill>
-                          <a:latin typeface="Century Gothic"/>
-                        </a:rPr>
-                        <a:t>3</a:t>
-                      </a:r>
-                      <a:endParaRPr b="0" lang="ru-RU" sz="1200" spc="-1" strike="noStrike">
-                        <a:solidFill>
-                          <a:srgbClr val="000000"/>
-                        </a:solidFill>
-                        <a:latin typeface="Arial"/>
-                      </a:endParaRPr>
-                    </a:p>
-                  </a:txBody>
-                  <a:tcPr anchor="ctr" marL="44640" marR="44640">
-                    <a:lnL w="12240">
-                      <a:solidFill>
-                        <a:srgbClr val="ffffff"/>
-                      </a:solidFill>
-                      <a:prstDash val="solid"/>
-                    </a:lnL>
-                    <a:lnR w="12240">
-                      <a:solidFill>
-                        <a:srgbClr val="ffffff"/>
-                      </a:solidFill>
-                      <a:prstDash val="solid"/>
-                    </a:lnR>
-                    <a:lnT w="12240">
-                      <a:solidFill>
-                        <a:srgbClr val="ffffff"/>
-                      </a:solidFill>
-                      <a:prstDash val="solid"/>
-                    </a:lnT>
-                    <a:lnB w="12240">
-                      <a:solidFill>
-                        <a:srgbClr val="ffffff"/>
-                      </a:solidFill>
-                      <a:prstDash val="solid"/>
-                    </a:lnB>
-                    <a:solidFill>
-                      <a:srgbClr val="dedce6"/>
-                    </a:solidFill>
-                  </a:tcPr>
-                </a:tc>
-                <a:tc>
-                  <a:txBody>
-                    <a:bodyPr lIns="44640" rIns="44640" anchor="ctr">
-                      <a:noAutofit/>
-                    </a:bodyPr>
-                    <a:p>
-                      <a:pPr algn="ctr" defTabSz="457200">
-                        <a:lnSpc>
-                          <a:spcPct val="107000"/>
-                        </a:lnSpc>
-                        <a:tabLst>
-                          <a:tab algn="l" pos="630720"/>
-                        </a:tabLst>
-                      </a:pPr>
-                      <a:r>
-                        <a:rPr b="0" lang="ru-RU" sz="1200" spc="-1" strike="noStrike">
-                          <a:solidFill>
-                            <a:schemeClr val="dk1"/>
-                          </a:solidFill>
-                          <a:latin typeface="Century Gothic"/>
-                        </a:rPr>
-                        <a:t>4</a:t>
-                      </a:r>
-                      <a:endParaRPr b="0" lang="ru-RU" sz="1200" spc="-1" strike="noStrike">
-                        <a:solidFill>
-                          <a:srgbClr val="000000"/>
-                        </a:solidFill>
-                        <a:latin typeface="Arial"/>
-                      </a:endParaRPr>
-                    </a:p>
-                  </a:txBody>
-                  <a:tcPr anchor="ctr" marL="44640" marR="44640">
-                    <a:lnL w="12240">
-                      <a:solidFill>
-                        <a:srgbClr val="ffffff"/>
-                      </a:solidFill>
-                      <a:prstDash val="solid"/>
-                    </a:lnL>
-                    <a:lnR w="12240">
-                      <a:solidFill>
-                        <a:srgbClr val="ffffff"/>
-                      </a:solidFill>
-                      <a:prstDash val="solid"/>
-                    </a:lnR>
-                    <a:lnT w="12240">
-                      <a:solidFill>
-                        <a:srgbClr val="ffffff"/>
-                      </a:solidFill>
-                      <a:prstDash val="solid"/>
-                    </a:lnT>
-                    <a:lnB w="12240">
-                      <a:solidFill>
-                        <a:srgbClr val="ffffff"/>
-                      </a:solidFill>
-                      <a:prstDash val="solid"/>
-                    </a:lnB>
-                    <a:solidFill>
-                      <a:srgbClr val="dedce6"/>
-                    </a:solidFill>
-                  </a:tcPr>
-                </a:tc>
-                <a:tc>
-                  <a:txBody>
-                    <a:bodyPr lIns="44640" rIns="44640" anchor="ctr">
-                      <a:noAutofit/>
-                    </a:bodyPr>
-                    <a:p>
-                      <a:pPr algn="ctr" defTabSz="457200">
-                        <a:lnSpc>
-                          <a:spcPct val="107000"/>
-                        </a:lnSpc>
-                        <a:tabLst>
-                          <a:tab algn="l" pos="630720"/>
-                        </a:tabLst>
-                      </a:pPr>
-                      <a:r>
-                        <a:rPr b="0" lang="ru-RU" sz="1200" spc="-1" strike="noStrike">
-                          <a:solidFill>
-                            <a:schemeClr val="dk1"/>
-                          </a:solidFill>
-                          <a:latin typeface="Century Gothic"/>
-                        </a:rPr>
-                        <a:t>5</a:t>
-                      </a:r>
-                      <a:endParaRPr b="0" lang="ru-RU" sz="1200" spc="-1" strike="noStrike">
-                        <a:solidFill>
-                          <a:srgbClr val="000000"/>
-                        </a:solidFill>
-                        <a:latin typeface="Arial"/>
-                      </a:endParaRPr>
-                    </a:p>
-                  </a:txBody>
-                  <a:tcPr anchor="ctr" marL="44640" marR="44640">
-                    <a:lnL w="12240">
-                      <a:solidFill>
-                        <a:srgbClr val="ffffff"/>
-                      </a:solidFill>
-                      <a:prstDash val="solid"/>
-                    </a:lnL>
-                    <a:lnR w="12240">
-                      <a:solidFill>
-                        <a:srgbClr val="ffffff"/>
-                      </a:solidFill>
-                      <a:prstDash val="solid"/>
-                    </a:lnR>
-                    <a:lnT w="12240">
-                      <a:solidFill>
-                        <a:srgbClr val="ffffff"/>
-                      </a:solidFill>
-                      <a:prstDash val="solid"/>
-                    </a:lnT>
-                    <a:lnB w="12240">
-                      <a:solidFill>
-                        <a:srgbClr val="ffffff"/>
-                      </a:solidFill>
-                      <a:prstDash val="solid"/>
-                    </a:lnB>
-                    <a:solidFill>
-                      <a:srgbClr val="dedce6"/>
-                    </a:solidFill>
-                  </a:tcPr>
-                </a:tc>
-              </a:tr>
-              <a:tr h="456840">
-                <a:tc>
-                  <a:txBody>
-                    <a:bodyPr lIns="44640" rIns="44640" anchor="ctr">
-                      <a:noAutofit/>
-                    </a:bodyPr>
-                    <a:p>
-                      <a:pPr defTabSz="457200">
-                        <a:lnSpc>
-                          <a:spcPct val="107000"/>
-                        </a:lnSpc>
-                        <a:tabLst>
-                          <a:tab algn="l" pos="630720"/>
-                        </a:tabLst>
-                      </a:pPr>
-                      <a:r>
-                        <a:rPr b="1" lang="ru-RU" sz="1200" spc="-1" strike="noStrike">
-                          <a:solidFill>
-                            <a:schemeClr val="lt1"/>
-                          </a:solidFill>
-                          <a:latin typeface="Century Gothic"/>
-                        </a:rPr>
-                        <a:t>Стоимость поставки ПО, руб</a:t>
-                      </a:r>
-                      <a:endParaRPr b="0" lang="ru-RU" sz="1200" spc="-1" strike="noStrike">
-                        <a:solidFill>
-                          <a:srgbClr val="ffffff"/>
-                        </a:solidFill>
-                        <a:latin typeface="Arial"/>
-                      </a:endParaRPr>
-                    </a:p>
-                  </a:txBody>
-                  <a:tcPr anchor="ctr" marL="44640" marR="44640">
-                    <a:lnL w="12240">
-                      <a:solidFill>
-                        <a:srgbClr val="ffffff"/>
-                      </a:solidFill>
-                      <a:prstDash val="solid"/>
-                    </a:lnL>
-                    <a:lnR w="12240">
-                      <a:solidFill>
-                        <a:srgbClr val="ffffff"/>
-                      </a:solidFill>
-                      <a:prstDash val="solid"/>
-                    </a:lnR>
-                    <a:lnT w="12240">
-                      <a:solidFill>
-                        <a:srgbClr val="ffffff"/>
-                      </a:solidFill>
-                      <a:prstDash val="solid"/>
-                    </a:lnT>
-                    <a:lnB w="12240">
-                      <a:solidFill>
-                        <a:srgbClr val="ffffff"/>
-                      </a:solidFill>
-                      <a:prstDash val="solid"/>
-                    </a:lnB>
-                    <a:solidFill>
-                      <a:srgbClr val="332974"/>
-                    </a:solidFill>
-                  </a:tcPr>
-                </a:tc>
-                <a:tc>
-                  <a:txBody>
-                    <a:bodyPr lIns="44640" rIns="44640" anchor="ctr">
-                      <a:noAutofit/>
-                    </a:bodyPr>
-                    <a:p>
-                      <a:pPr defTabSz="457200">
-                        <a:lnSpc>
-                          <a:spcPct val="107000"/>
-                        </a:lnSpc>
-                        <a:tabLst>
-                          <a:tab algn="l" pos="630720"/>
-                        </a:tabLst>
-                      </a:pPr>
-                      <a:r>
-                        <a:rPr b="0" lang="ru-RU" sz="1200" spc="-1" strike="noStrike">
-                          <a:solidFill>
-                            <a:schemeClr val="dk1"/>
-                          </a:solidFill>
-                          <a:latin typeface="Century Gothic"/>
-                        </a:rPr>
-                        <a:t>62 100.00</a:t>
-                      </a:r>
-                      <a:endParaRPr b="0" lang="ru-RU" sz="1200" spc="-1" strike="noStrike">
-                        <a:solidFill>
-                          <a:srgbClr val="000000"/>
-                        </a:solidFill>
-                        <a:latin typeface="Arial"/>
-                      </a:endParaRPr>
-                    </a:p>
-                  </a:txBody>
-                  <a:tcPr anchor="ctr" marL="44640" marR="44640">
-                    <a:lnL w="12240">
-                      <a:solidFill>
-                        <a:srgbClr val="ffffff"/>
-                      </a:solidFill>
-                      <a:prstDash val="solid"/>
-                    </a:lnL>
-                    <a:lnR w="12240">
-                      <a:solidFill>
-                        <a:srgbClr val="ffffff"/>
-                      </a:solidFill>
-                      <a:prstDash val="solid"/>
-                    </a:lnR>
-                    <a:lnT w="12240">
-                      <a:solidFill>
-                        <a:srgbClr val="ffffff"/>
-                      </a:solidFill>
-                      <a:prstDash val="solid"/>
-                    </a:lnT>
-                    <a:lnB w="12240">
-                      <a:solidFill>
-                        <a:srgbClr val="ffffff"/>
-                      </a:solidFill>
-                      <a:prstDash val="solid"/>
-                    </a:lnB>
-                    <a:solidFill>
-                      <a:schemeClr val="accent1">
-                        <a:tint val="20000"/>
-                      </a:schemeClr>
-                    </a:solidFill>
-                  </a:tcPr>
-                </a:tc>
-                <a:tc>
-                  <a:txBody>
-                    <a:bodyPr lIns="44640" rIns="44640" anchor="ctr">
-                      <a:noAutofit/>
-                    </a:bodyPr>
-                    <a:p>
-                      <a:pPr defTabSz="457200">
-                        <a:lnSpc>
-                          <a:spcPct val="107000"/>
-                        </a:lnSpc>
-                        <a:tabLst>
-                          <a:tab algn="l" pos="630720"/>
-                        </a:tabLst>
-                      </a:pPr>
-                      <a:r>
-                        <a:rPr b="0" lang="ru-RU" sz="1200" spc="-1" strike="noStrike">
-                          <a:solidFill>
-                            <a:schemeClr val="dk1"/>
-                          </a:solidFill>
-                          <a:latin typeface="Century Gothic"/>
-                        </a:rPr>
-                        <a:t>128 800.00</a:t>
-                      </a:r>
-                      <a:endParaRPr b="0" lang="ru-RU" sz="1200" spc="-1" strike="noStrike">
-                        <a:solidFill>
-                          <a:srgbClr val="000000"/>
-                        </a:solidFill>
-                        <a:latin typeface="Arial"/>
-                      </a:endParaRPr>
-                    </a:p>
-                  </a:txBody>
-                  <a:tcPr anchor="ctr" marL="44640" marR="44640">
-                    <a:lnL w="12240">
-                      <a:solidFill>
-                        <a:srgbClr val="ffffff"/>
-                      </a:solidFill>
-                      <a:prstDash val="solid"/>
-                    </a:lnL>
-                    <a:lnR w="12240">
-                      <a:solidFill>
-                        <a:srgbClr val="ffffff"/>
-                      </a:solidFill>
-                      <a:prstDash val="solid"/>
-                    </a:lnR>
-                    <a:lnT w="12240">
-                      <a:solidFill>
-                        <a:srgbClr val="ffffff"/>
-                      </a:solidFill>
-                      <a:prstDash val="solid"/>
-                    </a:lnT>
-                    <a:lnB w="12240">
-                      <a:solidFill>
-                        <a:srgbClr val="ffffff"/>
-                      </a:solidFill>
-                      <a:prstDash val="solid"/>
-                    </a:lnB>
-                    <a:solidFill>
-                      <a:schemeClr val="accent1">
-                        <a:tint val="20000"/>
-                      </a:schemeClr>
-                    </a:solidFill>
-                  </a:tcPr>
-                </a:tc>
-                <a:tc>
-                  <a:txBody>
-                    <a:bodyPr lIns="44640" rIns="44640" anchor="ctr">
-                      <a:noAutofit/>
-                    </a:bodyPr>
-                    <a:p>
-                      <a:pPr defTabSz="457200">
-                        <a:lnSpc>
-                          <a:spcPct val="107000"/>
-                        </a:lnSpc>
-                        <a:tabLst>
-                          <a:tab algn="l" pos="630720"/>
-                        </a:tabLst>
-                      </a:pPr>
-                      <a:r>
-                        <a:rPr b="0" lang="ru-RU" sz="1200" spc="-1" strike="noStrike">
-                          <a:solidFill>
-                            <a:schemeClr val="dk1"/>
-                          </a:solidFill>
-                          <a:latin typeface="Century Gothic"/>
-                        </a:rPr>
-                        <a:t>17 260.00</a:t>
-                      </a:r>
-                      <a:endParaRPr b="0" lang="ru-RU" sz="1200" spc="-1" strike="noStrike">
-                        <a:solidFill>
-                          <a:srgbClr val="000000"/>
-                        </a:solidFill>
-                        <a:latin typeface="Arial"/>
-                      </a:endParaRPr>
-                    </a:p>
-                  </a:txBody>
-                  <a:tcPr anchor="ctr" marL="44640" marR="44640">
-                    <a:lnL w="12240">
-                      <a:solidFill>
-                        <a:srgbClr val="ffffff"/>
-                      </a:solidFill>
-                      <a:prstDash val="solid"/>
-                    </a:lnL>
-                    <a:lnR w="12240">
-                      <a:solidFill>
-                        <a:srgbClr val="ffffff"/>
-                      </a:solidFill>
-                      <a:prstDash val="solid"/>
-                    </a:lnR>
-                    <a:lnT w="12240">
-                      <a:solidFill>
-                        <a:srgbClr val="ffffff"/>
-                      </a:solidFill>
-                      <a:prstDash val="solid"/>
-                    </a:lnT>
-                    <a:lnB w="12240">
-                      <a:solidFill>
-                        <a:srgbClr val="ffffff"/>
-                      </a:solidFill>
-                      <a:prstDash val="solid"/>
-                    </a:lnB>
-                    <a:solidFill>
-                      <a:schemeClr val="accent1">
-                        <a:tint val="20000"/>
-                      </a:schemeClr>
-                    </a:solidFill>
-                  </a:tcPr>
-                </a:tc>
-                <a:tc>
-                  <a:txBody>
-                    <a:bodyPr lIns="44640" rIns="44640" anchor="ctr">
-                      <a:noAutofit/>
-                    </a:bodyPr>
-                    <a:p>
-                      <a:pPr defTabSz="457200">
-                        <a:lnSpc>
-                          <a:spcPct val="107000"/>
-                        </a:lnSpc>
-                        <a:tabLst>
-                          <a:tab algn="l" pos="630720"/>
-                        </a:tabLst>
-                      </a:pPr>
-                      <a:r>
-                        <a:rPr b="0" lang="ru-RU" sz="1200" spc="-1" strike="noStrike">
-                          <a:solidFill>
-                            <a:schemeClr val="dk1"/>
-                          </a:solidFill>
-                          <a:latin typeface="Century Gothic"/>
-                        </a:rPr>
-                        <a:t>Не требуется</a:t>
-                      </a:r>
-                      <a:endParaRPr b="0" lang="ru-RU" sz="1200" spc="-1" strike="noStrike">
-                        <a:solidFill>
-                          <a:srgbClr val="000000"/>
-                        </a:solidFill>
-                        <a:latin typeface="Arial"/>
-                      </a:endParaRPr>
-                    </a:p>
-                  </a:txBody>
-                  <a:tcPr anchor="ctr" marL="44640" marR="44640">
-                    <a:lnL w="12240">
-                      <a:solidFill>
-                        <a:srgbClr val="ffffff"/>
-                      </a:solidFill>
-                      <a:prstDash val="solid"/>
-                    </a:lnL>
-                    <a:lnR w="12240">
-                      <a:solidFill>
-                        <a:srgbClr val="ffffff"/>
-                      </a:solidFill>
-                      <a:prstDash val="solid"/>
-                    </a:lnR>
-                    <a:lnT w="12240">
-                      <a:solidFill>
-                        <a:srgbClr val="ffffff"/>
-                      </a:solidFill>
-                      <a:prstDash val="solid"/>
-                    </a:lnT>
-                    <a:lnB w="12240">
-                      <a:solidFill>
-                        <a:srgbClr val="ffffff"/>
-                      </a:solidFill>
-                      <a:prstDash val="solid"/>
-                    </a:lnB>
-                    <a:solidFill>
-                      <a:schemeClr val="accent1">
-                        <a:tint val="20000"/>
-                      </a:schemeClr>
-                    </a:solidFill>
-                  </a:tcPr>
-                </a:tc>
-              </a:tr>
-              <a:tr h="639360">
-                <a:tc>
-                  <a:txBody>
-                    <a:bodyPr lIns="44640" rIns="44640" anchor="ctr">
-                      <a:noAutofit/>
-                    </a:bodyPr>
-                    <a:p>
-                      <a:pPr defTabSz="457200">
-                        <a:lnSpc>
-                          <a:spcPct val="107000"/>
-                        </a:lnSpc>
-                        <a:tabLst>
-                          <a:tab algn="l" pos="630720"/>
-                        </a:tabLst>
-                      </a:pPr>
-                      <a:r>
-                        <a:rPr b="1" lang="ru-RU" sz="1200" spc="-1" strike="noStrike">
-                          <a:solidFill>
-                            <a:schemeClr val="lt1"/>
-                          </a:solidFill>
-                          <a:latin typeface="Century Gothic"/>
-                        </a:rPr>
-                        <a:t>Масштабность внедрения</a:t>
-                      </a:r>
-                      <a:endParaRPr b="0" lang="ru-RU" sz="1200" spc="-1" strike="noStrike">
-                        <a:solidFill>
-                          <a:srgbClr val="ffffff"/>
-                        </a:solidFill>
-                        <a:latin typeface="Arial"/>
-                      </a:endParaRPr>
-                    </a:p>
-                  </a:txBody>
-                  <a:tcPr anchor="ctr" marL="44640" marR="44640">
-                    <a:lnL w="12240">
-                      <a:solidFill>
-                        <a:srgbClr val="ffffff"/>
-                      </a:solidFill>
-                      <a:prstDash val="solid"/>
-                    </a:lnL>
-                    <a:lnR w="12240">
-                      <a:solidFill>
-                        <a:srgbClr val="ffffff"/>
-                      </a:solidFill>
-                      <a:prstDash val="solid"/>
-                    </a:lnR>
-                    <a:lnT w="12240">
-                      <a:solidFill>
-                        <a:srgbClr val="ffffff"/>
-                      </a:solidFill>
-                      <a:prstDash val="solid"/>
-                    </a:lnT>
-                    <a:lnB w="12240">
-                      <a:solidFill>
-                        <a:srgbClr val="ffffff"/>
-                      </a:solidFill>
-                      <a:prstDash val="solid"/>
-                    </a:lnB>
-                    <a:solidFill>
-                      <a:srgbClr val="332974"/>
-                    </a:solidFill>
-                  </a:tcPr>
-                </a:tc>
-                <a:tc>
-                  <a:txBody>
-                    <a:bodyPr lIns="44640" rIns="44640" anchor="ctr">
-                      <a:noAutofit/>
-                    </a:bodyPr>
-                    <a:p>
-                      <a:pPr defTabSz="457200">
-                        <a:lnSpc>
-                          <a:spcPct val="107000"/>
-                        </a:lnSpc>
-                        <a:tabLst>
-                          <a:tab algn="l" pos="630720"/>
-                        </a:tabLst>
-                      </a:pPr>
-                      <a:r>
-                        <a:rPr b="0" lang="ru-RU" sz="1200" spc="-1" strike="noStrike">
-                          <a:solidFill>
-                            <a:schemeClr val="dk1"/>
-                          </a:solidFill>
-                          <a:latin typeface="Century Gothic"/>
-                        </a:rPr>
-                        <a:t>Крупные оптовые компании и розничные магазины</a:t>
-                      </a:r>
-                      <a:endParaRPr b="0" lang="ru-RU" sz="1200" spc="-1" strike="noStrike">
-                        <a:solidFill>
-                          <a:srgbClr val="000000"/>
-                        </a:solidFill>
-                        <a:latin typeface="Arial"/>
-                      </a:endParaRPr>
-                    </a:p>
-                  </a:txBody>
-                  <a:tcPr anchor="ctr" marL="44640" marR="44640">
-                    <a:lnL w="12240">
-                      <a:solidFill>
-                        <a:srgbClr val="ffffff"/>
-                      </a:solidFill>
-                      <a:prstDash val="solid"/>
-                    </a:lnL>
-                    <a:lnR w="12240">
-                      <a:solidFill>
-                        <a:srgbClr val="ffffff"/>
-                      </a:solidFill>
-                      <a:prstDash val="solid"/>
-                    </a:lnR>
-                    <a:lnT w="12240">
-                      <a:solidFill>
-                        <a:srgbClr val="ffffff"/>
-                      </a:solidFill>
-                      <a:prstDash val="solid"/>
-                    </a:lnT>
-                    <a:lnB w="12240">
-                      <a:solidFill>
-                        <a:srgbClr val="ffffff"/>
-                      </a:solidFill>
-                      <a:prstDash val="solid"/>
-                    </a:lnB>
-                    <a:solidFill>
-                      <a:srgbClr val="dedce6"/>
-                    </a:solidFill>
-                  </a:tcPr>
-                </a:tc>
-                <a:tc>
-                  <a:txBody>
-                    <a:bodyPr lIns="44640" rIns="44640" anchor="ctr">
-                      <a:noAutofit/>
-                    </a:bodyPr>
-                    <a:p>
-                      <a:pPr defTabSz="457200">
-                        <a:lnSpc>
-                          <a:spcPct val="107000"/>
-                        </a:lnSpc>
-                        <a:tabLst>
-                          <a:tab algn="l" pos="630720"/>
-                        </a:tabLst>
-                      </a:pPr>
-                      <a:r>
-                        <a:rPr b="0" lang="ru-RU" sz="1200" spc="-1" strike="noStrike">
-                          <a:solidFill>
-                            <a:schemeClr val="dk1"/>
-                          </a:solidFill>
-                          <a:latin typeface="Century Gothic"/>
-                        </a:rPr>
-                        <a:t>Оптовые компании и розничные магазины</a:t>
-                      </a:r>
-                      <a:endParaRPr b="0" lang="ru-RU" sz="1200" spc="-1" strike="noStrike">
-                        <a:solidFill>
-                          <a:srgbClr val="000000"/>
-                        </a:solidFill>
-                        <a:latin typeface="Arial"/>
-                      </a:endParaRPr>
-                    </a:p>
-                  </a:txBody>
-                  <a:tcPr anchor="ctr" marL="44640" marR="44640">
-                    <a:lnL w="12240">
-                      <a:solidFill>
-                        <a:srgbClr val="ffffff"/>
-                      </a:solidFill>
-                      <a:prstDash val="solid"/>
-                    </a:lnL>
-                    <a:lnR w="12240">
-                      <a:solidFill>
-                        <a:srgbClr val="ffffff"/>
-                      </a:solidFill>
-                      <a:prstDash val="solid"/>
-                    </a:lnR>
-                    <a:lnT w="12240">
-                      <a:solidFill>
-                        <a:srgbClr val="ffffff"/>
-                      </a:solidFill>
-                      <a:prstDash val="solid"/>
-                    </a:lnT>
-                    <a:lnB w="12240">
-                      <a:solidFill>
-                        <a:srgbClr val="ffffff"/>
-                      </a:solidFill>
-                      <a:prstDash val="solid"/>
-                    </a:lnB>
-                    <a:solidFill>
-                      <a:srgbClr val="dedce6"/>
-                    </a:solidFill>
-                  </a:tcPr>
-                </a:tc>
-                <a:tc>
-                  <a:txBody>
-                    <a:bodyPr lIns="44640" rIns="44640" anchor="ctr">
-                      <a:noAutofit/>
-                    </a:bodyPr>
-                    <a:p>
-                      <a:pPr defTabSz="457200">
-                        <a:lnSpc>
-                          <a:spcPct val="107000"/>
-                        </a:lnSpc>
-                        <a:tabLst>
-                          <a:tab algn="l" pos="630720"/>
-                        </a:tabLst>
-                      </a:pPr>
-                      <a:r>
-                        <a:rPr b="0" lang="ru-RU" sz="1200" spc="-1" strike="noStrike">
-                          <a:solidFill>
-                            <a:schemeClr val="dk1"/>
-                          </a:solidFill>
-                          <a:latin typeface="Century Gothic"/>
-                        </a:rPr>
-                        <a:t>Мелкие розничные магазины</a:t>
-                      </a:r>
-                      <a:endParaRPr b="0" lang="ru-RU" sz="1200" spc="-1" strike="noStrike">
-                        <a:solidFill>
-                          <a:srgbClr val="000000"/>
-                        </a:solidFill>
-                        <a:latin typeface="Arial"/>
-                      </a:endParaRPr>
-                    </a:p>
-                  </a:txBody>
-                  <a:tcPr anchor="ctr" marL="44640" marR="44640">
-                    <a:lnL w="12240">
-                      <a:solidFill>
-                        <a:srgbClr val="ffffff"/>
-                      </a:solidFill>
-                      <a:prstDash val="solid"/>
-                    </a:lnL>
-                    <a:lnR w="12240">
-                      <a:solidFill>
-                        <a:srgbClr val="ffffff"/>
-                      </a:solidFill>
-                      <a:prstDash val="solid"/>
-                    </a:lnR>
-                    <a:lnT w="12240">
-                      <a:solidFill>
-                        <a:srgbClr val="ffffff"/>
-                      </a:solidFill>
-                      <a:prstDash val="solid"/>
-                    </a:lnT>
-                    <a:lnB w="12240">
-                      <a:solidFill>
-                        <a:srgbClr val="ffffff"/>
-                      </a:solidFill>
-                      <a:prstDash val="solid"/>
-                    </a:lnB>
-                    <a:solidFill>
-                      <a:srgbClr val="dedce6"/>
-                    </a:solidFill>
-                  </a:tcPr>
-                </a:tc>
-                <a:tc>
-                  <a:txBody>
-                    <a:bodyPr lIns="44640" rIns="44640" anchor="ctr">
-                      <a:noAutofit/>
-                    </a:bodyPr>
-                    <a:p>
-                      <a:pPr defTabSz="457200">
-                        <a:lnSpc>
-                          <a:spcPct val="107000"/>
-                        </a:lnSpc>
-                        <a:tabLst>
-                          <a:tab algn="l" pos="630720"/>
-                        </a:tabLst>
-                      </a:pPr>
-                      <a:r>
-                        <a:rPr b="0" lang="ru-RU" sz="1200" spc="-1" strike="noStrike">
-                          <a:solidFill>
-                            <a:schemeClr val="dk1"/>
-                          </a:solidFill>
-                          <a:latin typeface="Century Gothic"/>
-                        </a:rPr>
-                        <a:t>Мелкие розничные магазины</a:t>
-                      </a:r>
-                      <a:endParaRPr b="0" lang="ru-RU" sz="1200" spc="-1" strike="noStrike">
-                        <a:solidFill>
-                          <a:srgbClr val="000000"/>
-                        </a:solidFill>
-                        <a:latin typeface="Arial"/>
-                      </a:endParaRPr>
-                    </a:p>
-                  </a:txBody>
-                  <a:tcPr anchor="ctr" marL="44640" marR="44640">
-                    <a:lnL w="12240">
-                      <a:solidFill>
-                        <a:srgbClr val="ffffff"/>
-                      </a:solidFill>
-                      <a:prstDash val="solid"/>
-                    </a:lnL>
-                    <a:lnR w="12240">
-                      <a:solidFill>
-                        <a:srgbClr val="ffffff"/>
-                      </a:solidFill>
-                      <a:prstDash val="solid"/>
-                    </a:lnR>
-                    <a:lnT w="12240">
-                      <a:solidFill>
-                        <a:srgbClr val="ffffff"/>
-                      </a:solidFill>
-                      <a:prstDash val="solid"/>
-                    </a:lnT>
-                    <a:lnB w="12240">
-                      <a:solidFill>
-                        <a:srgbClr val="ffffff"/>
-                      </a:solidFill>
-                      <a:prstDash val="solid"/>
-                    </a:lnB>
-                    <a:solidFill>
-                      <a:srgbClr val="dedce6"/>
-                    </a:solidFill>
-                  </a:tcPr>
-                </a:tc>
-              </a:tr>
-              <a:tr h="456840">
-                <a:tc>
-                  <a:txBody>
-                    <a:bodyPr lIns="44640" rIns="44640" anchor="ctr">
-                      <a:noAutofit/>
-                    </a:bodyPr>
-                    <a:p>
-                      <a:pPr defTabSz="457200">
-                        <a:lnSpc>
-                          <a:spcPct val="107000"/>
-                        </a:lnSpc>
-                        <a:tabLst>
-                          <a:tab algn="l" pos="630720"/>
-                        </a:tabLst>
-                      </a:pPr>
-                      <a:r>
-                        <a:rPr b="1" lang="ru-RU" sz="1200" spc="-1" strike="noStrike">
-                          <a:solidFill>
-                            <a:schemeClr val="lt1"/>
-                          </a:solidFill>
-                          <a:latin typeface="Century Gothic"/>
-                        </a:rPr>
-                        <a:t>Решение поставленных задач</a:t>
-                      </a:r>
-                      <a:endParaRPr b="0" lang="ru-RU" sz="1200" spc="-1" strike="noStrike">
-                        <a:solidFill>
-                          <a:srgbClr val="ffffff"/>
-                        </a:solidFill>
-                        <a:latin typeface="Arial"/>
-                      </a:endParaRPr>
-                    </a:p>
-                  </a:txBody>
-                  <a:tcPr anchor="ctr" marL="44640" marR="44640">
-                    <a:lnL w="12240">
-                      <a:solidFill>
-                        <a:srgbClr val="ffffff"/>
-                      </a:solidFill>
-                      <a:prstDash val="solid"/>
-                    </a:lnL>
-                    <a:lnR w="12240">
-                      <a:solidFill>
-                        <a:srgbClr val="ffffff"/>
-                      </a:solidFill>
-                      <a:prstDash val="solid"/>
-                    </a:lnR>
-                    <a:lnT w="12240">
-                      <a:solidFill>
-                        <a:srgbClr val="ffffff"/>
-                      </a:solidFill>
-                      <a:prstDash val="solid"/>
-                    </a:lnT>
-                    <a:lnB w="12240">
-                      <a:solidFill>
-                        <a:srgbClr val="ffffff"/>
-                      </a:solidFill>
-                      <a:prstDash val="solid"/>
-                    </a:lnB>
-                    <a:solidFill>
-                      <a:srgbClr val="332974"/>
-                    </a:solidFill>
-                  </a:tcPr>
-                </a:tc>
-                <a:tc>
-                  <a:txBody>
-                    <a:bodyPr lIns="44640" rIns="44640" anchor="ctr">
-                      <a:noAutofit/>
-                    </a:bodyPr>
-                    <a:p>
-                      <a:pPr defTabSz="457200">
-                        <a:lnSpc>
-                          <a:spcPct val="107000"/>
-                        </a:lnSpc>
-                        <a:tabLst>
-                          <a:tab algn="l" pos="630720"/>
-                        </a:tabLst>
-                      </a:pPr>
-                      <a:r>
-                        <a:rPr b="0" lang="ru-RU" sz="1200" spc="-1" strike="noStrike">
-                          <a:solidFill>
-                            <a:schemeClr val="dk1"/>
-                          </a:solidFill>
-                          <a:latin typeface="Century Gothic"/>
-                        </a:rPr>
-                        <a:t>Среднее</a:t>
-                      </a:r>
-                      <a:endParaRPr b="0" lang="ru-RU" sz="1200" spc="-1" strike="noStrike">
-                        <a:solidFill>
-                          <a:srgbClr val="000000"/>
-                        </a:solidFill>
-                        <a:latin typeface="Arial"/>
-                      </a:endParaRPr>
-                    </a:p>
-                  </a:txBody>
-                  <a:tcPr anchor="ctr" marL="44640" marR="44640">
-                    <a:lnL w="12240">
-                      <a:solidFill>
-                        <a:srgbClr val="ffffff"/>
-                      </a:solidFill>
-                      <a:prstDash val="solid"/>
-                    </a:lnL>
-                    <a:lnR w="12240">
-                      <a:solidFill>
-                        <a:srgbClr val="ffffff"/>
-                      </a:solidFill>
-                      <a:prstDash val="solid"/>
-                    </a:lnR>
-                    <a:lnT w="12240">
-                      <a:solidFill>
-                        <a:srgbClr val="ffffff"/>
-                      </a:solidFill>
-                      <a:prstDash val="solid"/>
-                    </a:lnT>
-                    <a:lnB w="12240">
-                      <a:solidFill>
-                        <a:srgbClr val="ffffff"/>
-                      </a:solidFill>
-                      <a:prstDash val="solid"/>
-                    </a:lnB>
-                    <a:solidFill>
-                      <a:schemeClr val="accent1">
-                        <a:tint val="20000"/>
-                      </a:schemeClr>
-                    </a:solidFill>
-                  </a:tcPr>
-                </a:tc>
-                <a:tc>
-                  <a:txBody>
-                    <a:bodyPr lIns="44640" rIns="44640" anchor="ctr">
-                      <a:noAutofit/>
-                    </a:bodyPr>
-                    <a:p>
-                      <a:pPr defTabSz="457200">
-                        <a:lnSpc>
-                          <a:spcPct val="107000"/>
-                        </a:lnSpc>
-                        <a:tabLst>
-                          <a:tab algn="l" pos="630720"/>
-                        </a:tabLst>
-                      </a:pPr>
-                      <a:r>
-                        <a:rPr b="0" lang="ru-RU" sz="1200" spc="-1" strike="noStrike">
-                          <a:solidFill>
-                            <a:schemeClr val="dk1"/>
-                          </a:solidFill>
-                          <a:latin typeface="Century Gothic"/>
-                        </a:rPr>
-                        <a:t>Полное</a:t>
-                      </a:r>
-                      <a:endParaRPr b="0" lang="ru-RU" sz="1200" spc="-1" strike="noStrike">
-                        <a:solidFill>
-                          <a:srgbClr val="000000"/>
-                        </a:solidFill>
-                        <a:latin typeface="Arial"/>
-                      </a:endParaRPr>
-                    </a:p>
-                  </a:txBody>
-                  <a:tcPr anchor="ctr" marL="44640" marR="44640">
-                    <a:lnL w="12240">
-                      <a:solidFill>
-                        <a:srgbClr val="ffffff"/>
-                      </a:solidFill>
-                      <a:prstDash val="solid"/>
-                    </a:lnL>
-                    <a:lnR w="12240">
-                      <a:solidFill>
-                        <a:srgbClr val="ffffff"/>
-                      </a:solidFill>
-                      <a:prstDash val="solid"/>
-                    </a:lnR>
-                    <a:lnT w="12240">
-                      <a:solidFill>
-                        <a:srgbClr val="ffffff"/>
-                      </a:solidFill>
-                      <a:prstDash val="solid"/>
-                    </a:lnT>
-                    <a:lnB w="12240">
-                      <a:solidFill>
-                        <a:srgbClr val="ffffff"/>
-                      </a:solidFill>
-                      <a:prstDash val="solid"/>
-                    </a:lnB>
-                    <a:solidFill>
-                      <a:schemeClr val="accent1">
-                        <a:tint val="20000"/>
-                      </a:schemeClr>
-                    </a:solidFill>
-                  </a:tcPr>
-                </a:tc>
-                <a:tc>
-                  <a:txBody>
-                    <a:bodyPr lIns="44640" rIns="44640" anchor="ctr">
-                      <a:noAutofit/>
-                    </a:bodyPr>
-                    <a:p>
-                      <a:pPr defTabSz="457200">
-                        <a:lnSpc>
-                          <a:spcPct val="107000"/>
-                        </a:lnSpc>
-                        <a:tabLst>
-                          <a:tab algn="l" pos="630720"/>
-                        </a:tabLst>
-                      </a:pPr>
-                      <a:r>
-                        <a:rPr b="0" lang="ru-RU" sz="1200" spc="-1" strike="noStrike">
-                          <a:solidFill>
-                            <a:schemeClr val="dk1"/>
-                          </a:solidFill>
-                          <a:latin typeface="Century Gothic"/>
-                        </a:rPr>
-                        <a:t>Низкое</a:t>
-                      </a:r>
-                      <a:endParaRPr b="0" lang="ru-RU" sz="1200" spc="-1" strike="noStrike">
-                        <a:solidFill>
-                          <a:srgbClr val="000000"/>
-                        </a:solidFill>
-                        <a:latin typeface="Arial"/>
-                      </a:endParaRPr>
-                    </a:p>
-                  </a:txBody>
-                  <a:tcPr anchor="ctr" marL="44640" marR="44640">
-                    <a:lnL w="12240">
-                      <a:solidFill>
-                        <a:srgbClr val="ffffff"/>
-                      </a:solidFill>
-                      <a:prstDash val="solid"/>
-                    </a:lnL>
-                    <a:lnR w="12240">
-                      <a:solidFill>
-                        <a:srgbClr val="ffffff"/>
-                      </a:solidFill>
-                      <a:prstDash val="solid"/>
-                    </a:lnR>
-                    <a:lnT w="12240">
-                      <a:solidFill>
-                        <a:srgbClr val="ffffff"/>
-                      </a:solidFill>
-                      <a:prstDash val="solid"/>
-                    </a:lnT>
-                    <a:lnB w="12240">
-                      <a:solidFill>
-                        <a:srgbClr val="ffffff"/>
-                      </a:solidFill>
-                      <a:prstDash val="solid"/>
-                    </a:lnB>
-                    <a:solidFill>
-                      <a:schemeClr val="accent1">
-                        <a:tint val="20000"/>
-                      </a:schemeClr>
-                    </a:solidFill>
-                  </a:tcPr>
-                </a:tc>
-                <a:tc>
-                  <a:txBody>
-                    <a:bodyPr lIns="44640" rIns="44640" anchor="ctr">
-                      <a:noAutofit/>
-                    </a:bodyPr>
-                    <a:p>
-                      <a:pPr defTabSz="457200">
-                        <a:lnSpc>
-                          <a:spcPct val="107000"/>
-                        </a:lnSpc>
-                        <a:tabLst>
-                          <a:tab algn="l" pos="630720"/>
-                        </a:tabLst>
-                      </a:pPr>
-                      <a:r>
-                        <a:rPr b="0" lang="ru-RU" sz="1200" spc="-1" strike="noStrike">
-                          <a:solidFill>
-                            <a:schemeClr val="dk1"/>
-                          </a:solidFill>
-                          <a:latin typeface="Century Gothic"/>
-                        </a:rPr>
-                        <a:t>Полное</a:t>
-                      </a:r>
-                      <a:endParaRPr b="0" lang="ru-RU" sz="1200" spc="-1" strike="noStrike">
-                        <a:solidFill>
-                          <a:srgbClr val="000000"/>
-                        </a:solidFill>
-                        <a:latin typeface="Arial"/>
-                      </a:endParaRPr>
-                    </a:p>
-                  </a:txBody>
-                  <a:tcPr anchor="ctr" marL="44640" marR="44640">
-                    <a:lnL w="12240">
-                      <a:solidFill>
-                        <a:srgbClr val="ffffff"/>
-                      </a:solidFill>
-                      <a:prstDash val="solid"/>
-                    </a:lnL>
-                    <a:lnR w="12240">
-                      <a:solidFill>
-                        <a:srgbClr val="ffffff"/>
-                      </a:solidFill>
-                      <a:prstDash val="solid"/>
-                    </a:lnR>
-                    <a:lnT w="12240">
-                      <a:solidFill>
-                        <a:srgbClr val="ffffff"/>
-                      </a:solidFill>
-                      <a:prstDash val="solid"/>
-                    </a:lnT>
-                    <a:lnB w="12240">
-                      <a:solidFill>
-                        <a:srgbClr val="ffffff"/>
-                      </a:solidFill>
-                      <a:prstDash val="solid"/>
-                    </a:lnB>
-                    <a:solidFill>
-                      <a:schemeClr val="accent1">
-                        <a:tint val="20000"/>
-                      </a:schemeClr>
-                    </a:solidFill>
-                  </a:tcPr>
-                </a:tc>
-              </a:tr>
-              <a:tr h="456840">
-                <a:tc>
-                  <a:txBody>
-                    <a:bodyPr lIns="44640" rIns="44640" anchor="ctr">
-                      <a:noAutofit/>
-                    </a:bodyPr>
-                    <a:p>
-                      <a:pPr defTabSz="457200">
-                        <a:lnSpc>
-                          <a:spcPct val="107000"/>
-                        </a:lnSpc>
-                        <a:tabLst>
-                          <a:tab algn="l" pos="630720"/>
-                        </a:tabLst>
-                      </a:pPr>
-                      <a:r>
-                        <a:rPr b="1" lang="ru-RU" sz="1200" spc="-1" strike="noStrike">
-                          <a:solidFill>
-                            <a:schemeClr val="lt1"/>
-                          </a:solidFill>
-                          <a:latin typeface="Century Gothic"/>
-                        </a:rPr>
-                        <a:t>Возможность оценки поставщиков</a:t>
-                      </a:r>
-                      <a:endParaRPr b="0" lang="ru-RU" sz="1200" spc="-1" strike="noStrike">
-                        <a:solidFill>
-                          <a:srgbClr val="ffffff"/>
-                        </a:solidFill>
-                        <a:latin typeface="Arial"/>
-                      </a:endParaRPr>
-                    </a:p>
-                  </a:txBody>
-                  <a:tcPr anchor="ctr" marL="44640" marR="44640">
-                    <a:lnL w="12240">
-                      <a:solidFill>
-                        <a:srgbClr val="ffffff"/>
-                      </a:solidFill>
-                      <a:prstDash val="solid"/>
-                    </a:lnL>
-                    <a:lnR w="12240">
-                      <a:solidFill>
-                        <a:srgbClr val="ffffff"/>
-                      </a:solidFill>
-                      <a:prstDash val="solid"/>
-                    </a:lnR>
-                    <a:lnT w="12240">
-                      <a:solidFill>
-                        <a:srgbClr val="ffffff"/>
-                      </a:solidFill>
-                      <a:prstDash val="solid"/>
-                    </a:lnT>
-                    <a:lnB w="12240">
-                      <a:solidFill>
-                        <a:srgbClr val="ffffff"/>
-                      </a:solidFill>
-                      <a:prstDash val="solid"/>
-                    </a:lnB>
-                    <a:solidFill>
-                      <a:srgbClr val="332974"/>
-                    </a:solidFill>
-                  </a:tcPr>
-                </a:tc>
-                <a:tc>
-                  <a:txBody>
-                    <a:bodyPr lIns="44640" rIns="44640" anchor="ctr">
-                      <a:noAutofit/>
-                    </a:bodyPr>
-                    <a:p>
-                      <a:pPr defTabSz="457200">
-                        <a:lnSpc>
-                          <a:spcPct val="107000"/>
-                        </a:lnSpc>
-                        <a:tabLst>
-                          <a:tab algn="l" pos="630720"/>
-                        </a:tabLst>
-                      </a:pPr>
-                      <a:r>
-                        <a:rPr b="0" lang="ru-RU" sz="1200" spc="-1" strike="noStrike">
-                          <a:solidFill>
-                            <a:schemeClr val="dk1"/>
-                          </a:solidFill>
-                          <a:latin typeface="Century Gothic"/>
-                        </a:rPr>
-                        <a:t>-</a:t>
-                      </a:r>
-                      <a:endParaRPr b="0" lang="ru-RU" sz="1200" spc="-1" strike="noStrike">
-                        <a:solidFill>
-                          <a:srgbClr val="000000"/>
-                        </a:solidFill>
-                        <a:latin typeface="Arial"/>
-                      </a:endParaRPr>
-                    </a:p>
-                  </a:txBody>
-                  <a:tcPr anchor="ctr" marL="44640" marR="44640">
-                    <a:lnL w="12240">
-                      <a:solidFill>
-                        <a:srgbClr val="ffffff"/>
-                      </a:solidFill>
-                      <a:prstDash val="solid"/>
-                    </a:lnL>
-                    <a:lnR w="12240">
-                      <a:solidFill>
-                        <a:srgbClr val="ffffff"/>
-                      </a:solidFill>
-                      <a:prstDash val="solid"/>
-                    </a:lnR>
-                    <a:lnT w="12240">
-                      <a:solidFill>
-                        <a:srgbClr val="ffffff"/>
-                      </a:solidFill>
-                      <a:prstDash val="solid"/>
-                    </a:lnT>
-                    <a:lnB w="12240">
-                      <a:solidFill>
-                        <a:srgbClr val="ffffff"/>
-                      </a:solidFill>
-                      <a:prstDash val="solid"/>
-                    </a:lnB>
-                    <a:solidFill>
-                      <a:srgbClr val="dedce6"/>
-                    </a:solidFill>
-                  </a:tcPr>
-                </a:tc>
-                <a:tc>
-                  <a:txBody>
-                    <a:bodyPr lIns="44640" rIns="44640" anchor="ctr">
-                      <a:noAutofit/>
-                    </a:bodyPr>
-                    <a:p>
-                      <a:pPr defTabSz="457200">
-                        <a:lnSpc>
-                          <a:spcPct val="107000"/>
-                        </a:lnSpc>
-                        <a:tabLst>
-                          <a:tab algn="l" pos="630720"/>
-                        </a:tabLst>
-                      </a:pPr>
-                      <a:r>
-                        <a:rPr b="0" lang="ru-RU" sz="1200" spc="-1" strike="noStrike">
-                          <a:solidFill>
-                            <a:schemeClr val="dk1"/>
-                          </a:solidFill>
-                          <a:latin typeface="Century Gothic"/>
-                        </a:rPr>
-                        <a:t>-</a:t>
-                      </a:r>
-                      <a:endParaRPr b="0" lang="ru-RU" sz="1200" spc="-1" strike="noStrike">
-                        <a:solidFill>
-                          <a:srgbClr val="000000"/>
-                        </a:solidFill>
-                        <a:latin typeface="Arial"/>
-                      </a:endParaRPr>
-                    </a:p>
-                  </a:txBody>
-                  <a:tcPr anchor="ctr" marL="44640" marR="44640">
-                    <a:lnL w="12240">
-                      <a:solidFill>
-                        <a:srgbClr val="ffffff"/>
-                      </a:solidFill>
-                      <a:prstDash val="solid"/>
-                    </a:lnL>
-                    <a:lnR w="12240">
-                      <a:solidFill>
-                        <a:srgbClr val="ffffff"/>
-                      </a:solidFill>
-                      <a:prstDash val="solid"/>
-                    </a:lnR>
-                    <a:lnT w="12240">
-                      <a:solidFill>
-                        <a:srgbClr val="ffffff"/>
-                      </a:solidFill>
-                      <a:prstDash val="solid"/>
-                    </a:lnT>
-                    <a:lnB w="12240">
-                      <a:solidFill>
-                        <a:srgbClr val="ffffff"/>
-                      </a:solidFill>
-                      <a:prstDash val="solid"/>
-                    </a:lnB>
-                    <a:solidFill>
-                      <a:srgbClr val="dedce6"/>
-                    </a:solidFill>
-                  </a:tcPr>
-                </a:tc>
-                <a:tc>
-                  <a:txBody>
-                    <a:bodyPr lIns="44640" rIns="44640" anchor="ctr">
-                      <a:noAutofit/>
-                    </a:bodyPr>
-                    <a:p>
-                      <a:pPr defTabSz="457200">
-                        <a:lnSpc>
-                          <a:spcPct val="107000"/>
-                        </a:lnSpc>
-                        <a:tabLst>
-                          <a:tab algn="l" pos="630720"/>
-                        </a:tabLst>
-                      </a:pPr>
-                      <a:r>
-                        <a:rPr b="0" lang="ru-RU" sz="1200" spc="-1" strike="noStrike">
-                          <a:solidFill>
-                            <a:schemeClr val="dk1"/>
-                          </a:solidFill>
-                          <a:latin typeface="Century Gothic"/>
-                        </a:rPr>
-                        <a:t>+</a:t>
-                      </a:r>
-                      <a:endParaRPr b="0" lang="ru-RU" sz="1200" spc="-1" strike="noStrike">
-                        <a:solidFill>
-                          <a:srgbClr val="000000"/>
-                        </a:solidFill>
-                        <a:latin typeface="Arial"/>
-                      </a:endParaRPr>
-                    </a:p>
-                  </a:txBody>
-                  <a:tcPr anchor="ctr" marL="44640" marR="44640">
-                    <a:lnL w="12240">
-                      <a:solidFill>
-                        <a:srgbClr val="ffffff"/>
-                      </a:solidFill>
-                      <a:prstDash val="solid"/>
-                    </a:lnL>
-                    <a:lnR w="12240">
-                      <a:solidFill>
-                        <a:srgbClr val="ffffff"/>
-                      </a:solidFill>
-                      <a:prstDash val="solid"/>
-                    </a:lnR>
-                    <a:lnT w="12240">
-                      <a:solidFill>
-                        <a:srgbClr val="ffffff"/>
-                      </a:solidFill>
-                      <a:prstDash val="solid"/>
-                    </a:lnT>
-                    <a:lnB w="12240">
-                      <a:solidFill>
-                        <a:srgbClr val="ffffff"/>
-                      </a:solidFill>
-                      <a:prstDash val="solid"/>
-                    </a:lnB>
-                    <a:solidFill>
-                      <a:srgbClr val="dedce6"/>
-                    </a:solidFill>
-                  </a:tcPr>
-                </a:tc>
-                <a:tc>
-                  <a:txBody>
-                    <a:bodyPr lIns="44640" rIns="44640" anchor="ctr">
-                      <a:noAutofit/>
-                    </a:bodyPr>
-                    <a:p>
-                      <a:pPr defTabSz="457200">
-                        <a:lnSpc>
-                          <a:spcPct val="107000"/>
-                        </a:lnSpc>
-                        <a:tabLst>
-                          <a:tab algn="l" pos="630720"/>
-                        </a:tabLst>
-                      </a:pPr>
-                      <a:r>
-                        <a:rPr b="0" lang="ru-RU" sz="1200" spc="-1" strike="noStrike">
-                          <a:solidFill>
-                            <a:schemeClr val="dk1"/>
-                          </a:solidFill>
-                          <a:latin typeface="Century Gothic"/>
-                        </a:rPr>
-                        <a:t>+</a:t>
-                      </a:r>
-                      <a:endParaRPr b="0" lang="ru-RU" sz="1200" spc="-1" strike="noStrike">
-                        <a:solidFill>
-                          <a:srgbClr val="000000"/>
-                        </a:solidFill>
-                        <a:latin typeface="Arial"/>
-                      </a:endParaRPr>
-                    </a:p>
-                  </a:txBody>
-                  <a:tcPr anchor="ctr" marL="44640" marR="44640">
-                    <a:lnL w="12240">
-                      <a:solidFill>
-                        <a:srgbClr val="ffffff"/>
-                      </a:solidFill>
-                      <a:prstDash val="solid"/>
-                    </a:lnL>
-                    <a:lnR w="12240">
-                      <a:solidFill>
-                        <a:srgbClr val="ffffff"/>
-                      </a:solidFill>
-                      <a:prstDash val="solid"/>
-                    </a:lnR>
-                    <a:lnT w="12240">
-                      <a:solidFill>
-                        <a:srgbClr val="ffffff"/>
-                      </a:solidFill>
-                      <a:prstDash val="solid"/>
-                    </a:lnT>
-                    <a:lnB w="12240">
-                      <a:solidFill>
-                        <a:srgbClr val="ffffff"/>
-                      </a:solidFill>
-                      <a:prstDash val="solid"/>
-                    </a:lnB>
-                    <a:solidFill>
-                      <a:srgbClr val="dedce6"/>
-                    </a:solidFill>
-                  </a:tcPr>
-                </a:tc>
-              </a:tr>
-              <a:tr h="639360">
-                <a:tc>
-                  <a:txBody>
-                    <a:bodyPr lIns="44640" rIns="44640" anchor="t">
-                      <a:noAutofit/>
-                    </a:bodyPr>
-                    <a:p>
-                      <a:pPr defTabSz="457200">
-                        <a:lnSpc>
-                          <a:spcPct val="107000"/>
-                        </a:lnSpc>
-                        <a:tabLst>
-                          <a:tab algn="l" pos="630720"/>
-                        </a:tabLst>
-                      </a:pPr>
-                      <a:r>
-                        <a:rPr b="1" lang="ru-RU" sz="1200" spc="-1" strike="noStrike">
-                          <a:solidFill>
-                            <a:schemeClr val="lt1"/>
-                          </a:solidFill>
-                          <a:latin typeface="Century Gothic"/>
-                        </a:rPr>
-                        <a:t>Эффективность и наполнение доступных отчётов</a:t>
-                      </a:r>
-                      <a:endParaRPr b="0" lang="ru-RU" sz="1200" spc="-1" strike="noStrike">
-                        <a:solidFill>
-                          <a:srgbClr val="ffffff"/>
-                        </a:solidFill>
-                        <a:latin typeface="Arial"/>
-                      </a:endParaRPr>
-                    </a:p>
-                  </a:txBody>
-                  <a:tcPr anchor="t" marL="44640" marR="44640">
-                    <a:lnL w="12240">
-                      <a:solidFill>
-                        <a:srgbClr val="ffffff"/>
-                      </a:solidFill>
-                      <a:prstDash val="solid"/>
-                    </a:lnL>
-                    <a:lnR w="12240">
-                      <a:solidFill>
-                        <a:srgbClr val="ffffff"/>
-                      </a:solidFill>
-                      <a:prstDash val="solid"/>
-                    </a:lnR>
-                    <a:lnT w="12240">
-                      <a:solidFill>
-                        <a:srgbClr val="ffffff"/>
-                      </a:solidFill>
-                      <a:prstDash val="solid"/>
-                    </a:lnT>
-                    <a:lnB w="12240">
-                      <a:solidFill>
-                        <a:srgbClr val="ffffff"/>
-                      </a:solidFill>
-                      <a:prstDash val="solid"/>
-                    </a:lnB>
-                    <a:solidFill>
-                      <a:srgbClr val="332974"/>
-                    </a:solidFill>
-                  </a:tcPr>
-                </a:tc>
-                <a:tc>
-                  <a:txBody>
-                    <a:bodyPr lIns="44640" rIns="44640" anchor="ctr">
-                      <a:noAutofit/>
-                    </a:bodyPr>
-                    <a:p>
-                      <a:pPr defTabSz="457200">
-                        <a:lnSpc>
-                          <a:spcPct val="107000"/>
-                        </a:lnSpc>
-                        <a:tabLst>
-                          <a:tab algn="l" pos="630720"/>
-                        </a:tabLst>
-                      </a:pPr>
-                      <a:r>
-                        <a:rPr b="0" lang="ru-RU" sz="1200" spc="-1" strike="noStrike">
-                          <a:solidFill>
-                            <a:schemeClr val="dk1"/>
-                          </a:solidFill>
-                          <a:latin typeface="Century Gothic"/>
-                        </a:rPr>
-                        <a:t>-</a:t>
-                      </a:r>
-                      <a:endParaRPr b="0" lang="ru-RU" sz="1200" spc="-1" strike="noStrike">
-                        <a:solidFill>
-                          <a:srgbClr val="000000"/>
-                        </a:solidFill>
-                        <a:latin typeface="Arial"/>
-                      </a:endParaRPr>
-                    </a:p>
-                  </a:txBody>
-                  <a:tcPr anchor="ctr" marL="44640" marR="44640">
-                    <a:lnL w="12240">
-                      <a:solidFill>
-                        <a:srgbClr val="ffffff"/>
-                      </a:solidFill>
-                      <a:prstDash val="solid"/>
-                    </a:lnL>
-                    <a:lnR w="12240">
-                      <a:solidFill>
-                        <a:srgbClr val="ffffff"/>
-                      </a:solidFill>
-                      <a:prstDash val="solid"/>
-                    </a:lnR>
-                    <a:lnT w="12240">
-                      <a:solidFill>
-                        <a:srgbClr val="ffffff"/>
-                      </a:solidFill>
-                      <a:prstDash val="solid"/>
-                    </a:lnT>
-                    <a:lnB w="12240">
-                      <a:solidFill>
-                        <a:srgbClr val="ffffff"/>
-                      </a:solidFill>
-                      <a:prstDash val="solid"/>
-                    </a:lnB>
-                    <a:solidFill>
-                      <a:schemeClr val="accent1">
-                        <a:tint val="20000"/>
-                      </a:schemeClr>
-                    </a:solidFill>
-                  </a:tcPr>
-                </a:tc>
-                <a:tc>
-                  <a:txBody>
-                    <a:bodyPr lIns="44640" rIns="44640" anchor="ctr">
-                      <a:noAutofit/>
-                    </a:bodyPr>
-                    <a:p>
-                      <a:pPr defTabSz="457200">
-                        <a:lnSpc>
-                          <a:spcPct val="107000"/>
-                        </a:lnSpc>
-                        <a:tabLst>
-                          <a:tab algn="l" pos="630720"/>
-                        </a:tabLst>
-                      </a:pPr>
-                      <a:r>
-                        <a:rPr b="0" lang="ru-RU" sz="1200" spc="-1" strike="noStrike">
-                          <a:solidFill>
-                            <a:schemeClr val="dk1"/>
-                          </a:solidFill>
-                          <a:latin typeface="Century Gothic"/>
-                        </a:rPr>
-                        <a:t>-</a:t>
-                      </a:r>
-                      <a:endParaRPr b="0" lang="ru-RU" sz="1200" spc="-1" strike="noStrike">
-                        <a:solidFill>
-                          <a:srgbClr val="000000"/>
-                        </a:solidFill>
-                        <a:latin typeface="Arial"/>
-                      </a:endParaRPr>
-                    </a:p>
-                  </a:txBody>
-                  <a:tcPr anchor="ctr" marL="44640" marR="44640">
-                    <a:lnL w="12240">
-                      <a:solidFill>
-                        <a:srgbClr val="ffffff"/>
-                      </a:solidFill>
-                      <a:prstDash val="solid"/>
-                    </a:lnL>
-                    <a:lnR w="12240">
-                      <a:solidFill>
-                        <a:srgbClr val="ffffff"/>
-                      </a:solidFill>
-                      <a:prstDash val="solid"/>
-                    </a:lnR>
-                    <a:lnT w="12240">
-                      <a:solidFill>
-                        <a:srgbClr val="ffffff"/>
-                      </a:solidFill>
-                      <a:prstDash val="solid"/>
-                    </a:lnT>
-                    <a:lnB w="12240">
-                      <a:solidFill>
-                        <a:srgbClr val="ffffff"/>
-                      </a:solidFill>
-                      <a:prstDash val="solid"/>
-                    </a:lnB>
-                    <a:solidFill>
-                      <a:schemeClr val="accent1">
-                        <a:tint val="20000"/>
-                      </a:schemeClr>
-                    </a:solidFill>
-                  </a:tcPr>
-                </a:tc>
-                <a:tc>
-                  <a:txBody>
-                    <a:bodyPr lIns="44640" rIns="44640" anchor="ctr">
-                      <a:noAutofit/>
-                    </a:bodyPr>
-                    <a:p>
-                      <a:pPr defTabSz="457200">
-                        <a:lnSpc>
-                          <a:spcPct val="107000"/>
-                        </a:lnSpc>
-                        <a:tabLst>
-                          <a:tab algn="l" pos="630720"/>
-                        </a:tabLst>
-                      </a:pPr>
-                      <a:r>
-                        <a:rPr b="0" lang="ru-RU" sz="1200" spc="-1" strike="noStrike">
-                          <a:solidFill>
-                            <a:schemeClr val="dk1"/>
-                          </a:solidFill>
-                          <a:latin typeface="Century Gothic"/>
-                        </a:rPr>
-                        <a:t>+</a:t>
-                      </a:r>
-                      <a:endParaRPr b="0" lang="ru-RU" sz="1200" spc="-1" strike="noStrike">
-                        <a:solidFill>
-                          <a:srgbClr val="000000"/>
-                        </a:solidFill>
-                        <a:latin typeface="Arial"/>
-                      </a:endParaRPr>
-                    </a:p>
-                  </a:txBody>
-                  <a:tcPr anchor="ctr" marL="44640" marR="44640">
-                    <a:lnL w="12240">
-                      <a:solidFill>
-                        <a:srgbClr val="ffffff"/>
-                      </a:solidFill>
-                      <a:prstDash val="solid"/>
-                    </a:lnL>
-                    <a:lnR w="12240">
-                      <a:solidFill>
-                        <a:srgbClr val="ffffff"/>
-                      </a:solidFill>
-                      <a:prstDash val="solid"/>
-                    </a:lnR>
-                    <a:lnT w="12240">
-                      <a:solidFill>
-                        <a:srgbClr val="ffffff"/>
-                      </a:solidFill>
-                      <a:prstDash val="solid"/>
-                    </a:lnT>
-                    <a:lnB w="12240">
-                      <a:solidFill>
-                        <a:srgbClr val="ffffff"/>
-                      </a:solidFill>
-                      <a:prstDash val="solid"/>
-                    </a:lnB>
-                    <a:solidFill>
-                      <a:schemeClr val="accent1">
-                        <a:tint val="20000"/>
-                      </a:schemeClr>
-                    </a:solidFill>
-                  </a:tcPr>
-                </a:tc>
-                <a:tc>
-                  <a:txBody>
-                    <a:bodyPr lIns="44640" rIns="44640" anchor="ctr">
-                      <a:noAutofit/>
-                    </a:bodyPr>
-                    <a:p>
-                      <a:pPr defTabSz="457200">
-                        <a:lnSpc>
-                          <a:spcPct val="107000"/>
-                        </a:lnSpc>
-                        <a:tabLst>
-                          <a:tab algn="l" pos="630720"/>
-                        </a:tabLst>
-                      </a:pPr>
-                      <a:r>
-                        <a:rPr b="0" lang="ru-RU" sz="1200" spc="-1" strike="noStrike">
-                          <a:solidFill>
-                            <a:schemeClr val="dk1"/>
-                          </a:solidFill>
-                          <a:latin typeface="Century Gothic"/>
-                        </a:rPr>
-                        <a:t>+</a:t>
-                      </a:r>
-                      <a:endParaRPr b="0" lang="ru-RU" sz="1200" spc="-1" strike="noStrike">
-                        <a:solidFill>
-                          <a:srgbClr val="000000"/>
-                        </a:solidFill>
-                        <a:latin typeface="Arial"/>
-                      </a:endParaRPr>
-                    </a:p>
-                  </a:txBody>
-                  <a:tcPr anchor="ctr" marL="44640" marR="44640">
-                    <a:lnL w="12240">
-                      <a:solidFill>
-                        <a:srgbClr val="ffffff"/>
-                      </a:solidFill>
-                      <a:prstDash val="solid"/>
-                    </a:lnL>
-                    <a:lnR w="12240">
-                      <a:solidFill>
-                        <a:srgbClr val="ffffff"/>
-                      </a:solidFill>
-                      <a:prstDash val="solid"/>
-                    </a:lnR>
-                    <a:lnT w="12240">
-                      <a:solidFill>
-                        <a:srgbClr val="ffffff"/>
-                      </a:solidFill>
-                      <a:prstDash val="solid"/>
-                    </a:lnT>
-                    <a:lnB w="12240">
-                      <a:solidFill>
-                        <a:srgbClr val="ffffff"/>
-                      </a:solidFill>
-                      <a:prstDash val="solid"/>
-                    </a:lnB>
-                    <a:solidFill>
-                      <a:schemeClr val="accent1">
-                        <a:tint val="20000"/>
-                      </a:schemeClr>
-                    </a:solidFill>
-                  </a:tcPr>
-                </a:tc>
-              </a:tr>
-              <a:tr h="639360">
-                <a:tc>
-                  <a:txBody>
-                    <a:bodyPr lIns="44640" rIns="44640" anchor="t">
-                      <a:noAutofit/>
-                    </a:bodyPr>
-                    <a:p>
-                      <a:pPr defTabSz="457200">
-                        <a:lnSpc>
-                          <a:spcPct val="107000"/>
-                        </a:lnSpc>
-                        <a:tabLst>
-                          <a:tab algn="l" pos="630720"/>
-                        </a:tabLst>
-                      </a:pPr>
-                      <a:r>
-                        <a:rPr b="1" lang="ru-RU" sz="1200" spc="-1" strike="noStrike">
-                          <a:solidFill>
-                            <a:schemeClr val="lt1"/>
-                          </a:solidFill>
-                          <a:latin typeface="Century Gothic"/>
-                        </a:rPr>
-                        <a:t>Многопользовательский режим и права доступа</a:t>
-                      </a:r>
-                      <a:endParaRPr b="0" lang="ru-RU" sz="1200" spc="-1" strike="noStrike">
-                        <a:solidFill>
-                          <a:srgbClr val="ffffff"/>
-                        </a:solidFill>
-                        <a:latin typeface="Arial"/>
-                      </a:endParaRPr>
-                    </a:p>
-                  </a:txBody>
-                  <a:tcPr anchor="t" marL="44640" marR="44640">
-                    <a:lnL w="12240">
-                      <a:solidFill>
-                        <a:srgbClr val="ffffff"/>
-                      </a:solidFill>
-                      <a:prstDash val="solid"/>
-                    </a:lnL>
-                    <a:lnR w="12240">
-                      <a:solidFill>
-                        <a:srgbClr val="ffffff"/>
-                      </a:solidFill>
-                      <a:prstDash val="solid"/>
-                    </a:lnR>
-                    <a:lnT w="12240">
-                      <a:solidFill>
-                        <a:srgbClr val="ffffff"/>
-                      </a:solidFill>
-                      <a:prstDash val="solid"/>
-                    </a:lnT>
-                    <a:lnB w="12240">
-                      <a:solidFill>
-                        <a:srgbClr val="ffffff"/>
-                      </a:solidFill>
-                      <a:prstDash val="solid"/>
-                    </a:lnB>
-                    <a:solidFill>
-                      <a:srgbClr val="332974"/>
-                    </a:solidFill>
-                  </a:tcPr>
-                </a:tc>
-                <a:tc>
-                  <a:txBody>
-                    <a:bodyPr lIns="44640" rIns="44640" anchor="ctr">
-                      <a:noAutofit/>
-                    </a:bodyPr>
-                    <a:p>
-                      <a:pPr defTabSz="457200">
-                        <a:lnSpc>
-                          <a:spcPct val="107000"/>
-                        </a:lnSpc>
-                        <a:tabLst>
-                          <a:tab algn="l" pos="630720"/>
-                        </a:tabLst>
-                      </a:pPr>
-                      <a:r>
-                        <a:rPr b="0" lang="ru-RU" sz="1200" spc="-1" strike="noStrike">
-                          <a:solidFill>
-                            <a:schemeClr val="dk1"/>
-                          </a:solidFill>
-                          <a:latin typeface="Century Gothic"/>
-                        </a:rPr>
-                        <a:t>+</a:t>
-                      </a:r>
-                      <a:endParaRPr b="0" lang="ru-RU" sz="1200" spc="-1" strike="noStrike">
-                        <a:solidFill>
-                          <a:srgbClr val="000000"/>
-                        </a:solidFill>
-                        <a:latin typeface="Arial"/>
-                      </a:endParaRPr>
-                    </a:p>
-                  </a:txBody>
-                  <a:tcPr anchor="ctr" marL="44640" marR="44640">
-                    <a:lnL w="12240">
-                      <a:solidFill>
-                        <a:srgbClr val="ffffff"/>
-                      </a:solidFill>
-                      <a:prstDash val="solid"/>
-                    </a:lnL>
-                    <a:lnR w="12240">
-                      <a:solidFill>
-                        <a:srgbClr val="ffffff"/>
-                      </a:solidFill>
-                      <a:prstDash val="solid"/>
-                    </a:lnR>
-                    <a:lnT w="12240">
-                      <a:solidFill>
-                        <a:srgbClr val="ffffff"/>
-                      </a:solidFill>
-                      <a:prstDash val="solid"/>
-                    </a:lnT>
-                    <a:lnB w="12240">
-                      <a:solidFill>
-                        <a:srgbClr val="ffffff"/>
-                      </a:solidFill>
-                      <a:prstDash val="solid"/>
-                    </a:lnB>
-                    <a:solidFill>
-                      <a:srgbClr val="dedce6"/>
-                    </a:solidFill>
-                  </a:tcPr>
-                </a:tc>
-                <a:tc>
-                  <a:txBody>
-                    <a:bodyPr lIns="44640" rIns="44640" anchor="ctr">
-                      <a:noAutofit/>
-                    </a:bodyPr>
-                    <a:p>
-                      <a:pPr defTabSz="457200">
-                        <a:lnSpc>
-                          <a:spcPct val="107000"/>
-                        </a:lnSpc>
-                        <a:tabLst>
-                          <a:tab algn="l" pos="630720"/>
-                        </a:tabLst>
-                      </a:pPr>
-                      <a:r>
-                        <a:rPr b="0" lang="ru-RU" sz="1200" spc="-1" strike="noStrike">
-                          <a:solidFill>
-                            <a:schemeClr val="dk1"/>
-                          </a:solidFill>
-                          <a:latin typeface="Century Gothic"/>
-                        </a:rPr>
-                        <a:t>+</a:t>
-                      </a:r>
-                      <a:endParaRPr b="0" lang="ru-RU" sz="1200" spc="-1" strike="noStrike">
-                        <a:solidFill>
-                          <a:srgbClr val="000000"/>
-                        </a:solidFill>
-                        <a:latin typeface="Arial"/>
-                      </a:endParaRPr>
-                    </a:p>
-                  </a:txBody>
-                  <a:tcPr anchor="ctr" marL="44640" marR="44640">
-                    <a:lnL w="12240">
-                      <a:solidFill>
-                        <a:srgbClr val="ffffff"/>
-                      </a:solidFill>
-                      <a:prstDash val="solid"/>
-                    </a:lnL>
-                    <a:lnR w="12240">
-                      <a:solidFill>
-                        <a:srgbClr val="ffffff"/>
-                      </a:solidFill>
-                      <a:prstDash val="solid"/>
-                    </a:lnR>
-                    <a:lnT w="12240">
-                      <a:solidFill>
-                        <a:srgbClr val="ffffff"/>
-                      </a:solidFill>
-                      <a:prstDash val="solid"/>
-                    </a:lnT>
-                    <a:lnB w="12240">
-                      <a:solidFill>
-                        <a:srgbClr val="ffffff"/>
-                      </a:solidFill>
-                      <a:prstDash val="solid"/>
-                    </a:lnB>
-                    <a:solidFill>
-                      <a:srgbClr val="dedce6"/>
-                    </a:solidFill>
-                  </a:tcPr>
-                </a:tc>
-                <a:tc>
-                  <a:txBody>
-                    <a:bodyPr lIns="44640" rIns="44640" anchor="ctr">
-                      <a:noAutofit/>
-                    </a:bodyPr>
-                    <a:p>
-                      <a:pPr defTabSz="457200">
-                        <a:lnSpc>
-                          <a:spcPct val="107000"/>
-                        </a:lnSpc>
-                        <a:tabLst>
-                          <a:tab algn="l" pos="630720"/>
-                        </a:tabLst>
-                      </a:pPr>
-                      <a:r>
-                        <a:rPr b="0" lang="ru-RU" sz="1200" spc="-1" strike="noStrike">
-                          <a:solidFill>
-                            <a:schemeClr val="dk1"/>
-                          </a:solidFill>
-                          <a:latin typeface="Century Gothic"/>
-                        </a:rPr>
-                        <a:t>-</a:t>
-                      </a:r>
-                      <a:endParaRPr b="0" lang="ru-RU" sz="1200" spc="-1" strike="noStrike">
-                        <a:solidFill>
-                          <a:srgbClr val="000000"/>
-                        </a:solidFill>
-                        <a:latin typeface="Arial"/>
-                      </a:endParaRPr>
-                    </a:p>
-                  </a:txBody>
-                  <a:tcPr anchor="ctr" marL="44640" marR="44640">
-                    <a:lnL w="12240">
-                      <a:solidFill>
-                        <a:srgbClr val="ffffff"/>
-                      </a:solidFill>
-                      <a:prstDash val="solid"/>
-                    </a:lnL>
-                    <a:lnR w="12240">
-                      <a:solidFill>
-                        <a:srgbClr val="ffffff"/>
-                      </a:solidFill>
-                      <a:prstDash val="solid"/>
-                    </a:lnR>
-                    <a:lnT w="12240">
-                      <a:solidFill>
-                        <a:srgbClr val="ffffff"/>
-                      </a:solidFill>
-                      <a:prstDash val="solid"/>
-                    </a:lnT>
-                    <a:lnB w="12240">
-                      <a:solidFill>
-                        <a:srgbClr val="ffffff"/>
-                      </a:solidFill>
-                      <a:prstDash val="solid"/>
-                    </a:lnB>
-                    <a:solidFill>
-                      <a:srgbClr val="dedce6"/>
-                    </a:solidFill>
-                  </a:tcPr>
-                </a:tc>
-                <a:tc>
-                  <a:txBody>
-                    <a:bodyPr lIns="44640" rIns="44640" anchor="ctr">
-                      <a:noAutofit/>
-                    </a:bodyPr>
-                    <a:p>
-                      <a:pPr defTabSz="457200">
-                        <a:lnSpc>
-                          <a:spcPct val="107000"/>
-                        </a:lnSpc>
-                        <a:tabLst>
-                          <a:tab algn="l" pos="630720"/>
-                        </a:tabLst>
-                      </a:pPr>
-                      <a:r>
-                        <a:rPr b="0" lang="ru-RU" sz="1200" spc="-1" strike="noStrike">
-                          <a:solidFill>
-                            <a:schemeClr val="dk1"/>
-                          </a:solidFill>
-                          <a:latin typeface="Century Gothic"/>
-                        </a:rPr>
-                        <a:t>+</a:t>
-                      </a:r>
-                      <a:endParaRPr b="0" lang="ru-RU" sz="1200" spc="-1" strike="noStrike">
-                        <a:solidFill>
-                          <a:srgbClr val="000000"/>
-                        </a:solidFill>
-                        <a:latin typeface="Arial"/>
-                      </a:endParaRPr>
-                    </a:p>
-                  </a:txBody>
-                  <a:tcPr anchor="ctr" marL="44640" marR="44640">
-                    <a:lnL w="12240">
-                      <a:solidFill>
-                        <a:srgbClr val="ffffff"/>
-                      </a:solidFill>
-                      <a:prstDash val="solid"/>
-                    </a:lnL>
-                    <a:lnR w="12240">
-                      <a:solidFill>
-                        <a:srgbClr val="ffffff"/>
-                      </a:solidFill>
-                      <a:prstDash val="solid"/>
-                    </a:lnR>
-                    <a:lnT w="12240">
-                      <a:solidFill>
-                        <a:srgbClr val="ffffff"/>
-                      </a:solidFill>
-                      <a:prstDash val="solid"/>
-                    </a:lnT>
-                    <a:lnB w="12240">
-                      <a:solidFill>
-                        <a:srgbClr val="ffffff"/>
-                      </a:solidFill>
-                      <a:prstDash val="solid"/>
-                    </a:lnB>
-                    <a:solidFill>
-                      <a:srgbClr val="dedce6"/>
-                    </a:solidFill>
-                  </a:tcPr>
-                </a:tc>
-              </a:tr>
-            </a:tbl>
-          </a:graphicData>
-        </a:graphic>
-      </p:graphicFrame>
       <p:sp>
         <p:nvSpPr>
-          <p:cNvPr id="4" name="PlaceHolder 3"/>
+          <p:cNvPr id="144" name=""/>
+          <p:cNvSpPr/>
+          <p:nvPr/>
+        </p:nvSpPr>
+        <p:spPr>
+          <a:xfrm>
+            <a:off x="5940000" y="1080000"/>
+            <a:ext cx="5615640" cy="2330640"/>
+          </a:xfrm>
+          <a:prstGeom prst="rect">
+            <a:avLst/>
+          </a:prstGeom>
+          <a:noFill/>
+          <a:ln w="0">
+            <a:noFill/>
+          </a:ln>
+        </p:spPr>
+        <p:style>
+          <a:lnRef idx="0"/>
+          <a:fillRef idx="0"/>
+          <a:effectRef idx="0"/>
+          <a:fontRef idx="minor"/>
+        </p:style>
+        <p:txBody>
+          <a:bodyPr lIns="90000" rIns="90000" tIns="45000" bIns="45000" anchor="t">
+            <a:noAutofit/>
+          </a:bodyPr>
+          <a:p>
+            <a:pPr>
+              <a:lnSpc>
+                <a:spcPct val="100000"/>
+              </a:lnSpc>
+            </a:pPr>
+            <a:r>
+              <a:rPr b="1" lang="ru-RU" sz="1800" spc="-1" strike="noStrike">
+                <a:solidFill>
+                  <a:srgbClr val="332974"/>
+                </a:solidFill>
+                <a:latin typeface="Montserrat"/>
+              </a:rPr>
+              <a:t>4. Фреймворк для создания API</a:t>
+            </a:r>
+            <a:endParaRPr b="0" lang="ru-RU" sz="1800" spc="-1" strike="noStrike">
+              <a:solidFill>
+                <a:srgbClr val="000000"/>
+              </a:solidFill>
+              <a:latin typeface="Arial"/>
+            </a:endParaRPr>
+          </a:p>
+          <a:p>
+            <a:pPr>
+              <a:lnSpc>
+                <a:spcPct val="100000"/>
+              </a:lnSpc>
+            </a:pPr>
+            <a:r>
+              <a:rPr b="0" lang="ru-RU" sz="1800" spc="-1" strike="noStrike">
+                <a:solidFill>
+                  <a:srgbClr val="332974"/>
+                </a:solidFill>
+                <a:latin typeface="Montserrat"/>
+              </a:rPr>
+              <a:t>    </a:t>
+            </a:r>
+            <a:r>
+              <a:rPr b="0" lang="ru-RU" sz="1800" spc="-1" strike="noStrike">
+                <a:solidFill>
+                  <a:srgbClr val="332974"/>
+                </a:solidFill>
+                <a:latin typeface="Montserrat"/>
+              </a:rPr>
+              <a:t>FastAP</a:t>
+            </a:r>
+            <a:endParaRPr b="0" lang="ru-RU" sz="1800" spc="-1" strike="noStrike">
+              <a:solidFill>
+                <a:srgbClr val="000000"/>
+              </a:solidFill>
+              <a:latin typeface="Arial"/>
+            </a:endParaRPr>
+          </a:p>
+          <a:p>
+            <a:pPr>
+              <a:lnSpc>
+                <a:spcPct val="100000"/>
+              </a:lnSpc>
+            </a:pPr>
+            <a:endParaRPr b="0" lang="ru-RU" sz="1800" spc="-1" strike="noStrike">
+              <a:solidFill>
+                <a:srgbClr val="000000"/>
+              </a:solidFill>
+              <a:latin typeface="Arial"/>
+            </a:endParaRPr>
+          </a:p>
+          <a:p>
+            <a:pPr>
+              <a:lnSpc>
+                <a:spcPct val="100000"/>
+              </a:lnSpc>
+            </a:pPr>
+            <a:r>
+              <a:rPr b="1" lang="ru-RU" sz="1800" spc="-1" strike="noStrike">
+                <a:solidFill>
+                  <a:srgbClr val="332974"/>
+                </a:solidFill>
+                <a:latin typeface="Montserrat"/>
+              </a:rPr>
+              <a:t>5. HTTP-клиент для внешних запросов</a:t>
+            </a:r>
+            <a:endParaRPr b="0" lang="ru-RU" sz="1800" spc="-1" strike="noStrike">
+              <a:solidFill>
+                <a:srgbClr val="000000"/>
+              </a:solidFill>
+              <a:latin typeface="Arial"/>
+            </a:endParaRPr>
+          </a:p>
+          <a:p>
+            <a:pPr>
+              <a:lnSpc>
+                <a:spcPct val="100000"/>
+              </a:lnSpc>
+            </a:pPr>
+            <a:r>
+              <a:rPr b="0" lang="ru-RU" sz="1800" spc="-1" strike="noStrike">
+                <a:solidFill>
+                  <a:srgbClr val="332974"/>
+                </a:solidFill>
+                <a:latin typeface="Montserrat"/>
+              </a:rPr>
+              <a:t>    </a:t>
+            </a:r>
+            <a:r>
+              <a:rPr b="0" lang="ru-RU" sz="1800" spc="-1" strike="noStrike">
+                <a:solidFill>
+                  <a:srgbClr val="332974"/>
+                </a:solidFill>
+                <a:latin typeface="Montserrat"/>
+              </a:rPr>
+              <a:t>aiohttp</a:t>
+            </a:r>
+            <a:endParaRPr b="0" lang="ru-RU" sz="1800" spc="-1" strike="noStrike">
+              <a:solidFill>
+                <a:srgbClr val="000000"/>
+              </a:solidFill>
+              <a:latin typeface="Arial"/>
+            </a:endParaRPr>
+          </a:p>
+          <a:p>
+            <a:pPr>
+              <a:lnSpc>
+                <a:spcPct val="100000"/>
+              </a:lnSpc>
+            </a:pPr>
+            <a:endParaRPr b="0" lang="ru-RU" sz="1800" spc="-1" strike="noStrike">
+              <a:solidFill>
+                <a:srgbClr val="000000"/>
+              </a:solidFill>
+              <a:latin typeface="Arial"/>
+            </a:endParaRPr>
+          </a:p>
+          <a:p>
+            <a:pPr>
+              <a:lnSpc>
+                <a:spcPct val="100000"/>
+              </a:lnSpc>
+            </a:pPr>
+            <a:r>
+              <a:rPr b="1" lang="ru-RU" sz="1800" spc="-1" strike="noStrike">
+                <a:solidFill>
+                  <a:srgbClr val="332974"/>
+                </a:solidFill>
+                <a:latin typeface="Montserrat"/>
+              </a:rPr>
+              <a:t>6. Внешний API-сервис для получения данных</a:t>
+            </a:r>
+            <a:endParaRPr b="0" lang="ru-RU" sz="1800" spc="-1" strike="noStrike">
+              <a:solidFill>
+                <a:srgbClr val="000000"/>
+              </a:solidFill>
+              <a:latin typeface="Arial"/>
+            </a:endParaRPr>
+          </a:p>
+          <a:p>
+            <a:pPr>
+              <a:lnSpc>
+                <a:spcPct val="100000"/>
+              </a:lnSpc>
+            </a:pPr>
+            <a:r>
+              <a:rPr b="0" lang="ru-RU" sz="1800" spc="-1" strike="noStrike">
+                <a:solidFill>
+                  <a:srgbClr val="332974"/>
+                </a:solidFill>
+                <a:latin typeface="Montserrat"/>
+              </a:rPr>
+              <a:t>    </a:t>
+            </a:r>
+            <a:r>
+              <a:rPr b="0" lang="ru-RU" sz="1800" spc="-1" strike="noStrike">
+                <a:solidFill>
+                  <a:srgbClr val="332974"/>
+                </a:solidFill>
+                <a:latin typeface="Montserrat"/>
+              </a:rPr>
+              <a:t>API "Репутация"</a:t>
+            </a:r>
+            <a:endParaRPr b="0" lang="ru-RU" sz="1800" spc="-1" strike="noStrike">
+              <a:solidFill>
+                <a:srgbClr val="000000"/>
+              </a:solidFill>
+              <a:latin typeface="Arial"/>
+            </a:endParaRPr>
+          </a:p>
+        </p:txBody>
+      </p:sp>
+      <p:sp>
+        <p:nvSpPr>
+          <p:cNvPr id="3" name="PlaceHolder 2"/>
           <p:cNvSpPr>
             <a:spLocks noGrp="1"/>
           </p:cNvSpPr>
@@ -15876,7 +13631,7 @@
         <p:txBody>
           <a:bodyPr/>
           <a:p>
-            <a:fld id="{B5C9B01F-784D-42ED-8660-97480F61E3E2}" type="slidenum">
+            <a:fld id="{286092F8-3C9D-4DC3-88C8-68BE42E23CC9}" type="slidenum">
               <a:t>6</a:t>
             </a:fld>
           </a:p>
@@ -15925,7 +13680,7 @@
         <p:spPr>
           <a:xfrm>
             <a:off x="0" y="0"/>
-            <a:ext cx="11226960" cy="920160"/>
+            <a:ext cx="11226600" cy="919800"/>
           </a:xfrm>
           <a:prstGeom prst="rect">
             <a:avLst/>
@@ -15956,7 +13711,7 @@
                 </a:solidFill>
                 <a:latin typeface="Montserrat SemiBold"/>
               </a:rPr>
-              <a:t>Выбранные технические решения</a:t>
+              <a:t>Архитектурное проектирование</a:t>
             </a:r>
             <a:endParaRPr b="0" lang="ru-RU" sz="3600" spc="-1" strike="noStrike">
               <a:solidFill>
@@ -15969,14 +13724,18 @@
       </p:sp>
       <p:sp>
         <p:nvSpPr>
-          <p:cNvPr id="146" name=""/>
-          <p:cNvSpPr/>
-          <p:nvPr/>
+          <p:cNvPr id="146" name="PlaceHolder 2"/>
+          <p:cNvSpPr>
+            <a:spLocks noGrp="1"/>
+          </p:cNvSpPr>
+          <p:nvPr>
+            <p:ph type="ftr" idx="45"/>
+          </p:nvPr>
         </p:nvSpPr>
         <p:spPr>
           <a:xfrm>
-            <a:off x="141480" y="1088640"/>
-            <a:ext cx="5616000" cy="2331000"/>
+            <a:off x="1333440" y="6352560"/>
+            <a:ext cx="7477200" cy="361800"/>
           </a:xfrm>
           <a:prstGeom prst="rect">
             <a:avLst/>
@@ -15986,435 +13745,49 @@
             <a:noFill/>
           </a:ln>
         </p:spPr>
-        <p:style>
-          <a:lnRef idx="0"/>
-          <a:fillRef idx="0"/>
-          <a:effectRef idx="0"/>
-          <a:fontRef idx="minor"/>
-        </p:style>
         <p:txBody>
           <a:bodyPr lIns="90000" rIns="90000" tIns="45000" bIns="45000" anchor="t">
             <a:noAutofit/>
           </a:bodyPr>
           <a:p>
-            <a:pPr>
-              <a:lnSpc>
-                <a:spcPct val="100000"/>
-              </a:lnSpc>
+            <a:pPr indent="0">
+              <a:buNone/>
             </a:pPr>
-            <a:r>
-              <a:rPr b="1" lang="ru-RU" sz="1800" spc="-1" strike="noStrike">
-                <a:solidFill>
-                  <a:srgbClr val="332974"/>
-                </a:solidFill>
-                <a:latin typeface="Montserrat"/>
-              </a:rPr>
-              <a:t>1. Платформа клиентского приложения</a:t>
-            </a:r>
-            <a:endParaRPr b="0" lang="ru-RU" sz="1800" spc="-1" strike="noStrike">
+            <a:endParaRPr b="0" lang="ru-RU" sz="1400" spc="-1" strike="noStrike">
               <a:solidFill>
                 <a:srgbClr val="000000"/>
               </a:solidFill>
-              <a:latin typeface="Arial"/>
-            </a:endParaRPr>
-          </a:p>
-          <a:p>
-            <a:pPr>
-              <a:lnSpc>
-                <a:spcPct val="100000"/>
-              </a:lnSpc>
-            </a:pPr>
-            <a:r>
-              <a:rPr b="0" lang="ru-RU" sz="1800" spc="-1" strike="noStrike">
-                <a:solidFill>
-                  <a:srgbClr val="332974"/>
-                </a:solidFill>
-                <a:latin typeface="Montserrat"/>
-              </a:rPr>
-              <a:t>    </a:t>
-            </a:r>
-            <a:r>
-              <a:rPr b="0" lang="ru-RU" sz="1800" spc="-1" strike="noStrike">
-                <a:solidFill>
-                  <a:srgbClr val="332974"/>
-                </a:solidFill>
-                <a:latin typeface="Montserrat"/>
-              </a:rPr>
-              <a:t>1С:Предприятие 8.3</a:t>
-            </a:r>
-            <a:endParaRPr b="0" lang="ru-RU" sz="1800" spc="-1" strike="noStrike">
-              <a:solidFill>
-                <a:srgbClr val="000000"/>
-              </a:solidFill>
-              <a:latin typeface="Arial"/>
-            </a:endParaRPr>
-          </a:p>
-          <a:p>
-            <a:pPr>
-              <a:lnSpc>
-                <a:spcPct val="100000"/>
-              </a:lnSpc>
-            </a:pPr>
-            <a:endParaRPr b="0" lang="ru-RU" sz="1800" spc="-1" strike="noStrike">
-              <a:solidFill>
-                <a:srgbClr val="000000"/>
-              </a:solidFill>
-              <a:latin typeface="Arial"/>
-            </a:endParaRPr>
-          </a:p>
-          <a:p>
-            <a:pPr>
-              <a:lnSpc>
-                <a:spcPct val="100000"/>
-              </a:lnSpc>
-            </a:pPr>
-            <a:r>
-              <a:rPr b="1" lang="ru-RU" sz="1800" spc="-1" strike="noStrike">
-                <a:solidFill>
-                  <a:srgbClr val="332974"/>
-                </a:solidFill>
-                <a:latin typeface="Montserrat"/>
-              </a:rPr>
-              <a:t>2. Язык и среда разработки ML-сервиса</a:t>
-            </a:r>
-            <a:endParaRPr b="0" lang="ru-RU" sz="1800" spc="-1" strike="noStrike">
-              <a:solidFill>
-                <a:srgbClr val="000000"/>
-              </a:solidFill>
-              <a:latin typeface="Arial"/>
-            </a:endParaRPr>
-          </a:p>
-          <a:p>
-            <a:pPr>
-              <a:lnSpc>
-                <a:spcPct val="100000"/>
-              </a:lnSpc>
-            </a:pPr>
-            <a:r>
-              <a:rPr b="0" lang="ru-RU" sz="1800" spc="-1" strike="noStrike">
-                <a:solidFill>
-                  <a:srgbClr val="332974"/>
-                </a:solidFill>
-                <a:latin typeface="Montserrat"/>
-              </a:rPr>
-              <a:t>    </a:t>
-            </a:r>
-            <a:r>
-              <a:rPr b="0" lang="ru-RU" sz="1800" spc="-1" strike="noStrike">
-                <a:solidFill>
-                  <a:srgbClr val="332974"/>
-                </a:solidFill>
-                <a:latin typeface="Montserrat"/>
-              </a:rPr>
-              <a:t>Python 3.11+</a:t>
-            </a:r>
-            <a:endParaRPr b="0" lang="ru-RU" sz="1800" spc="-1" strike="noStrike">
-              <a:solidFill>
-                <a:srgbClr val="000000"/>
-              </a:solidFill>
-              <a:latin typeface="Arial"/>
-            </a:endParaRPr>
-          </a:p>
-          <a:p>
-            <a:pPr>
-              <a:lnSpc>
-                <a:spcPct val="100000"/>
-              </a:lnSpc>
-            </a:pPr>
-            <a:endParaRPr b="0" lang="ru-RU" sz="1800" spc="-1" strike="noStrike">
-              <a:solidFill>
-                <a:srgbClr val="000000"/>
-              </a:solidFill>
-              <a:latin typeface="Arial"/>
-            </a:endParaRPr>
-          </a:p>
-          <a:p>
-            <a:pPr>
-              <a:lnSpc>
-                <a:spcPct val="100000"/>
-              </a:lnSpc>
-            </a:pPr>
-            <a:r>
-              <a:rPr b="1" lang="ru-RU" sz="1800" spc="-1" strike="noStrike">
-                <a:solidFill>
-                  <a:srgbClr val="332974"/>
-                </a:solidFill>
-                <a:latin typeface="Montserrat"/>
-              </a:rPr>
-              <a:t>3. Библиотеки машинного обучения</a:t>
-            </a:r>
-            <a:endParaRPr b="0" lang="ru-RU" sz="1800" spc="-1" strike="noStrike">
-              <a:solidFill>
-                <a:srgbClr val="000000"/>
-              </a:solidFill>
-              <a:latin typeface="Arial"/>
-            </a:endParaRPr>
-          </a:p>
-          <a:p>
-            <a:pPr>
-              <a:lnSpc>
-                <a:spcPct val="100000"/>
-              </a:lnSpc>
-            </a:pPr>
-            <a:r>
-              <a:rPr b="0" lang="ru-RU" sz="1800" spc="-1" strike="noStrike">
-                <a:solidFill>
-                  <a:srgbClr val="332974"/>
-                </a:solidFill>
-                <a:latin typeface="Montserrat"/>
-              </a:rPr>
-              <a:t>    </a:t>
-            </a:r>
-            <a:r>
-              <a:rPr b="0" lang="ru-RU" sz="1800" spc="-1" strike="noStrike">
-                <a:solidFill>
-                  <a:srgbClr val="332974"/>
-                </a:solidFill>
-                <a:latin typeface="Montserrat"/>
-              </a:rPr>
-              <a:t>Scikit-learn, XGBoost, Imbalanced-learn</a:t>
-            </a:r>
-            <a:endParaRPr b="0" lang="ru-RU" sz="1800" spc="-1" strike="noStrike">
-              <a:solidFill>
-                <a:srgbClr val="000000"/>
-              </a:solidFill>
-              <a:latin typeface="Arial"/>
-            </a:endParaRPr>
-          </a:p>
-          <a:p>
-            <a:pPr>
-              <a:lnSpc>
-                <a:spcPct val="100000"/>
-              </a:lnSpc>
-            </a:pPr>
-            <a:endParaRPr b="0" lang="ru-RU" sz="1800" spc="-1" strike="noStrike">
-              <a:solidFill>
-                <a:srgbClr val="000000"/>
-              </a:solidFill>
-              <a:latin typeface="Arial"/>
+              <a:latin typeface="Times New Roman"/>
             </a:endParaRPr>
           </a:p>
         </p:txBody>
       </p:sp>
+      <p:pic>
+        <p:nvPicPr>
+          <p:cNvPr id="147" name="" descr=""/>
+          <p:cNvPicPr/>
+          <p:nvPr/>
+        </p:nvPicPr>
+        <p:blipFill>
+          <a:blip r:embed="rId1"/>
+          <a:stretch/>
+        </p:blipFill>
+        <p:spPr>
+          <a:xfrm>
+            <a:off x="2340360" y="1611720"/>
+            <a:ext cx="7554600" cy="4142880"/>
+          </a:xfrm>
+          <a:prstGeom prst="rect">
+            <a:avLst/>
+          </a:prstGeom>
+          <a:ln w="0">
+            <a:noFill/>
+          </a:ln>
+        </p:spPr>
+      </p:pic>
       <p:sp>
         <p:nvSpPr>
-          <p:cNvPr id="147" name=""/>
-          <p:cNvSpPr/>
-          <p:nvPr/>
-        </p:nvSpPr>
-        <p:spPr>
-          <a:xfrm>
-            <a:off x="5940000" y="1080000"/>
-            <a:ext cx="5616000" cy="2331000"/>
-          </a:xfrm>
-          <a:prstGeom prst="rect">
-            <a:avLst/>
-          </a:prstGeom>
-          <a:noFill/>
-          <a:ln w="0">
-            <a:noFill/>
-          </a:ln>
-        </p:spPr>
-        <p:style>
-          <a:lnRef idx="0"/>
-          <a:fillRef idx="0"/>
-          <a:effectRef idx="0"/>
-          <a:fontRef idx="minor"/>
-        </p:style>
-        <p:txBody>
-          <a:bodyPr lIns="90000" rIns="90000" tIns="45000" bIns="45000" anchor="t">
-            <a:noAutofit/>
-          </a:bodyPr>
-          <a:p>
-            <a:pPr>
-              <a:lnSpc>
-                <a:spcPct val="100000"/>
-              </a:lnSpc>
-            </a:pPr>
-            <a:r>
-              <a:rPr b="1" lang="ru-RU" sz="1800" spc="-1" strike="noStrike">
-                <a:solidFill>
-                  <a:srgbClr val="332974"/>
-                </a:solidFill>
-                <a:latin typeface="Montserrat"/>
-              </a:rPr>
-              <a:t>4. Фреймворк для создания API</a:t>
-            </a:r>
-            <a:endParaRPr b="0" lang="ru-RU" sz="1800" spc="-1" strike="noStrike">
-              <a:solidFill>
-                <a:srgbClr val="000000"/>
-              </a:solidFill>
-              <a:latin typeface="Arial"/>
-            </a:endParaRPr>
-          </a:p>
-          <a:p>
-            <a:pPr>
-              <a:lnSpc>
-                <a:spcPct val="100000"/>
-              </a:lnSpc>
-            </a:pPr>
-            <a:r>
-              <a:rPr b="0" lang="ru-RU" sz="1800" spc="-1" strike="noStrike">
-                <a:solidFill>
-                  <a:srgbClr val="332974"/>
-                </a:solidFill>
-                <a:latin typeface="Montserrat"/>
-              </a:rPr>
-              <a:t>    </a:t>
-            </a:r>
-            <a:r>
-              <a:rPr b="0" lang="ru-RU" sz="1800" spc="-1" strike="noStrike">
-                <a:solidFill>
-                  <a:srgbClr val="332974"/>
-                </a:solidFill>
-                <a:latin typeface="Montserrat"/>
-              </a:rPr>
-              <a:t>FastAP</a:t>
-            </a:r>
-            <a:endParaRPr b="0" lang="ru-RU" sz="1800" spc="-1" strike="noStrike">
-              <a:solidFill>
-                <a:srgbClr val="000000"/>
-              </a:solidFill>
-              <a:latin typeface="Arial"/>
-            </a:endParaRPr>
-          </a:p>
-          <a:p>
-            <a:pPr>
-              <a:lnSpc>
-                <a:spcPct val="100000"/>
-              </a:lnSpc>
-            </a:pPr>
-            <a:endParaRPr b="0" lang="ru-RU" sz="1800" spc="-1" strike="noStrike">
-              <a:solidFill>
-                <a:srgbClr val="000000"/>
-              </a:solidFill>
-              <a:latin typeface="Arial"/>
-            </a:endParaRPr>
-          </a:p>
-          <a:p>
-            <a:pPr>
-              <a:lnSpc>
-                <a:spcPct val="100000"/>
-              </a:lnSpc>
-            </a:pPr>
-            <a:r>
-              <a:rPr b="1" lang="ru-RU" sz="1800" spc="-1" strike="noStrike">
-                <a:solidFill>
-                  <a:srgbClr val="332974"/>
-                </a:solidFill>
-                <a:latin typeface="Montserrat"/>
-              </a:rPr>
-              <a:t>5. HTTP-клиент для внешних запросов</a:t>
-            </a:r>
-            <a:endParaRPr b="0" lang="ru-RU" sz="1800" spc="-1" strike="noStrike">
-              <a:solidFill>
-                <a:srgbClr val="000000"/>
-              </a:solidFill>
-              <a:latin typeface="Arial"/>
-            </a:endParaRPr>
-          </a:p>
-          <a:p>
-            <a:pPr>
-              <a:lnSpc>
-                <a:spcPct val="100000"/>
-              </a:lnSpc>
-            </a:pPr>
-            <a:r>
-              <a:rPr b="0" lang="ru-RU" sz="1800" spc="-1" strike="noStrike">
-                <a:solidFill>
-                  <a:srgbClr val="332974"/>
-                </a:solidFill>
-                <a:latin typeface="Montserrat"/>
-              </a:rPr>
-              <a:t>    </a:t>
-            </a:r>
-            <a:r>
-              <a:rPr b="0" lang="ru-RU" sz="1800" spc="-1" strike="noStrike">
-                <a:solidFill>
-                  <a:srgbClr val="332974"/>
-                </a:solidFill>
-                <a:latin typeface="Montserrat"/>
-              </a:rPr>
-              <a:t>aiohttp</a:t>
-            </a:r>
-            <a:endParaRPr b="0" lang="ru-RU" sz="1800" spc="-1" strike="noStrike">
-              <a:solidFill>
-                <a:srgbClr val="000000"/>
-              </a:solidFill>
-              <a:latin typeface="Arial"/>
-            </a:endParaRPr>
-          </a:p>
-          <a:p>
-            <a:pPr>
-              <a:lnSpc>
-                <a:spcPct val="100000"/>
-              </a:lnSpc>
-            </a:pPr>
-            <a:endParaRPr b="0" lang="ru-RU" sz="1800" spc="-1" strike="noStrike">
-              <a:solidFill>
-                <a:srgbClr val="000000"/>
-              </a:solidFill>
-              <a:latin typeface="Arial"/>
-            </a:endParaRPr>
-          </a:p>
-          <a:p>
-            <a:pPr>
-              <a:lnSpc>
-                <a:spcPct val="100000"/>
-              </a:lnSpc>
-            </a:pPr>
-            <a:r>
-              <a:rPr b="1" lang="ru-RU" sz="1800" spc="-1" strike="noStrike">
-                <a:solidFill>
-                  <a:srgbClr val="332974"/>
-                </a:solidFill>
-                <a:latin typeface="Montserrat"/>
-              </a:rPr>
-              <a:t>6. Внешний API-сервис для получения данных</a:t>
-            </a:r>
-            <a:endParaRPr b="0" lang="ru-RU" sz="1800" spc="-1" strike="noStrike">
-              <a:solidFill>
-                <a:srgbClr val="000000"/>
-              </a:solidFill>
-              <a:latin typeface="Arial"/>
-            </a:endParaRPr>
-          </a:p>
-          <a:p>
-            <a:pPr>
-              <a:lnSpc>
-                <a:spcPct val="100000"/>
-              </a:lnSpc>
-            </a:pPr>
-            <a:r>
-              <a:rPr b="0" lang="ru-RU" sz="1800" spc="-1" strike="noStrike">
-                <a:solidFill>
-                  <a:srgbClr val="332974"/>
-                </a:solidFill>
-                <a:latin typeface="Montserrat"/>
-              </a:rPr>
-              <a:t>    </a:t>
-            </a:r>
-            <a:r>
-              <a:rPr b="0" lang="ru-RU" sz="1800" spc="-1" strike="noStrike">
-                <a:solidFill>
-                  <a:srgbClr val="332974"/>
-                </a:solidFill>
-                <a:latin typeface="Montserrat"/>
-              </a:rPr>
-              <a:t>API "Репутация"</a:t>
-            </a:r>
-            <a:endParaRPr b="0" lang="ru-RU" sz="1800" spc="-1" strike="noStrike">
-              <a:solidFill>
-                <a:srgbClr val="000000"/>
-              </a:solidFill>
-              <a:latin typeface="Arial"/>
-            </a:endParaRPr>
-          </a:p>
-        </p:txBody>
-      </p:sp>
-      <p:sp>
-        <p:nvSpPr>
-          <p:cNvPr id="3" name="PlaceHolder 2"/>
+          <p:cNvPr id="4" name="PlaceHolder 3"/>
           <p:cNvSpPr>
             <a:spLocks noGrp="1"/>
           </p:cNvSpPr>
@@ -16426,7 +13799,7 @@
         <p:txBody>
           <a:bodyPr/>
           <a:p>
-            <a:fld id="{9E9EB8D9-2085-4595-A901-A2CBE0B53618}" type="slidenum">
+            <a:fld id="{813940E6-8458-4145-AC24-EB2F855EB63D}" type="slidenum">
               <a:t>7</a:t>
             </a:fld>
           </a:p>
@@ -16464,18 +13837,14 @@
       </p:grpSpPr>
       <p:sp>
         <p:nvSpPr>
-          <p:cNvPr id="148" name="PlaceHolder 1"/>
-          <p:cNvSpPr>
-            <a:spLocks noGrp="1"/>
-          </p:cNvSpPr>
-          <p:nvPr>
-            <p:ph type="title"/>
-          </p:nvPr>
+          <p:cNvPr id="148" name="PlaceHolder 5"/>
+          <p:cNvSpPr/>
+          <p:nvPr/>
         </p:nvSpPr>
         <p:spPr>
           <a:xfrm>
-            <a:off x="0" y="0"/>
-            <a:ext cx="11226960" cy="920160"/>
+            <a:off x="-76320" y="0"/>
+            <a:ext cx="7737480" cy="717480"/>
           </a:xfrm>
           <a:prstGeom prst="rect">
             <a:avLst/>
@@ -16485,16 +13854,21 @@
             <a:noFill/>
           </a:ln>
         </p:spPr>
+        <p:style>
+          <a:lnRef idx="0"/>
+          <a:fillRef idx="0"/>
+          <a:effectRef idx="0"/>
+          <a:fontRef idx="minor"/>
+        </p:style>
         <p:txBody>
-          <a:bodyPr lIns="91440" rIns="91440" tIns="45720" bIns="45720" anchor="t">
+          <a:bodyPr lIns="90000" rIns="90000" tIns="45000" bIns="45000" anchor="ctr">
             <a:noAutofit/>
           </a:bodyPr>
           <a:p>
-            <a:pPr indent="0" defTabSz="914400">
+            <a:pPr algn="ctr">
               <a:lnSpc>
-                <a:spcPct val="100000"/>
+                <a:spcPct val="108000"/>
               </a:lnSpc>
-              <a:buNone/>
               <a:tabLst>
                 <a:tab algn="l" pos="0"/>
               </a:tabLst>
@@ -16505,61 +13879,22 @@
                   <a:srgbClr val="332974"/>
                 </a:solidFill>
                 <a:latin typeface="Montserrat SemiBold"/>
+                <a:ea typeface="Microsoft YaHei"/>
               </a:rPr>
-              <a:t>Архитектурное проектирование</a:t>
+              <a:t>Архитектура Python-сервиса</a:t>
             </a:r>
             <a:endParaRPr b="0" lang="ru-RU" sz="3600" spc="-1" strike="noStrike">
               <a:solidFill>
                 <a:srgbClr val="000000"/>
               </a:solidFill>
               <a:latin typeface="Arial"/>
-            </a:endParaRPr>
-          </a:p>
-        </p:txBody>
-      </p:sp>
-      <p:sp>
-        <p:nvSpPr>
-          <p:cNvPr id="149" name="PlaceHolder 2"/>
-          <p:cNvSpPr>
-            <a:spLocks noGrp="1"/>
-          </p:cNvSpPr>
-          <p:nvPr>
-            <p:ph type="ftr" idx="46"/>
-          </p:nvPr>
-        </p:nvSpPr>
-        <p:spPr>
-          <a:xfrm>
-            <a:off x="1333440" y="6352560"/>
-            <a:ext cx="7477560" cy="362160"/>
-          </a:xfrm>
-          <a:prstGeom prst="rect">
-            <a:avLst/>
-          </a:prstGeom>
-          <a:noFill/>
-          <a:ln w="0">
-            <a:noFill/>
-          </a:ln>
-        </p:spPr>
-        <p:txBody>
-          <a:bodyPr lIns="90000" rIns="90000" tIns="45000" bIns="45000" anchor="t">
-            <a:noAutofit/>
-          </a:bodyPr>
-          <a:p>
-            <a:pPr indent="0">
-              <a:buNone/>
-            </a:pPr>
-            <a:endParaRPr b="0" lang="ru-RU" sz="1400" spc="-1" strike="noStrike">
-              <a:solidFill>
-                <a:srgbClr val="000000"/>
-              </a:solidFill>
-              <a:latin typeface="Times New Roman"/>
             </a:endParaRPr>
           </a:p>
         </p:txBody>
       </p:sp>
       <p:pic>
         <p:nvPicPr>
-          <p:cNvPr id="150" name="" descr=""/>
+          <p:cNvPr id="149" name="" descr=""/>
           <p:cNvPicPr/>
           <p:nvPr/>
         </p:nvPicPr>
@@ -16569,8 +13904,8 @@
         </p:blipFill>
         <p:spPr>
           <a:xfrm>
-            <a:off x="2340360" y="1611720"/>
-            <a:ext cx="7554960" cy="4143240"/>
+            <a:off x="4140360" y="1620360"/>
+            <a:ext cx="4134600" cy="4647240"/>
           </a:xfrm>
           <a:prstGeom prst="rect">
             <a:avLst/>
@@ -16582,7 +13917,7 @@
       </p:pic>
       <p:sp>
         <p:nvSpPr>
-          <p:cNvPr id="4" name="PlaceHolder 3"/>
+          <p:cNvPr id="2" name="PlaceHolder 1"/>
           <p:cNvSpPr>
             <a:spLocks noGrp="1"/>
           </p:cNvSpPr>
@@ -16594,7 +13929,7 @@
         <p:txBody>
           <a:bodyPr/>
           <a:p>
-            <a:fld id="{0CFBAD07-F329-41AA-B97B-CA7C2D84C0D1}" type="slidenum">
+            <a:fld id="{7C336A69-5622-407B-B769-71804EA0AD98}" type="slidenum">
               <a:t>8</a:t>
             </a:fld>
           </a:p>
@@ -16630,16 +13965,39 @@
           <a:chExt cx="0" cy="0"/>
         </a:xfrm>
       </p:grpSpPr>
+      <p:pic>
+        <p:nvPicPr>
+          <p:cNvPr id="150" name="" descr=""/>
+          <p:cNvPicPr/>
+          <p:nvPr/>
+        </p:nvPicPr>
+        <p:blipFill>
+          <a:blip r:embed="rId1"/>
+          <a:stretch/>
+        </p:blipFill>
+        <p:spPr>
+          <a:xfrm>
+            <a:off x="180000" y="936360"/>
+            <a:ext cx="10517040" cy="3202920"/>
+          </a:xfrm>
+          <a:prstGeom prst="rect">
+            <a:avLst/>
+          </a:prstGeom>
+          <a:ln w="0">
+            <a:noFill/>
+          </a:ln>
+        </p:spPr>
+      </p:pic>
       <p:sp>
         <p:nvSpPr>
-          <p:cNvPr id="151" name="PlaceHolder 5"/>
+          <p:cNvPr id="151" name="PlaceHolder 9"/>
           <p:cNvSpPr/>
           <p:nvPr/>
         </p:nvSpPr>
         <p:spPr>
           <a:xfrm>
-            <a:off x="-76320" y="0"/>
-            <a:ext cx="7737840" cy="717840"/>
+            <a:off x="0" y="-36000"/>
+            <a:ext cx="7559280" cy="717480"/>
           </a:xfrm>
           <a:prstGeom prst="rect">
             <a:avLst/>
@@ -16676,7 +14034,7 @@
                 <a:latin typeface="Montserrat SemiBold"/>
                 <a:ea typeface="Microsoft YaHei"/>
               </a:rPr>
-              <a:t>Архитектура Python-сервиса</a:t>
+              <a:t>Архитектура модуля FastAPI</a:t>
             </a:r>
             <a:endParaRPr b="0" lang="ru-RU" sz="3600" spc="-1" strike="noStrike">
               <a:solidFill>
@@ -16687,29 +14045,6 @@
           </a:p>
         </p:txBody>
       </p:sp>
-      <p:pic>
-        <p:nvPicPr>
-          <p:cNvPr id="152" name="" descr=""/>
-          <p:cNvPicPr/>
-          <p:nvPr/>
-        </p:nvPicPr>
-        <p:blipFill>
-          <a:blip r:embed="rId1"/>
-          <a:stretch/>
-        </p:blipFill>
-        <p:spPr>
-          <a:xfrm>
-            <a:off x="4140360" y="1620360"/>
-            <a:ext cx="4134960" cy="4647600"/>
-          </a:xfrm>
-          <a:prstGeom prst="rect">
-            <a:avLst/>
-          </a:prstGeom>
-          <a:ln w="0">
-            <a:noFill/>
-          </a:ln>
-        </p:spPr>
-      </p:pic>
       <p:sp>
         <p:nvSpPr>
           <p:cNvPr id="2" name="PlaceHolder 1"/>
@@ -16724,7 +14059,7 @@
         <p:txBody>
           <a:bodyPr/>
           <a:p>
-            <a:fld id="{945CE1AD-4691-4930-BBD8-9180F5E67D05}" type="slidenum">
+            <a:fld id="{9A781DBC-ED50-41E5-8872-21AC4C1BF651}" type="slidenum">
               <a:t>9</a:t>
             </a:fld>
           </a:p>
